--- a/slides/01_apresentacao/apresentacao_130126.pptx
+++ b/slides/01_apresentacao/apresentacao_130126.pptx
@@ -1,26 +1,26 @@
 
 <file path=ppt/presentation.xml><?xml version="1.0" encoding="utf-8"?>
-<p:presentation xmlns:a="http://schemas.openxmlformats.org/drawingml/2006/main" xmlns:r="http://schemas.openxmlformats.org/officeDocument/2006/relationships" xmlns:mc="http://schemas.openxmlformats.org/markup-compatibility/2006" xmlns:mv="urn:schemas-microsoft-com:mac:vml" xmlns:p="http://schemas.openxmlformats.org/presentationml/2006/main" xmlns:c="http://schemas.openxmlformats.org/drawingml/2006/chart" xmlns:dgm="http://schemas.openxmlformats.org/drawingml/2006/diagram" xmlns:o="urn:schemas-microsoft-com:office:office" xmlns:v="urn:schemas-microsoft-com:vml" xmlns:pvml="urn:schemas-microsoft-com:office:powerpoint" xmlns:com="http://schemas.openxmlformats.org/drawingml/2006/compatibility" xmlns:p14="http://schemas.microsoft.com/office/powerpoint/2010/main" xmlns:p15="http://schemas.microsoft.com/office/powerpoint/2012/main" xmlns:ahyp="http://schemas.microsoft.com/office/drawing/2018/hyperlinkcolor" autoCompressPictures="0" strictFirstAndLastChars="0" saveSubsetFonts="1" showSpecialPlsOnTitleSld="0">
+<p:presentation xmlns:a="http://schemas.openxmlformats.org/drawingml/2006/main" xmlns:r="http://schemas.openxmlformats.org/officeDocument/2006/relationships" xmlns:p="http://schemas.openxmlformats.org/presentationml/2006/main" showSpecialPlsOnTitleSld="0" strictFirstAndLastChars="0" saveSubsetFonts="1" autoCompressPictures="0">
   <p:sldMasterIdLst>
-    <p:sldMasterId id="2147483648" r:id="rId5"/>
+    <p:sldMasterId id="2147483648" r:id="rId1"/>
   </p:sldMasterIdLst>
   <p:notesMasterIdLst>
-    <p:notesMasterId r:id="rId6"/>
+    <p:notesMasterId r:id="rId10"/>
   </p:notesMasterIdLst>
   <p:sldIdLst>
-    <p:sldId id="256" r:id="rId7"/>
-    <p:sldId id="257" r:id="rId8"/>
-    <p:sldId id="258" r:id="rId9"/>
-    <p:sldId id="259" r:id="rId10"/>
-    <p:sldId id="260" r:id="rId11"/>
-    <p:sldId id="261" r:id="rId12"/>
-    <p:sldId id="262" r:id="rId13"/>
-    <p:sldId id="263" r:id="rId14"/>
+    <p:sldId id="256" r:id="rId2"/>
+    <p:sldId id="257" r:id="rId3"/>
+    <p:sldId id="258" r:id="rId4"/>
+    <p:sldId id="259" r:id="rId5"/>
+    <p:sldId id="260" r:id="rId6"/>
+    <p:sldId id="261" r:id="rId7"/>
+    <p:sldId id="262" r:id="rId8"/>
+    <p:sldId id="263" r:id="rId9"/>
   </p:sldIdLst>
-  <p:sldSz cy="5143500" cx="9144000"/>
+  <p:sldSz cx="9144000" cy="5143500" type="screen16x9"/>
   <p:notesSz cx="6858000" cy="9144000"/>
   <p:defaultTextStyle>
-    <a:defPPr lvl="0" marR="0" rtl="0" algn="l">
+    <a:defPPr marR="0" lvl="0" algn="l" rtl="0">
       <a:lnSpc>
         <a:spcPct val="100000"/>
       </a:lnSpc>
@@ -31,7 +31,7 @@
         <a:spcPts val="0"/>
       </a:spcAft>
     </a:defPPr>
-    <a:lvl1pPr lvl="0" marR="0" rtl="0" algn="l">
+    <a:lvl1pPr marR="0" lvl="0" algn="l" rtl="0">
       <a:lnSpc>
         <a:spcPct val="100000"/>
       </a:lnSpc>
@@ -45,7 +45,7 @@
         <a:srgbClr val="000000"/>
       </a:buClr>
       <a:buFont typeface="Arial"/>
-      <a:defRPr b="0" i="0" sz="1400" u="none" cap="none" strike="noStrike">
+      <a:defRPr sz="1400" b="0" i="0" u="none" strike="noStrike" cap="none">
         <a:solidFill>
           <a:srgbClr val="000000"/>
         </a:solidFill>
@@ -55,7 +55,7 @@
         <a:sym typeface="Arial"/>
       </a:defRPr>
     </a:lvl1pPr>
-    <a:lvl2pPr lvl="1" marR="0" rtl="0" algn="l">
+    <a:lvl2pPr marR="0" lvl="1" algn="l" rtl="0">
       <a:lnSpc>
         <a:spcPct val="100000"/>
       </a:lnSpc>
@@ -69,7 +69,7 @@
         <a:srgbClr val="000000"/>
       </a:buClr>
       <a:buFont typeface="Arial"/>
-      <a:defRPr b="0" i="0" sz="1400" u="none" cap="none" strike="noStrike">
+      <a:defRPr sz="1400" b="0" i="0" u="none" strike="noStrike" cap="none">
         <a:solidFill>
           <a:srgbClr val="000000"/>
         </a:solidFill>
@@ -79,7 +79,7 @@
         <a:sym typeface="Arial"/>
       </a:defRPr>
     </a:lvl2pPr>
-    <a:lvl3pPr lvl="2" marR="0" rtl="0" algn="l">
+    <a:lvl3pPr marR="0" lvl="2" algn="l" rtl="0">
       <a:lnSpc>
         <a:spcPct val="100000"/>
       </a:lnSpc>
@@ -93,7 +93,7 @@
         <a:srgbClr val="000000"/>
       </a:buClr>
       <a:buFont typeface="Arial"/>
-      <a:defRPr b="0" i="0" sz="1400" u="none" cap="none" strike="noStrike">
+      <a:defRPr sz="1400" b="0" i="0" u="none" strike="noStrike" cap="none">
         <a:solidFill>
           <a:srgbClr val="000000"/>
         </a:solidFill>
@@ -103,7 +103,7 @@
         <a:sym typeface="Arial"/>
       </a:defRPr>
     </a:lvl3pPr>
-    <a:lvl4pPr lvl="3" marR="0" rtl="0" algn="l">
+    <a:lvl4pPr marR="0" lvl="3" algn="l" rtl="0">
       <a:lnSpc>
         <a:spcPct val="100000"/>
       </a:lnSpc>
@@ -117,7 +117,7 @@
         <a:srgbClr val="000000"/>
       </a:buClr>
       <a:buFont typeface="Arial"/>
-      <a:defRPr b="0" i="0" sz="1400" u="none" cap="none" strike="noStrike">
+      <a:defRPr sz="1400" b="0" i="0" u="none" strike="noStrike" cap="none">
         <a:solidFill>
           <a:srgbClr val="000000"/>
         </a:solidFill>
@@ -127,7 +127,7 @@
         <a:sym typeface="Arial"/>
       </a:defRPr>
     </a:lvl4pPr>
-    <a:lvl5pPr lvl="4" marR="0" rtl="0" algn="l">
+    <a:lvl5pPr marR="0" lvl="4" algn="l" rtl="0">
       <a:lnSpc>
         <a:spcPct val="100000"/>
       </a:lnSpc>
@@ -141,7 +141,7 @@
         <a:srgbClr val="000000"/>
       </a:buClr>
       <a:buFont typeface="Arial"/>
-      <a:defRPr b="0" i="0" sz="1400" u="none" cap="none" strike="noStrike">
+      <a:defRPr sz="1400" b="0" i="0" u="none" strike="noStrike" cap="none">
         <a:solidFill>
           <a:srgbClr val="000000"/>
         </a:solidFill>
@@ -151,7 +151,7 @@
         <a:sym typeface="Arial"/>
       </a:defRPr>
     </a:lvl5pPr>
-    <a:lvl6pPr lvl="5" marR="0" rtl="0" algn="l">
+    <a:lvl6pPr marR="0" lvl="5" algn="l" rtl="0">
       <a:lnSpc>
         <a:spcPct val="100000"/>
       </a:lnSpc>
@@ -165,7 +165,7 @@
         <a:srgbClr val="000000"/>
       </a:buClr>
       <a:buFont typeface="Arial"/>
-      <a:defRPr b="0" i="0" sz="1400" u="none" cap="none" strike="noStrike">
+      <a:defRPr sz="1400" b="0" i="0" u="none" strike="noStrike" cap="none">
         <a:solidFill>
           <a:srgbClr val="000000"/>
         </a:solidFill>
@@ -175,7 +175,7 @@
         <a:sym typeface="Arial"/>
       </a:defRPr>
     </a:lvl6pPr>
-    <a:lvl7pPr lvl="6" marR="0" rtl="0" algn="l">
+    <a:lvl7pPr marR="0" lvl="6" algn="l" rtl="0">
       <a:lnSpc>
         <a:spcPct val="100000"/>
       </a:lnSpc>
@@ -189,7 +189,7 @@
         <a:srgbClr val="000000"/>
       </a:buClr>
       <a:buFont typeface="Arial"/>
-      <a:defRPr b="0" i="0" sz="1400" u="none" cap="none" strike="noStrike">
+      <a:defRPr sz="1400" b="0" i="0" u="none" strike="noStrike" cap="none">
         <a:solidFill>
           <a:srgbClr val="000000"/>
         </a:solidFill>
@@ -199,7 +199,7 @@
         <a:sym typeface="Arial"/>
       </a:defRPr>
     </a:lvl7pPr>
-    <a:lvl8pPr lvl="7" marR="0" rtl="0" algn="l">
+    <a:lvl8pPr marR="0" lvl="7" algn="l" rtl="0">
       <a:lnSpc>
         <a:spcPct val="100000"/>
       </a:lnSpc>
@@ -213,7 +213,7 @@
         <a:srgbClr val="000000"/>
       </a:buClr>
       <a:buFont typeface="Arial"/>
-      <a:defRPr b="0" i="0" sz="1400" u="none" cap="none" strike="noStrike">
+      <a:defRPr sz="1400" b="0" i="0" u="none" strike="noStrike" cap="none">
         <a:solidFill>
           <a:srgbClr val="000000"/>
         </a:solidFill>
@@ -223,7 +223,7 @@
         <a:sym typeface="Arial"/>
       </a:defRPr>
     </a:lvl8pPr>
-    <a:lvl9pPr lvl="8" marR="0" rtl="0" algn="l">
+    <a:lvl9pPr marR="0" lvl="8" algn="l" rtl="0">
       <a:lnSpc>
         <a:spcPct val="100000"/>
       </a:lnSpc>
@@ -237,7 +237,7 @@
         <a:srgbClr val="000000"/>
       </a:buClr>
       <a:buFont typeface="Arial"/>
-      <a:defRPr b="0" i="0" sz="1400" u="none" cap="none" strike="noStrike">
+      <a:defRPr sz="1400" b="0" i="0" u="none" strike="noStrike" cap="none">
         <a:solidFill>
           <a:srgbClr val="000000"/>
         </a:solidFill>
@@ -250,7 +250,7 @@
   </p:defaultTextStyle>
   <p:extLst>
     <p:ext uri="{EFAFB233-063F-42B5-8137-9DF3F51BA10A}">
-      <p15:sldGuideLst>
+      <p15:sldGuideLst xmlns:p15="http://schemas.microsoft.com/office/powerpoint/2012/main">
         <p15:guide id="1" orient="horz" pos="1620">
           <p15:clr>
             <a:srgbClr val="A4A3A4"/>
@@ -264,25 +264,26 @@
       </p15:sldGuideLst>
     </p:ext>
     <p:ext uri="GoogleSlidesCustomDataVersion2">
-      <go:slidesCustomData xmlns:go="http://customooxmlschemas.google.com/" r:id="rId15" roundtripDataSignature="AMtx7miWG15QiNcFbjcR5NN5/V4TkR8ZhA=="/>
+      <go:slidesCustomData xmlns:go="http://customooxmlschemas.google.com/" xmlns:ahyp="http://schemas.microsoft.com/office/drawing/2018/hyperlinkcolor" xmlns:p15="http://schemas.microsoft.com/office/powerpoint/2012/main" xmlns:p14="http://schemas.microsoft.com/office/powerpoint/2010/main" xmlns:com="http://schemas.openxmlformats.org/drawingml/2006/compatibility" xmlns:pvml="urn:schemas-microsoft-com:office:powerpoint" xmlns:v="urn:schemas-microsoft-com:vml" xmlns:o="urn:schemas-microsoft-com:office:office" xmlns:dgm="http://schemas.openxmlformats.org/drawingml/2006/diagram" xmlns:c="http://schemas.openxmlformats.org/drawingml/2006/chart" xmlns:mv="urn:schemas-microsoft-com:mac:vml" xmlns:mc="http://schemas.openxmlformats.org/markup-compatibility/2006" xmlns="" r:id="rId15" roundtripDataSignature="AMtx7miWG15QiNcFbjcR5NN5/V4TkR8ZhA=="/>
     </p:ext>
   </p:extLst>
 </p:presentation>
 </file>
 
 <file path=ppt/notesMasters/notesMaster1.xml><?xml version="1.0" encoding="utf-8"?>
-<p:notesMaster xmlns:a="http://schemas.openxmlformats.org/drawingml/2006/main" xmlns:r="http://schemas.openxmlformats.org/officeDocument/2006/relationships" xmlns:mc="http://schemas.openxmlformats.org/markup-compatibility/2006" xmlns:mv="urn:schemas-microsoft-com:mac:vml" xmlns:p="http://schemas.openxmlformats.org/presentationml/2006/main" xmlns:c="http://schemas.openxmlformats.org/drawingml/2006/chart" xmlns:dgm="http://schemas.openxmlformats.org/drawingml/2006/diagram" xmlns:o="urn:schemas-microsoft-com:office:office" xmlns:v="urn:schemas-microsoft-com:vml" xmlns:pvml="urn:schemas-microsoft-com:office:powerpoint" xmlns:com="http://schemas.openxmlformats.org/drawingml/2006/compatibility" xmlns:p14="http://schemas.microsoft.com/office/powerpoint/2010/main" xmlns:p15="http://schemas.microsoft.com/office/powerpoint/2012/main" xmlns:ahyp="http://schemas.microsoft.com/office/drawing/2018/hyperlinkcolor">
+<p:notesMaster xmlns:a="http://schemas.openxmlformats.org/drawingml/2006/main" xmlns:r="http://schemas.openxmlformats.org/officeDocument/2006/relationships" xmlns:p="http://schemas.openxmlformats.org/presentationml/2006/main">
   <p:cSld>
     <p:bg>
       <p:bgPr>
         <a:solidFill>
           <a:schemeClr val="lt1"/>
         </a:solidFill>
+        <a:effectLst/>
       </p:bgPr>
     </p:bg>
     <p:spTree>
       <p:nvGrpSpPr>
-        <p:cNvPr id="2" name="Shape 2"/>
+        <p:cNvPr id="1" name="Shape 2"/>
         <p:cNvGrpSpPr/>
         <p:nvPr/>
       </p:nvGrpSpPr>
@@ -297,9 +298,11 @@
       <p:sp>
         <p:nvSpPr>
           <p:cNvPr id="3" name="Google Shape;3;n"/>
-          <p:cNvSpPr/>
+          <p:cNvSpPr>
+            <a:spLocks noGrp="1" noRot="1" noChangeAspect="1"/>
+          </p:cNvSpPr>
           <p:nvPr>
-            <p:ph idx="2" type="sldImg"/>
+            <p:ph type="sldImg" idx="2"/>
           </p:nvPr>
         </p:nvSpPr>
         <p:spPr>
@@ -308,9 +311,13 @@
             <a:ext cx="6096075" cy="3429000"/>
           </a:xfrm>
           <a:custGeom>
-            <a:rect b="b" l="l" r="r" t="t"/>
+            <a:avLst/>
+            <a:gdLst/>
+            <a:ahLst/>
+            <a:cxnLst/>
+            <a:rect l="l" t="t" r="r" b="b"/>
             <a:pathLst>
-              <a:path extrusionOk="0" h="120000" w="120000">
+              <a:path w="120000" h="120000" extrusionOk="0">
                 <a:moveTo>
                   <a:pt x="0" y="0"/>
                 </a:moveTo>
@@ -328,23 +335,25 @@
             </a:pathLst>
           </a:custGeom>
           <a:noFill/>
-          <a:ln cap="flat" cmpd="sng" w="9525">
+          <a:ln w="9525" cap="flat" cmpd="sng">
             <a:solidFill>
               <a:srgbClr val="000000"/>
             </a:solidFill>
             <a:prstDash val="solid"/>
             <a:round/>
-            <a:headEnd len="sm" w="sm" type="none"/>
-            <a:tailEnd len="sm" w="sm" type="none"/>
+            <a:headEnd type="none" w="sm" len="sm"/>
+            <a:tailEnd type="none" w="sm" len="sm"/>
           </a:ln>
         </p:spPr>
       </p:sp>
       <p:sp>
         <p:nvSpPr>
           <p:cNvPr id="4" name="Google Shape;4;n"/>
-          <p:cNvSpPr txBox="1"/>
+          <p:cNvSpPr txBox="1">
+            <a:spLocks noGrp="1"/>
+          </p:cNvSpPr>
           <p:nvPr>
-            <p:ph idx="1" type="body"/>
+            <p:ph type="body" idx="1"/>
           </p:nvPr>
         </p:nvSpPr>
         <p:spPr>
@@ -361,11 +370,11 @@
           </a:ln>
         </p:spPr>
         <p:txBody>
-          <a:bodyPr anchorCtr="0" anchor="t" bIns="91425" lIns="91425" spcFirstLastPara="1" rIns="91425" wrap="square" tIns="91425">
+          <a:bodyPr spcFirstLastPara="1" wrap="square" lIns="91425" tIns="91425" rIns="91425" bIns="91425" anchor="t" anchorCtr="0">
             <a:noAutofit/>
           </a:bodyPr>
           <a:lstStyle>
-            <a:lvl1pPr indent="-298450" lvl="0" marL="457200" marR="0" rtl="0" algn="l">
+            <a:lvl1pPr marL="457200" marR="0" lvl="0" indent="-298450" algn="l" rtl="0">
               <a:lnSpc>
                 <a:spcPct val="100000"/>
               </a:lnSpc>
@@ -381,7 +390,7 @@
               <a:buSzPts val="1100"/>
               <a:buFont typeface="Arial"/>
               <a:buChar char="●"/>
-              <a:defRPr b="0" i="0" sz="1100" u="none" cap="none" strike="noStrike">
+              <a:defRPr sz="1100" b="0" i="0" u="none" strike="noStrike" cap="none">
                 <a:solidFill>
                   <a:srgbClr val="000000"/>
                 </a:solidFill>
@@ -391,7 +400,7 @@
                 <a:sym typeface="Arial"/>
               </a:defRPr>
             </a:lvl1pPr>
-            <a:lvl2pPr indent="-298450" lvl="1" marL="914400" marR="0" rtl="0" algn="l">
+            <a:lvl2pPr marL="914400" marR="0" lvl="1" indent="-298450" algn="l" rtl="0">
               <a:lnSpc>
                 <a:spcPct val="100000"/>
               </a:lnSpc>
@@ -407,7 +416,7 @@
               <a:buSzPts val="1100"/>
               <a:buFont typeface="Arial"/>
               <a:buChar char="○"/>
-              <a:defRPr b="0" i="0" sz="1100" u="none" cap="none" strike="noStrike">
+              <a:defRPr sz="1100" b="0" i="0" u="none" strike="noStrike" cap="none">
                 <a:solidFill>
                   <a:srgbClr val="000000"/>
                 </a:solidFill>
@@ -417,7 +426,7 @@
                 <a:sym typeface="Arial"/>
               </a:defRPr>
             </a:lvl2pPr>
-            <a:lvl3pPr indent="-298450" lvl="2" marL="1371600" marR="0" rtl="0" algn="l">
+            <a:lvl3pPr marL="1371600" marR="0" lvl="2" indent="-298450" algn="l" rtl="0">
               <a:lnSpc>
                 <a:spcPct val="100000"/>
               </a:lnSpc>
@@ -433,7 +442,7 @@
               <a:buSzPts val="1100"/>
               <a:buFont typeface="Arial"/>
               <a:buChar char="■"/>
-              <a:defRPr b="0" i="0" sz="1100" u="none" cap="none" strike="noStrike">
+              <a:defRPr sz="1100" b="0" i="0" u="none" strike="noStrike" cap="none">
                 <a:solidFill>
                   <a:srgbClr val="000000"/>
                 </a:solidFill>
@@ -443,7 +452,7 @@
                 <a:sym typeface="Arial"/>
               </a:defRPr>
             </a:lvl3pPr>
-            <a:lvl4pPr indent="-298450" lvl="3" marL="1828800" marR="0" rtl="0" algn="l">
+            <a:lvl4pPr marL="1828800" marR="0" lvl="3" indent="-298450" algn="l" rtl="0">
               <a:lnSpc>
                 <a:spcPct val="100000"/>
               </a:lnSpc>
@@ -459,7 +468,7 @@
               <a:buSzPts val="1100"/>
               <a:buFont typeface="Arial"/>
               <a:buChar char="●"/>
-              <a:defRPr b="0" i="0" sz="1100" u="none" cap="none" strike="noStrike">
+              <a:defRPr sz="1100" b="0" i="0" u="none" strike="noStrike" cap="none">
                 <a:solidFill>
                   <a:srgbClr val="000000"/>
                 </a:solidFill>
@@ -469,7 +478,7 @@
                 <a:sym typeface="Arial"/>
               </a:defRPr>
             </a:lvl4pPr>
-            <a:lvl5pPr indent="-298450" lvl="4" marL="2286000" marR="0" rtl="0" algn="l">
+            <a:lvl5pPr marL="2286000" marR="0" lvl="4" indent="-298450" algn="l" rtl="0">
               <a:lnSpc>
                 <a:spcPct val="100000"/>
               </a:lnSpc>
@@ -485,7 +494,7 @@
               <a:buSzPts val="1100"/>
               <a:buFont typeface="Arial"/>
               <a:buChar char="○"/>
-              <a:defRPr b="0" i="0" sz="1100" u="none" cap="none" strike="noStrike">
+              <a:defRPr sz="1100" b="0" i="0" u="none" strike="noStrike" cap="none">
                 <a:solidFill>
                   <a:srgbClr val="000000"/>
                 </a:solidFill>
@@ -495,7 +504,7 @@
                 <a:sym typeface="Arial"/>
               </a:defRPr>
             </a:lvl5pPr>
-            <a:lvl6pPr indent="-298450" lvl="5" marL="2743200" marR="0" rtl="0" algn="l">
+            <a:lvl6pPr marL="2743200" marR="0" lvl="5" indent="-298450" algn="l" rtl="0">
               <a:lnSpc>
                 <a:spcPct val="100000"/>
               </a:lnSpc>
@@ -511,7 +520,7 @@
               <a:buSzPts val="1100"/>
               <a:buFont typeface="Arial"/>
               <a:buChar char="■"/>
-              <a:defRPr b="0" i="0" sz="1100" u="none" cap="none" strike="noStrike">
+              <a:defRPr sz="1100" b="0" i="0" u="none" strike="noStrike" cap="none">
                 <a:solidFill>
                   <a:srgbClr val="000000"/>
                 </a:solidFill>
@@ -521,7 +530,7 @@
                 <a:sym typeface="Arial"/>
               </a:defRPr>
             </a:lvl6pPr>
-            <a:lvl7pPr indent="-298450" lvl="6" marL="3200400" marR="0" rtl="0" algn="l">
+            <a:lvl7pPr marL="3200400" marR="0" lvl="6" indent="-298450" algn="l" rtl="0">
               <a:lnSpc>
                 <a:spcPct val="100000"/>
               </a:lnSpc>
@@ -537,7 +546,7 @@
               <a:buSzPts val="1100"/>
               <a:buFont typeface="Arial"/>
               <a:buChar char="●"/>
-              <a:defRPr b="0" i="0" sz="1100" u="none" cap="none" strike="noStrike">
+              <a:defRPr sz="1100" b="0" i="0" u="none" strike="noStrike" cap="none">
                 <a:solidFill>
                   <a:srgbClr val="000000"/>
                 </a:solidFill>
@@ -547,7 +556,7 @@
                 <a:sym typeface="Arial"/>
               </a:defRPr>
             </a:lvl7pPr>
-            <a:lvl8pPr indent="-298450" lvl="7" marL="3657600" marR="0" rtl="0" algn="l">
+            <a:lvl8pPr marL="3657600" marR="0" lvl="7" indent="-298450" algn="l" rtl="0">
               <a:lnSpc>
                 <a:spcPct val="100000"/>
               </a:lnSpc>
@@ -563,7 +572,7 @@
               <a:buSzPts val="1100"/>
               <a:buFont typeface="Arial"/>
               <a:buChar char="○"/>
-              <a:defRPr b="0" i="0" sz="1100" u="none" cap="none" strike="noStrike">
+              <a:defRPr sz="1100" b="0" i="0" u="none" strike="noStrike" cap="none">
                 <a:solidFill>
                   <a:srgbClr val="000000"/>
                 </a:solidFill>
@@ -573,7 +582,7 @@
                 <a:sym typeface="Arial"/>
               </a:defRPr>
             </a:lvl8pPr>
-            <a:lvl9pPr indent="-298450" lvl="8" marL="4114800" marR="0" rtl="0" algn="l">
+            <a:lvl9pPr marL="4114800" marR="0" lvl="8" indent="-298450" algn="l" rtl="0">
               <a:lnSpc>
                 <a:spcPct val="100000"/>
               </a:lnSpc>
@@ -589,7 +598,7 @@
               <a:buSzPts val="1100"/>
               <a:buFont typeface="Arial"/>
               <a:buChar char="■"/>
-              <a:defRPr b="0" i="0" sz="1100" u="none" cap="none" strike="noStrike">
+              <a:defRPr sz="1100" b="0" i="0" u="none" strike="noStrike" cap="none">
                 <a:solidFill>
                   <a:srgbClr val="000000"/>
                 </a:solidFill>
@@ -600,14 +609,16 @@
               </a:defRPr>
             </a:lvl9pPr>
           </a:lstStyle>
-          <a:p/>
+          <a:p>
+            <a:endParaRPr/>
+          </a:p>
         </p:txBody>
       </p:sp>
     </p:spTree>
   </p:cSld>
-  <p:clrMap accent1="accent1" accent2="accent2" accent3="accent3" accent4="accent4" accent5="accent5" accent6="accent6" bg1="lt1" bg2="dk2" tx1="dk1" tx2="lt2" folHlink="folHlink" hlink="hlink"/>
+  <p:clrMap bg1="lt1" tx1="dk1" bg2="dk2" tx2="lt2" accent1="accent1" accent2="accent2" accent3="accent3" accent4="accent4" accent5="accent5" accent6="accent6" hlink="hlink" folHlink="folHlink"/>
   <p:notesStyle>
-    <a:defPPr lvl="0" marR="0" rtl="0" algn="l">
+    <a:defPPr marR="0" lvl="0" algn="l" rtl="0">
       <a:lnSpc>
         <a:spcPct val="100000"/>
       </a:lnSpc>
@@ -618,7 +629,7 @@
         <a:spcPts val="0"/>
       </a:spcAft>
     </a:defPPr>
-    <a:lvl1pPr lvl="0" marR="0" rtl="0" algn="l">
+    <a:lvl1pPr marR="0" lvl="0" algn="l" rtl="0">
       <a:lnSpc>
         <a:spcPct val="100000"/>
       </a:lnSpc>
@@ -632,7 +643,7 @@
         <a:srgbClr val="000000"/>
       </a:buClr>
       <a:buFont typeface="Arial"/>
-      <a:defRPr b="0" i="0" sz="1400" u="none" cap="none" strike="noStrike">
+      <a:defRPr sz="1400" b="0" i="0" u="none" strike="noStrike" cap="none">
         <a:solidFill>
           <a:srgbClr val="000000"/>
         </a:solidFill>
@@ -642,7 +653,7 @@
         <a:sym typeface="Arial"/>
       </a:defRPr>
     </a:lvl1pPr>
-    <a:lvl2pPr lvl="1" marR="0" rtl="0" algn="l">
+    <a:lvl2pPr marR="0" lvl="1" algn="l" rtl="0">
       <a:lnSpc>
         <a:spcPct val="100000"/>
       </a:lnSpc>
@@ -656,7 +667,7 @@
         <a:srgbClr val="000000"/>
       </a:buClr>
       <a:buFont typeface="Arial"/>
-      <a:defRPr b="0" i="0" sz="1400" u="none" cap="none" strike="noStrike">
+      <a:defRPr sz="1400" b="0" i="0" u="none" strike="noStrike" cap="none">
         <a:solidFill>
           <a:srgbClr val="000000"/>
         </a:solidFill>
@@ -666,7 +677,7 @@
         <a:sym typeface="Arial"/>
       </a:defRPr>
     </a:lvl2pPr>
-    <a:lvl3pPr lvl="2" marR="0" rtl="0" algn="l">
+    <a:lvl3pPr marR="0" lvl="2" algn="l" rtl="0">
       <a:lnSpc>
         <a:spcPct val="100000"/>
       </a:lnSpc>
@@ -680,7 +691,7 @@
         <a:srgbClr val="000000"/>
       </a:buClr>
       <a:buFont typeface="Arial"/>
-      <a:defRPr b="0" i="0" sz="1400" u="none" cap="none" strike="noStrike">
+      <a:defRPr sz="1400" b="0" i="0" u="none" strike="noStrike" cap="none">
         <a:solidFill>
           <a:srgbClr val="000000"/>
         </a:solidFill>
@@ -690,7 +701,7 @@
         <a:sym typeface="Arial"/>
       </a:defRPr>
     </a:lvl3pPr>
-    <a:lvl4pPr lvl="3" marR="0" rtl="0" algn="l">
+    <a:lvl4pPr marR="0" lvl="3" algn="l" rtl="0">
       <a:lnSpc>
         <a:spcPct val="100000"/>
       </a:lnSpc>
@@ -704,7 +715,7 @@
         <a:srgbClr val="000000"/>
       </a:buClr>
       <a:buFont typeface="Arial"/>
-      <a:defRPr b="0" i="0" sz="1400" u="none" cap="none" strike="noStrike">
+      <a:defRPr sz="1400" b="0" i="0" u="none" strike="noStrike" cap="none">
         <a:solidFill>
           <a:srgbClr val="000000"/>
         </a:solidFill>
@@ -714,7 +725,7 @@
         <a:sym typeface="Arial"/>
       </a:defRPr>
     </a:lvl4pPr>
-    <a:lvl5pPr lvl="4" marR="0" rtl="0" algn="l">
+    <a:lvl5pPr marR="0" lvl="4" algn="l" rtl="0">
       <a:lnSpc>
         <a:spcPct val="100000"/>
       </a:lnSpc>
@@ -728,7 +739,7 @@
         <a:srgbClr val="000000"/>
       </a:buClr>
       <a:buFont typeface="Arial"/>
-      <a:defRPr b="0" i="0" sz="1400" u="none" cap="none" strike="noStrike">
+      <a:defRPr sz="1400" b="0" i="0" u="none" strike="noStrike" cap="none">
         <a:solidFill>
           <a:srgbClr val="000000"/>
         </a:solidFill>
@@ -738,7 +749,7 @@
         <a:sym typeface="Arial"/>
       </a:defRPr>
     </a:lvl5pPr>
-    <a:lvl6pPr lvl="5" marR="0" rtl="0" algn="l">
+    <a:lvl6pPr marR="0" lvl="5" algn="l" rtl="0">
       <a:lnSpc>
         <a:spcPct val="100000"/>
       </a:lnSpc>
@@ -752,7 +763,7 @@
         <a:srgbClr val="000000"/>
       </a:buClr>
       <a:buFont typeface="Arial"/>
-      <a:defRPr b="0" i="0" sz="1400" u="none" cap="none" strike="noStrike">
+      <a:defRPr sz="1400" b="0" i="0" u="none" strike="noStrike" cap="none">
         <a:solidFill>
           <a:srgbClr val="000000"/>
         </a:solidFill>
@@ -762,7 +773,7 @@
         <a:sym typeface="Arial"/>
       </a:defRPr>
     </a:lvl6pPr>
-    <a:lvl7pPr lvl="6" marR="0" rtl="0" algn="l">
+    <a:lvl7pPr marR="0" lvl="6" algn="l" rtl="0">
       <a:lnSpc>
         <a:spcPct val="100000"/>
       </a:lnSpc>
@@ -776,7 +787,7 @@
         <a:srgbClr val="000000"/>
       </a:buClr>
       <a:buFont typeface="Arial"/>
-      <a:defRPr b="0" i="0" sz="1400" u="none" cap="none" strike="noStrike">
+      <a:defRPr sz="1400" b="0" i="0" u="none" strike="noStrike" cap="none">
         <a:solidFill>
           <a:srgbClr val="000000"/>
         </a:solidFill>
@@ -786,7 +797,7 @@
         <a:sym typeface="Arial"/>
       </a:defRPr>
     </a:lvl7pPr>
-    <a:lvl8pPr lvl="7" marR="0" rtl="0" algn="l">
+    <a:lvl8pPr marR="0" lvl="7" algn="l" rtl="0">
       <a:lnSpc>
         <a:spcPct val="100000"/>
       </a:lnSpc>
@@ -800,7 +811,7 @@
         <a:srgbClr val="000000"/>
       </a:buClr>
       <a:buFont typeface="Arial"/>
-      <a:defRPr b="0" i="0" sz="1400" u="none" cap="none" strike="noStrike">
+      <a:defRPr sz="1400" b="0" i="0" u="none" strike="noStrike" cap="none">
         <a:solidFill>
           <a:srgbClr val="000000"/>
         </a:solidFill>
@@ -810,7 +821,7 @@
         <a:sym typeface="Arial"/>
       </a:defRPr>
     </a:lvl8pPr>
-    <a:lvl9pPr lvl="8" marR="0" rtl="0" algn="l">
+    <a:lvl9pPr marR="0" lvl="8" algn="l" rtl="0">
       <a:lnSpc>
         <a:spcPct val="100000"/>
       </a:lnSpc>
@@ -824,7 +835,7 @@
         <a:srgbClr val="000000"/>
       </a:buClr>
       <a:buFont typeface="Arial"/>
-      <a:defRPr b="0" i="0" sz="1400" u="none" cap="none" strike="noStrike">
+      <a:defRPr sz="1400" b="0" i="0" u="none" strike="noStrike" cap="none">
         <a:solidFill>
           <a:srgbClr val="000000"/>
         </a:solidFill>
@@ -839,11 +850,11 @@
 </file>
 
 <file path=ppt/notesSlides/notesSlide1.xml><?xml version="1.0" encoding="utf-8"?>
-<p:notes xmlns:a="http://schemas.openxmlformats.org/drawingml/2006/main" xmlns:r="http://schemas.openxmlformats.org/officeDocument/2006/relationships" xmlns:mc="http://schemas.openxmlformats.org/markup-compatibility/2006" xmlns:mv="urn:schemas-microsoft-com:mac:vml" xmlns:p="http://schemas.openxmlformats.org/presentationml/2006/main" xmlns:c="http://schemas.openxmlformats.org/drawingml/2006/chart" xmlns:dgm="http://schemas.openxmlformats.org/drawingml/2006/diagram" xmlns:o="urn:schemas-microsoft-com:office:office" xmlns:v="urn:schemas-microsoft-com:vml" xmlns:pvml="urn:schemas-microsoft-com:office:powerpoint" xmlns:com="http://schemas.openxmlformats.org/drawingml/2006/compatibility" xmlns:p14="http://schemas.microsoft.com/office/powerpoint/2010/main" xmlns:p15="http://schemas.microsoft.com/office/powerpoint/2012/main" xmlns:ahyp="http://schemas.microsoft.com/office/drawing/2018/hyperlinkcolor" showMasterPhAnim="0" showMasterSp="0">
+<p:notes xmlns:a="http://schemas.openxmlformats.org/drawingml/2006/main" xmlns:r="http://schemas.openxmlformats.org/officeDocument/2006/relationships" xmlns:p="http://schemas.openxmlformats.org/presentationml/2006/main" showMasterSp="0" showMasterPhAnim="0">
   <p:cSld>
     <p:spTree>
       <p:nvGrpSpPr>
-        <p:cNvPr id="55" name="Shape 55"/>
+        <p:cNvPr id="1" name="Shape 55"/>
         <p:cNvGrpSpPr/>
         <p:nvPr/>
       </p:nvGrpSpPr>
@@ -858,9 +869,11 @@
       <p:sp>
         <p:nvSpPr>
           <p:cNvPr id="56" name="Google Shape;56;p1:notes"/>
-          <p:cNvSpPr/>
+          <p:cNvSpPr>
+            <a:spLocks noGrp="1" noRot="1" noChangeAspect="1"/>
+          </p:cNvSpPr>
           <p:nvPr>
-            <p:ph idx="2" type="sldImg"/>
+            <p:ph type="sldImg" idx="2"/>
           </p:nvPr>
         </p:nvSpPr>
         <p:spPr>
@@ -869,9 +882,13 @@
             <a:ext cx="6096000" cy="3429000"/>
           </a:xfrm>
           <a:custGeom>
-            <a:rect b="b" l="l" r="r" t="t"/>
+            <a:avLst/>
+            <a:gdLst/>
+            <a:ahLst/>
+            <a:cxnLst/>
+            <a:rect l="l" t="t" r="r" b="b"/>
             <a:pathLst>
-              <a:path extrusionOk="0" h="120000" w="120000">
+              <a:path w="120000" h="120000" extrusionOk="0">
                 <a:moveTo>
                   <a:pt x="0" y="0"/>
                 </a:moveTo>
@@ -889,23 +906,25 @@
             </a:pathLst>
           </a:custGeom>
           <a:noFill/>
-          <a:ln cap="flat" cmpd="sng" w="9525">
+          <a:ln w="9525" cap="flat" cmpd="sng">
             <a:solidFill>
               <a:srgbClr val="000000"/>
             </a:solidFill>
             <a:prstDash val="solid"/>
             <a:round/>
-            <a:headEnd len="sm" w="sm" type="none"/>
-            <a:tailEnd len="sm" w="sm" type="none"/>
+            <a:headEnd type="none" w="sm" len="sm"/>
+            <a:tailEnd type="none" w="sm" len="sm"/>
           </a:ln>
         </p:spPr>
       </p:sp>
       <p:sp>
         <p:nvSpPr>
           <p:cNvPr id="57" name="Google Shape;57;p1:notes"/>
-          <p:cNvSpPr txBox="1"/>
+          <p:cNvSpPr txBox="1">
+            <a:spLocks noGrp="1"/>
+          </p:cNvSpPr>
           <p:nvPr>
-            <p:ph idx="1" type="body"/>
+            <p:ph type="body" idx="1"/>
           </p:nvPr>
         </p:nvSpPr>
         <p:spPr>
@@ -922,12 +941,12 @@
           </a:ln>
         </p:spPr>
         <p:txBody>
-          <a:bodyPr anchorCtr="0" anchor="t" bIns="91425" lIns="91425" spcFirstLastPara="1" rIns="91425" wrap="square" tIns="91425">
+          <a:bodyPr spcFirstLastPara="1" wrap="square" lIns="91425" tIns="91425" rIns="91425" bIns="91425" anchor="t" anchorCtr="0">
             <a:noAutofit/>
           </a:bodyPr>
           <a:lstStyle/>
           <a:p>
-            <a:pPr indent="0" lvl="0" marL="0" rtl="0" algn="l">
+            <a:pPr marL="0" lvl="0" indent="0" algn="l" rtl="0">
               <a:lnSpc>
                 <a:spcPct val="100000"/>
               </a:lnSpc>
@@ -940,9 +959,6 @@
               <a:buSzPts val="1100"/>
               <a:buNone/>
             </a:pPr>
-            <a:r>
-              <a:t/>
-            </a:r>
             <a:endParaRPr/>
           </a:p>
         </p:txBody>
@@ -956,11 +972,11 @@
 </file>
 
 <file path=ppt/notesSlides/notesSlide2.xml><?xml version="1.0" encoding="utf-8"?>
-<p:notes xmlns:a="http://schemas.openxmlformats.org/drawingml/2006/main" xmlns:r="http://schemas.openxmlformats.org/officeDocument/2006/relationships" xmlns:mc="http://schemas.openxmlformats.org/markup-compatibility/2006" xmlns:mv="urn:schemas-microsoft-com:mac:vml" xmlns:p="http://schemas.openxmlformats.org/presentationml/2006/main" xmlns:c="http://schemas.openxmlformats.org/drawingml/2006/chart" xmlns:dgm="http://schemas.openxmlformats.org/drawingml/2006/diagram" xmlns:o="urn:schemas-microsoft-com:office:office" xmlns:v="urn:schemas-microsoft-com:vml" xmlns:pvml="urn:schemas-microsoft-com:office:powerpoint" xmlns:com="http://schemas.openxmlformats.org/drawingml/2006/compatibility" xmlns:p14="http://schemas.microsoft.com/office/powerpoint/2010/main" xmlns:p15="http://schemas.microsoft.com/office/powerpoint/2012/main" xmlns:ahyp="http://schemas.microsoft.com/office/drawing/2018/hyperlinkcolor" showMasterPhAnim="0" showMasterSp="0">
+<p:notes xmlns:a="http://schemas.openxmlformats.org/drawingml/2006/main" xmlns:r="http://schemas.openxmlformats.org/officeDocument/2006/relationships" xmlns:p="http://schemas.openxmlformats.org/presentationml/2006/main" showMasterSp="0" showMasterPhAnim="0">
   <p:cSld>
     <p:spTree>
       <p:nvGrpSpPr>
-        <p:cNvPr id="62" name="Shape 62"/>
+        <p:cNvPr id="1" name="Shape 62"/>
         <p:cNvGrpSpPr/>
         <p:nvPr/>
       </p:nvGrpSpPr>
@@ -975,9 +991,11 @@
       <p:sp>
         <p:nvSpPr>
           <p:cNvPr id="63" name="Google Shape;63;p2:notes"/>
-          <p:cNvSpPr/>
+          <p:cNvSpPr>
+            <a:spLocks noGrp="1" noRot="1" noChangeAspect="1"/>
+          </p:cNvSpPr>
           <p:nvPr>
-            <p:ph idx="2" type="sldImg"/>
+            <p:ph type="sldImg" idx="2"/>
           </p:nvPr>
         </p:nvSpPr>
         <p:spPr>
@@ -986,9 +1004,13 @@
             <a:ext cx="6096000" cy="3429000"/>
           </a:xfrm>
           <a:custGeom>
-            <a:rect b="b" l="l" r="r" t="t"/>
+            <a:avLst/>
+            <a:gdLst/>
+            <a:ahLst/>
+            <a:cxnLst/>
+            <a:rect l="l" t="t" r="r" b="b"/>
             <a:pathLst>
-              <a:path extrusionOk="0" h="120000" w="120000">
+              <a:path w="120000" h="120000" extrusionOk="0">
                 <a:moveTo>
                   <a:pt x="0" y="0"/>
                 </a:moveTo>
@@ -1006,23 +1028,25 @@
             </a:pathLst>
           </a:custGeom>
           <a:noFill/>
-          <a:ln cap="flat" cmpd="sng" w="9525">
+          <a:ln w="9525" cap="flat" cmpd="sng">
             <a:solidFill>
               <a:srgbClr val="000000"/>
             </a:solidFill>
             <a:prstDash val="solid"/>
             <a:round/>
-            <a:headEnd len="sm" w="sm" type="none"/>
-            <a:tailEnd len="sm" w="sm" type="none"/>
+            <a:headEnd type="none" w="sm" len="sm"/>
+            <a:tailEnd type="none" w="sm" len="sm"/>
           </a:ln>
         </p:spPr>
       </p:sp>
       <p:sp>
         <p:nvSpPr>
           <p:cNvPr id="64" name="Google Shape;64;p2:notes"/>
-          <p:cNvSpPr txBox="1"/>
+          <p:cNvSpPr txBox="1">
+            <a:spLocks noGrp="1"/>
+          </p:cNvSpPr>
           <p:nvPr>
-            <p:ph idx="1" type="body"/>
+            <p:ph type="body" idx="1"/>
           </p:nvPr>
         </p:nvSpPr>
         <p:spPr>
@@ -1039,12 +1063,12 @@
           </a:ln>
         </p:spPr>
         <p:txBody>
-          <a:bodyPr anchorCtr="0" anchor="t" bIns="91425" lIns="91425" spcFirstLastPara="1" rIns="91425" wrap="square" tIns="91425">
+          <a:bodyPr spcFirstLastPara="1" wrap="square" lIns="91425" tIns="91425" rIns="91425" bIns="91425" anchor="t" anchorCtr="0">
             <a:noAutofit/>
           </a:bodyPr>
           <a:lstStyle/>
           <a:p>
-            <a:pPr indent="0" lvl="0" marL="0" rtl="0" algn="l">
+            <a:pPr marL="0" lvl="0" indent="0" algn="l" rtl="0">
               <a:lnSpc>
                 <a:spcPct val="100000"/>
               </a:lnSpc>
@@ -1057,9 +1081,6 @@
               <a:buSzPts val="1100"/>
               <a:buNone/>
             </a:pPr>
-            <a:r>
-              <a:t/>
-            </a:r>
             <a:endParaRPr/>
           </a:p>
         </p:txBody>
@@ -1073,11 +1094,11 @@
 </file>
 
 <file path=ppt/notesSlides/notesSlide3.xml><?xml version="1.0" encoding="utf-8"?>
-<p:notes xmlns:a="http://schemas.openxmlformats.org/drawingml/2006/main" xmlns:r="http://schemas.openxmlformats.org/officeDocument/2006/relationships" xmlns:mc="http://schemas.openxmlformats.org/markup-compatibility/2006" xmlns:mv="urn:schemas-microsoft-com:mac:vml" xmlns:p="http://schemas.openxmlformats.org/presentationml/2006/main" xmlns:c="http://schemas.openxmlformats.org/drawingml/2006/chart" xmlns:dgm="http://schemas.openxmlformats.org/drawingml/2006/diagram" xmlns:o="urn:schemas-microsoft-com:office:office" xmlns:v="urn:schemas-microsoft-com:vml" xmlns:pvml="urn:schemas-microsoft-com:office:powerpoint" xmlns:com="http://schemas.openxmlformats.org/drawingml/2006/compatibility" xmlns:p14="http://schemas.microsoft.com/office/powerpoint/2010/main" xmlns:p15="http://schemas.microsoft.com/office/powerpoint/2012/main" xmlns:ahyp="http://schemas.microsoft.com/office/drawing/2018/hyperlinkcolor" showMasterPhAnim="0" showMasterSp="0">
+<p:notes xmlns:a="http://schemas.openxmlformats.org/drawingml/2006/main" xmlns:r="http://schemas.openxmlformats.org/officeDocument/2006/relationships" xmlns:p="http://schemas.openxmlformats.org/presentationml/2006/main" showMasterSp="0" showMasterPhAnim="0">
   <p:cSld>
     <p:spTree>
       <p:nvGrpSpPr>
-        <p:cNvPr id="79" name="Shape 79"/>
+        <p:cNvPr id="1" name="Shape 79"/>
         <p:cNvGrpSpPr/>
         <p:nvPr/>
       </p:nvGrpSpPr>
@@ -1092,9 +1113,11 @@
       <p:sp>
         <p:nvSpPr>
           <p:cNvPr id="80" name="Google Shape;80;p3:notes"/>
-          <p:cNvSpPr txBox="1"/>
+          <p:cNvSpPr txBox="1">
+            <a:spLocks noGrp="1"/>
+          </p:cNvSpPr>
           <p:nvPr>
-            <p:ph idx="1" type="body"/>
+            <p:ph type="body" idx="1"/>
           </p:nvPr>
         </p:nvSpPr>
         <p:spPr>
@@ -1107,12 +1130,12 @@
           </a:prstGeom>
         </p:spPr>
         <p:txBody>
-          <a:bodyPr anchorCtr="0" anchor="t" bIns="91425" lIns="91425" spcFirstLastPara="1" rIns="91425" wrap="square" tIns="91425">
+          <a:bodyPr spcFirstLastPara="1" wrap="square" lIns="91425" tIns="91425" rIns="91425" bIns="91425" anchor="t" anchorCtr="0">
             <a:noAutofit/>
           </a:bodyPr>
           <a:lstStyle/>
           <a:p>
-            <a:pPr indent="0" lvl="0" marL="0" rtl="0" algn="l">
+            <a:pPr marL="0" lvl="0" indent="0" algn="l" rtl="0">
               <a:spcBef>
                 <a:spcPts val="0"/>
               </a:spcBef>
@@ -1121,9 +1144,6 @@
               </a:spcAft>
               <a:buNone/>
             </a:pPr>
-            <a:r>
-              <a:t/>
-            </a:r>
             <a:endParaRPr/>
           </a:p>
         </p:txBody>
@@ -1131,9 +1151,11 @@
       <p:sp>
         <p:nvSpPr>
           <p:cNvPr id="81" name="Google Shape;81;p3:notes"/>
-          <p:cNvSpPr/>
+          <p:cNvSpPr>
+            <a:spLocks noGrp="1" noRot="1" noChangeAspect="1"/>
+          </p:cNvSpPr>
           <p:nvPr>
-            <p:ph idx="2" type="sldImg"/>
+            <p:ph type="sldImg" idx="2"/>
           </p:nvPr>
         </p:nvSpPr>
         <p:spPr>
@@ -1142,9 +1164,13 @@
             <a:ext cx="6096075" cy="3429000"/>
           </a:xfrm>
           <a:custGeom>
-            <a:rect b="b" l="l" r="r" t="t"/>
+            <a:avLst/>
+            <a:gdLst/>
+            <a:ahLst/>
+            <a:cxnLst/>
+            <a:rect l="l" t="t" r="r" b="b"/>
             <a:pathLst>
-              <a:path extrusionOk="0" h="120000" w="120000">
+              <a:path w="120000" h="120000" extrusionOk="0">
                 <a:moveTo>
                   <a:pt x="0" y="0"/>
                 </a:moveTo>
@@ -1172,11 +1198,11 @@
 </file>
 
 <file path=ppt/notesSlides/notesSlide4.xml><?xml version="1.0" encoding="utf-8"?>
-<p:notes xmlns:a="http://schemas.openxmlformats.org/drawingml/2006/main" xmlns:r="http://schemas.openxmlformats.org/officeDocument/2006/relationships" xmlns:mc="http://schemas.openxmlformats.org/markup-compatibility/2006" xmlns:mv="urn:schemas-microsoft-com:mac:vml" xmlns:p="http://schemas.openxmlformats.org/presentationml/2006/main" xmlns:c="http://schemas.openxmlformats.org/drawingml/2006/chart" xmlns:dgm="http://schemas.openxmlformats.org/drawingml/2006/diagram" xmlns:o="urn:schemas-microsoft-com:office:office" xmlns:v="urn:schemas-microsoft-com:vml" xmlns:pvml="urn:schemas-microsoft-com:office:powerpoint" xmlns:com="http://schemas.openxmlformats.org/drawingml/2006/compatibility" xmlns:p14="http://schemas.microsoft.com/office/powerpoint/2010/main" xmlns:p15="http://schemas.microsoft.com/office/powerpoint/2012/main" xmlns:ahyp="http://schemas.microsoft.com/office/drawing/2018/hyperlinkcolor" showMasterPhAnim="0" showMasterSp="0">
+<p:notes xmlns:a="http://schemas.openxmlformats.org/drawingml/2006/main" xmlns:r="http://schemas.openxmlformats.org/officeDocument/2006/relationships" xmlns:p="http://schemas.openxmlformats.org/presentationml/2006/main" showMasterSp="0" showMasterPhAnim="0">
   <p:cSld>
     <p:spTree>
       <p:nvGrpSpPr>
-        <p:cNvPr id="87" name="Shape 87"/>
+        <p:cNvPr id="1" name="Shape 87"/>
         <p:cNvGrpSpPr/>
         <p:nvPr/>
       </p:nvGrpSpPr>
@@ -1191,9 +1217,11 @@
       <p:sp>
         <p:nvSpPr>
           <p:cNvPr id="88" name="Google Shape;88;p4:notes"/>
-          <p:cNvSpPr txBox="1"/>
+          <p:cNvSpPr txBox="1">
+            <a:spLocks noGrp="1"/>
+          </p:cNvSpPr>
           <p:nvPr>
-            <p:ph idx="1" type="body"/>
+            <p:ph type="body" idx="1"/>
           </p:nvPr>
         </p:nvSpPr>
         <p:spPr>
@@ -1206,12 +1234,12 @@
           </a:prstGeom>
         </p:spPr>
         <p:txBody>
-          <a:bodyPr anchorCtr="0" anchor="t" bIns="91425" lIns="91425" spcFirstLastPara="1" rIns="91425" wrap="square" tIns="91425">
+          <a:bodyPr spcFirstLastPara="1" wrap="square" lIns="91425" tIns="91425" rIns="91425" bIns="91425" anchor="t" anchorCtr="0">
             <a:noAutofit/>
           </a:bodyPr>
           <a:lstStyle/>
           <a:p>
-            <a:pPr indent="0" lvl="0" marL="0" rtl="0" algn="l">
+            <a:pPr marL="0" lvl="0" indent="0" algn="l" rtl="0">
               <a:spcBef>
                 <a:spcPts val="0"/>
               </a:spcBef>
@@ -1220,9 +1248,6 @@
               </a:spcAft>
               <a:buNone/>
             </a:pPr>
-            <a:r>
-              <a:t/>
-            </a:r>
             <a:endParaRPr/>
           </a:p>
         </p:txBody>
@@ -1230,9 +1255,11 @@
       <p:sp>
         <p:nvSpPr>
           <p:cNvPr id="89" name="Google Shape;89;p4:notes"/>
-          <p:cNvSpPr/>
+          <p:cNvSpPr>
+            <a:spLocks noGrp="1" noRot="1" noChangeAspect="1"/>
+          </p:cNvSpPr>
           <p:nvPr>
-            <p:ph idx="2" type="sldImg"/>
+            <p:ph type="sldImg" idx="2"/>
           </p:nvPr>
         </p:nvSpPr>
         <p:spPr>
@@ -1241,9 +1268,13 @@
             <a:ext cx="6096075" cy="3429000"/>
           </a:xfrm>
           <a:custGeom>
-            <a:rect b="b" l="l" r="r" t="t"/>
+            <a:avLst/>
+            <a:gdLst/>
+            <a:ahLst/>
+            <a:cxnLst/>
+            <a:rect l="l" t="t" r="r" b="b"/>
             <a:pathLst>
-              <a:path extrusionOk="0" h="120000" w="120000">
+              <a:path w="120000" h="120000" extrusionOk="0">
                 <a:moveTo>
                   <a:pt x="0" y="0"/>
                 </a:moveTo>
@@ -1271,11 +1302,11 @@
 </file>
 
 <file path=ppt/notesSlides/notesSlide5.xml><?xml version="1.0" encoding="utf-8"?>
-<p:notes xmlns:a="http://schemas.openxmlformats.org/drawingml/2006/main" xmlns:r="http://schemas.openxmlformats.org/officeDocument/2006/relationships" xmlns:mc="http://schemas.openxmlformats.org/markup-compatibility/2006" xmlns:mv="urn:schemas-microsoft-com:mac:vml" xmlns:p="http://schemas.openxmlformats.org/presentationml/2006/main" xmlns:c="http://schemas.openxmlformats.org/drawingml/2006/chart" xmlns:dgm="http://schemas.openxmlformats.org/drawingml/2006/diagram" xmlns:o="urn:schemas-microsoft-com:office:office" xmlns:v="urn:schemas-microsoft-com:vml" xmlns:pvml="urn:schemas-microsoft-com:office:powerpoint" xmlns:com="http://schemas.openxmlformats.org/drawingml/2006/compatibility" xmlns:p14="http://schemas.microsoft.com/office/powerpoint/2010/main" xmlns:p15="http://schemas.microsoft.com/office/powerpoint/2012/main" xmlns:ahyp="http://schemas.microsoft.com/office/drawing/2018/hyperlinkcolor" showMasterPhAnim="0" showMasterSp="0">
+<p:notes xmlns:a="http://schemas.openxmlformats.org/drawingml/2006/main" xmlns:r="http://schemas.openxmlformats.org/officeDocument/2006/relationships" xmlns:p="http://schemas.openxmlformats.org/presentationml/2006/main" showMasterSp="0" showMasterPhAnim="0">
   <p:cSld>
     <p:spTree>
       <p:nvGrpSpPr>
-        <p:cNvPr id="94" name="Shape 94"/>
+        <p:cNvPr id="1" name="Shape 94"/>
         <p:cNvGrpSpPr/>
         <p:nvPr/>
       </p:nvGrpSpPr>
@@ -1290,9 +1321,11 @@
       <p:sp>
         <p:nvSpPr>
           <p:cNvPr id="95" name="Google Shape;95;p5:notes"/>
-          <p:cNvSpPr txBox="1"/>
+          <p:cNvSpPr txBox="1">
+            <a:spLocks noGrp="1"/>
+          </p:cNvSpPr>
           <p:nvPr>
-            <p:ph idx="1" type="body"/>
+            <p:ph type="body" idx="1"/>
           </p:nvPr>
         </p:nvSpPr>
         <p:spPr>
@@ -1305,12 +1338,12 @@
           </a:prstGeom>
         </p:spPr>
         <p:txBody>
-          <a:bodyPr anchorCtr="0" anchor="t" bIns="91425" lIns="91425" spcFirstLastPara="1" rIns="91425" wrap="square" tIns="91425">
+          <a:bodyPr spcFirstLastPara="1" wrap="square" lIns="91425" tIns="91425" rIns="91425" bIns="91425" anchor="t" anchorCtr="0">
             <a:noAutofit/>
           </a:bodyPr>
           <a:lstStyle/>
           <a:p>
-            <a:pPr indent="0" lvl="0" marL="0" rtl="0" algn="l">
+            <a:pPr marL="0" lvl="0" indent="0" algn="l" rtl="0">
               <a:spcBef>
                 <a:spcPts val="0"/>
               </a:spcBef>
@@ -1319,9 +1352,6 @@
               </a:spcAft>
               <a:buNone/>
             </a:pPr>
-            <a:r>
-              <a:t/>
-            </a:r>
             <a:endParaRPr/>
           </a:p>
         </p:txBody>
@@ -1329,9 +1359,11 @@
       <p:sp>
         <p:nvSpPr>
           <p:cNvPr id="96" name="Google Shape;96;p5:notes"/>
-          <p:cNvSpPr/>
+          <p:cNvSpPr>
+            <a:spLocks noGrp="1" noRot="1" noChangeAspect="1"/>
+          </p:cNvSpPr>
           <p:nvPr>
-            <p:ph idx="2" type="sldImg"/>
+            <p:ph type="sldImg" idx="2"/>
           </p:nvPr>
         </p:nvSpPr>
         <p:spPr>
@@ -1340,9 +1372,13 @@
             <a:ext cx="6096075" cy="3429000"/>
           </a:xfrm>
           <a:custGeom>
-            <a:rect b="b" l="l" r="r" t="t"/>
+            <a:avLst/>
+            <a:gdLst/>
+            <a:ahLst/>
+            <a:cxnLst/>
+            <a:rect l="l" t="t" r="r" b="b"/>
             <a:pathLst>
-              <a:path extrusionOk="0" h="120000" w="120000">
+              <a:path w="120000" h="120000" extrusionOk="0">
                 <a:moveTo>
                   <a:pt x="0" y="0"/>
                 </a:moveTo>
@@ -1370,11 +1406,11 @@
 </file>
 
 <file path=ppt/notesSlides/notesSlide6.xml><?xml version="1.0" encoding="utf-8"?>
-<p:notes xmlns:a="http://schemas.openxmlformats.org/drawingml/2006/main" xmlns:r="http://schemas.openxmlformats.org/officeDocument/2006/relationships" xmlns:mc="http://schemas.openxmlformats.org/markup-compatibility/2006" xmlns:mv="urn:schemas-microsoft-com:mac:vml" xmlns:p="http://schemas.openxmlformats.org/presentationml/2006/main" xmlns:c="http://schemas.openxmlformats.org/drawingml/2006/chart" xmlns:dgm="http://schemas.openxmlformats.org/drawingml/2006/diagram" xmlns:o="urn:schemas-microsoft-com:office:office" xmlns:v="urn:schemas-microsoft-com:vml" xmlns:pvml="urn:schemas-microsoft-com:office:powerpoint" xmlns:com="http://schemas.openxmlformats.org/drawingml/2006/compatibility" xmlns:p14="http://schemas.microsoft.com/office/powerpoint/2010/main" xmlns:p15="http://schemas.microsoft.com/office/powerpoint/2012/main" xmlns:ahyp="http://schemas.microsoft.com/office/drawing/2018/hyperlinkcolor" showMasterPhAnim="0" showMasterSp="0">
+<p:notes xmlns:a="http://schemas.openxmlformats.org/drawingml/2006/main" xmlns:r="http://schemas.openxmlformats.org/officeDocument/2006/relationships" xmlns:p="http://schemas.openxmlformats.org/presentationml/2006/main" showMasterSp="0" showMasterPhAnim="0">
   <p:cSld>
     <p:spTree>
       <p:nvGrpSpPr>
-        <p:cNvPr id="101" name="Shape 101"/>
+        <p:cNvPr id="1" name="Shape 101"/>
         <p:cNvGrpSpPr/>
         <p:nvPr/>
       </p:nvGrpSpPr>
@@ -1389,9 +1425,11 @@
       <p:sp>
         <p:nvSpPr>
           <p:cNvPr id="102" name="Google Shape;102;p6:notes"/>
-          <p:cNvSpPr txBox="1"/>
+          <p:cNvSpPr txBox="1">
+            <a:spLocks noGrp="1"/>
+          </p:cNvSpPr>
           <p:nvPr>
-            <p:ph idx="1" type="body"/>
+            <p:ph type="body" idx="1"/>
           </p:nvPr>
         </p:nvSpPr>
         <p:spPr>
@@ -1404,12 +1442,12 @@
           </a:prstGeom>
         </p:spPr>
         <p:txBody>
-          <a:bodyPr anchorCtr="0" anchor="t" bIns="91425" lIns="91425" spcFirstLastPara="1" rIns="91425" wrap="square" tIns="91425">
+          <a:bodyPr spcFirstLastPara="1" wrap="square" lIns="91425" tIns="91425" rIns="91425" bIns="91425" anchor="t" anchorCtr="0">
             <a:noAutofit/>
           </a:bodyPr>
           <a:lstStyle/>
           <a:p>
-            <a:pPr indent="0" lvl="0" marL="0" rtl="0" algn="l">
+            <a:pPr marL="0" lvl="0" indent="0" algn="l" rtl="0">
               <a:spcBef>
                 <a:spcPts val="0"/>
               </a:spcBef>
@@ -1418,9 +1456,6 @@
               </a:spcAft>
               <a:buNone/>
             </a:pPr>
-            <a:r>
-              <a:t/>
-            </a:r>
             <a:endParaRPr/>
           </a:p>
         </p:txBody>
@@ -1428,9 +1463,11 @@
       <p:sp>
         <p:nvSpPr>
           <p:cNvPr id="103" name="Google Shape;103;p6:notes"/>
-          <p:cNvSpPr/>
+          <p:cNvSpPr>
+            <a:spLocks noGrp="1" noRot="1" noChangeAspect="1"/>
+          </p:cNvSpPr>
           <p:nvPr>
-            <p:ph idx="2" type="sldImg"/>
+            <p:ph type="sldImg" idx="2"/>
           </p:nvPr>
         </p:nvSpPr>
         <p:spPr>
@@ -1439,9 +1476,13 @@
             <a:ext cx="6096075" cy="3429000"/>
           </a:xfrm>
           <a:custGeom>
-            <a:rect b="b" l="l" r="r" t="t"/>
+            <a:avLst/>
+            <a:gdLst/>
+            <a:ahLst/>
+            <a:cxnLst/>
+            <a:rect l="l" t="t" r="r" b="b"/>
             <a:pathLst>
-              <a:path extrusionOk="0" h="120000" w="120000">
+              <a:path w="120000" h="120000" extrusionOk="0">
                 <a:moveTo>
                   <a:pt x="0" y="0"/>
                 </a:moveTo>
@@ -1469,11 +1510,11 @@
 </file>
 
 <file path=ppt/notesSlides/notesSlide7.xml><?xml version="1.0" encoding="utf-8"?>
-<p:notes xmlns:a="http://schemas.openxmlformats.org/drawingml/2006/main" xmlns:r="http://schemas.openxmlformats.org/officeDocument/2006/relationships" xmlns:mc="http://schemas.openxmlformats.org/markup-compatibility/2006" xmlns:mv="urn:schemas-microsoft-com:mac:vml" xmlns:p="http://schemas.openxmlformats.org/presentationml/2006/main" xmlns:c="http://schemas.openxmlformats.org/drawingml/2006/chart" xmlns:dgm="http://schemas.openxmlformats.org/drawingml/2006/diagram" xmlns:o="urn:schemas-microsoft-com:office:office" xmlns:v="urn:schemas-microsoft-com:vml" xmlns:pvml="urn:schemas-microsoft-com:office:powerpoint" xmlns:com="http://schemas.openxmlformats.org/drawingml/2006/compatibility" xmlns:p14="http://schemas.microsoft.com/office/powerpoint/2010/main" xmlns:p15="http://schemas.microsoft.com/office/powerpoint/2012/main" xmlns:ahyp="http://schemas.microsoft.com/office/drawing/2018/hyperlinkcolor" showMasterPhAnim="0" showMasterSp="0">
+<p:notes xmlns:a="http://schemas.openxmlformats.org/drawingml/2006/main" xmlns:r="http://schemas.openxmlformats.org/officeDocument/2006/relationships" xmlns:p="http://schemas.openxmlformats.org/presentationml/2006/main" showMasterSp="0" showMasterPhAnim="0">
   <p:cSld>
     <p:spTree>
       <p:nvGrpSpPr>
-        <p:cNvPr id="109" name="Shape 109"/>
+        <p:cNvPr id="1" name="Shape 109"/>
         <p:cNvGrpSpPr/>
         <p:nvPr/>
       </p:nvGrpSpPr>
@@ -1488,9 +1529,11 @@
       <p:sp>
         <p:nvSpPr>
           <p:cNvPr id="110" name="Google Shape;110;p7:notes"/>
-          <p:cNvSpPr txBox="1"/>
+          <p:cNvSpPr txBox="1">
+            <a:spLocks noGrp="1"/>
+          </p:cNvSpPr>
           <p:nvPr>
-            <p:ph idx="1" type="body"/>
+            <p:ph type="body" idx="1"/>
           </p:nvPr>
         </p:nvSpPr>
         <p:spPr>
@@ -1503,12 +1546,12 @@
           </a:prstGeom>
         </p:spPr>
         <p:txBody>
-          <a:bodyPr anchorCtr="0" anchor="t" bIns="91425" lIns="91425" spcFirstLastPara="1" rIns="91425" wrap="square" tIns="91425">
+          <a:bodyPr spcFirstLastPara="1" wrap="square" lIns="91425" tIns="91425" rIns="91425" bIns="91425" anchor="t" anchorCtr="0">
             <a:noAutofit/>
           </a:bodyPr>
           <a:lstStyle/>
           <a:p>
-            <a:pPr indent="0" lvl="0" marL="0" rtl="0" algn="l">
+            <a:pPr marL="0" lvl="0" indent="0" algn="l" rtl="0">
               <a:spcBef>
                 <a:spcPts val="0"/>
               </a:spcBef>
@@ -1517,9 +1560,6 @@
               </a:spcAft>
               <a:buNone/>
             </a:pPr>
-            <a:r>
-              <a:t/>
-            </a:r>
             <a:endParaRPr/>
           </a:p>
         </p:txBody>
@@ -1527,9 +1567,11 @@
       <p:sp>
         <p:nvSpPr>
           <p:cNvPr id="111" name="Google Shape;111;p7:notes"/>
-          <p:cNvSpPr/>
+          <p:cNvSpPr>
+            <a:spLocks noGrp="1" noRot="1" noChangeAspect="1"/>
+          </p:cNvSpPr>
           <p:nvPr>
-            <p:ph idx="2" type="sldImg"/>
+            <p:ph type="sldImg" idx="2"/>
           </p:nvPr>
         </p:nvSpPr>
         <p:spPr>
@@ -1538,9 +1580,13 @@
             <a:ext cx="6096075" cy="3429000"/>
           </a:xfrm>
           <a:custGeom>
-            <a:rect b="b" l="l" r="r" t="t"/>
+            <a:avLst/>
+            <a:gdLst/>
+            <a:ahLst/>
+            <a:cxnLst/>
+            <a:rect l="l" t="t" r="r" b="b"/>
             <a:pathLst>
-              <a:path extrusionOk="0" h="120000" w="120000">
+              <a:path w="120000" h="120000" extrusionOk="0">
                 <a:moveTo>
                   <a:pt x="0" y="0"/>
                 </a:moveTo>
@@ -1568,11 +1614,11 @@
 </file>
 
 <file path=ppt/notesSlides/notesSlide8.xml><?xml version="1.0" encoding="utf-8"?>
-<p:notes xmlns:a="http://schemas.openxmlformats.org/drawingml/2006/main" xmlns:r="http://schemas.openxmlformats.org/officeDocument/2006/relationships" xmlns:mc="http://schemas.openxmlformats.org/markup-compatibility/2006" xmlns:mv="urn:schemas-microsoft-com:mac:vml" xmlns:p="http://schemas.openxmlformats.org/presentationml/2006/main" xmlns:c="http://schemas.openxmlformats.org/drawingml/2006/chart" xmlns:dgm="http://schemas.openxmlformats.org/drawingml/2006/diagram" xmlns:o="urn:schemas-microsoft-com:office:office" xmlns:v="urn:schemas-microsoft-com:vml" xmlns:pvml="urn:schemas-microsoft-com:office:powerpoint" xmlns:com="http://schemas.openxmlformats.org/drawingml/2006/compatibility" xmlns:p14="http://schemas.microsoft.com/office/powerpoint/2010/main" xmlns:p15="http://schemas.microsoft.com/office/powerpoint/2012/main" xmlns:ahyp="http://schemas.microsoft.com/office/drawing/2018/hyperlinkcolor" showMasterPhAnim="0" showMasterSp="0">
+<p:notes xmlns:a="http://schemas.openxmlformats.org/drawingml/2006/main" xmlns:r="http://schemas.openxmlformats.org/officeDocument/2006/relationships" xmlns:p="http://schemas.openxmlformats.org/presentationml/2006/main" showMasterSp="0" showMasterPhAnim="0">
   <p:cSld>
     <p:spTree>
       <p:nvGrpSpPr>
-        <p:cNvPr id="117" name="Shape 117"/>
+        <p:cNvPr id="1" name="Shape 117"/>
         <p:cNvGrpSpPr/>
         <p:nvPr/>
       </p:nvGrpSpPr>
@@ -1587,9 +1633,11 @@
       <p:sp>
         <p:nvSpPr>
           <p:cNvPr id="118" name="Google Shape;118;p8:notes"/>
-          <p:cNvSpPr txBox="1"/>
+          <p:cNvSpPr txBox="1">
+            <a:spLocks noGrp="1"/>
+          </p:cNvSpPr>
           <p:nvPr>
-            <p:ph idx="1" type="body"/>
+            <p:ph type="body" idx="1"/>
           </p:nvPr>
         </p:nvSpPr>
         <p:spPr>
@@ -1602,12 +1650,12 @@
           </a:prstGeom>
         </p:spPr>
         <p:txBody>
-          <a:bodyPr anchorCtr="0" anchor="t" bIns="91425" lIns="91425" spcFirstLastPara="1" rIns="91425" wrap="square" tIns="91425">
+          <a:bodyPr spcFirstLastPara="1" wrap="square" lIns="91425" tIns="91425" rIns="91425" bIns="91425" anchor="t" anchorCtr="0">
             <a:noAutofit/>
           </a:bodyPr>
           <a:lstStyle/>
           <a:p>
-            <a:pPr indent="0" lvl="0" marL="0" rtl="0" algn="l">
+            <a:pPr marL="0" lvl="0" indent="0" algn="l" rtl="0">
               <a:spcBef>
                 <a:spcPts val="0"/>
               </a:spcBef>
@@ -1616,9 +1664,6 @@
               </a:spcAft>
               <a:buNone/>
             </a:pPr>
-            <a:r>
-              <a:t/>
-            </a:r>
             <a:endParaRPr/>
           </a:p>
         </p:txBody>
@@ -1626,9 +1671,11 @@
       <p:sp>
         <p:nvSpPr>
           <p:cNvPr id="119" name="Google Shape;119;p8:notes"/>
-          <p:cNvSpPr/>
+          <p:cNvSpPr>
+            <a:spLocks noGrp="1" noRot="1" noChangeAspect="1"/>
+          </p:cNvSpPr>
           <p:nvPr>
-            <p:ph idx="2" type="sldImg"/>
+            <p:ph type="sldImg" idx="2"/>
           </p:nvPr>
         </p:nvSpPr>
         <p:spPr>
@@ -1637,9 +1684,13 @@
             <a:ext cx="6096075" cy="3429000"/>
           </a:xfrm>
           <a:custGeom>
-            <a:rect b="b" l="l" r="r" t="t"/>
+            <a:avLst/>
+            <a:gdLst/>
+            <a:ahLst/>
+            <a:cxnLst/>
+            <a:rect l="l" t="t" r="r" b="b"/>
             <a:pathLst>
-              <a:path extrusionOk="0" h="120000" w="120000">
+              <a:path w="120000" h="120000" extrusionOk="0">
                 <a:moveTo>
                   <a:pt x="0" y="0"/>
                 </a:moveTo>
@@ -1667,11 +1718,11 @@
 </file>
 
 <file path=ppt/slideLayouts/slideLayout1.xml><?xml version="1.0" encoding="utf-8"?>
-<p:sldLayout xmlns:a="http://schemas.openxmlformats.org/drawingml/2006/main" xmlns:r="http://schemas.openxmlformats.org/officeDocument/2006/relationships" xmlns:mc="http://schemas.openxmlformats.org/markup-compatibility/2006" xmlns:mv="urn:schemas-microsoft-com:mac:vml" xmlns:p="http://schemas.openxmlformats.org/presentationml/2006/main" xmlns:c="http://schemas.openxmlformats.org/drawingml/2006/chart" xmlns:dgm="http://schemas.openxmlformats.org/drawingml/2006/diagram" xmlns:o="urn:schemas-microsoft-com:office:office" xmlns:v="urn:schemas-microsoft-com:vml" xmlns:pvml="urn:schemas-microsoft-com:office:powerpoint" xmlns:com="http://schemas.openxmlformats.org/drawingml/2006/compatibility" xmlns:p14="http://schemas.microsoft.com/office/powerpoint/2010/main" xmlns:p15="http://schemas.microsoft.com/office/powerpoint/2012/main" xmlns:ahyp="http://schemas.microsoft.com/office/drawing/2018/hyperlinkcolor" matchingName="Title slide" type="title">
+<p:sldLayout xmlns:a="http://schemas.openxmlformats.org/drawingml/2006/main" xmlns:r="http://schemas.openxmlformats.org/officeDocument/2006/relationships" xmlns:p="http://schemas.openxmlformats.org/presentationml/2006/main" matchingName="Title slide" type="title">
   <p:cSld name="TITLE">
     <p:spTree>
       <p:nvGrpSpPr>
-        <p:cNvPr id="10" name="Shape 10"/>
+        <p:cNvPr id="1" name="Shape 10"/>
         <p:cNvGrpSpPr/>
         <p:nvPr/>
       </p:nvGrpSpPr>
@@ -1703,12 +1754,12 @@
           </a:ln>
         </p:spPr>
         <p:txBody>
-          <a:bodyPr anchorCtr="0" anchor="ctr" bIns="91425" lIns="91425" spcFirstLastPara="1" rIns="91425" wrap="square" tIns="91425">
+          <a:bodyPr spcFirstLastPara="1" wrap="square" lIns="91425" tIns="91425" rIns="91425" bIns="91425" anchor="ctr" anchorCtr="0">
             <a:noAutofit/>
           </a:bodyPr>
           <a:lstStyle/>
           <a:p>
-            <a:pPr indent="0" lvl="0" marL="0" marR="0" rtl="0" algn="l">
+            <a:pPr marL="0" marR="0" lvl="0" indent="0" algn="l" rtl="0">
               <a:lnSpc>
                 <a:spcPct val="100000"/>
               </a:lnSpc>
@@ -1726,7 +1777,7 @@
               <a:buNone/>
             </a:pPr>
             <a:r>
-              <a:rPr b="0" i="0" lang="en-US" sz="1500" u="none" cap="none" strike="noStrike">
+              <a:rPr lang="en-US" sz="1500" b="0" i="0" u="none" strike="noStrike" cap="none">
                 <a:solidFill>
                   <a:srgbClr val="454F5B"/>
                 </a:solidFill>
@@ -1737,7 +1788,7 @@
               </a:rPr>
               <a:t>Universidade Federal do Amazonas</a:t>
             </a:r>
-            <a:endParaRPr b="0" i="0" sz="1500" u="none" cap="none" strike="noStrike">
+            <a:endParaRPr sz="1500" b="0" i="0" u="none" strike="noStrike" cap="none">
               <a:solidFill>
                 <a:srgbClr val="454F5B"/>
               </a:solidFill>
@@ -1748,7 +1799,7 @@
             </a:endParaRPr>
           </a:p>
           <a:p>
-            <a:pPr indent="0" lvl="0" marL="0" marR="0" rtl="0" algn="l">
+            <a:pPr marL="0" marR="0" lvl="0" indent="0" algn="l" rtl="0">
               <a:lnSpc>
                 <a:spcPct val="100000"/>
               </a:lnSpc>
@@ -1766,7 +1817,7 @@
               <a:buNone/>
             </a:pPr>
             <a:r>
-              <a:rPr b="0" i="0" lang="en-US" sz="1500" u="none" cap="none" strike="noStrike">
+              <a:rPr lang="en-US" sz="1500" b="0" i="0" u="none" strike="noStrike" cap="none">
                 <a:solidFill>
                   <a:srgbClr val="454F5B"/>
                 </a:solidFill>
@@ -1777,7 +1828,7 @@
               </a:rPr>
               <a:t>Instituto de Computação</a:t>
             </a:r>
-            <a:endParaRPr b="0" i="0" sz="1500" u="none" cap="none" strike="noStrike">
+            <a:endParaRPr sz="1500" b="0" i="0" u="none" strike="noStrike" cap="none">
               <a:solidFill>
                 <a:srgbClr val="454F5B"/>
               </a:solidFill>
@@ -1788,7 +1839,7 @@
             </a:endParaRPr>
           </a:p>
           <a:p>
-            <a:pPr indent="0" lvl="0" marL="0" marR="0" rtl="0" algn="l">
+            <a:pPr marL="0" marR="0" lvl="0" indent="0" algn="l" rtl="0">
               <a:lnSpc>
                 <a:spcPct val="100000"/>
               </a:lnSpc>
@@ -1806,7 +1857,7 @@
               <a:buNone/>
             </a:pPr>
             <a:r>
-              <a:rPr b="0" i="0" lang="en-US" sz="1500" u="none" cap="none" strike="noStrike">
+              <a:rPr lang="en-US" sz="1500" b="0" i="0" u="none" strike="noStrike" cap="none">
                 <a:solidFill>
                   <a:srgbClr val="454F5B"/>
                 </a:solidFill>
@@ -1817,7 +1868,7 @@
               </a:rPr>
               <a:t>DevTITANS -  Projeto de Desenvolvimento, Tecnologia e Inovação em </a:t>
             </a:r>
-            <a:endParaRPr b="0" i="0" sz="1500" u="none" cap="none" strike="noStrike">
+            <a:endParaRPr sz="1500" b="0" i="0" u="none" strike="noStrike" cap="none">
               <a:solidFill>
                 <a:srgbClr val="454F5B"/>
               </a:solidFill>
@@ -1828,7 +1879,7 @@
             </a:endParaRPr>
           </a:p>
           <a:p>
-            <a:pPr indent="0" lvl="0" marL="914400" marR="0" rtl="0" algn="l">
+            <a:pPr marL="914400" marR="0" lvl="0" indent="0" algn="l" rtl="0">
               <a:lnSpc>
                 <a:spcPct val="100000"/>
               </a:lnSpc>
@@ -1846,7 +1897,7 @@
               <a:buNone/>
             </a:pPr>
             <a:r>
-              <a:rPr b="0" i="0" lang="en-US" sz="1500" u="none" cap="none" strike="noStrike">
+              <a:rPr lang="en-US" sz="1500" b="0" i="0" u="none" strike="noStrike" cap="none">
                 <a:solidFill>
                   <a:srgbClr val="454F5B"/>
                 </a:solidFill>
@@ -1857,7 +1908,7 @@
               </a:rPr>
               <a:t>      Android e Sistemas Embarcados</a:t>
             </a:r>
-            <a:endParaRPr b="0" i="0" sz="1500" u="none" cap="none" strike="noStrike">
+            <a:endParaRPr sz="1500" b="0" i="0" u="none" strike="noStrike" cap="none">
               <a:solidFill>
                 <a:srgbClr val="454F5B"/>
               </a:solidFill>
@@ -1891,12 +1942,12 @@
           </a:ln>
         </p:spPr>
         <p:txBody>
-          <a:bodyPr anchorCtr="0" anchor="ctr" bIns="91425" lIns="91425" spcFirstLastPara="1" rIns="91425" wrap="square" tIns="91425">
+          <a:bodyPr spcFirstLastPara="1" wrap="square" lIns="91425" tIns="91425" rIns="91425" bIns="91425" anchor="ctr" anchorCtr="0">
             <a:noAutofit/>
           </a:bodyPr>
           <a:lstStyle/>
           <a:p>
-            <a:pPr indent="0" lvl="0" marL="0" marR="0" rtl="0" algn="l">
+            <a:pPr marL="0" marR="0" lvl="0" indent="0" algn="l" rtl="0">
               <a:lnSpc>
                 <a:spcPct val="100000"/>
               </a:lnSpc>
@@ -1913,10 +1964,7 @@
               <a:buFont typeface="Arial"/>
               <a:buNone/>
             </a:pPr>
-            <a:r>
-              <a:t/>
-            </a:r>
-            <a:endParaRPr b="0" i="0" sz="1400" u="none" cap="none" strike="noStrike">
+            <a:endParaRPr sz="1400" b="0" i="0" u="none" strike="noStrike" cap="none">
               <a:solidFill>
                 <a:srgbClr val="000000"/>
               </a:solidFill>
@@ -1938,7 +1986,7 @@
           <a:blip r:embed="rId2">
             <a:alphaModFix/>
           </a:blip>
-          <a:srcRect b="0" l="0" r="0" t="0"/>
+          <a:srcRect/>
           <a:stretch/>
         </p:blipFill>
         <p:spPr>
@@ -1975,12 +2023,12 @@
           </a:ln>
         </p:spPr>
         <p:txBody>
-          <a:bodyPr anchorCtr="0" anchor="t" bIns="91425" lIns="91425" spcFirstLastPara="1" rIns="91425" wrap="square" tIns="91425">
+          <a:bodyPr spcFirstLastPara="1" wrap="square" lIns="91425" tIns="91425" rIns="91425" bIns="91425" anchor="t" anchorCtr="0">
             <a:noAutofit/>
           </a:bodyPr>
           <a:lstStyle/>
           <a:p>
-            <a:pPr indent="0" lvl="0" marL="0" marR="0" rtl="0" algn="r">
+            <a:pPr marL="0" marR="0" lvl="0" indent="0" algn="r" rtl="0">
               <a:lnSpc>
                 <a:spcPct val="100000"/>
               </a:lnSpc>
@@ -1998,7 +2046,7 @@
               <a:buNone/>
             </a:pPr>
             <a:r>
-              <a:rPr b="0" i="0" lang="en-US" sz="1400" u="none" cap="none" strike="noStrike">
+              <a:rPr lang="en-US" sz="1400" b="0" i="0" u="none" strike="noStrike" cap="none">
                 <a:solidFill>
                   <a:srgbClr val="454F5B"/>
                 </a:solidFill>
@@ -2009,7 +2057,7 @@
               </a:rPr>
               <a:t>Prof. Diogo Soares</a:t>
             </a:r>
-            <a:endParaRPr b="0" i="0" sz="1400" u="none" cap="none" strike="noStrike">
+            <a:endParaRPr sz="1400" b="0" i="0" u="none" strike="noStrike" cap="none">
               <a:solidFill>
                 <a:srgbClr val="454F5B"/>
               </a:solidFill>
@@ -2020,7 +2068,7 @@
             </a:endParaRPr>
           </a:p>
           <a:p>
-            <a:pPr indent="0" lvl="0" marL="0" marR="0" rtl="0" algn="r">
+            <a:pPr marL="0" marR="0" lvl="0" indent="0" algn="r" rtl="0">
               <a:lnSpc>
                 <a:spcPct val="100000"/>
               </a:lnSpc>
@@ -2038,7 +2086,7 @@
               <a:buNone/>
             </a:pPr>
             <a:r>
-              <a:rPr b="0" i="0" lang="en-US" sz="1400" u="none" cap="none" strike="noStrike">
+              <a:rPr lang="en-US" sz="1400" b="0" i="0" u="none" strike="noStrike" cap="none">
                 <a:solidFill>
                   <a:srgbClr val="0084D1"/>
                 </a:solidFill>
@@ -2049,7 +2097,7 @@
               </a:rPr>
               <a:t>diogosoaresm@ufam.edu.br</a:t>
             </a:r>
-            <a:endParaRPr b="0" i="0" sz="1400" u="none" cap="none" strike="noStrike">
+            <a:endParaRPr sz="1400" b="0" i="0" u="none" strike="noStrike" cap="none">
               <a:solidFill>
                 <a:srgbClr val="454F5B"/>
               </a:solidFill>
@@ -2081,12 +2129,12 @@
           </a:ln>
         </p:spPr>
         <p:txBody>
-          <a:bodyPr anchorCtr="0" anchor="t" bIns="91425" lIns="91425" spcFirstLastPara="1" rIns="91425" wrap="square" tIns="91425">
+          <a:bodyPr spcFirstLastPara="1" wrap="square" lIns="91425" tIns="91425" rIns="91425" bIns="91425" anchor="t" anchorCtr="0">
             <a:noAutofit/>
           </a:bodyPr>
           <a:lstStyle/>
           <a:p>
-            <a:pPr indent="0" lvl="0" marL="0" marR="0" rtl="0" algn="l">
+            <a:pPr marL="0" marR="0" lvl="0" indent="0" algn="l" rtl="0">
               <a:lnSpc>
                 <a:spcPct val="100000"/>
               </a:lnSpc>
@@ -2104,7 +2152,7 @@
               <a:buNone/>
             </a:pPr>
             <a:r>
-              <a:rPr b="0" i="0" lang="en-US" sz="1400" u="none" cap="none" strike="noStrike">
+              <a:rPr lang="en-US" sz="1400" b="0" i="0" u="none" strike="noStrike" cap="none">
                 <a:solidFill>
                   <a:srgbClr val="454F5B"/>
                 </a:solidFill>
@@ -2116,7 +2164,7 @@
               <a:t>ColabWeb: </a:t>
             </a:r>
             <a:r>
-              <a:rPr b="0" i="0" lang="en-US" sz="1400" u="none" cap="none" strike="noStrike">
+              <a:rPr lang="en-US" sz="1400" b="0" i="0" u="none" strike="noStrike" cap="none">
                 <a:solidFill>
                   <a:srgbClr val="0084D1"/>
                 </a:solidFill>
@@ -2127,7 +2175,7 @@
               </a:rPr>
               <a:t>https://bit.ly/devtitans-shards</a:t>
             </a:r>
-            <a:endParaRPr b="0" i="0" sz="1400" u="none" cap="none" strike="noStrike">
+            <a:endParaRPr sz="1400" b="0" i="0" u="none" strike="noStrike" cap="none">
               <a:solidFill>
                 <a:srgbClr val="454F5B"/>
               </a:solidFill>
@@ -2142,7 +2190,9 @@
       <p:sp>
         <p:nvSpPr>
           <p:cNvPr id="16" name="Google Shape;16;p10"/>
-          <p:cNvSpPr txBox="1"/>
+          <p:cNvSpPr txBox="1">
+            <a:spLocks noGrp="1"/>
+          </p:cNvSpPr>
           <p:nvPr>
             <p:ph type="title"/>
           </p:nvPr>
@@ -2161,7 +2211,7 @@
           </a:ln>
         </p:spPr>
         <p:txBody>
-          <a:bodyPr anchorCtr="0" anchor="t" bIns="91425" lIns="91425" spcFirstLastPara="1" rIns="91425" wrap="square" tIns="91425">
+          <a:bodyPr spcFirstLastPara="1" wrap="square" lIns="91425" tIns="91425" rIns="91425" bIns="91425" anchor="t" anchorCtr="0">
             <a:noAutofit/>
           </a:bodyPr>
           <a:lstStyle>
@@ -2180,7 +2230,7 @@
               </a:buClr>
               <a:buSzPts val="3500"/>
               <a:buNone/>
-              <a:defRPr b="1" sz="3500">
+              <a:defRPr sz="3500" b="1">
                 <a:solidFill>
                   <a:srgbClr val="454F5B"/>
                 </a:solidFill>
@@ -2299,7 +2349,9 @@
               <a:defRPr/>
             </a:lvl9pPr>
           </a:lstStyle>
-          <a:p/>
+          <a:p>
+            <a:endParaRPr/>
+          </a:p>
         </p:txBody>
       </p:sp>
     </p:spTree>
@@ -2309,7 +2361,7 @@
   </p:clrMapOvr>
   <p:extLst>
     <p:ext uri="{DCECCB84-F9BA-43D5-87BE-67443E8EF086}">
-      <p15:sldGuideLst>
+      <p15:sldGuideLst xmlns:p15="http://schemas.microsoft.com/office/powerpoint/2012/main">
         <p15:guide id="1" orient="horz" pos="1620">
           <p15:clr>
             <a:srgbClr val="FA7B17"/>
@@ -2327,11 +2379,11 @@
 </file>
 
 <file path=ppt/slideLayouts/slideLayout10.xml><?xml version="1.0" encoding="utf-8"?>
-<p:sldLayout xmlns:a="http://schemas.openxmlformats.org/drawingml/2006/main" xmlns:r="http://schemas.openxmlformats.org/officeDocument/2006/relationships" xmlns:mc="http://schemas.openxmlformats.org/markup-compatibility/2006" xmlns:mv="urn:schemas-microsoft-com:mac:vml" xmlns:p="http://schemas.openxmlformats.org/presentationml/2006/main" xmlns:c="http://schemas.openxmlformats.org/drawingml/2006/chart" xmlns:dgm="http://schemas.openxmlformats.org/drawingml/2006/diagram" xmlns:o="urn:schemas-microsoft-com:office:office" xmlns:v="urn:schemas-microsoft-com:vml" xmlns:pvml="urn:schemas-microsoft-com:office:powerpoint" xmlns:com="http://schemas.openxmlformats.org/drawingml/2006/compatibility" xmlns:p14="http://schemas.microsoft.com/office/powerpoint/2010/main" xmlns:p15="http://schemas.microsoft.com/office/powerpoint/2012/main" xmlns:ahyp="http://schemas.microsoft.com/office/drawing/2018/hyperlinkcolor" matchingName="Big number">
+<p:sldLayout xmlns:a="http://schemas.openxmlformats.org/drawingml/2006/main" xmlns:r="http://schemas.openxmlformats.org/officeDocument/2006/relationships" xmlns:p="http://schemas.openxmlformats.org/presentationml/2006/main" matchingName="Big number">
   <p:cSld name="BIG_NUMBER">
     <p:spTree>
       <p:nvGrpSpPr>
-        <p:cNvPr id="49" name="Shape 49"/>
+        <p:cNvPr id="1" name="Shape 49"/>
         <p:cNvGrpSpPr/>
         <p:nvPr/>
       </p:nvGrpSpPr>
@@ -2346,9 +2398,11 @@
       <p:sp>
         <p:nvSpPr>
           <p:cNvPr id="50" name="Google Shape;50;p19"/>
-          <p:cNvSpPr txBox="1"/>
+          <p:cNvSpPr txBox="1">
+            <a:spLocks noGrp="1"/>
+          </p:cNvSpPr>
           <p:nvPr>
-            <p:ph hasCustomPrompt="1" type="title"/>
+            <p:ph type="title" hasCustomPrompt="1"/>
           </p:nvPr>
         </p:nvSpPr>
         <p:spPr>
@@ -2365,7 +2419,7 @@
           </a:ln>
         </p:spPr>
         <p:txBody>
-          <a:bodyPr anchorCtr="0" anchor="b" bIns="91425" lIns="91425" spcFirstLastPara="1" rIns="91425" wrap="square" tIns="91425">
+          <a:bodyPr spcFirstLastPara="1" wrap="square" lIns="91425" tIns="91425" rIns="91425" bIns="91425" anchor="b" anchorCtr="0">
             <a:noAutofit/>
           </a:bodyPr>
           <a:lstStyle>
@@ -2506,9 +2560,11 @@
       <p:sp>
         <p:nvSpPr>
           <p:cNvPr id="51" name="Google Shape;51;p19"/>
-          <p:cNvSpPr txBox="1"/>
+          <p:cNvSpPr txBox="1">
+            <a:spLocks noGrp="1"/>
+          </p:cNvSpPr>
           <p:nvPr>
-            <p:ph idx="1" type="body"/>
+            <p:ph type="body" idx="1"/>
           </p:nvPr>
         </p:nvSpPr>
         <p:spPr>
@@ -2525,11 +2581,11 @@
           </a:ln>
         </p:spPr>
         <p:txBody>
-          <a:bodyPr anchorCtr="0" anchor="t" bIns="91425" lIns="91425" spcFirstLastPara="1" rIns="91425" wrap="square" tIns="91425">
+          <a:bodyPr spcFirstLastPara="1" wrap="square" lIns="91425" tIns="91425" rIns="91425" bIns="91425" anchor="t" anchorCtr="0">
             <a:noAutofit/>
           </a:bodyPr>
           <a:lstStyle>
-            <a:lvl1pPr indent="-342900" lvl="0" marL="457200" algn="ctr">
+            <a:lvl1pPr marL="457200" lvl="0" indent="-342900" algn="ctr">
               <a:lnSpc>
                 <a:spcPct val="115000"/>
               </a:lnSpc>
@@ -2543,7 +2599,7 @@
               <a:buChar char="●"/>
               <a:defRPr/>
             </a:lvl1pPr>
-            <a:lvl2pPr indent="-317500" lvl="1" marL="914400" algn="ctr">
+            <a:lvl2pPr marL="914400" lvl="1" indent="-317500" algn="ctr">
               <a:lnSpc>
                 <a:spcPct val="115000"/>
               </a:lnSpc>
@@ -2557,7 +2613,7 @@
               <a:buChar char="○"/>
               <a:defRPr/>
             </a:lvl2pPr>
-            <a:lvl3pPr indent="-317500" lvl="2" marL="1371600" algn="ctr">
+            <a:lvl3pPr marL="1371600" lvl="2" indent="-317500" algn="ctr">
               <a:lnSpc>
                 <a:spcPct val="115000"/>
               </a:lnSpc>
@@ -2571,7 +2627,7 @@
               <a:buChar char="■"/>
               <a:defRPr/>
             </a:lvl3pPr>
-            <a:lvl4pPr indent="-317500" lvl="3" marL="1828800" algn="ctr">
+            <a:lvl4pPr marL="1828800" lvl="3" indent="-317500" algn="ctr">
               <a:lnSpc>
                 <a:spcPct val="115000"/>
               </a:lnSpc>
@@ -2585,7 +2641,7 @@
               <a:buChar char="●"/>
               <a:defRPr/>
             </a:lvl4pPr>
-            <a:lvl5pPr indent="-317500" lvl="4" marL="2286000" algn="ctr">
+            <a:lvl5pPr marL="2286000" lvl="4" indent="-317500" algn="ctr">
               <a:lnSpc>
                 <a:spcPct val="115000"/>
               </a:lnSpc>
@@ -2599,7 +2655,7 @@
               <a:buChar char="○"/>
               <a:defRPr/>
             </a:lvl5pPr>
-            <a:lvl6pPr indent="-317500" lvl="5" marL="2743200" algn="ctr">
+            <a:lvl6pPr marL="2743200" lvl="5" indent="-317500" algn="ctr">
               <a:lnSpc>
                 <a:spcPct val="115000"/>
               </a:lnSpc>
@@ -2613,7 +2669,7 @@
               <a:buChar char="■"/>
               <a:defRPr/>
             </a:lvl6pPr>
-            <a:lvl7pPr indent="-317500" lvl="6" marL="3200400" algn="ctr">
+            <a:lvl7pPr marL="3200400" lvl="6" indent="-317500" algn="ctr">
               <a:lnSpc>
                 <a:spcPct val="115000"/>
               </a:lnSpc>
@@ -2627,7 +2683,7 @@
               <a:buChar char="●"/>
               <a:defRPr/>
             </a:lvl7pPr>
-            <a:lvl8pPr indent="-317500" lvl="7" marL="3657600" algn="ctr">
+            <a:lvl8pPr marL="3657600" lvl="7" indent="-317500" algn="ctr">
               <a:lnSpc>
                 <a:spcPct val="115000"/>
               </a:lnSpc>
@@ -2641,7 +2697,7 @@
               <a:buChar char="○"/>
               <a:defRPr/>
             </a:lvl8pPr>
-            <a:lvl9pPr indent="-317500" lvl="8" marL="4114800" algn="ctr">
+            <a:lvl9pPr marL="4114800" lvl="8" indent="-317500" algn="ctr">
               <a:lnSpc>
                 <a:spcPct val="115000"/>
               </a:lnSpc>
@@ -2656,15 +2712,19 @@
               <a:defRPr/>
             </a:lvl9pPr>
           </a:lstStyle>
-          <a:p/>
+          <a:p>
+            <a:endParaRPr/>
+          </a:p>
         </p:txBody>
       </p:sp>
       <p:sp>
         <p:nvSpPr>
           <p:cNvPr id="52" name="Google Shape;52;p19"/>
-          <p:cNvSpPr txBox="1"/>
+          <p:cNvSpPr txBox="1">
+            <a:spLocks noGrp="1"/>
+          </p:cNvSpPr>
           <p:nvPr>
-            <p:ph idx="12" type="sldNum"/>
+            <p:ph type="sldNum" idx="12"/>
           </p:nvPr>
         </p:nvSpPr>
         <p:spPr>
@@ -2681,11 +2741,11 @@
           </a:ln>
         </p:spPr>
         <p:txBody>
-          <a:bodyPr anchorCtr="0" anchor="ctr" bIns="91425" lIns="91425" spcFirstLastPara="1" rIns="91425" wrap="square" tIns="91425">
+          <a:bodyPr spcFirstLastPara="1" wrap="square" lIns="91425" tIns="91425" rIns="91425" bIns="91425" anchor="ctr" anchorCtr="0">
             <a:noAutofit/>
           </a:bodyPr>
           <a:lstStyle>
-            <a:lvl1pPr indent="0" lvl="0" marL="0" marR="0" algn="r">
+            <a:lvl1pPr marL="0" marR="0" lvl="0" indent="0" algn="r">
               <a:lnSpc>
                 <a:spcPct val="100000"/>
               </a:lnSpc>
@@ -2701,7 +2761,7 @@
               <a:buSzPts val="1000"/>
               <a:buFont typeface="Arial"/>
               <a:buNone/>
-              <a:defRPr b="0" i="0" sz="1000" u="none" cap="none" strike="noStrike">
+              <a:defRPr sz="1000" b="0" i="0" u="none" strike="noStrike" cap="none">
                 <a:solidFill>
                   <a:schemeClr val="dk2"/>
                 </a:solidFill>
@@ -2711,7 +2771,7 @@
                 <a:sym typeface="Arial"/>
               </a:defRPr>
             </a:lvl1pPr>
-            <a:lvl2pPr indent="0" lvl="1" marL="0" marR="0" algn="r">
+            <a:lvl2pPr marL="0" marR="0" lvl="1" indent="0" algn="r">
               <a:lnSpc>
                 <a:spcPct val="100000"/>
               </a:lnSpc>
@@ -2727,7 +2787,7 @@
               <a:buSzPts val="1000"/>
               <a:buFont typeface="Arial"/>
               <a:buNone/>
-              <a:defRPr b="0" i="0" sz="1000" u="none" cap="none" strike="noStrike">
+              <a:defRPr sz="1000" b="0" i="0" u="none" strike="noStrike" cap="none">
                 <a:solidFill>
                   <a:schemeClr val="dk2"/>
                 </a:solidFill>
@@ -2737,7 +2797,7 @@
                 <a:sym typeface="Arial"/>
               </a:defRPr>
             </a:lvl2pPr>
-            <a:lvl3pPr indent="0" lvl="2" marL="0" marR="0" algn="r">
+            <a:lvl3pPr marL="0" marR="0" lvl="2" indent="0" algn="r">
               <a:lnSpc>
                 <a:spcPct val="100000"/>
               </a:lnSpc>
@@ -2753,7 +2813,7 @@
               <a:buSzPts val="1000"/>
               <a:buFont typeface="Arial"/>
               <a:buNone/>
-              <a:defRPr b="0" i="0" sz="1000" u="none" cap="none" strike="noStrike">
+              <a:defRPr sz="1000" b="0" i="0" u="none" strike="noStrike" cap="none">
                 <a:solidFill>
                   <a:schemeClr val="dk2"/>
                 </a:solidFill>
@@ -2763,7 +2823,7 @@
                 <a:sym typeface="Arial"/>
               </a:defRPr>
             </a:lvl3pPr>
-            <a:lvl4pPr indent="0" lvl="3" marL="0" marR="0" algn="r">
+            <a:lvl4pPr marL="0" marR="0" lvl="3" indent="0" algn="r">
               <a:lnSpc>
                 <a:spcPct val="100000"/>
               </a:lnSpc>
@@ -2779,7 +2839,7 @@
               <a:buSzPts val="1000"/>
               <a:buFont typeface="Arial"/>
               <a:buNone/>
-              <a:defRPr b="0" i="0" sz="1000" u="none" cap="none" strike="noStrike">
+              <a:defRPr sz="1000" b="0" i="0" u="none" strike="noStrike" cap="none">
                 <a:solidFill>
                   <a:schemeClr val="dk2"/>
                 </a:solidFill>
@@ -2789,7 +2849,7 @@
                 <a:sym typeface="Arial"/>
               </a:defRPr>
             </a:lvl4pPr>
-            <a:lvl5pPr indent="0" lvl="4" marL="0" marR="0" algn="r">
+            <a:lvl5pPr marL="0" marR="0" lvl="4" indent="0" algn="r">
               <a:lnSpc>
                 <a:spcPct val="100000"/>
               </a:lnSpc>
@@ -2805,7 +2865,7 @@
               <a:buSzPts val="1000"/>
               <a:buFont typeface="Arial"/>
               <a:buNone/>
-              <a:defRPr b="0" i="0" sz="1000" u="none" cap="none" strike="noStrike">
+              <a:defRPr sz="1000" b="0" i="0" u="none" strike="noStrike" cap="none">
                 <a:solidFill>
                   <a:schemeClr val="dk2"/>
                 </a:solidFill>
@@ -2815,7 +2875,7 @@
                 <a:sym typeface="Arial"/>
               </a:defRPr>
             </a:lvl5pPr>
-            <a:lvl6pPr indent="0" lvl="5" marL="0" marR="0" algn="r">
+            <a:lvl6pPr marL="0" marR="0" lvl="5" indent="0" algn="r">
               <a:lnSpc>
                 <a:spcPct val="100000"/>
               </a:lnSpc>
@@ -2831,7 +2891,7 @@
               <a:buSzPts val="1000"/>
               <a:buFont typeface="Arial"/>
               <a:buNone/>
-              <a:defRPr b="0" i="0" sz="1000" u="none" cap="none" strike="noStrike">
+              <a:defRPr sz="1000" b="0" i="0" u="none" strike="noStrike" cap="none">
                 <a:solidFill>
                   <a:schemeClr val="dk2"/>
                 </a:solidFill>
@@ -2841,7 +2901,7 @@
                 <a:sym typeface="Arial"/>
               </a:defRPr>
             </a:lvl6pPr>
-            <a:lvl7pPr indent="0" lvl="6" marL="0" marR="0" algn="r">
+            <a:lvl7pPr marL="0" marR="0" lvl="6" indent="0" algn="r">
               <a:lnSpc>
                 <a:spcPct val="100000"/>
               </a:lnSpc>
@@ -2857,7 +2917,7 @@
               <a:buSzPts val="1000"/>
               <a:buFont typeface="Arial"/>
               <a:buNone/>
-              <a:defRPr b="0" i="0" sz="1000" u="none" cap="none" strike="noStrike">
+              <a:defRPr sz="1000" b="0" i="0" u="none" strike="noStrike" cap="none">
                 <a:solidFill>
                   <a:schemeClr val="dk2"/>
                 </a:solidFill>
@@ -2867,7 +2927,7 @@
                 <a:sym typeface="Arial"/>
               </a:defRPr>
             </a:lvl7pPr>
-            <a:lvl8pPr indent="0" lvl="7" marL="0" marR="0" algn="r">
+            <a:lvl8pPr marL="0" marR="0" lvl="7" indent="0" algn="r">
               <a:lnSpc>
                 <a:spcPct val="100000"/>
               </a:lnSpc>
@@ -2883,7 +2943,7 @@
               <a:buSzPts val="1000"/>
               <a:buFont typeface="Arial"/>
               <a:buNone/>
-              <a:defRPr b="0" i="0" sz="1000" u="none" cap="none" strike="noStrike">
+              <a:defRPr sz="1000" b="0" i="0" u="none" strike="noStrike" cap="none">
                 <a:solidFill>
                   <a:schemeClr val="dk2"/>
                 </a:solidFill>
@@ -2893,7 +2953,7 @@
                 <a:sym typeface="Arial"/>
               </a:defRPr>
             </a:lvl8pPr>
-            <a:lvl9pPr indent="0" lvl="8" marL="0" marR="0" algn="r">
+            <a:lvl9pPr marL="0" marR="0" lvl="8" indent="0" algn="r">
               <a:lnSpc>
                 <a:spcPct val="100000"/>
               </a:lnSpc>
@@ -2909,7 +2969,7 @@
               <a:buSzPts val="1000"/>
               <a:buFont typeface="Arial"/>
               <a:buNone/>
-              <a:defRPr b="0" i="0" sz="1000" u="none" cap="none" strike="noStrike">
+              <a:defRPr sz="1000" b="0" i="0" u="none" strike="noStrike" cap="none">
                 <a:solidFill>
                   <a:schemeClr val="dk2"/>
                 </a:solidFill>
@@ -2921,7 +2981,7 @@
             </a:lvl9pPr>
           </a:lstStyle>
           <a:p>
-            <a:pPr indent="0" lvl="0" marL="0" rtl="0" algn="r">
+            <a:pPr marL="0" lvl="0" indent="0" algn="r" rtl="0">
               <a:spcBef>
                 <a:spcPts val="0"/>
               </a:spcBef>
@@ -2932,7 +2992,7 @@
             </a:pPr>
             <a:fld id="{00000000-1234-1234-1234-123412341234}" type="slidenum">
               <a:rPr lang="en-US"/>
-              <a:t>‹#›</a:t>
+              <a:t>‹nº›</a:t>
             </a:fld>
             <a:endParaRPr/>
           </a:p>
@@ -2947,11 +3007,11 @@
 </file>
 
 <file path=ppt/slideLayouts/slideLayout11.xml><?xml version="1.0" encoding="utf-8"?>
-<p:sldLayout xmlns:a="http://schemas.openxmlformats.org/drawingml/2006/main" xmlns:r="http://schemas.openxmlformats.org/officeDocument/2006/relationships" xmlns:mc="http://schemas.openxmlformats.org/markup-compatibility/2006" xmlns:mv="urn:schemas-microsoft-com:mac:vml" xmlns:p="http://schemas.openxmlformats.org/presentationml/2006/main" xmlns:c="http://schemas.openxmlformats.org/drawingml/2006/chart" xmlns:dgm="http://schemas.openxmlformats.org/drawingml/2006/diagram" xmlns:o="urn:schemas-microsoft-com:office:office" xmlns:v="urn:schemas-microsoft-com:vml" xmlns:pvml="urn:schemas-microsoft-com:office:powerpoint" xmlns:com="http://schemas.openxmlformats.org/drawingml/2006/compatibility" xmlns:p14="http://schemas.microsoft.com/office/powerpoint/2010/main" xmlns:p15="http://schemas.microsoft.com/office/powerpoint/2012/main" xmlns:ahyp="http://schemas.microsoft.com/office/drawing/2018/hyperlinkcolor" matchingName="Blank" type="blank">
+<p:sldLayout xmlns:a="http://schemas.openxmlformats.org/drawingml/2006/main" xmlns:r="http://schemas.openxmlformats.org/officeDocument/2006/relationships" xmlns:p="http://schemas.openxmlformats.org/presentationml/2006/main" matchingName="Blank" type="blank">
   <p:cSld name="BLANK">
     <p:spTree>
       <p:nvGrpSpPr>
-        <p:cNvPr id="53" name="Shape 53"/>
+        <p:cNvPr id="1" name="Shape 53"/>
         <p:cNvGrpSpPr/>
         <p:nvPr/>
       </p:nvGrpSpPr>
@@ -2966,9 +3026,11 @@
       <p:sp>
         <p:nvSpPr>
           <p:cNvPr id="54" name="Google Shape;54;p20"/>
-          <p:cNvSpPr txBox="1"/>
+          <p:cNvSpPr txBox="1">
+            <a:spLocks noGrp="1"/>
+          </p:cNvSpPr>
           <p:nvPr>
-            <p:ph idx="12" type="sldNum"/>
+            <p:ph type="sldNum" idx="12"/>
           </p:nvPr>
         </p:nvSpPr>
         <p:spPr>
@@ -2985,11 +3047,11 @@
           </a:ln>
         </p:spPr>
         <p:txBody>
-          <a:bodyPr anchorCtr="0" anchor="ctr" bIns="91425" lIns="91425" spcFirstLastPara="1" rIns="91425" wrap="square" tIns="91425">
+          <a:bodyPr spcFirstLastPara="1" wrap="square" lIns="91425" tIns="91425" rIns="91425" bIns="91425" anchor="ctr" anchorCtr="0">
             <a:noAutofit/>
           </a:bodyPr>
           <a:lstStyle>
-            <a:lvl1pPr indent="0" lvl="0" marL="0" marR="0" algn="r">
+            <a:lvl1pPr marL="0" marR="0" lvl="0" indent="0" algn="r">
               <a:lnSpc>
                 <a:spcPct val="100000"/>
               </a:lnSpc>
@@ -3005,7 +3067,7 @@
               <a:buSzPts val="1000"/>
               <a:buFont typeface="Arial"/>
               <a:buNone/>
-              <a:defRPr b="0" i="0" sz="1000" u="none" cap="none" strike="noStrike">
+              <a:defRPr sz="1000" b="0" i="0" u="none" strike="noStrike" cap="none">
                 <a:solidFill>
                   <a:schemeClr val="dk2"/>
                 </a:solidFill>
@@ -3015,7 +3077,7 @@
                 <a:sym typeface="Arial"/>
               </a:defRPr>
             </a:lvl1pPr>
-            <a:lvl2pPr indent="0" lvl="1" marL="0" marR="0" algn="r">
+            <a:lvl2pPr marL="0" marR="0" lvl="1" indent="0" algn="r">
               <a:lnSpc>
                 <a:spcPct val="100000"/>
               </a:lnSpc>
@@ -3031,7 +3093,7 @@
               <a:buSzPts val="1000"/>
               <a:buFont typeface="Arial"/>
               <a:buNone/>
-              <a:defRPr b="0" i="0" sz="1000" u="none" cap="none" strike="noStrike">
+              <a:defRPr sz="1000" b="0" i="0" u="none" strike="noStrike" cap="none">
                 <a:solidFill>
                   <a:schemeClr val="dk2"/>
                 </a:solidFill>
@@ -3041,7 +3103,7 @@
                 <a:sym typeface="Arial"/>
               </a:defRPr>
             </a:lvl2pPr>
-            <a:lvl3pPr indent="0" lvl="2" marL="0" marR="0" algn="r">
+            <a:lvl3pPr marL="0" marR="0" lvl="2" indent="0" algn="r">
               <a:lnSpc>
                 <a:spcPct val="100000"/>
               </a:lnSpc>
@@ -3057,7 +3119,7 @@
               <a:buSzPts val="1000"/>
               <a:buFont typeface="Arial"/>
               <a:buNone/>
-              <a:defRPr b="0" i="0" sz="1000" u="none" cap="none" strike="noStrike">
+              <a:defRPr sz="1000" b="0" i="0" u="none" strike="noStrike" cap="none">
                 <a:solidFill>
                   <a:schemeClr val="dk2"/>
                 </a:solidFill>
@@ -3067,7 +3129,7 @@
                 <a:sym typeface="Arial"/>
               </a:defRPr>
             </a:lvl3pPr>
-            <a:lvl4pPr indent="0" lvl="3" marL="0" marR="0" algn="r">
+            <a:lvl4pPr marL="0" marR="0" lvl="3" indent="0" algn="r">
               <a:lnSpc>
                 <a:spcPct val="100000"/>
               </a:lnSpc>
@@ -3083,7 +3145,7 @@
               <a:buSzPts val="1000"/>
               <a:buFont typeface="Arial"/>
               <a:buNone/>
-              <a:defRPr b="0" i="0" sz="1000" u="none" cap="none" strike="noStrike">
+              <a:defRPr sz="1000" b="0" i="0" u="none" strike="noStrike" cap="none">
                 <a:solidFill>
                   <a:schemeClr val="dk2"/>
                 </a:solidFill>
@@ -3093,7 +3155,7 @@
                 <a:sym typeface="Arial"/>
               </a:defRPr>
             </a:lvl4pPr>
-            <a:lvl5pPr indent="0" lvl="4" marL="0" marR="0" algn="r">
+            <a:lvl5pPr marL="0" marR="0" lvl="4" indent="0" algn="r">
               <a:lnSpc>
                 <a:spcPct val="100000"/>
               </a:lnSpc>
@@ -3109,7 +3171,7 @@
               <a:buSzPts val="1000"/>
               <a:buFont typeface="Arial"/>
               <a:buNone/>
-              <a:defRPr b="0" i="0" sz="1000" u="none" cap="none" strike="noStrike">
+              <a:defRPr sz="1000" b="0" i="0" u="none" strike="noStrike" cap="none">
                 <a:solidFill>
                   <a:schemeClr val="dk2"/>
                 </a:solidFill>
@@ -3119,7 +3181,7 @@
                 <a:sym typeface="Arial"/>
               </a:defRPr>
             </a:lvl5pPr>
-            <a:lvl6pPr indent="0" lvl="5" marL="0" marR="0" algn="r">
+            <a:lvl6pPr marL="0" marR="0" lvl="5" indent="0" algn="r">
               <a:lnSpc>
                 <a:spcPct val="100000"/>
               </a:lnSpc>
@@ -3135,7 +3197,7 @@
               <a:buSzPts val="1000"/>
               <a:buFont typeface="Arial"/>
               <a:buNone/>
-              <a:defRPr b="0" i="0" sz="1000" u="none" cap="none" strike="noStrike">
+              <a:defRPr sz="1000" b="0" i="0" u="none" strike="noStrike" cap="none">
                 <a:solidFill>
                   <a:schemeClr val="dk2"/>
                 </a:solidFill>
@@ -3145,7 +3207,7 @@
                 <a:sym typeface="Arial"/>
               </a:defRPr>
             </a:lvl6pPr>
-            <a:lvl7pPr indent="0" lvl="6" marL="0" marR="0" algn="r">
+            <a:lvl7pPr marL="0" marR="0" lvl="6" indent="0" algn="r">
               <a:lnSpc>
                 <a:spcPct val="100000"/>
               </a:lnSpc>
@@ -3161,7 +3223,7 @@
               <a:buSzPts val="1000"/>
               <a:buFont typeface="Arial"/>
               <a:buNone/>
-              <a:defRPr b="0" i="0" sz="1000" u="none" cap="none" strike="noStrike">
+              <a:defRPr sz="1000" b="0" i="0" u="none" strike="noStrike" cap="none">
                 <a:solidFill>
                   <a:schemeClr val="dk2"/>
                 </a:solidFill>
@@ -3171,7 +3233,7 @@
                 <a:sym typeface="Arial"/>
               </a:defRPr>
             </a:lvl7pPr>
-            <a:lvl8pPr indent="0" lvl="7" marL="0" marR="0" algn="r">
+            <a:lvl8pPr marL="0" marR="0" lvl="7" indent="0" algn="r">
               <a:lnSpc>
                 <a:spcPct val="100000"/>
               </a:lnSpc>
@@ -3187,7 +3249,7 @@
               <a:buSzPts val="1000"/>
               <a:buFont typeface="Arial"/>
               <a:buNone/>
-              <a:defRPr b="0" i="0" sz="1000" u="none" cap="none" strike="noStrike">
+              <a:defRPr sz="1000" b="0" i="0" u="none" strike="noStrike" cap="none">
                 <a:solidFill>
                   <a:schemeClr val="dk2"/>
                 </a:solidFill>
@@ -3197,7 +3259,7 @@
                 <a:sym typeface="Arial"/>
               </a:defRPr>
             </a:lvl8pPr>
-            <a:lvl9pPr indent="0" lvl="8" marL="0" marR="0" algn="r">
+            <a:lvl9pPr marL="0" marR="0" lvl="8" indent="0" algn="r">
               <a:lnSpc>
                 <a:spcPct val="100000"/>
               </a:lnSpc>
@@ -3213,7 +3275,7 @@
               <a:buSzPts val="1000"/>
               <a:buFont typeface="Arial"/>
               <a:buNone/>
-              <a:defRPr b="0" i="0" sz="1000" u="none" cap="none" strike="noStrike">
+              <a:defRPr sz="1000" b="0" i="0" u="none" strike="noStrike" cap="none">
                 <a:solidFill>
                   <a:schemeClr val="dk2"/>
                 </a:solidFill>
@@ -3225,7 +3287,7 @@
             </a:lvl9pPr>
           </a:lstStyle>
           <a:p>
-            <a:pPr indent="0" lvl="0" marL="0" rtl="0" algn="r">
+            <a:pPr marL="0" lvl="0" indent="0" algn="r" rtl="0">
               <a:spcBef>
                 <a:spcPts val="0"/>
               </a:spcBef>
@@ -3236,7 +3298,7 @@
             </a:pPr>
             <a:fld id="{00000000-1234-1234-1234-123412341234}" type="slidenum">
               <a:rPr lang="en-US"/>
-              <a:t>‹#›</a:t>
+              <a:t>‹nº›</a:t>
             </a:fld>
             <a:endParaRPr/>
           </a:p>
@@ -3251,11 +3313,11 @@
 </file>
 
 <file path=ppt/slideLayouts/slideLayout2.xml><?xml version="1.0" encoding="utf-8"?>
-<p:sldLayout xmlns:a="http://schemas.openxmlformats.org/drawingml/2006/main" xmlns:r="http://schemas.openxmlformats.org/officeDocument/2006/relationships" xmlns:mc="http://schemas.openxmlformats.org/markup-compatibility/2006" xmlns:mv="urn:schemas-microsoft-com:mac:vml" xmlns:p="http://schemas.openxmlformats.org/presentationml/2006/main" xmlns:c="http://schemas.openxmlformats.org/drawingml/2006/chart" xmlns:dgm="http://schemas.openxmlformats.org/drawingml/2006/diagram" xmlns:o="urn:schemas-microsoft-com:office:office" xmlns:v="urn:schemas-microsoft-com:vml" xmlns:pvml="urn:schemas-microsoft-com:office:powerpoint" xmlns:com="http://schemas.openxmlformats.org/drawingml/2006/compatibility" xmlns:p14="http://schemas.microsoft.com/office/powerpoint/2010/main" xmlns:p15="http://schemas.microsoft.com/office/powerpoint/2012/main" xmlns:ahyp="http://schemas.microsoft.com/office/drawing/2018/hyperlinkcolor" matchingName="Title and body" type="tx">
+<p:sldLayout xmlns:a="http://schemas.openxmlformats.org/drawingml/2006/main" xmlns:r="http://schemas.openxmlformats.org/officeDocument/2006/relationships" xmlns:p="http://schemas.openxmlformats.org/presentationml/2006/main" matchingName="Title and body" type="tx">
   <p:cSld name="TITLE_AND_BODY">
     <p:spTree>
       <p:nvGrpSpPr>
-        <p:cNvPr id="17" name="Shape 17"/>
+        <p:cNvPr id="1" name="Shape 17"/>
         <p:cNvGrpSpPr/>
         <p:nvPr/>
       </p:nvGrpSpPr>
@@ -3270,7 +3332,9 @@
       <p:sp>
         <p:nvSpPr>
           <p:cNvPr id="18" name="Google Shape;18;p11"/>
-          <p:cNvSpPr txBox="1"/>
+          <p:cNvSpPr txBox="1">
+            <a:spLocks noGrp="1"/>
+          </p:cNvSpPr>
           <p:nvPr>
             <p:ph type="title"/>
           </p:nvPr>
@@ -3289,7 +3353,7 @@
           </a:ln>
         </p:spPr>
         <p:txBody>
-          <a:bodyPr anchorCtr="0" anchor="ctr" bIns="91425" lIns="91425" spcFirstLastPara="1" rIns="91425" wrap="square" tIns="91425">
+          <a:bodyPr spcFirstLastPara="1" wrap="square" lIns="91425" tIns="91425" rIns="91425" bIns="91425" anchor="ctr" anchorCtr="0">
             <a:noAutofit/>
           </a:bodyPr>
           <a:lstStyle>
@@ -3308,7 +3372,7 @@
               </a:buClr>
               <a:buSzPts val="3000"/>
               <a:buNone/>
-              <a:defRPr b="1" sz="3000">
+              <a:defRPr sz="3000" b="1">
                 <a:solidFill>
                   <a:srgbClr val="454F5B"/>
                 </a:solidFill>
@@ -3427,15 +3491,19 @@
               <a:defRPr/>
             </a:lvl9pPr>
           </a:lstStyle>
-          <a:p/>
+          <a:p>
+            <a:endParaRPr/>
+          </a:p>
         </p:txBody>
       </p:sp>
       <p:sp>
         <p:nvSpPr>
           <p:cNvPr id="19" name="Google Shape;19;p11"/>
-          <p:cNvSpPr txBox="1"/>
+          <p:cNvSpPr txBox="1">
+            <a:spLocks noGrp="1"/>
+          </p:cNvSpPr>
           <p:nvPr>
-            <p:ph idx="1" type="body"/>
+            <p:ph type="body" idx="1"/>
           </p:nvPr>
         </p:nvSpPr>
         <p:spPr>
@@ -3452,11 +3520,11 @@
           </a:ln>
         </p:spPr>
         <p:txBody>
-          <a:bodyPr anchorCtr="0" anchor="t" bIns="91425" lIns="91425" spcFirstLastPara="1" rIns="91425" wrap="square" tIns="91425">
+          <a:bodyPr spcFirstLastPara="1" wrap="square" lIns="91425" tIns="91425" rIns="91425" bIns="91425" anchor="t" anchorCtr="0">
             <a:noAutofit/>
           </a:bodyPr>
           <a:lstStyle>
-            <a:lvl1pPr indent="-355600" lvl="0" marL="457200" algn="l">
+            <a:lvl1pPr marL="457200" lvl="0" indent="-355600" algn="l">
               <a:lnSpc>
                 <a:spcPct val="115000"/>
               </a:lnSpc>
@@ -3473,7 +3541,7 @@
               <a:buChar char="▣"/>
               <a:defRPr sz="2000"/>
             </a:lvl1pPr>
-            <a:lvl2pPr indent="-330200" lvl="1" marL="914400" algn="l">
+            <a:lvl2pPr marL="914400" lvl="1" indent="-330200" algn="l">
               <a:lnSpc>
                 <a:spcPct val="115000"/>
               </a:lnSpc>
@@ -3490,7 +3558,7 @@
               <a:buChar char="▢"/>
               <a:defRPr sz="1600"/>
             </a:lvl2pPr>
-            <a:lvl3pPr indent="-317500" lvl="2" marL="1371600" algn="l">
+            <a:lvl3pPr marL="1371600" lvl="2" indent="-317500" algn="l">
               <a:lnSpc>
                 <a:spcPct val="115000"/>
               </a:lnSpc>
@@ -3507,7 +3575,7 @@
               <a:buChar char="○"/>
               <a:defRPr i="1"/>
             </a:lvl3pPr>
-            <a:lvl4pPr indent="-317500" lvl="3" marL="1828800" algn="l">
+            <a:lvl4pPr marL="1828800" lvl="3" indent="-317500" algn="l">
               <a:lnSpc>
                 <a:spcPct val="115000"/>
               </a:lnSpc>
@@ -3521,7 +3589,7 @@
               <a:buChar char="●"/>
               <a:defRPr/>
             </a:lvl4pPr>
-            <a:lvl5pPr indent="-317500" lvl="4" marL="2286000" algn="l">
+            <a:lvl5pPr marL="2286000" lvl="4" indent="-317500" algn="l">
               <a:lnSpc>
                 <a:spcPct val="115000"/>
               </a:lnSpc>
@@ -3535,7 +3603,7 @@
               <a:buChar char="○"/>
               <a:defRPr/>
             </a:lvl5pPr>
-            <a:lvl6pPr indent="-317500" lvl="5" marL="2743200" algn="l">
+            <a:lvl6pPr marL="2743200" lvl="5" indent="-317500" algn="l">
               <a:lnSpc>
                 <a:spcPct val="115000"/>
               </a:lnSpc>
@@ -3549,7 +3617,7 @@
               <a:buChar char="■"/>
               <a:defRPr/>
             </a:lvl6pPr>
-            <a:lvl7pPr indent="-317500" lvl="6" marL="3200400" algn="l">
+            <a:lvl7pPr marL="3200400" lvl="6" indent="-317500" algn="l">
               <a:lnSpc>
                 <a:spcPct val="115000"/>
               </a:lnSpc>
@@ -3563,7 +3631,7 @@
               <a:buChar char="●"/>
               <a:defRPr/>
             </a:lvl7pPr>
-            <a:lvl8pPr indent="-317500" lvl="7" marL="3657600" algn="l">
+            <a:lvl8pPr marL="3657600" lvl="7" indent="-317500" algn="l">
               <a:lnSpc>
                 <a:spcPct val="115000"/>
               </a:lnSpc>
@@ -3577,7 +3645,7 @@
               <a:buChar char="○"/>
               <a:defRPr/>
             </a:lvl8pPr>
-            <a:lvl9pPr indent="-317500" lvl="8" marL="4114800" algn="l">
+            <a:lvl9pPr marL="4114800" lvl="8" indent="-317500" algn="l">
               <a:lnSpc>
                 <a:spcPct val="115000"/>
               </a:lnSpc>
@@ -3592,15 +3660,19 @@
               <a:defRPr/>
             </a:lvl9pPr>
           </a:lstStyle>
-          <a:p/>
+          <a:p>
+            <a:endParaRPr/>
+          </a:p>
         </p:txBody>
       </p:sp>
       <p:sp>
         <p:nvSpPr>
           <p:cNvPr id="20" name="Google Shape;20;p11"/>
-          <p:cNvSpPr txBox="1"/>
+          <p:cNvSpPr txBox="1">
+            <a:spLocks noGrp="1"/>
+          </p:cNvSpPr>
           <p:nvPr>
-            <p:ph idx="12" type="sldNum"/>
+            <p:ph type="sldNum" idx="12"/>
           </p:nvPr>
         </p:nvSpPr>
         <p:spPr>
@@ -3617,11 +3689,11 @@
           </a:ln>
         </p:spPr>
         <p:txBody>
-          <a:bodyPr anchorCtr="0" anchor="ctr" bIns="91425" lIns="91425" spcFirstLastPara="1" rIns="91425" wrap="square" tIns="91425">
+          <a:bodyPr spcFirstLastPara="1" wrap="square" lIns="91425" tIns="91425" rIns="91425" bIns="91425" anchor="ctr" anchorCtr="0">
             <a:noAutofit/>
           </a:bodyPr>
           <a:lstStyle>
-            <a:lvl1pPr indent="0" lvl="0" marL="0" marR="0" algn="r">
+            <a:lvl1pPr marL="0" marR="0" lvl="0" indent="0" algn="r">
               <a:lnSpc>
                 <a:spcPct val="100000"/>
               </a:lnSpc>
@@ -3637,7 +3709,7 @@
               <a:buSzPts val="1000"/>
               <a:buFont typeface="Arial"/>
               <a:buNone/>
-              <a:defRPr b="0" i="0" sz="1000" u="none" cap="none" strike="noStrike">
+              <a:defRPr sz="1000" b="0" i="0" u="none" strike="noStrike" cap="none">
                 <a:solidFill>
                   <a:srgbClr val="454F5B"/>
                 </a:solidFill>
@@ -3647,7 +3719,7 @@
                 <a:sym typeface="Arial"/>
               </a:defRPr>
             </a:lvl1pPr>
-            <a:lvl2pPr indent="0" lvl="1" marL="0" marR="0" algn="r">
+            <a:lvl2pPr marL="0" marR="0" lvl="1" indent="0" algn="r">
               <a:lnSpc>
                 <a:spcPct val="100000"/>
               </a:lnSpc>
@@ -3663,7 +3735,7 @@
               <a:buSzPts val="1000"/>
               <a:buFont typeface="Arial"/>
               <a:buNone/>
-              <a:defRPr b="0" i="0" sz="1000" u="none" cap="none" strike="noStrike">
+              <a:defRPr sz="1000" b="0" i="0" u="none" strike="noStrike" cap="none">
                 <a:solidFill>
                   <a:srgbClr val="454F5B"/>
                 </a:solidFill>
@@ -3673,7 +3745,7 @@
                 <a:sym typeface="Arial"/>
               </a:defRPr>
             </a:lvl2pPr>
-            <a:lvl3pPr indent="0" lvl="2" marL="0" marR="0" algn="r">
+            <a:lvl3pPr marL="0" marR="0" lvl="2" indent="0" algn="r">
               <a:lnSpc>
                 <a:spcPct val="100000"/>
               </a:lnSpc>
@@ -3689,7 +3761,7 @@
               <a:buSzPts val="1000"/>
               <a:buFont typeface="Arial"/>
               <a:buNone/>
-              <a:defRPr b="0" i="0" sz="1000" u="none" cap="none" strike="noStrike">
+              <a:defRPr sz="1000" b="0" i="0" u="none" strike="noStrike" cap="none">
                 <a:solidFill>
                   <a:srgbClr val="454F5B"/>
                 </a:solidFill>
@@ -3699,7 +3771,7 @@
                 <a:sym typeface="Arial"/>
               </a:defRPr>
             </a:lvl3pPr>
-            <a:lvl4pPr indent="0" lvl="3" marL="0" marR="0" algn="r">
+            <a:lvl4pPr marL="0" marR="0" lvl="3" indent="0" algn="r">
               <a:lnSpc>
                 <a:spcPct val="100000"/>
               </a:lnSpc>
@@ -3715,7 +3787,7 @@
               <a:buSzPts val="1000"/>
               <a:buFont typeface="Arial"/>
               <a:buNone/>
-              <a:defRPr b="0" i="0" sz="1000" u="none" cap="none" strike="noStrike">
+              <a:defRPr sz="1000" b="0" i="0" u="none" strike="noStrike" cap="none">
                 <a:solidFill>
                   <a:srgbClr val="454F5B"/>
                 </a:solidFill>
@@ -3725,7 +3797,7 @@
                 <a:sym typeface="Arial"/>
               </a:defRPr>
             </a:lvl4pPr>
-            <a:lvl5pPr indent="0" lvl="4" marL="0" marR="0" algn="r">
+            <a:lvl5pPr marL="0" marR="0" lvl="4" indent="0" algn="r">
               <a:lnSpc>
                 <a:spcPct val="100000"/>
               </a:lnSpc>
@@ -3741,7 +3813,7 @@
               <a:buSzPts val="1000"/>
               <a:buFont typeface="Arial"/>
               <a:buNone/>
-              <a:defRPr b="0" i="0" sz="1000" u="none" cap="none" strike="noStrike">
+              <a:defRPr sz="1000" b="0" i="0" u="none" strike="noStrike" cap="none">
                 <a:solidFill>
                   <a:srgbClr val="454F5B"/>
                 </a:solidFill>
@@ -3751,7 +3823,7 @@
                 <a:sym typeface="Arial"/>
               </a:defRPr>
             </a:lvl5pPr>
-            <a:lvl6pPr indent="0" lvl="5" marL="0" marR="0" algn="r">
+            <a:lvl6pPr marL="0" marR="0" lvl="5" indent="0" algn="r">
               <a:lnSpc>
                 <a:spcPct val="100000"/>
               </a:lnSpc>
@@ -3767,7 +3839,7 @@
               <a:buSzPts val="1000"/>
               <a:buFont typeface="Arial"/>
               <a:buNone/>
-              <a:defRPr b="0" i="0" sz="1000" u="none" cap="none" strike="noStrike">
+              <a:defRPr sz="1000" b="0" i="0" u="none" strike="noStrike" cap="none">
                 <a:solidFill>
                   <a:srgbClr val="454F5B"/>
                 </a:solidFill>
@@ -3777,7 +3849,7 @@
                 <a:sym typeface="Arial"/>
               </a:defRPr>
             </a:lvl6pPr>
-            <a:lvl7pPr indent="0" lvl="6" marL="0" marR="0" algn="r">
+            <a:lvl7pPr marL="0" marR="0" lvl="6" indent="0" algn="r">
               <a:lnSpc>
                 <a:spcPct val="100000"/>
               </a:lnSpc>
@@ -3793,7 +3865,7 @@
               <a:buSzPts val="1000"/>
               <a:buFont typeface="Arial"/>
               <a:buNone/>
-              <a:defRPr b="0" i="0" sz="1000" u="none" cap="none" strike="noStrike">
+              <a:defRPr sz="1000" b="0" i="0" u="none" strike="noStrike" cap="none">
                 <a:solidFill>
                   <a:srgbClr val="454F5B"/>
                 </a:solidFill>
@@ -3803,7 +3875,7 @@
                 <a:sym typeface="Arial"/>
               </a:defRPr>
             </a:lvl7pPr>
-            <a:lvl8pPr indent="0" lvl="7" marL="0" marR="0" algn="r">
+            <a:lvl8pPr marL="0" marR="0" lvl="7" indent="0" algn="r">
               <a:lnSpc>
                 <a:spcPct val="100000"/>
               </a:lnSpc>
@@ -3819,7 +3891,7 @@
               <a:buSzPts val="1000"/>
               <a:buFont typeface="Arial"/>
               <a:buNone/>
-              <a:defRPr b="0" i="0" sz="1000" u="none" cap="none" strike="noStrike">
+              <a:defRPr sz="1000" b="0" i="0" u="none" strike="noStrike" cap="none">
                 <a:solidFill>
                   <a:srgbClr val="454F5B"/>
                 </a:solidFill>
@@ -3829,7 +3901,7 @@
                 <a:sym typeface="Arial"/>
               </a:defRPr>
             </a:lvl8pPr>
-            <a:lvl9pPr indent="0" lvl="8" marL="0" marR="0" algn="r">
+            <a:lvl9pPr marL="0" marR="0" lvl="8" indent="0" algn="r">
               <a:lnSpc>
                 <a:spcPct val="100000"/>
               </a:lnSpc>
@@ -3845,7 +3917,7 @@
               <a:buSzPts val="1000"/>
               <a:buFont typeface="Arial"/>
               <a:buNone/>
-              <a:defRPr b="0" i="0" sz="1000" u="none" cap="none" strike="noStrike">
+              <a:defRPr sz="1000" b="0" i="0" u="none" strike="noStrike" cap="none">
                 <a:solidFill>
                   <a:srgbClr val="454F5B"/>
                 </a:solidFill>
@@ -3857,7 +3929,7 @@
             </a:lvl9pPr>
           </a:lstStyle>
           <a:p>
-            <a:pPr indent="0" lvl="0" marL="0" rtl="0" algn="r">
+            <a:pPr marL="0" lvl="0" indent="0" algn="r" rtl="0">
               <a:spcBef>
                 <a:spcPts val="0"/>
               </a:spcBef>
@@ -3868,7 +3940,7 @@
             </a:pPr>
             <a:fld id="{00000000-1234-1234-1234-123412341234}" type="slidenum">
               <a:rPr lang="en-US"/>
-              <a:t>‹#›</a:t>
+              <a:t>‹nº›</a:t>
             </a:fld>
             <a:endParaRPr/>
           </a:p>
@@ -3896,12 +3968,12 @@
           </a:ln>
         </p:spPr>
         <p:txBody>
-          <a:bodyPr anchorCtr="0" anchor="ctr" bIns="91425" lIns="91425" spcFirstLastPara="1" rIns="91425" wrap="square" tIns="91425">
+          <a:bodyPr spcFirstLastPara="1" wrap="square" lIns="91425" tIns="91425" rIns="91425" bIns="91425" anchor="ctr" anchorCtr="0">
             <a:noAutofit/>
           </a:bodyPr>
           <a:lstStyle/>
           <a:p>
-            <a:pPr indent="0" lvl="0" marL="0" marR="0" rtl="0" algn="l">
+            <a:pPr marL="0" marR="0" lvl="0" indent="0" algn="l" rtl="0">
               <a:lnSpc>
                 <a:spcPct val="100000"/>
               </a:lnSpc>
@@ -3918,10 +3990,7 @@
               <a:buFont typeface="Arial"/>
               <a:buNone/>
             </a:pPr>
-            <a:r>
-              <a:t/>
-            </a:r>
-            <a:endParaRPr b="0" i="0" sz="1400" u="none" cap="none" strike="noStrike">
+            <a:endParaRPr sz="1400" b="0" i="0" u="none" strike="noStrike" cap="none">
               <a:solidFill>
                 <a:srgbClr val="000000"/>
               </a:solidFill>
@@ -3942,11 +4011,11 @@
 </file>
 
 <file path=ppt/slideLayouts/slideLayout3.xml><?xml version="1.0" encoding="utf-8"?>
-<p:sldLayout xmlns:a="http://schemas.openxmlformats.org/drawingml/2006/main" xmlns:r="http://schemas.openxmlformats.org/officeDocument/2006/relationships" xmlns:mc="http://schemas.openxmlformats.org/markup-compatibility/2006" xmlns:mv="urn:schemas-microsoft-com:mac:vml" xmlns:p="http://schemas.openxmlformats.org/presentationml/2006/main" xmlns:c="http://schemas.openxmlformats.org/drawingml/2006/chart" xmlns:dgm="http://schemas.openxmlformats.org/drawingml/2006/diagram" xmlns:o="urn:schemas-microsoft-com:office:office" xmlns:v="urn:schemas-microsoft-com:vml" xmlns:pvml="urn:schemas-microsoft-com:office:powerpoint" xmlns:com="http://schemas.openxmlformats.org/drawingml/2006/compatibility" xmlns:p14="http://schemas.microsoft.com/office/powerpoint/2010/main" xmlns:p15="http://schemas.microsoft.com/office/powerpoint/2012/main" xmlns:ahyp="http://schemas.microsoft.com/office/drawing/2018/hyperlinkcolor" matchingName="Section header" type="secHead">
+<p:sldLayout xmlns:a="http://schemas.openxmlformats.org/drawingml/2006/main" xmlns:r="http://schemas.openxmlformats.org/officeDocument/2006/relationships" xmlns:p="http://schemas.openxmlformats.org/presentationml/2006/main" matchingName="Section header" type="secHead">
   <p:cSld name="SECTION_HEADER">
     <p:spTree>
       <p:nvGrpSpPr>
-        <p:cNvPr id="22" name="Shape 22"/>
+        <p:cNvPr id="1" name="Shape 22"/>
         <p:cNvGrpSpPr/>
         <p:nvPr/>
       </p:nvGrpSpPr>
@@ -3961,7 +4030,9 @@
       <p:sp>
         <p:nvSpPr>
           <p:cNvPr id="23" name="Google Shape;23;p12"/>
-          <p:cNvSpPr txBox="1"/>
+          <p:cNvSpPr txBox="1">
+            <a:spLocks noGrp="1"/>
+          </p:cNvSpPr>
           <p:nvPr>
             <p:ph type="title"/>
           </p:nvPr>
@@ -3980,7 +4051,7 @@
           </a:ln>
         </p:spPr>
         <p:txBody>
-          <a:bodyPr anchorCtr="0" anchor="ctr" bIns="91425" lIns="91425" spcFirstLastPara="1" rIns="91425" wrap="square" tIns="91425">
+          <a:bodyPr spcFirstLastPara="1" wrap="square" lIns="91425" tIns="91425" rIns="91425" bIns="91425" anchor="ctr" anchorCtr="0">
             <a:noAutofit/>
           </a:bodyPr>
           <a:lstStyle>
@@ -4111,15 +4182,19 @@
               <a:defRPr sz="3600"/>
             </a:lvl9pPr>
           </a:lstStyle>
-          <a:p/>
+          <a:p>
+            <a:endParaRPr/>
+          </a:p>
         </p:txBody>
       </p:sp>
       <p:sp>
         <p:nvSpPr>
           <p:cNvPr id="24" name="Google Shape;24;p12"/>
-          <p:cNvSpPr txBox="1"/>
+          <p:cNvSpPr txBox="1">
+            <a:spLocks noGrp="1"/>
+          </p:cNvSpPr>
           <p:nvPr>
-            <p:ph idx="12" type="sldNum"/>
+            <p:ph type="sldNum" idx="12"/>
           </p:nvPr>
         </p:nvSpPr>
         <p:spPr>
@@ -4136,11 +4211,11 @@
           </a:ln>
         </p:spPr>
         <p:txBody>
-          <a:bodyPr anchorCtr="0" anchor="ctr" bIns="91425" lIns="91425" spcFirstLastPara="1" rIns="91425" wrap="square" tIns="91425">
+          <a:bodyPr spcFirstLastPara="1" wrap="square" lIns="91425" tIns="91425" rIns="91425" bIns="91425" anchor="ctr" anchorCtr="0">
             <a:noAutofit/>
           </a:bodyPr>
           <a:lstStyle>
-            <a:lvl1pPr indent="0" lvl="0" marL="0" marR="0" algn="r">
+            <a:lvl1pPr marL="0" marR="0" lvl="0" indent="0" algn="r">
               <a:lnSpc>
                 <a:spcPct val="100000"/>
               </a:lnSpc>
@@ -4156,7 +4231,7 @@
               <a:buSzPts val="1000"/>
               <a:buFont typeface="Arial"/>
               <a:buNone/>
-              <a:defRPr b="0" i="0" sz="1000" u="none" cap="none" strike="noStrike">
+              <a:defRPr sz="1000" b="0" i="0" u="none" strike="noStrike" cap="none">
                 <a:solidFill>
                   <a:schemeClr val="dk2"/>
                 </a:solidFill>
@@ -4166,7 +4241,7 @@
                 <a:sym typeface="Arial"/>
               </a:defRPr>
             </a:lvl1pPr>
-            <a:lvl2pPr indent="0" lvl="1" marL="0" marR="0" algn="r">
+            <a:lvl2pPr marL="0" marR="0" lvl="1" indent="0" algn="r">
               <a:lnSpc>
                 <a:spcPct val="100000"/>
               </a:lnSpc>
@@ -4182,7 +4257,7 @@
               <a:buSzPts val="1000"/>
               <a:buFont typeface="Arial"/>
               <a:buNone/>
-              <a:defRPr b="0" i="0" sz="1000" u="none" cap="none" strike="noStrike">
+              <a:defRPr sz="1000" b="0" i="0" u="none" strike="noStrike" cap="none">
                 <a:solidFill>
                   <a:schemeClr val="dk2"/>
                 </a:solidFill>
@@ -4192,7 +4267,7 @@
                 <a:sym typeface="Arial"/>
               </a:defRPr>
             </a:lvl2pPr>
-            <a:lvl3pPr indent="0" lvl="2" marL="0" marR="0" algn="r">
+            <a:lvl3pPr marL="0" marR="0" lvl="2" indent="0" algn="r">
               <a:lnSpc>
                 <a:spcPct val="100000"/>
               </a:lnSpc>
@@ -4208,7 +4283,7 @@
               <a:buSzPts val="1000"/>
               <a:buFont typeface="Arial"/>
               <a:buNone/>
-              <a:defRPr b="0" i="0" sz="1000" u="none" cap="none" strike="noStrike">
+              <a:defRPr sz="1000" b="0" i="0" u="none" strike="noStrike" cap="none">
                 <a:solidFill>
                   <a:schemeClr val="dk2"/>
                 </a:solidFill>
@@ -4218,7 +4293,7 @@
                 <a:sym typeface="Arial"/>
               </a:defRPr>
             </a:lvl3pPr>
-            <a:lvl4pPr indent="0" lvl="3" marL="0" marR="0" algn="r">
+            <a:lvl4pPr marL="0" marR="0" lvl="3" indent="0" algn="r">
               <a:lnSpc>
                 <a:spcPct val="100000"/>
               </a:lnSpc>
@@ -4234,7 +4309,7 @@
               <a:buSzPts val="1000"/>
               <a:buFont typeface="Arial"/>
               <a:buNone/>
-              <a:defRPr b="0" i="0" sz="1000" u="none" cap="none" strike="noStrike">
+              <a:defRPr sz="1000" b="0" i="0" u="none" strike="noStrike" cap="none">
                 <a:solidFill>
                   <a:schemeClr val="dk2"/>
                 </a:solidFill>
@@ -4244,7 +4319,7 @@
                 <a:sym typeface="Arial"/>
               </a:defRPr>
             </a:lvl4pPr>
-            <a:lvl5pPr indent="0" lvl="4" marL="0" marR="0" algn="r">
+            <a:lvl5pPr marL="0" marR="0" lvl="4" indent="0" algn="r">
               <a:lnSpc>
                 <a:spcPct val="100000"/>
               </a:lnSpc>
@@ -4260,7 +4335,7 @@
               <a:buSzPts val="1000"/>
               <a:buFont typeface="Arial"/>
               <a:buNone/>
-              <a:defRPr b="0" i="0" sz="1000" u="none" cap="none" strike="noStrike">
+              <a:defRPr sz="1000" b="0" i="0" u="none" strike="noStrike" cap="none">
                 <a:solidFill>
                   <a:schemeClr val="dk2"/>
                 </a:solidFill>
@@ -4270,7 +4345,7 @@
                 <a:sym typeface="Arial"/>
               </a:defRPr>
             </a:lvl5pPr>
-            <a:lvl6pPr indent="0" lvl="5" marL="0" marR="0" algn="r">
+            <a:lvl6pPr marL="0" marR="0" lvl="5" indent="0" algn="r">
               <a:lnSpc>
                 <a:spcPct val="100000"/>
               </a:lnSpc>
@@ -4286,7 +4361,7 @@
               <a:buSzPts val="1000"/>
               <a:buFont typeface="Arial"/>
               <a:buNone/>
-              <a:defRPr b="0" i="0" sz="1000" u="none" cap="none" strike="noStrike">
+              <a:defRPr sz="1000" b="0" i="0" u="none" strike="noStrike" cap="none">
                 <a:solidFill>
                   <a:schemeClr val="dk2"/>
                 </a:solidFill>
@@ -4296,7 +4371,7 @@
                 <a:sym typeface="Arial"/>
               </a:defRPr>
             </a:lvl6pPr>
-            <a:lvl7pPr indent="0" lvl="6" marL="0" marR="0" algn="r">
+            <a:lvl7pPr marL="0" marR="0" lvl="6" indent="0" algn="r">
               <a:lnSpc>
                 <a:spcPct val="100000"/>
               </a:lnSpc>
@@ -4312,7 +4387,7 @@
               <a:buSzPts val="1000"/>
               <a:buFont typeface="Arial"/>
               <a:buNone/>
-              <a:defRPr b="0" i="0" sz="1000" u="none" cap="none" strike="noStrike">
+              <a:defRPr sz="1000" b="0" i="0" u="none" strike="noStrike" cap="none">
                 <a:solidFill>
                   <a:schemeClr val="dk2"/>
                 </a:solidFill>
@@ -4322,7 +4397,7 @@
                 <a:sym typeface="Arial"/>
               </a:defRPr>
             </a:lvl7pPr>
-            <a:lvl8pPr indent="0" lvl="7" marL="0" marR="0" algn="r">
+            <a:lvl8pPr marL="0" marR="0" lvl="7" indent="0" algn="r">
               <a:lnSpc>
                 <a:spcPct val="100000"/>
               </a:lnSpc>
@@ -4338,7 +4413,7 @@
               <a:buSzPts val="1000"/>
               <a:buFont typeface="Arial"/>
               <a:buNone/>
-              <a:defRPr b="0" i="0" sz="1000" u="none" cap="none" strike="noStrike">
+              <a:defRPr sz="1000" b="0" i="0" u="none" strike="noStrike" cap="none">
                 <a:solidFill>
                   <a:schemeClr val="dk2"/>
                 </a:solidFill>
@@ -4348,7 +4423,7 @@
                 <a:sym typeface="Arial"/>
               </a:defRPr>
             </a:lvl8pPr>
-            <a:lvl9pPr indent="0" lvl="8" marL="0" marR="0" algn="r">
+            <a:lvl9pPr marL="0" marR="0" lvl="8" indent="0" algn="r">
               <a:lnSpc>
                 <a:spcPct val="100000"/>
               </a:lnSpc>
@@ -4364,7 +4439,7 @@
               <a:buSzPts val="1000"/>
               <a:buFont typeface="Arial"/>
               <a:buNone/>
-              <a:defRPr b="0" i="0" sz="1000" u="none" cap="none" strike="noStrike">
+              <a:defRPr sz="1000" b="0" i="0" u="none" strike="noStrike" cap="none">
                 <a:solidFill>
                   <a:schemeClr val="dk2"/>
                 </a:solidFill>
@@ -4376,7 +4451,7 @@
             </a:lvl9pPr>
           </a:lstStyle>
           <a:p>
-            <a:pPr indent="0" lvl="0" marL="0" rtl="0" algn="r">
+            <a:pPr marL="0" lvl="0" indent="0" algn="r" rtl="0">
               <a:spcBef>
                 <a:spcPts val="0"/>
               </a:spcBef>
@@ -4387,7 +4462,7 @@
             </a:pPr>
             <a:fld id="{00000000-1234-1234-1234-123412341234}" type="slidenum">
               <a:rPr lang="en-US"/>
-              <a:t>‹#›</a:t>
+              <a:t>‹nº›</a:t>
             </a:fld>
             <a:endParaRPr/>
           </a:p>
@@ -4402,11 +4477,11 @@
 </file>
 
 <file path=ppt/slideLayouts/slideLayout4.xml><?xml version="1.0" encoding="utf-8"?>
-<p:sldLayout xmlns:a="http://schemas.openxmlformats.org/drawingml/2006/main" xmlns:r="http://schemas.openxmlformats.org/officeDocument/2006/relationships" xmlns:mc="http://schemas.openxmlformats.org/markup-compatibility/2006" xmlns:mv="urn:schemas-microsoft-com:mac:vml" xmlns:p="http://schemas.openxmlformats.org/presentationml/2006/main" xmlns:c="http://schemas.openxmlformats.org/drawingml/2006/chart" xmlns:dgm="http://schemas.openxmlformats.org/drawingml/2006/diagram" xmlns:o="urn:schemas-microsoft-com:office:office" xmlns:v="urn:schemas-microsoft-com:vml" xmlns:pvml="urn:schemas-microsoft-com:office:powerpoint" xmlns:com="http://schemas.openxmlformats.org/drawingml/2006/compatibility" xmlns:p14="http://schemas.microsoft.com/office/powerpoint/2010/main" xmlns:p15="http://schemas.microsoft.com/office/powerpoint/2012/main" xmlns:ahyp="http://schemas.microsoft.com/office/drawing/2018/hyperlinkcolor" matchingName="Title and two columns" type="twoColTx">
+<p:sldLayout xmlns:a="http://schemas.openxmlformats.org/drawingml/2006/main" xmlns:r="http://schemas.openxmlformats.org/officeDocument/2006/relationships" xmlns:p="http://schemas.openxmlformats.org/presentationml/2006/main" matchingName="Title and two columns" type="twoColTx">
   <p:cSld name="TITLE_AND_TWO_COLUMNS">
     <p:spTree>
       <p:nvGrpSpPr>
-        <p:cNvPr id="25" name="Shape 25"/>
+        <p:cNvPr id="1" name="Shape 25"/>
         <p:cNvGrpSpPr/>
         <p:nvPr/>
       </p:nvGrpSpPr>
@@ -4421,7 +4496,9 @@
       <p:sp>
         <p:nvSpPr>
           <p:cNvPr id="26" name="Google Shape;26;p13"/>
-          <p:cNvSpPr txBox="1"/>
+          <p:cNvSpPr txBox="1">
+            <a:spLocks noGrp="1"/>
+          </p:cNvSpPr>
           <p:nvPr>
             <p:ph type="title"/>
           </p:nvPr>
@@ -4440,7 +4517,7 @@
           </a:ln>
         </p:spPr>
         <p:txBody>
-          <a:bodyPr anchorCtr="0" anchor="t" bIns="91425" lIns="91425" spcFirstLastPara="1" rIns="91425" wrap="square" tIns="91425">
+          <a:bodyPr spcFirstLastPara="1" wrap="square" lIns="91425" tIns="91425" rIns="91425" bIns="91425" anchor="t" anchorCtr="0">
             <a:noAutofit/>
           </a:bodyPr>
           <a:lstStyle>
@@ -4571,15 +4648,19 @@
               <a:defRPr/>
             </a:lvl9pPr>
           </a:lstStyle>
-          <a:p/>
+          <a:p>
+            <a:endParaRPr/>
+          </a:p>
         </p:txBody>
       </p:sp>
       <p:sp>
         <p:nvSpPr>
           <p:cNvPr id="27" name="Google Shape;27;p13"/>
-          <p:cNvSpPr txBox="1"/>
+          <p:cNvSpPr txBox="1">
+            <a:spLocks noGrp="1"/>
+          </p:cNvSpPr>
           <p:nvPr>
-            <p:ph idx="1" type="body"/>
+            <p:ph type="body" idx="1"/>
           </p:nvPr>
         </p:nvSpPr>
         <p:spPr>
@@ -4596,11 +4677,11 @@
           </a:ln>
         </p:spPr>
         <p:txBody>
-          <a:bodyPr anchorCtr="0" anchor="t" bIns="91425" lIns="91425" spcFirstLastPara="1" rIns="91425" wrap="square" tIns="91425">
+          <a:bodyPr spcFirstLastPara="1" wrap="square" lIns="91425" tIns="91425" rIns="91425" bIns="91425" anchor="t" anchorCtr="0">
             <a:noAutofit/>
           </a:bodyPr>
           <a:lstStyle>
-            <a:lvl1pPr indent="-317500" lvl="0" marL="457200" algn="l">
+            <a:lvl1pPr marL="457200" lvl="0" indent="-317500" algn="l">
               <a:lnSpc>
                 <a:spcPct val="115000"/>
               </a:lnSpc>
@@ -4614,7 +4695,7 @@
               <a:buChar char="●"/>
               <a:defRPr sz="1400"/>
             </a:lvl1pPr>
-            <a:lvl2pPr indent="-304800" lvl="1" marL="914400" algn="l">
+            <a:lvl2pPr marL="914400" lvl="1" indent="-304800" algn="l">
               <a:lnSpc>
                 <a:spcPct val="115000"/>
               </a:lnSpc>
@@ -4628,7 +4709,7 @@
               <a:buChar char="○"/>
               <a:defRPr sz="1200"/>
             </a:lvl2pPr>
-            <a:lvl3pPr indent="-304800" lvl="2" marL="1371600" algn="l">
+            <a:lvl3pPr marL="1371600" lvl="2" indent="-304800" algn="l">
               <a:lnSpc>
                 <a:spcPct val="115000"/>
               </a:lnSpc>
@@ -4642,7 +4723,7 @@
               <a:buChar char="■"/>
               <a:defRPr sz="1200"/>
             </a:lvl3pPr>
-            <a:lvl4pPr indent="-304800" lvl="3" marL="1828800" algn="l">
+            <a:lvl4pPr marL="1828800" lvl="3" indent="-304800" algn="l">
               <a:lnSpc>
                 <a:spcPct val="115000"/>
               </a:lnSpc>
@@ -4656,7 +4737,7 @@
               <a:buChar char="●"/>
               <a:defRPr sz="1200"/>
             </a:lvl4pPr>
-            <a:lvl5pPr indent="-304800" lvl="4" marL="2286000" algn="l">
+            <a:lvl5pPr marL="2286000" lvl="4" indent="-304800" algn="l">
               <a:lnSpc>
                 <a:spcPct val="115000"/>
               </a:lnSpc>
@@ -4670,7 +4751,7 @@
               <a:buChar char="○"/>
               <a:defRPr sz="1200"/>
             </a:lvl5pPr>
-            <a:lvl6pPr indent="-304800" lvl="5" marL="2743200" algn="l">
+            <a:lvl6pPr marL="2743200" lvl="5" indent="-304800" algn="l">
               <a:lnSpc>
                 <a:spcPct val="115000"/>
               </a:lnSpc>
@@ -4684,7 +4765,7 @@
               <a:buChar char="■"/>
               <a:defRPr sz="1200"/>
             </a:lvl6pPr>
-            <a:lvl7pPr indent="-304800" lvl="6" marL="3200400" algn="l">
+            <a:lvl7pPr marL="3200400" lvl="6" indent="-304800" algn="l">
               <a:lnSpc>
                 <a:spcPct val="115000"/>
               </a:lnSpc>
@@ -4698,7 +4779,7 @@
               <a:buChar char="●"/>
               <a:defRPr sz="1200"/>
             </a:lvl7pPr>
-            <a:lvl8pPr indent="-304800" lvl="7" marL="3657600" algn="l">
+            <a:lvl8pPr marL="3657600" lvl="7" indent="-304800" algn="l">
               <a:lnSpc>
                 <a:spcPct val="115000"/>
               </a:lnSpc>
@@ -4712,7 +4793,7 @@
               <a:buChar char="○"/>
               <a:defRPr sz="1200"/>
             </a:lvl8pPr>
-            <a:lvl9pPr indent="-304800" lvl="8" marL="4114800" algn="l">
+            <a:lvl9pPr marL="4114800" lvl="8" indent="-304800" algn="l">
               <a:lnSpc>
                 <a:spcPct val="115000"/>
               </a:lnSpc>
@@ -4727,15 +4808,19 @@
               <a:defRPr sz="1200"/>
             </a:lvl9pPr>
           </a:lstStyle>
-          <a:p/>
+          <a:p>
+            <a:endParaRPr/>
+          </a:p>
         </p:txBody>
       </p:sp>
       <p:sp>
         <p:nvSpPr>
           <p:cNvPr id="28" name="Google Shape;28;p13"/>
-          <p:cNvSpPr txBox="1"/>
+          <p:cNvSpPr txBox="1">
+            <a:spLocks noGrp="1"/>
+          </p:cNvSpPr>
           <p:nvPr>
-            <p:ph idx="2" type="body"/>
+            <p:ph type="body" idx="2"/>
           </p:nvPr>
         </p:nvSpPr>
         <p:spPr>
@@ -4752,11 +4837,11 @@
           </a:ln>
         </p:spPr>
         <p:txBody>
-          <a:bodyPr anchorCtr="0" anchor="t" bIns="91425" lIns="91425" spcFirstLastPara="1" rIns="91425" wrap="square" tIns="91425">
+          <a:bodyPr spcFirstLastPara="1" wrap="square" lIns="91425" tIns="91425" rIns="91425" bIns="91425" anchor="t" anchorCtr="0">
             <a:noAutofit/>
           </a:bodyPr>
           <a:lstStyle>
-            <a:lvl1pPr indent="-317500" lvl="0" marL="457200" algn="l">
+            <a:lvl1pPr marL="457200" lvl="0" indent="-317500" algn="l">
               <a:lnSpc>
                 <a:spcPct val="115000"/>
               </a:lnSpc>
@@ -4770,7 +4855,7 @@
               <a:buChar char="●"/>
               <a:defRPr sz="1400"/>
             </a:lvl1pPr>
-            <a:lvl2pPr indent="-304800" lvl="1" marL="914400" algn="l">
+            <a:lvl2pPr marL="914400" lvl="1" indent="-304800" algn="l">
               <a:lnSpc>
                 <a:spcPct val="115000"/>
               </a:lnSpc>
@@ -4784,7 +4869,7 @@
               <a:buChar char="○"/>
               <a:defRPr sz="1200"/>
             </a:lvl2pPr>
-            <a:lvl3pPr indent="-304800" lvl="2" marL="1371600" algn="l">
+            <a:lvl3pPr marL="1371600" lvl="2" indent="-304800" algn="l">
               <a:lnSpc>
                 <a:spcPct val="115000"/>
               </a:lnSpc>
@@ -4798,7 +4883,7 @@
               <a:buChar char="■"/>
               <a:defRPr sz="1200"/>
             </a:lvl3pPr>
-            <a:lvl4pPr indent="-304800" lvl="3" marL="1828800" algn="l">
+            <a:lvl4pPr marL="1828800" lvl="3" indent="-304800" algn="l">
               <a:lnSpc>
                 <a:spcPct val="115000"/>
               </a:lnSpc>
@@ -4812,7 +4897,7 @@
               <a:buChar char="●"/>
               <a:defRPr sz="1200"/>
             </a:lvl4pPr>
-            <a:lvl5pPr indent="-304800" lvl="4" marL="2286000" algn="l">
+            <a:lvl5pPr marL="2286000" lvl="4" indent="-304800" algn="l">
               <a:lnSpc>
                 <a:spcPct val="115000"/>
               </a:lnSpc>
@@ -4826,7 +4911,7 @@
               <a:buChar char="○"/>
               <a:defRPr sz="1200"/>
             </a:lvl5pPr>
-            <a:lvl6pPr indent="-304800" lvl="5" marL="2743200" algn="l">
+            <a:lvl6pPr marL="2743200" lvl="5" indent="-304800" algn="l">
               <a:lnSpc>
                 <a:spcPct val="115000"/>
               </a:lnSpc>
@@ -4840,7 +4925,7 @@
               <a:buChar char="■"/>
               <a:defRPr sz="1200"/>
             </a:lvl6pPr>
-            <a:lvl7pPr indent="-304800" lvl="6" marL="3200400" algn="l">
+            <a:lvl7pPr marL="3200400" lvl="6" indent="-304800" algn="l">
               <a:lnSpc>
                 <a:spcPct val="115000"/>
               </a:lnSpc>
@@ -4854,7 +4939,7 @@
               <a:buChar char="●"/>
               <a:defRPr sz="1200"/>
             </a:lvl7pPr>
-            <a:lvl8pPr indent="-304800" lvl="7" marL="3657600" algn="l">
+            <a:lvl8pPr marL="3657600" lvl="7" indent="-304800" algn="l">
               <a:lnSpc>
                 <a:spcPct val="115000"/>
               </a:lnSpc>
@@ -4868,7 +4953,7 @@
               <a:buChar char="○"/>
               <a:defRPr sz="1200"/>
             </a:lvl8pPr>
-            <a:lvl9pPr indent="-304800" lvl="8" marL="4114800" algn="l">
+            <a:lvl9pPr marL="4114800" lvl="8" indent="-304800" algn="l">
               <a:lnSpc>
                 <a:spcPct val="115000"/>
               </a:lnSpc>
@@ -4883,15 +4968,19 @@
               <a:defRPr sz="1200"/>
             </a:lvl9pPr>
           </a:lstStyle>
-          <a:p/>
+          <a:p>
+            <a:endParaRPr/>
+          </a:p>
         </p:txBody>
       </p:sp>
       <p:sp>
         <p:nvSpPr>
           <p:cNvPr id="29" name="Google Shape;29;p13"/>
-          <p:cNvSpPr txBox="1"/>
+          <p:cNvSpPr txBox="1">
+            <a:spLocks noGrp="1"/>
+          </p:cNvSpPr>
           <p:nvPr>
-            <p:ph idx="12" type="sldNum"/>
+            <p:ph type="sldNum" idx="12"/>
           </p:nvPr>
         </p:nvSpPr>
         <p:spPr>
@@ -4908,11 +4997,11 @@
           </a:ln>
         </p:spPr>
         <p:txBody>
-          <a:bodyPr anchorCtr="0" anchor="ctr" bIns="91425" lIns="91425" spcFirstLastPara="1" rIns="91425" wrap="square" tIns="91425">
+          <a:bodyPr spcFirstLastPara="1" wrap="square" lIns="91425" tIns="91425" rIns="91425" bIns="91425" anchor="ctr" anchorCtr="0">
             <a:noAutofit/>
           </a:bodyPr>
           <a:lstStyle>
-            <a:lvl1pPr indent="0" lvl="0" marL="0" marR="0" algn="r">
+            <a:lvl1pPr marL="0" marR="0" lvl="0" indent="0" algn="r">
               <a:lnSpc>
                 <a:spcPct val="100000"/>
               </a:lnSpc>
@@ -4928,7 +5017,7 @@
               <a:buSzPts val="1000"/>
               <a:buFont typeface="Arial"/>
               <a:buNone/>
-              <a:defRPr b="0" i="0" sz="1000" u="none" cap="none" strike="noStrike">
+              <a:defRPr sz="1000" b="0" i="0" u="none" strike="noStrike" cap="none">
                 <a:solidFill>
                   <a:schemeClr val="dk2"/>
                 </a:solidFill>
@@ -4938,7 +5027,7 @@
                 <a:sym typeface="Arial"/>
               </a:defRPr>
             </a:lvl1pPr>
-            <a:lvl2pPr indent="0" lvl="1" marL="0" marR="0" algn="r">
+            <a:lvl2pPr marL="0" marR="0" lvl="1" indent="0" algn="r">
               <a:lnSpc>
                 <a:spcPct val="100000"/>
               </a:lnSpc>
@@ -4954,7 +5043,7 @@
               <a:buSzPts val="1000"/>
               <a:buFont typeface="Arial"/>
               <a:buNone/>
-              <a:defRPr b="0" i="0" sz="1000" u="none" cap="none" strike="noStrike">
+              <a:defRPr sz="1000" b="0" i="0" u="none" strike="noStrike" cap="none">
                 <a:solidFill>
                   <a:schemeClr val="dk2"/>
                 </a:solidFill>
@@ -4964,7 +5053,7 @@
                 <a:sym typeface="Arial"/>
               </a:defRPr>
             </a:lvl2pPr>
-            <a:lvl3pPr indent="0" lvl="2" marL="0" marR="0" algn="r">
+            <a:lvl3pPr marL="0" marR="0" lvl="2" indent="0" algn="r">
               <a:lnSpc>
                 <a:spcPct val="100000"/>
               </a:lnSpc>
@@ -4980,7 +5069,7 @@
               <a:buSzPts val="1000"/>
               <a:buFont typeface="Arial"/>
               <a:buNone/>
-              <a:defRPr b="0" i="0" sz="1000" u="none" cap="none" strike="noStrike">
+              <a:defRPr sz="1000" b="0" i="0" u="none" strike="noStrike" cap="none">
                 <a:solidFill>
                   <a:schemeClr val="dk2"/>
                 </a:solidFill>
@@ -4990,7 +5079,7 @@
                 <a:sym typeface="Arial"/>
               </a:defRPr>
             </a:lvl3pPr>
-            <a:lvl4pPr indent="0" lvl="3" marL="0" marR="0" algn="r">
+            <a:lvl4pPr marL="0" marR="0" lvl="3" indent="0" algn="r">
               <a:lnSpc>
                 <a:spcPct val="100000"/>
               </a:lnSpc>
@@ -5006,7 +5095,7 @@
               <a:buSzPts val="1000"/>
               <a:buFont typeface="Arial"/>
               <a:buNone/>
-              <a:defRPr b="0" i="0" sz="1000" u="none" cap="none" strike="noStrike">
+              <a:defRPr sz="1000" b="0" i="0" u="none" strike="noStrike" cap="none">
                 <a:solidFill>
                   <a:schemeClr val="dk2"/>
                 </a:solidFill>
@@ -5016,7 +5105,7 @@
                 <a:sym typeface="Arial"/>
               </a:defRPr>
             </a:lvl4pPr>
-            <a:lvl5pPr indent="0" lvl="4" marL="0" marR="0" algn="r">
+            <a:lvl5pPr marL="0" marR="0" lvl="4" indent="0" algn="r">
               <a:lnSpc>
                 <a:spcPct val="100000"/>
               </a:lnSpc>
@@ -5032,7 +5121,7 @@
               <a:buSzPts val="1000"/>
               <a:buFont typeface="Arial"/>
               <a:buNone/>
-              <a:defRPr b="0" i="0" sz="1000" u="none" cap="none" strike="noStrike">
+              <a:defRPr sz="1000" b="0" i="0" u="none" strike="noStrike" cap="none">
                 <a:solidFill>
                   <a:schemeClr val="dk2"/>
                 </a:solidFill>
@@ -5042,7 +5131,7 @@
                 <a:sym typeface="Arial"/>
               </a:defRPr>
             </a:lvl5pPr>
-            <a:lvl6pPr indent="0" lvl="5" marL="0" marR="0" algn="r">
+            <a:lvl6pPr marL="0" marR="0" lvl="5" indent="0" algn="r">
               <a:lnSpc>
                 <a:spcPct val="100000"/>
               </a:lnSpc>
@@ -5058,7 +5147,7 @@
               <a:buSzPts val="1000"/>
               <a:buFont typeface="Arial"/>
               <a:buNone/>
-              <a:defRPr b="0" i="0" sz="1000" u="none" cap="none" strike="noStrike">
+              <a:defRPr sz="1000" b="0" i="0" u="none" strike="noStrike" cap="none">
                 <a:solidFill>
                   <a:schemeClr val="dk2"/>
                 </a:solidFill>
@@ -5068,7 +5157,7 @@
                 <a:sym typeface="Arial"/>
               </a:defRPr>
             </a:lvl6pPr>
-            <a:lvl7pPr indent="0" lvl="6" marL="0" marR="0" algn="r">
+            <a:lvl7pPr marL="0" marR="0" lvl="6" indent="0" algn="r">
               <a:lnSpc>
                 <a:spcPct val="100000"/>
               </a:lnSpc>
@@ -5084,7 +5173,7 @@
               <a:buSzPts val="1000"/>
               <a:buFont typeface="Arial"/>
               <a:buNone/>
-              <a:defRPr b="0" i="0" sz="1000" u="none" cap="none" strike="noStrike">
+              <a:defRPr sz="1000" b="0" i="0" u="none" strike="noStrike" cap="none">
                 <a:solidFill>
                   <a:schemeClr val="dk2"/>
                 </a:solidFill>
@@ -5094,7 +5183,7 @@
                 <a:sym typeface="Arial"/>
               </a:defRPr>
             </a:lvl7pPr>
-            <a:lvl8pPr indent="0" lvl="7" marL="0" marR="0" algn="r">
+            <a:lvl8pPr marL="0" marR="0" lvl="7" indent="0" algn="r">
               <a:lnSpc>
                 <a:spcPct val="100000"/>
               </a:lnSpc>
@@ -5110,7 +5199,7 @@
               <a:buSzPts val="1000"/>
               <a:buFont typeface="Arial"/>
               <a:buNone/>
-              <a:defRPr b="0" i="0" sz="1000" u="none" cap="none" strike="noStrike">
+              <a:defRPr sz="1000" b="0" i="0" u="none" strike="noStrike" cap="none">
                 <a:solidFill>
                   <a:schemeClr val="dk2"/>
                 </a:solidFill>
@@ -5120,7 +5209,7 @@
                 <a:sym typeface="Arial"/>
               </a:defRPr>
             </a:lvl8pPr>
-            <a:lvl9pPr indent="0" lvl="8" marL="0" marR="0" algn="r">
+            <a:lvl9pPr marL="0" marR="0" lvl="8" indent="0" algn="r">
               <a:lnSpc>
                 <a:spcPct val="100000"/>
               </a:lnSpc>
@@ -5136,7 +5225,7 @@
               <a:buSzPts val="1000"/>
               <a:buFont typeface="Arial"/>
               <a:buNone/>
-              <a:defRPr b="0" i="0" sz="1000" u="none" cap="none" strike="noStrike">
+              <a:defRPr sz="1000" b="0" i="0" u="none" strike="noStrike" cap="none">
                 <a:solidFill>
                   <a:schemeClr val="dk2"/>
                 </a:solidFill>
@@ -5148,7 +5237,7 @@
             </a:lvl9pPr>
           </a:lstStyle>
           <a:p>
-            <a:pPr indent="0" lvl="0" marL="0" rtl="0" algn="r">
+            <a:pPr marL="0" lvl="0" indent="0" algn="r" rtl="0">
               <a:spcBef>
                 <a:spcPts val="0"/>
               </a:spcBef>
@@ -5159,7 +5248,7 @@
             </a:pPr>
             <a:fld id="{00000000-1234-1234-1234-123412341234}" type="slidenum">
               <a:rPr lang="en-US"/>
-              <a:t>‹#›</a:t>
+              <a:t>‹nº›</a:t>
             </a:fld>
             <a:endParaRPr/>
           </a:p>
@@ -5174,11 +5263,11 @@
 </file>
 
 <file path=ppt/slideLayouts/slideLayout5.xml><?xml version="1.0" encoding="utf-8"?>
-<p:sldLayout xmlns:a="http://schemas.openxmlformats.org/drawingml/2006/main" xmlns:r="http://schemas.openxmlformats.org/officeDocument/2006/relationships" xmlns:mc="http://schemas.openxmlformats.org/markup-compatibility/2006" xmlns:mv="urn:schemas-microsoft-com:mac:vml" xmlns:p="http://schemas.openxmlformats.org/presentationml/2006/main" xmlns:c="http://schemas.openxmlformats.org/drawingml/2006/chart" xmlns:dgm="http://schemas.openxmlformats.org/drawingml/2006/diagram" xmlns:o="urn:schemas-microsoft-com:office:office" xmlns:v="urn:schemas-microsoft-com:vml" xmlns:pvml="urn:schemas-microsoft-com:office:powerpoint" xmlns:com="http://schemas.openxmlformats.org/drawingml/2006/compatibility" xmlns:p14="http://schemas.microsoft.com/office/powerpoint/2010/main" xmlns:p15="http://schemas.microsoft.com/office/powerpoint/2012/main" xmlns:ahyp="http://schemas.microsoft.com/office/drawing/2018/hyperlinkcolor" matchingName="Title only" type="titleOnly">
+<p:sldLayout xmlns:a="http://schemas.openxmlformats.org/drawingml/2006/main" xmlns:r="http://schemas.openxmlformats.org/officeDocument/2006/relationships" xmlns:p="http://schemas.openxmlformats.org/presentationml/2006/main" matchingName="Title only" type="titleOnly">
   <p:cSld name="TITLE_ONLY">
     <p:spTree>
       <p:nvGrpSpPr>
-        <p:cNvPr id="30" name="Shape 30"/>
+        <p:cNvPr id="1" name="Shape 30"/>
         <p:cNvGrpSpPr/>
         <p:nvPr/>
       </p:nvGrpSpPr>
@@ -5193,7 +5282,9 @@
       <p:sp>
         <p:nvSpPr>
           <p:cNvPr id="31" name="Google Shape;31;p14"/>
-          <p:cNvSpPr txBox="1"/>
+          <p:cNvSpPr txBox="1">
+            <a:spLocks noGrp="1"/>
+          </p:cNvSpPr>
           <p:nvPr>
             <p:ph type="title"/>
           </p:nvPr>
@@ -5212,7 +5303,7 @@
           </a:ln>
         </p:spPr>
         <p:txBody>
-          <a:bodyPr anchorCtr="0" anchor="t" bIns="91425" lIns="91425" spcFirstLastPara="1" rIns="91425" wrap="square" tIns="91425">
+          <a:bodyPr spcFirstLastPara="1" wrap="square" lIns="91425" tIns="91425" rIns="91425" bIns="91425" anchor="t" anchorCtr="0">
             <a:noAutofit/>
           </a:bodyPr>
           <a:lstStyle>
@@ -5343,15 +5434,19 @@
               <a:defRPr/>
             </a:lvl9pPr>
           </a:lstStyle>
-          <a:p/>
+          <a:p>
+            <a:endParaRPr/>
+          </a:p>
         </p:txBody>
       </p:sp>
       <p:sp>
         <p:nvSpPr>
           <p:cNvPr id="32" name="Google Shape;32;p14"/>
-          <p:cNvSpPr txBox="1"/>
+          <p:cNvSpPr txBox="1">
+            <a:spLocks noGrp="1"/>
+          </p:cNvSpPr>
           <p:nvPr>
-            <p:ph idx="12" type="sldNum"/>
+            <p:ph type="sldNum" idx="12"/>
           </p:nvPr>
         </p:nvSpPr>
         <p:spPr>
@@ -5368,11 +5463,11 @@
           </a:ln>
         </p:spPr>
         <p:txBody>
-          <a:bodyPr anchorCtr="0" anchor="ctr" bIns="91425" lIns="91425" spcFirstLastPara="1" rIns="91425" wrap="square" tIns="91425">
+          <a:bodyPr spcFirstLastPara="1" wrap="square" lIns="91425" tIns="91425" rIns="91425" bIns="91425" anchor="ctr" anchorCtr="0">
             <a:noAutofit/>
           </a:bodyPr>
           <a:lstStyle>
-            <a:lvl1pPr indent="0" lvl="0" marL="0" marR="0" algn="r">
+            <a:lvl1pPr marL="0" marR="0" lvl="0" indent="0" algn="r">
               <a:lnSpc>
                 <a:spcPct val="100000"/>
               </a:lnSpc>
@@ -5388,7 +5483,7 @@
               <a:buSzPts val="1000"/>
               <a:buFont typeface="Arial"/>
               <a:buNone/>
-              <a:defRPr b="0" i="0" sz="1000" u="none" cap="none" strike="noStrike">
+              <a:defRPr sz="1000" b="0" i="0" u="none" strike="noStrike" cap="none">
                 <a:solidFill>
                   <a:schemeClr val="dk2"/>
                 </a:solidFill>
@@ -5398,7 +5493,7 @@
                 <a:sym typeface="Arial"/>
               </a:defRPr>
             </a:lvl1pPr>
-            <a:lvl2pPr indent="0" lvl="1" marL="0" marR="0" algn="r">
+            <a:lvl2pPr marL="0" marR="0" lvl="1" indent="0" algn="r">
               <a:lnSpc>
                 <a:spcPct val="100000"/>
               </a:lnSpc>
@@ -5414,7 +5509,7 @@
               <a:buSzPts val="1000"/>
               <a:buFont typeface="Arial"/>
               <a:buNone/>
-              <a:defRPr b="0" i="0" sz="1000" u="none" cap="none" strike="noStrike">
+              <a:defRPr sz="1000" b="0" i="0" u="none" strike="noStrike" cap="none">
                 <a:solidFill>
                   <a:schemeClr val="dk2"/>
                 </a:solidFill>
@@ -5424,7 +5519,7 @@
                 <a:sym typeface="Arial"/>
               </a:defRPr>
             </a:lvl2pPr>
-            <a:lvl3pPr indent="0" lvl="2" marL="0" marR="0" algn="r">
+            <a:lvl3pPr marL="0" marR="0" lvl="2" indent="0" algn="r">
               <a:lnSpc>
                 <a:spcPct val="100000"/>
               </a:lnSpc>
@@ -5440,7 +5535,7 @@
               <a:buSzPts val="1000"/>
               <a:buFont typeface="Arial"/>
               <a:buNone/>
-              <a:defRPr b="0" i="0" sz="1000" u="none" cap="none" strike="noStrike">
+              <a:defRPr sz="1000" b="0" i="0" u="none" strike="noStrike" cap="none">
                 <a:solidFill>
                   <a:schemeClr val="dk2"/>
                 </a:solidFill>
@@ -5450,7 +5545,7 @@
                 <a:sym typeface="Arial"/>
               </a:defRPr>
             </a:lvl3pPr>
-            <a:lvl4pPr indent="0" lvl="3" marL="0" marR="0" algn="r">
+            <a:lvl4pPr marL="0" marR="0" lvl="3" indent="0" algn="r">
               <a:lnSpc>
                 <a:spcPct val="100000"/>
               </a:lnSpc>
@@ -5466,7 +5561,7 @@
               <a:buSzPts val="1000"/>
               <a:buFont typeface="Arial"/>
               <a:buNone/>
-              <a:defRPr b="0" i="0" sz="1000" u="none" cap="none" strike="noStrike">
+              <a:defRPr sz="1000" b="0" i="0" u="none" strike="noStrike" cap="none">
                 <a:solidFill>
                   <a:schemeClr val="dk2"/>
                 </a:solidFill>
@@ -5476,7 +5571,7 @@
                 <a:sym typeface="Arial"/>
               </a:defRPr>
             </a:lvl4pPr>
-            <a:lvl5pPr indent="0" lvl="4" marL="0" marR="0" algn="r">
+            <a:lvl5pPr marL="0" marR="0" lvl="4" indent="0" algn="r">
               <a:lnSpc>
                 <a:spcPct val="100000"/>
               </a:lnSpc>
@@ -5492,7 +5587,7 @@
               <a:buSzPts val="1000"/>
               <a:buFont typeface="Arial"/>
               <a:buNone/>
-              <a:defRPr b="0" i="0" sz="1000" u="none" cap="none" strike="noStrike">
+              <a:defRPr sz="1000" b="0" i="0" u="none" strike="noStrike" cap="none">
                 <a:solidFill>
                   <a:schemeClr val="dk2"/>
                 </a:solidFill>
@@ -5502,7 +5597,7 @@
                 <a:sym typeface="Arial"/>
               </a:defRPr>
             </a:lvl5pPr>
-            <a:lvl6pPr indent="0" lvl="5" marL="0" marR="0" algn="r">
+            <a:lvl6pPr marL="0" marR="0" lvl="5" indent="0" algn="r">
               <a:lnSpc>
                 <a:spcPct val="100000"/>
               </a:lnSpc>
@@ -5518,7 +5613,7 @@
               <a:buSzPts val="1000"/>
               <a:buFont typeface="Arial"/>
               <a:buNone/>
-              <a:defRPr b="0" i="0" sz="1000" u="none" cap="none" strike="noStrike">
+              <a:defRPr sz="1000" b="0" i="0" u="none" strike="noStrike" cap="none">
                 <a:solidFill>
                   <a:schemeClr val="dk2"/>
                 </a:solidFill>
@@ -5528,7 +5623,7 @@
                 <a:sym typeface="Arial"/>
               </a:defRPr>
             </a:lvl6pPr>
-            <a:lvl7pPr indent="0" lvl="6" marL="0" marR="0" algn="r">
+            <a:lvl7pPr marL="0" marR="0" lvl="6" indent="0" algn="r">
               <a:lnSpc>
                 <a:spcPct val="100000"/>
               </a:lnSpc>
@@ -5544,7 +5639,7 @@
               <a:buSzPts val="1000"/>
               <a:buFont typeface="Arial"/>
               <a:buNone/>
-              <a:defRPr b="0" i="0" sz="1000" u="none" cap="none" strike="noStrike">
+              <a:defRPr sz="1000" b="0" i="0" u="none" strike="noStrike" cap="none">
                 <a:solidFill>
                   <a:schemeClr val="dk2"/>
                 </a:solidFill>
@@ -5554,7 +5649,7 @@
                 <a:sym typeface="Arial"/>
               </a:defRPr>
             </a:lvl7pPr>
-            <a:lvl8pPr indent="0" lvl="7" marL="0" marR="0" algn="r">
+            <a:lvl8pPr marL="0" marR="0" lvl="7" indent="0" algn="r">
               <a:lnSpc>
                 <a:spcPct val="100000"/>
               </a:lnSpc>
@@ -5570,7 +5665,7 @@
               <a:buSzPts val="1000"/>
               <a:buFont typeface="Arial"/>
               <a:buNone/>
-              <a:defRPr b="0" i="0" sz="1000" u="none" cap="none" strike="noStrike">
+              <a:defRPr sz="1000" b="0" i="0" u="none" strike="noStrike" cap="none">
                 <a:solidFill>
                   <a:schemeClr val="dk2"/>
                 </a:solidFill>
@@ -5580,7 +5675,7 @@
                 <a:sym typeface="Arial"/>
               </a:defRPr>
             </a:lvl8pPr>
-            <a:lvl9pPr indent="0" lvl="8" marL="0" marR="0" algn="r">
+            <a:lvl9pPr marL="0" marR="0" lvl="8" indent="0" algn="r">
               <a:lnSpc>
                 <a:spcPct val="100000"/>
               </a:lnSpc>
@@ -5596,7 +5691,7 @@
               <a:buSzPts val="1000"/>
               <a:buFont typeface="Arial"/>
               <a:buNone/>
-              <a:defRPr b="0" i="0" sz="1000" u="none" cap="none" strike="noStrike">
+              <a:defRPr sz="1000" b="0" i="0" u="none" strike="noStrike" cap="none">
                 <a:solidFill>
                   <a:schemeClr val="dk2"/>
                 </a:solidFill>
@@ -5608,7 +5703,7 @@
             </a:lvl9pPr>
           </a:lstStyle>
           <a:p>
-            <a:pPr indent="0" lvl="0" marL="0" rtl="0" algn="r">
+            <a:pPr marL="0" lvl="0" indent="0" algn="r" rtl="0">
               <a:spcBef>
                 <a:spcPts val="0"/>
               </a:spcBef>
@@ -5619,7 +5714,7 @@
             </a:pPr>
             <a:fld id="{00000000-1234-1234-1234-123412341234}" type="slidenum">
               <a:rPr lang="en-US"/>
-              <a:t>‹#›</a:t>
+              <a:t>‹nº›</a:t>
             </a:fld>
             <a:endParaRPr/>
           </a:p>
@@ -5634,11 +5729,11 @@
 </file>
 
 <file path=ppt/slideLayouts/slideLayout6.xml><?xml version="1.0" encoding="utf-8"?>
-<p:sldLayout xmlns:a="http://schemas.openxmlformats.org/drawingml/2006/main" xmlns:r="http://schemas.openxmlformats.org/officeDocument/2006/relationships" xmlns:mc="http://schemas.openxmlformats.org/markup-compatibility/2006" xmlns:mv="urn:schemas-microsoft-com:mac:vml" xmlns:p="http://schemas.openxmlformats.org/presentationml/2006/main" xmlns:c="http://schemas.openxmlformats.org/drawingml/2006/chart" xmlns:dgm="http://schemas.openxmlformats.org/drawingml/2006/diagram" xmlns:o="urn:schemas-microsoft-com:office:office" xmlns:v="urn:schemas-microsoft-com:vml" xmlns:pvml="urn:schemas-microsoft-com:office:powerpoint" xmlns:com="http://schemas.openxmlformats.org/drawingml/2006/compatibility" xmlns:p14="http://schemas.microsoft.com/office/powerpoint/2010/main" xmlns:p15="http://schemas.microsoft.com/office/powerpoint/2012/main" xmlns:ahyp="http://schemas.microsoft.com/office/drawing/2018/hyperlinkcolor" matchingName="One column text">
+<p:sldLayout xmlns:a="http://schemas.openxmlformats.org/drawingml/2006/main" xmlns:r="http://schemas.openxmlformats.org/officeDocument/2006/relationships" xmlns:p="http://schemas.openxmlformats.org/presentationml/2006/main" matchingName="One column text">
   <p:cSld name="ONE_COLUMN_TEXT">
     <p:spTree>
       <p:nvGrpSpPr>
-        <p:cNvPr id="33" name="Shape 33"/>
+        <p:cNvPr id="1" name="Shape 33"/>
         <p:cNvGrpSpPr/>
         <p:nvPr/>
       </p:nvGrpSpPr>
@@ -5653,7 +5748,9 @@
       <p:sp>
         <p:nvSpPr>
           <p:cNvPr id="34" name="Google Shape;34;p15"/>
-          <p:cNvSpPr txBox="1"/>
+          <p:cNvSpPr txBox="1">
+            <a:spLocks noGrp="1"/>
+          </p:cNvSpPr>
           <p:nvPr>
             <p:ph type="title"/>
           </p:nvPr>
@@ -5672,7 +5769,7 @@
           </a:ln>
         </p:spPr>
         <p:txBody>
-          <a:bodyPr anchorCtr="0" anchor="b" bIns="91425" lIns="91425" spcFirstLastPara="1" rIns="91425" wrap="square" tIns="91425">
+          <a:bodyPr spcFirstLastPara="1" wrap="square" lIns="91425" tIns="91425" rIns="91425" bIns="91425" anchor="b" anchorCtr="0">
             <a:noAutofit/>
           </a:bodyPr>
           <a:lstStyle>
@@ -5803,15 +5900,19 @@
               <a:defRPr sz="2400"/>
             </a:lvl9pPr>
           </a:lstStyle>
-          <a:p/>
+          <a:p>
+            <a:endParaRPr/>
+          </a:p>
         </p:txBody>
       </p:sp>
       <p:sp>
         <p:nvSpPr>
           <p:cNvPr id="35" name="Google Shape;35;p15"/>
-          <p:cNvSpPr txBox="1"/>
+          <p:cNvSpPr txBox="1">
+            <a:spLocks noGrp="1"/>
+          </p:cNvSpPr>
           <p:nvPr>
-            <p:ph idx="1" type="body"/>
+            <p:ph type="body" idx="1"/>
           </p:nvPr>
         </p:nvSpPr>
         <p:spPr>
@@ -5828,11 +5929,11 @@
           </a:ln>
         </p:spPr>
         <p:txBody>
-          <a:bodyPr anchorCtr="0" anchor="t" bIns="91425" lIns="91425" spcFirstLastPara="1" rIns="91425" wrap="square" tIns="91425">
+          <a:bodyPr spcFirstLastPara="1" wrap="square" lIns="91425" tIns="91425" rIns="91425" bIns="91425" anchor="t" anchorCtr="0">
             <a:noAutofit/>
           </a:bodyPr>
           <a:lstStyle>
-            <a:lvl1pPr indent="-304800" lvl="0" marL="457200" algn="l">
+            <a:lvl1pPr marL="457200" lvl="0" indent="-304800" algn="l">
               <a:lnSpc>
                 <a:spcPct val="115000"/>
               </a:lnSpc>
@@ -5846,7 +5947,7 @@
               <a:buChar char="●"/>
               <a:defRPr sz="1200"/>
             </a:lvl1pPr>
-            <a:lvl2pPr indent="-304800" lvl="1" marL="914400" algn="l">
+            <a:lvl2pPr marL="914400" lvl="1" indent="-304800" algn="l">
               <a:lnSpc>
                 <a:spcPct val="115000"/>
               </a:lnSpc>
@@ -5860,7 +5961,7 @@
               <a:buChar char="○"/>
               <a:defRPr sz="1200"/>
             </a:lvl2pPr>
-            <a:lvl3pPr indent="-304800" lvl="2" marL="1371600" algn="l">
+            <a:lvl3pPr marL="1371600" lvl="2" indent="-304800" algn="l">
               <a:lnSpc>
                 <a:spcPct val="115000"/>
               </a:lnSpc>
@@ -5874,7 +5975,7 @@
               <a:buChar char="■"/>
               <a:defRPr sz="1200"/>
             </a:lvl3pPr>
-            <a:lvl4pPr indent="-304800" lvl="3" marL="1828800" algn="l">
+            <a:lvl4pPr marL="1828800" lvl="3" indent="-304800" algn="l">
               <a:lnSpc>
                 <a:spcPct val="115000"/>
               </a:lnSpc>
@@ -5888,7 +5989,7 @@
               <a:buChar char="●"/>
               <a:defRPr sz="1200"/>
             </a:lvl4pPr>
-            <a:lvl5pPr indent="-304800" lvl="4" marL="2286000" algn="l">
+            <a:lvl5pPr marL="2286000" lvl="4" indent="-304800" algn="l">
               <a:lnSpc>
                 <a:spcPct val="115000"/>
               </a:lnSpc>
@@ -5902,7 +6003,7 @@
               <a:buChar char="○"/>
               <a:defRPr sz="1200"/>
             </a:lvl5pPr>
-            <a:lvl6pPr indent="-304800" lvl="5" marL="2743200" algn="l">
+            <a:lvl6pPr marL="2743200" lvl="5" indent="-304800" algn="l">
               <a:lnSpc>
                 <a:spcPct val="115000"/>
               </a:lnSpc>
@@ -5916,7 +6017,7 @@
               <a:buChar char="■"/>
               <a:defRPr sz="1200"/>
             </a:lvl6pPr>
-            <a:lvl7pPr indent="-304800" lvl="6" marL="3200400" algn="l">
+            <a:lvl7pPr marL="3200400" lvl="6" indent="-304800" algn="l">
               <a:lnSpc>
                 <a:spcPct val="115000"/>
               </a:lnSpc>
@@ -5930,7 +6031,7 @@
               <a:buChar char="●"/>
               <a:defRPr sz="1200"/>
             </a:lvl7pPr>
-            <a:lvl8pPr indent="-304800" lvl="7" marL="3657600" algn="l">
+            <a:lvl8pPr marL="3657600" lvl="7" indent="-304800" algn="l">
               <a:lnSpc>
                 <a:spcPct val="115000"/>
               </a:lnSpc>
@@ -5944,7 +6045,7 @@
               <a:buChar char="○"/>
               <a:defRPr sz="1200"/>
             </a:lvl8pPr>
-            <a:lvl9pPr indent="-304800" lvl="8" marL="4114800" algn="l">
+            <a:lvl9pPr marL="4114800" lvl="8" indent="-304800" algn="l">
               <a:lnSpc>
                 <a:spcPct val="115000"/>
               </a:lnSpc>
@@ -5959,15 +6060,19 @@
               <a:defRPr sz="1200"/>
             </a:lvl9pPr>
           </a:lstStyle>
-          <a:p/>
+          <a:p>
+            <a:endParaRPr/>
+          </a:p>
         </p:txBody>
       </p:sp>
       <p:sp>
         <p:nvSpPr>
           <p:cNvPr id="36" name="Google Shape;36;p15"/>
-          <p:cNvSpPr txBox="1"/>
+          <p:cNvSpPr txBox="1">
+            <a:spLocks noGrp="1"/>
+          </p:cNvSpPr>
           <p:nvPr>
-            <p:ph idx="12" type="sldNum"/>
+            <p:ph type="sldNum" idx="12"/>
           </p:nvPr>
         </p:nvSpPr>
         <p:spPr>
@@ -5984,11 +6089,11 @@
           </a:ln>
         </p:spPr>
         <p:txBody>
-          <a:bodyPr anchorCtr="0" anchor="ctr" bIns="91425" lIns="91425" spcFirstLastPara="1" rIns="91425" wrap="square" tIns="91425">
+          <a:bodyPr spcFirstLastPara="1" wrap="square" lIns="91425" tIns="91425" rIns="91425" bIns="91425" anchor="ctr" anchorCtr="0">
             <a:noAutofit/>
           </a:bodyPr>
           <a:lstStyle>
-            <a:lvl1pPr indent="0" lvl="0" marL="0" marR="0" algn="r">
+            <a:lvl1pPr marL="0" marR="0" lvl="0" indent="0" algn="r">
               <a:lnSpc>
                 <a:spcPct val="100000"/>
               </a:lnSpc>
@@ -6004,7 +6109,7 @@
               <a:buSzPts val="1000"/>
               <a:buFont typeface="Arial"/>
               <a:buNone/>
-              <a:defRPr b="0" i="0" sz="1000" u="none" cap="none" strike="noStrike">
+              <a:defRPr sz="1000" b="0" i="0" u="none" strike="noStrike" cap="none">
                 <a:solidFill>
                   <a:schemeClr val="dk2"/>
                 </a:solidFill>
@@ -6014,7 +6119,7 @@
                 <a:sym typeface="Arial"/>
               </a:defRPr>
             </a:lvl1pPr>
-            <a:lvl2pPr indent="0" lvl="1" marL="0" marR="0" algn="r">
+            <a:lvl2pPr marL="0" marR="0" lvl="1" indent="0" algn="r">
               <a:lnSpc>
                 <a:spcPct val="100000"/>
               </a:lnSpc>
@@ -6030,7 +6135,7 @@
               <a:buSzPts val="1000"/>
               <a:buFont typeface="Arial"/>
               <a:buNone/>
-              <a:defRPr b="0" i="0" sz="1000" u="none" cap="none" strike="noStrike">
+              <a:defRPr sz="1000" b="0" i="0" u="none" strike="noStrike" cap="none">
                 <a:solidFill>
                   <a:schemeClr val="dk2"/>
                 </a:solidFill>
@@ -6040,7 +6145,7 @@
                 <a:sym typeface="Arial"/>
               </a:defRPr>
             </a:lvl2pPr>
-            <a:lvl3pPr indent="0" lvl="2" marL="0" marR="0" algn="r">
+            <a:lvl3pPr marL="0" marR="0" lvl="2" indent="0" algn="r">
               <a:lnSpc>
                 <a:spcPct val="100000"/>
               </a:lnSpc>
@@ -6056,7 +6161,7 @@
               <a:buSzPts val="1000"/>
               <a:buFont typeface="Arial"/>
               <a:buNone/>
-              <a:defRPr b="0" i="0" sz="1000" u="none" cap="none" strike="noStrike">
+              <a:defRPr sz="1000" b="0" i="0" u="none" strike="noStrike" cap="none">
                 <a:solidFill>
                   <a:schemeClr val="dk2"/>
                 </a:solidFill>
@@ -6066,7 +6171,7 @@
                 <a:sym typeface="Arial"/>
               </a:defRPr>
             </a:lvl3pPr>
-            <a:lvl4pPr indent="0" lvl="3" marL="0" marR="0" algn="r">
+            <a:lvl4pPr marL="0" marR="0" lvl="3" indent="0" algn="r">
               <a:lnSpc>
                 <a:spcPct val="100000"/>
               </a:lnSpc>
@@ -6082,7 +6187,7 @@
               <a:buSzPts val="1000"/>
               <a:buFont typeface="Arial"/>
               <a:buNone/>
-              <a:defRPr b="0" i="0" sz="1000" u="none" cap="none" strike="noStrike">
+              <a:defRPr sz="1000" b="0" i="0" u="none" strike="noStrike" cap="none">
                 <a:solidFill>
                   <a:schemeClr val="dk2"/>
                 </a:solidFill>
@@ -6092,7 +6197,7 @@
                 <a:sym typeface="Arial"/>
               </a:defRPr>
             </a:lvl4pPr>
-            <a:lvl5pPr indent="0" lvl="4" marL="0" marR="0" algn="r">
+            <a:lvl5pPr marL="0" marR="0" lvl="4" indent="0" algn="r">
               <a:lnSpc>
                 <a:spcPct val="100000"/>
               </a:lnSpc>
@@ -6108,7 +6213,7 @@
               <a:buSzPts val="1000"/>
               <a:buFont typeface="Arial"/>
               <a:buNone/>
-              <a:defRPr b="0" i="0" sz="1000" u="none" cap="none" strike="noStrike">
+              <a:defRPr sz="1000" b="0" i="0" u="none" strike="noStrike" cap="none">
                 <a:solidFill>
                   <a:schemeClr val="dk2"/>
                 </a:solidFill>
@@ -6118,7 +6223,7 @@
                 <a:sym typeface="Arial"/>
               </a:defRPr>
             </a:lvl5pPr>
-            <a:lvl6pPr indent="0" lvl="5" marL="0" marR="0" algn="r">
+            <a:lvl6pPr marL="0" marR="0" lvl="5" indent="0" algn="r">
               <a:lnSpc>
                 <a:spcPct val="100000"/>
               </a:lnSpc>
@@ -6134,7 +6239,7 @@
               <a:buSzPts val="1000"/>
               <a:buFont typeface="Arial"/>
               <a:buNone/>
-              <a:defRPr b="0" i="0" sz="1000" u="none" cap="none" strike="noStrike">
+              <a:defRPr sz="1000" b="0" i="0" u="none" strike="noStrike" cap="none">
                 <a:solidFill>
                   <a:schemeClr val="dk2"/>
                 </a:solidFill>
@@ -6144,7 +6249,7 @@
                 <a:sym typeface="Arial"/>
               </a:defRPr>
             </a:lvl6pPr>
-            <a:lvl7pPr indent="0" lvl="6" marL="0" marR="0" algn="r">
+            <a:lvl7pPr marL="0" marR="0" lvl="6" indent="0" algn="r">
               <a:lnSpc>
                 <a:spcPct val="100000"/>
               </a:lnSpc>
@@ -6160,7 +6265,7 @@
               <a:buSzPts val="1000"/>
               <a:buFont typeface="Arial"/>
               <a:buNone/>
-              <a:defRPr b="0" i="0" sz="1000" u="none" cap="none" strike="noStrike">
+              <a:defRPr sz="1000" b="0" i="0" u="none" strike="noStrike" cap="none">
                 <a:solidFill>
                   <a:schemeClr val="dk2"/>
                 </a:solidFill>
@@ -6170,7 +6275,7 @@
                 <a:sym typeface="Arial"/>
               </a:defRPr>
             </a:lvl7pPr>
-            <a:lvl8pPr indent="0" lvl="7" marL="0" marR="0" algn="r">
+            <a:lvl8pPr marL="0" marR="0" lvl="7" indent="0" algn="r">
               <a:lnSpc>
                 <a:spcPct val="100000"/>
               </a:lnSpc>
@@ -6186,7 +6291,7 @@
               <a:buSzPts val="1000"/>
               <a:buFont typeface="Arial"/>
               <a:buNone/>
-              <a:defRPr b="0" i="0" sz="1000" u="none" cap="none" strike="noStrike">
+              <a:defRPr sz="1000" b="0" i="0" u="none" strike="noStrike" cap="none">
                 <a:solidFill>
                   <a:schemeClr val="dk2"/>
                 </a:solidFill>
@@ -6196,7 +6301,7 @@
                 <a:sym typeface="Arial"/>
               </a:defRPr>
             </a:lvl8pPr>
-            <a:lvl9pPr indent="0" lvl="8" marL="0" marR="0" algn="r">
+            <a:lvl9pPr marL="0" marR="0" lvl="8" indent="0" algn="r">
               <a:lnSpc>
                 <a:spcPct val="100000"/>
               </a:lnSpc>
@@ -6212,7 +6317,7 @@
               <a:buSzPts val="1000"/>
               <a:buFont typeface="Arial"/>
               <a:buNone/>
-              <a:defRPr b="0" i="0" sz="1000" u="none" cap="none" strike="noStrike">
+              <a:defRPr sz="1000" b="0" i="0" u="none" strike="noStrike" cap="none">
                 <a:solidFill>
                   <a:schemeClr val="dk2"/>
                 </a:solidFill>
@@ -6224,7 +6329,7 @@
             </a:lvl9pPr>
           </a:lstStyle>
           <a:p>
-            <a:pPr indent="0" lvl="0" marL="0" rtl="0" algn="r">
+            <a:pPr marL="0" lvl="0" indent="0" algn="r" rtl="0">
               <a:spcBef>
                 <a:spcPts val="0"/>
               </a:spcBef>
@@ -6235,7 +6340,7 @@
             </a:pPr>
             <a:fld id="{00000000-1234-1234-1234-123412341234}" type="slidenum">
               <a:rPr lang="en-US"/>
-              <a:t>‹#›</a:t>
+              <a:t>‹nº›</a:t>
             </a:fld>
             <a:endParaRPr/>
           </a:p>
@@ -6250,11 +6355,11 @@
 </file>
 
 <file path=ppt/slideLayouts/slideLayout7.xml><?xml version="1.0" encoding="utf-8"?>
-<p:sldLayout xmlns:a="http://schemas.openxmlformats.org/drawingml/2006/main" xmlns:r="http://schemas.openxmlformats.org/officeDocument/2006/relationships" xmlns:mc="http://schemas.openxmlformats.org/markup-compatibility/2006" xmlns:mv="urn:schemas-microsoft-com:mac:vml" xmlns:p="http://schemas.openxmlformats.org/presentationml/2006/main" xmlns:c="http://schemas.openxmlformats.org/drawingml/2006/chart" xmlns:dgm="http://schemas.openxmlformats.org/drawingml/2006/diagram" xmlns:o="urn:schemas-microsoft-com:office:office" xmlns:v="urn:schemas-microsoft-com:vml" xmlns:pvml="urn:schemas-microsoft-com:office:powerpoint" xmlns:com="http://schemas.openxmlformats.org/drawingml/2006/compatibility" xmlns:p14="http://schemas.microsoft.com/office/powerpoint/2010/main" xmlns:p15="http://schemas.microsoft.com/office/powerpoint/2012/main" xmlns:ahyp="http://schemas.microsoft.com/office/drawing/2018/hyperlinkcolor" matchingName="Main point">
+<p:sldLayout xmlns:a="http://schemas.openxmlformats.org/drawingml/2006/main" xmlns:r="http://schemas.openxmlformats.org/officeDocument/2006/relationships" xmlns:p="http://schemas.openxmlformats.org/presentationml/2006/main" matchingName="Main point">
   <p:cSld name="MAIN_POINT">
     <p:spTree>
       <p:nvGrpSpPr>
-        <p:cNvPr id="37" name="Shape 37"/>
+        <p:cNvPr id="1" name="Shape 37"/>
         <p:cNvGrpSpPr/>
         <p:nvPr/>
       </p:nvGrpSpPr>
@@ -6269,7 +6374,9 @@
       <p:sp>
         <p:nvSpPr>
           <p:cNvPr id="38" name="Google Shape;38;p16"/>
-          <p:cNvSpPr txBox="1"/>
+          <p:cNvSpPr txBox="1">
+            <a:spLocks noGrp="1"/>
+          </p:cNvSpPr>
           <p:nvPr>
             <p:ph type="title"/>
           </p:nvPr>
@@ -6288,7 +6395,7 @@
           </a:ln>
         </p:spPr>
         <p:txBody>
-          <a:bodyPr anchorCtr="0" anchor="ctr" bIns="91425" lIns="91425" spcFirstLastPara="1" rIns="91425" wrap="square" tIns="91425">
+          <a:bodyPr spcFirstLastPara="1" wrap="square" lIns="91425" tIns="91425" rIns="91425" bIns="91425" anchor="ctr" anchorCtr="0">
             <a:noAutofit/>
           </a:bodyPr>
           <a:lstStyle>
@@ -6419,15 +6526,19 @@
               <a:defRPr sz="4800"/>
             </a:lvl9pPr>
           </a:lstStyle>
-          <a:p/>
+          <a:p>
+            <a:endParaRPr/>
+          </a:p>
         </p:txBody>
       </p:sp>
       <p:sp>
         <p:nvSpPr>
           <p:cNvPr id="39" name="Google Shape;39;p16"/>
-          <p:cNvSpPr txBox="1"/>
+          <p:cNvSpPr txBox="1">
+            <a:spLocks noGrp="1"/>
+          </p:cNvSpPr>
           <p:nvPr>
-            <p:ph idx="12" type="sldNum"/>
+            <p:ph type="sldNum" idx="12"/>
           </p:nvPr>
         </p:nvSpPr>
         <p:spPr>
@@ -6444,11 +6555,11 @@
           </a:ln>
         </p:spPr>
         <p:txBody>
-          <a:bodyPr anchorCtr="0" anchor="ctr" bIns="91425" lIns="91425" spcFirstLastPara="1" rIns="91425" wrap="square" tIns="91425">
+          <a:bodyPr spcFirstLastPara="1" wrap="square" lIns="91425" tIns="91425" rIns="91425" bIns="91425" anchor="ctr" anchorCtr="0">
             <a:noAutofit/>
           </a:bodyPr>
           <a:lstStyle>
-            <a:lvl1pPr indent="0" lvl="0" marL="0" marR="0" algn="r">
+            <a:lvl1pPr marL="0" marR="0" lvl="0" indent="0" algn="r">
               <a:lnSpc>
                 <a:spcPct val="100000"/>
               </a:lnSpc>
@@ -6464,7 +6575,7 @@
               <a:buSzPts val="1000"/>
               <a:buFont typeface="Arial"/>
               <a:buNone/>
-              <a:defRPr b="0" i="0" sz="1000" u="none" cap="none" strike="noStrike">
+              <a:defRPr sz="1000" b="0" i="0" u="none" strike="noStrike" cap="none">
                 <a:solidFill>
                   <a:schemeClr val="dk2"/>
                 </a:solidFill>
@@ -6474,7 +6585,7 @@
                 <a:sym typeface="Arial"/>
               </a:defRPr>
             </a:lvl1pPr>
-            <a:lvl2pPr indent="0" lvl="1" marL="0" marR="0" algn="r">
+            <a:lvl2pPr marL="0" marR="0" lvl="1" indent="0" algn="r">
               <a:lnSpc>
                 <a:spcPct val="100000"/>
               </a:lnSpc>
@@ -6490,7 +6601,7 @@
               <a:buSzPts val="1000"/>
               <a:buFont typeface="Arial"/>
               <a:buNone/>
-              <a:defRPr b="0" i="0" sz="1000" u="none" cap="none" strike="noStrike">
+              <a:defRPr sz="1000" b="0" i="0" u="none" strike="noStrike" cap="none">
                 <a:solidFill>
                   <a:schemeClr val="dk2"/>
                 </a:solidFill>
@@ -6500,7 +6611,7 @@
                 <a:sym typeface="Arial"/>
               </a:defRPr>
             </a:lvl2pPr>
-            <a:lvl3pPr indent="0" lvl="2" marL="0" marR="0" algn="r">
+            <a:lvl3pPr marL="0" marR="0" lvl="2" indent="0" algn="r">
               <a:lnSpc>
                 <a:spcPct val="100000"/>
               </a:lnSpc>
@@ -6516,7 +6627,7 @@
               <a:buSzPts val="1000"/>
               <a:buFont typeface="Arial"/>
               <a:buNone/>
-              <a:defRPr b="0" i="0" sz="1000" u="none" cap="none" strike="noStrike">
+              <a:defRPr sz="1000" b="0" i="0" u="none" strike="noStrike" cap="none">
                 <a:solidFill>
                   <a:schemeClr val="dk2"/>
                 </a:solidFill>
@@ -6526,7 +6637,7 @@
                 <a:sym typeface="Arial"/>
               </a:defRPr>
             </a:lvl3pPr>
-            <a:lvl4pPr indent="0" lvl="3" marL="0" marR="0" algn="r">
+            <a:lvl4pPr marL="0" marR="0" lvl="3" indent="0" algn="r">
               <a:lnSpc>
                 <a:spcPct val="100000"/>
               </a:lnSpc>
@@ -6542,7 +6653,7 @@
               <a:buSzPts val="1000"/>
               <a:buFont typeface="Arial"/>
               <a:buNone/>
-              <a:defRPr b="0" i="0" sz="1000" u="none" cap="none" strike="noStrike">
+              <a:defRPr sz="1000" b="0" i="0" u="none" strike="noStrike" cap="none">
                 <a:solidFill>
                   <a:schemeClr val="dk2"/>
                 </a:solidFill>
@@ -6552,7 +6663,7 @@
                 <a:sym typeface="Arial"/>
               </a:defRPr>
             </a:lvl4pPr>
-            <a:lvl5pPr indent="0" lvl="4" marL="0" marR="0" algn="r">
+            <a:lvl5pPr marL="0" marR="0" lvl="4" indent="0" algn="r">
               <a:lnSpc>
                 <a:spcPct val="100000"/>
               </a:lnSpc>
@@ -6568,7 +6679,7 @@
               <a:buSzPts val="1000"/>
               <a:buFont typeface="Arial"/>
               <a:buNone/>
-              <a:defRPr b="0" i="0" sz="1000" u="none" cap="none" strike="noStrike">
+              <a:defRPr sz="1000" b="0" i="0" u="none" strike="noStrike" cap="none">
                 <a:solidFill>
                   <a:schemeClr val="dk2"/>
                 </a:solidFill>
@@ -6578,7 +6689,7 @@
                 <a:sym typeface="Arial"/>
               </a:defRPr>
             </a:lvl5pPr>
-            <a:lvl6pPr indent="0" lvl="5" marL="0" marR="0" algn="r">
+            <a:lvl6pPr marL="0" marR="0" lvl="5" indent="0" algn="r">
               <a:lnSpc>
                 <a:spcPct val="100000"/>
               </a:lnSpc>
@@ -6594,7 +6705,7 @@
               <a:buSzPts val="1000"/>
               <a:buFont typeface="Arial"/>
               <a:buNone/>
-              <a:defRPr b="0" i="0" sz="1000" u="none" cap="none" strike="noStrike">
+              <a:defRPr sz="1000" b="0" i="0" u="none" strike="noStrike" cap="none">
                 <a:solidFill>
                   <a:schemeClr val="dk2"/>
                 </a:solidFill>
@@ -6604,7 +6715,7 @@
                 <a:sym typeface="Arial"/>
               </a:defRPr>
             </a:lvl6pPr>
-            <a:lvl7pPr indent="0" lvl="6" marL="0" marR="0" algn="r">
+            <a:lvl7pPr marL="0" marR="0" lvl="6" indent="0" algn="r">
               <a:lnSpc>
                 <a:spcPct val="100000"/>
               </a:lnSpc>
@@ -6620,7 +6731,7 @@
               <a:buSzPts val="1000"/>
               <a:buFont typeface="Arial"/>
               <a:buNone/>
-              <a:defRPr b="0" i="0" sz="1000" u="none" cap="none" strike="noStrike">
+              <a:defRPr sz="1000" b="0" i="0" u="none" strike="noStrike" cap="none">
                 <a:solidFill>
                   <a:schemeClr val="dk2"/>
                 </a:solidFill>
@@ -6630,7 +6741,7 @@
                 <a:sym typeface="Arial"/>
               </a:defRPr>
             </a:lvl7pPr>
-            <a:lvl8pPr indent="0" lvl="7" marL="0" marR="0" algn="r">
+            <a:lvl8pPr marL="0" marR="0" lvl="7" indent="0" algn="r">
               <a:lnSpc>
                 <a:spcPct val="100000"/>
               </a:lnSpc>
@@ -6646,7 +6757,7 @@
               <a:buSzPts val="1000"/>
               <a:buFont typeface="Arial"/>
               <a:buNone/>
-              <a:defRPr b="0" i="0" sz="1000" u="none" cap="none" strike="noStrike">
+              <a:defRPr sz="1000" b="0" i="0" u="none" strike="noStrike" cap="none">
                 <a:solidFill>
                   <a:schemeClr val="dk2"/>
                 </a:solidFill>
@@ -6656,7 +6767,7 @@
                 <a:sym typeface="Arial"/>
               </a:defRPr>
             </a:lvl8pPr>
-            <a:lvl9pPr indent="0" lvl="8" marL="0" marR="0" algn="r">
+            <a:lvl9pPr marL="0" marR="0" lvl="8" indent="0" algn="r">
               <a:lnSpc>
                 <a:spcPct val="100000"/>
               </a:lnSpc>
@@ -6672,7 +6783,7 @@
               <a:buSzPts val="1000"/>
               <a:buFont typeface="Arial"/>
               <a:buNone/>
-              <a:defRPr b="0" i="0" sz="1000" u="none" cap="none" strike="noStrike">
+              <a:defRPr sz="1000" b="0" i="0" u="none" strike="noStrike" cap="none">
                 <a:solidFill>
                   <a:schemeClr val="dk2"/>
                 </a:solidFill>
@@ -6684,7 +6795,7 @@
             </a:lvl9pPr>
           </a:lstStyle>
           <a:p>
-            <a:pPr indent="0" lvl="0" marL="0" rtl="0" algn="r">
+            <a:pPr marL="0" lvl="0" indent="0" algn="r" rtl="0">
               <a:spcBef>
                 <a:spcPts val="0"/>
               </a:spcBef>
@@ -6695,7 +6806,7 @@
             </a:pPr>
             <a:fld id="{00000000-1234-1234-1234-123412341234}" type="slidenum">
               <a:rPr lang="en-US"/>
-              <a:t>‹#›</a:t>
+              <a:t>‹nº›</a:t>
             </a:fld>
             <a:endParaRPr/>
           </a:p>
@@ -6710,11 +6821,11 @@
 </file>
 
 <file path=ppt/slideLayouts/slideLayout8.xml><?xml version="1.0" encoding="utf-8"?>
-<p:sldLayout xmlns:a="http://schemas.openxmlformats.org/drawingml/2006/main" xmlns:r="http://schemas.openxmlformats.org/officeDocument/2006/relationships" xmlns:mc="http://schemas.openxmlformats.org/markup-compatibility/2006" xmlns:mv="urn:schemas-microsoft-com:mac:vml" xmlns:p="http://schemas.openxmlformats.org/presentationml/2006/main" xmlns:c="http://schemas.openxmlformats.org/drawingml/2006/chart" xmlns:dgm="http://schemas.openxmlformats.org/drawingml/2006/diagram" xmlns:o="urn:schemas-microsoft-com:office:office" xmlns:v="urn:schemas-microsoft-com:vml" xmlns:pvml="urn:schemas-microsoft-com:office:powerpoint" xmlns:com="http://schemas.openxmlformats.org/drawingml/2006/compatibility" xmlns:p14="http://schemas.microsoft.com/office/powerpoint/2010/main" xmlns:p15="http://schemas.microsoft.com/office/powerpoint/2012/main" xmlns:ahyp="http://schemas.microsoft.com/office/drawing/2018/hyperlinkcolor" matchingName="Section title and description">
+<p:sldLayout xmlns:a="http://schemas.openxmlformats.org/drawingml/2006/main" xmlns:r="http://schemas.openxmlformats.org/officeDocument/2006/relationships" xmlns:p="http://schemas.openxmlformats.org/presentationml/2006/main" matchingName="Section title and description">
   <p:cSld name="SECTION_TITLE_AND_DESCRIPTION">
     <p:spTree>
       <p:nvGrpSpPr>
-        <p:cNvPr id="40" name="Shape 40"/>
+        <p:cNvPr id="1" name="Shape 40"/>
         <p:cNvGrpSpPr/>
         <p:nvPr/>
       </p:nvGrpSpPr>
@@ -6748,12 +6859,12 @@
           </a:ln>
         </p:spPr>
         <p:txBody>
-          <a:bodyPr anchorCtr="0" anchor="ctr" bIns="91425" lIns="91425" spcFirstLastPara="1" rIns="91425" wrap="square" tIns="91425">
+          <a:bodyPr spcFirstLastPara="1" wrap="square" lIns="91425" tIns="91425" rIns="91425" bIns="91425" anchor="ctr" anchorCtr="0">
             <a:noAutofit/>
           </a:bodyPr>
           <a:lstStyle/>
           <a:p>
-            <a:pPr indent="0" lvl="0" marL="0" marR="0" rtl="0" algn="l">
+            <a:pPr marL="0" marR="0" lvl="0" indent="0" algn="l" rtl="0">
               <a:lnSpc>
                 <a:spcPct val="100000"/>
               </a:lnSpc>
@@ -6770,10 +6881,7 @@
               <a:buFont typeface="Arial"/>
               <a:buNone/>
             </a:pPr>
-            <a:r>
-              <a:t/>
-            </a:r>
-            <a:endParaRPr b="0" i="0" sz="1400" u="none" cap="none" strike="noStrike">
+            <a:endParaRPr sz="1400" b="0" i="0" u="none" strike="noStrike" cap="none">
               <a:solidFill>
                 <a:srgbClr val="000000"/>
               </a:solidFill>
@@ -6788,7 +6896,9 @@
       <p:sp>
         <p:nvSpPr>
           <p:cNvPr id="42" name="Google Shape;42;p17"/>
-          <p:cNvSpPr txBox="1"/>
+          <p:cNvSpPr txBox="1">
+            <a:spLocks noGrp="1"/>
+          </p:cNvSpPr>
           <p:nvPr>
             <p:ph type="title"/>
           </p:nvPr>
@@ -6807,7 +6917,7 @@
           </a:ln>
         </p:spPr>
         <p:txBody>
-          <a:bodyPr anchorCtr="0" anchor="b" bIns="91425" lIns="91425" spcFirstLastPara="1" rIns="91425" wrap="square" tIns="91425">
+          <a:bodyPr spcFirstLastPara="1" wrap="square" lIns="91425" tIns="91425" rIns="91425" bIns="91425" anchor="b" anchorCtr="0">
             <a:noAutofit/>
           </a:bodyPr>
           <a:lstStyle>
@@ -6938,15 +7048,19 @@
               <a:defRPr sz="4200"/>
             </a:lvl9pPr>
           </a:lstStyle>
-          <a:p/>
+          <a:p>
+            <a:endParaRPr/>
+          </a:p>
         </p:txBody>
       </p:sp>
       <p:sp>
         <p:nvSpPr>
           <p:cNvPr id="43" name="Google Shape;43;p17"/>
-          <p:cNvSpPr txBox="1"/>
+          <p:cNvSpPr txBox="1">
+            <a:spLocks noGrp="1"/>
+          </p:cNvSpPr>
           <p:nvPr>
-            <p:ph idx="1" type="subTitle"/>
+            <p:ph type="subTitle" idx="1"/>
           </p:nvPr>
         </p:nvSpPr>
         <p:spPr>
@@ -6963,7 +7077,7 @@
           </a:ln>
         </p:spPr>
         <p:txBody>
-          <a:bodyPr anchorCtr="0" anchor="t" bIns="91425" lIns="91425" spcFirstLastPara="1" rIns="91425" wrap="square" tIns="91425">
+          <a:bodyPr spcFirstLastPara="1" wrap="square" lIns="91425" tIns="91425" rIns="91425" bIns="91425" anchor="t" anchorCtr="0">
             <a:noAutofit/>
           </a:bodyPr>
           <a:lstStyle>
@@ -7094,15 +7208,19 @@
               <a:defRPr sz="2100"/>
             </a:lvl9pPr>
           </a:lstStyle>
-          <a:p/>
+          <a:p>
+            <a:endParaRPr/>
+          </a:p>
         </p:txBody>
       </p:sp>
       <p:sp>
         <p:nvSpPr>
           <p:cNvPr id="44" name="Google Shape;44;p17"/>
-          <p:cNvSpPr txBox="1"/>
+          <p:cNvSpPr txBox="1">
+            <a:spLocks noGrp="1"/>
+          </p:cNvSpPr>
           <p:nvPr>
-            <p:ph idx="2" type="body"/>
+            <p:ph type="body" idx="2"/>
           </p:nvPr>
         </p:nvSpPr>
         <p:spPr>
@@ -7119,11 +7237,11 @@
           </a:ln>
         </p:spPr>
         <p:txBody>
-          <a:bodyPr anchorCtr="0" anchor="ctr" bIns="91425" lIns="91425" spcFirstLastPara="1" rIns="91425" wrap="square" tIns="91425">
+          <a:bodyPr spcFirstLastPara="1" wrap="square" lIns="91425" tIns="91425" rIns="91425" bIns="91425" anchor="ctr" anchorCtr="0">
             <a:noAutofit/>
           </a:bodyPr>
           <a:lstStyle>
-            <a:lvl1pPr indent="-342900" lvl="0" marL="457200" algn="l">
+            <a:lvl1pPr marL="457200" lvl="0" indent="-342900" algn="l">
               <a:lnSpc>
                 <a:spcPct val="115000"/>
               </a:lnSpc>
@@ -7137,7 +7255,7 @@
               <a:buChar char="●"/>
               <a:defRPr/>
             </a:lvl1pPr>
-            <a:lvl2pPr indent="-317500" lvl="1" marL="914400" algn="l">
+            <a:lvl2pPr marL="914400" lvl="1" indent="-317500" algn="l">
               <a:lnSpc>
                 <a:spcPct val="115000"/>
               </a:lnSpc>
@@ -7151,7 +7269,7 @@
               <a:buChar char="○"/>
               <a:defRPr/>
             </a:lvl2pPr>
-            <a:lvl3pPr indent="-317500" lvl="2" marL="1371600" algn="l">
+            <a:lvl3pPr marL="1371600" lvl="2" indent="-317500" algn="l">
               <a:lnSpc>
                 <a:spcPct val="115000"/>
               </a:lnSpc>
@@ -7165,7 +7283,7 @@
               <a:buChar char="■"/>
               <a:defRPr/>
             </a:lvl3pPr>
-            <a:lvl4pPr indent="-317500" lvl="3" marL="1828800" algn="l">
+            <a:lvl4pPr marL="1828800" lvl="3" indent="-317500" algn="l">
               <a:lnSpc>
                 <a:spcPct val="115000"/>
               </a:lnSpc>
@@ -7179,7 +7297,7 @@
               <a:buChar char="●"/>
               <a:defRPr/>
             </a:lvl4pPr>
-            <a:lvl5pPr indent="-317500" lvl="4" marL="2286000" algn="l">
+            <a:lvl5pPr marL="2286000" lvl="4" indent="-317500" algn="l">
               <a:lnSpc>
                 <a:spcPct val="115000"/>
               </a:lnSpc>
@@ -7193,7 +7311,7 @@
               <a:buChar char="○"/>
               <a:defRPr/>
             </a:lvl5pPr>
-            <a:lvl6pPr indent="-317500" lvl="5" marL="2743200" algn="l">
+            <a:lvl6pPr marL="2743200" lvl="5" indent="-317500" algn="l">
               <a:lnSpc>
                 <a:spcPct val="115000"/>
               </a:lnSpc>
@@ -7207,7 +7325,7 @@
               <a:buChar char="■"/>
               <a:defRPr/>
             </a:lvl6pPr>
-            <a:lvl7pPr indent="-317500" lvl="6" marL="3200400" algn="l">
+            <a:lvl7pPr marL="3200400" lvl="6" indent="-317500" algn="l">
               <a:lnSpc>
                 <a:spcPct val="115000"/>
               </a:lnSpc>
@@ -7221,7 +7339,7 @@
               <a:buChar char="●"/>
               <a:defRPr/>
             </a:lvl7pPr>
-            <a:lvl8pPr indent="-317500" lvl="7" marL="3657600" algn="l">
+            <a:lvl8pPr marL="3657600" lvl="7" indent="-317500" algn="l">
               <a:lnSpc>
                 <a:spcPct val="115000"/>
               </a:lnSpc>
@@ -7235,7 +7353,7 @@
               <a:buChar char="○"/>
               <a:defRPr/>
             </a:lvl8pPr>
-            <a:lvl9pPr indent="-317500" lvl="8" marL="4114800" algn="l">
+            <a:lvl9pPr marL="4114800" lvl="8" indent="-317500" algn="l">
               <a:lnSpc>
                 <a:spcPct val="115000"/>
               </a:lnSpc>
@@ -7250,15 +7368,19 @@
               <a:defRPr/>
             </a:lvl9pPr>
           </a:lstStyle>
-          <a:p/>
+          <a:p>
+            <a:endParaRPr/>
+          </a:p>
         </p:txBody>
       </p:sp>
       <p:sp>
         <p:nvSpPr>
           <p:cNvPr id="45" name="Google Shape;45;p17"/>
-          <p:cNvSpPr txBox="1"/>
+          <p:cNvSpPr txBox="1">
+            <a:spLocks noGrp="1"/>
+          </p:cNvSpPr>
           <p:nvPr>
-            <p:ph idx="12" type="sldNum"/>
+            <p:ph type="sldNum" idx="12"/>
           </p:nvPr>
         </p:nvSpPr>
         <p:spPr>
@@ -7275,11 +7397,11 @@
           </a:ln>
         </p:spPr>
         <p:txBody>
-          <a:bodyPr anchorCtr="0" anchor="ctr" bIns="91425" lIns="91425" spcFirstLastPara="1" rIns="91425" wrap="square" tIns="91425">
+          <a:bodyPr spcFirstLastPara="1" wrap="square" lIns="91425" tIns="91425" rIns="91425" bIns="91425" anchor="ctr" anchorCtr="0">
             <a:noAutofit/>
           </a:bodyPr>
           <a:lstStyle>
-            <a:lvl1pPr indent="0" lvl="0" marL="0" marR="0" algn="r">
+            <a:lvl1pPr marL="0" marR="0" lvl="0" indent="0" algn="r">
               <a:lnSpc>
                 <a:spcPct val="100000"/>
               </a:lnSpc>
@@ -7295,7 +7417,7 @@
               <a:buSzPts val="1000"/>
               <a:buFont typeface="Arial"/>
               <a:buNone/>
-              <a:defRPr b="0" i="0" sz="1000" u="none" cap="none" strike="noStrike">
+              <a:defRPr sz="1000" b="0" i="0" u="none" strike="noStrike" cap="none">
                 <a:solidFill>
                   <a:schemeClr val="dk2"/>
                 </a:solidFill>
@@ -7305,7 +7427,7 @@
                 <a:sym typeface="Arial"/>
               </a:defRPr>
             </a:lvl1pPr>
-            <a:lvl2pPr indent="0" lvl="1" marL="0" marR="0" algn="r">
+            <a:lvl2pPr marL="0" marR="0" lvl="1" indent="0" algn="r">
               <a:lnSpc>
                 <a:spcPct val="100000"/>
               </a:lnSpc>
@@ -7321,7 +7443,7 @@
               <a:buSzPts val="1000"/>
               <a:buFont typeface="Arial"/>
               <a:buNone/>
-              <a:defRPr b="0" i="0" sz="1000" u="none" cap="none" strike="noStrike">
+              <a:defRPr sz="1000" b="0" i="0" u="none" strike="noStrike" cap="none">
                 <a:solidFill>
                   <a:schemeClr val="dk2"/>
                 </a:solidFill>
@@ -7331,7 +7453,7 @@
                 <a:sym typeface="Arial"/>
               </a:defRPr>
             </a:lvl2pPr>
-            <a:lvl3pPr indent="0" lvl="2" marL="0" marR="0" algn="r">
+            <a:lvl3pPr marL="0" marR="0" lvl="2" indent="0" algn="r">
               <a:lnSpc>
                 <a:spcPct val="100000"/>
               </a:lnSpc>
@@ -7347,7 +7469,7 @@
               <a:buSzPts val="1000"/>
               <a:buFont typeface="Arial"/>
               <a:buNone/>
-              <a:defRPr b="0" i="0" sz="1000" u="none" cap="none" strike="noStrike">
+              <a:defRPr sz="1000" b="0" i="0" u="none" strike="noStrike" cap="none">
                 <a:solidFill>
                   <a:schemeClr val="dk2"/>
                 </a:solidFill>
@@ -7357,7 +7479,7 @@
                 <a:sym typeface="Arial"/>
               </a:defRPr>
             </a:lvl3pPr>
-            <a:lvl4pPr indent="0" lvl="3" marL="0" marR="0" algn="r">
+            <a:lvl4pPr marL="0" marR="0" lvl="3" indent="0" algn="r">
               <a:lnSpc>
                 <a:spcPct val="100000"/>
               </a:lnSpc>
@@ -7373,7 +7495,7 @@
               <a:buSzPts val="1000"/>
               <a:buFont typeface="Arial"/>
               <a:buNone/>
-              <a:defRPr b="0" i="0" sz="1000" u="none" cap="none" strike="noStrike">
+              <a:defRPr sz="1000" b="0" i="0" u="none" strike="noStrike" cap="none">
                 <a:solidFill>
                   <a:schemeClr val="dk2"/>
                 </a:solidFill>
@@ -7383,7 +7505,7 @@
                 <a:sym typeface="Arial"/>
               </a:defRPr>
             </a:lvl4pPr>
-            <a:lvl5pPr indent="0" lvl="4" marL="0" marR="0" algn="r">
+            <a:lvl5pPr marL="0" marR="0" lvl="4" indent="0" algn="r">
               <a:lnSpc>
                 <a:spcPct val="100000"/>
               </a:lnSpc>
@@ -7399,7 +7521,7 @@
               <a:buSzPts val="1000"/>
               <a:buFont typeface="Arial"/>
               <a:buNone/>
-              <a:defRPr b="0" i="0" sz="1000" u="none" cap="none" strike="noStrike">
+              <a:defRPr sz="1000" b="0" i="0" u="none" strike="noStrike" cap="none">
                 <a:solidFill>
                   <a:schemeClr val="dk2"/>
                 </a:solidFill>
@@ -7409,7 +7531,7 @@
                 <a:sym typeface="Arial"/>
               </a:defRPr>
             </a:lvl5pPr>
-            <a:lvl6pPr indent="0" lvl="5" marL="0" marR="0" algn="r">
+            <a:lvl6pPr marL="0" marR="0" lvl="5" indent="0" algn="r">
               <a:lnSpc>
                 <a:spcPct val="100000"/>
               </a:lnSpc>
@@ -7425,7 +7547,7 @@
               <a:buSzPts val="1000"/>
               <a:buFont typeface="Arial"/>
               <a:buNone/>
-              <a:defRPr b="0" i="0" sz="1000" u="none" cap="none" strike="noStrike">
+              <a:defRPr sz="1000" b="0" i="0" u="none" strike="noStrike" cap="none">
                 <a:solidFill>
                   <a:schemeClr val="dk2"/>
                 </a:solidFill>
@@ -7435,7 +7557,7 @@
                 <a:sym typeface="Arial"/>
               </a:defRPr>
             </a:lvl6pPr>
-            <a:lvl7pPr indent="0" lvl="6" marL="0" marR="0" algn="r">
+            <a:lvl7pPr marL="0" marR="0" lvl="6" indent="0" algn="r">
               <a:lnSpc>
                 <a:spcPct val="100000"/>
               </a:lnSpc>
@@ -7451,7 +7573,7 @@
               <a:buSzPts val="1000"/>
               <a:buFont typeface="Arial"/>
               <a:buNone/>
-              <a:defRPr b="0" i="0" sz="1000" u="none" cap="none" strike="noStrike">
+              <a:defRPr sz="1000" b="0" i="0" u="none" strike="noStrike" cap="none">
                 <a:solidFill>
                   <a:schemeClr val="dk2"/>
                 </a:solidFill>
@@ -7461,7 +7583,7 @@
                 <a:sym typeface="Arial"/>
               </a:defRPr>
             </a:lvl7pPr>
-            <a:lvl8pPr indent="0" lvl="7" marL="0" marR="0" algn="r">
+            <a:lvl8pPr marL="0" marR="0" lvl="7" indent="0" algn="r">
               <a:lnSpc>
                 <a:spcPct val="100000"/>
               </a:lnSpc>
@@ -7477,7 +7599,7 @@
               <a:buSzPts val="1000"/>
               <a:buFont typeface="Arial"/>
               <a:buNone/>
-              <a:defRPr b="0" i="0" sz="1000" u="none" cap="none" strike="noStrike">
+              <a:defRPr sz="1000" b="0" i="0" u="none" strike="noStrike" cap="none">
                 <a:solidFill>
                   <a:schemeClr val="dk2"/>
                 </a:solidFill>
@@ -7487,7 +7609,7 @@
                 <a:sym typeface="Arial"/>
               </a:defRPr>
             </a:lvl8pPr>
-            <a:lvl9pPr indent="0" lvl="8" marL="0" marR="0" algn="r">
+            <a:lvl9pPr marL="0" marR="0" lvl="8" indent="0" algn="r">
               <a:lnSpc>
                 <a:spcPct val="100000"/>
               </a:lnSpc>
@@ -7503,7 +7625,7 @@
               <a:buSzPts val="1000"/>
               <a:buFont typeface="Arial"/>
               <a:buNone/>
-              <a:defRPr b="0" i="0" sz="1000" u="none" cap="none" strike="noStrike">
+              <a:defRPr sz="1000" b="0" i="0" u="none" strike="noStrike" cap="none">
                 <a:solidFill>
                   <a:schemeClr val="dk2"/>
                 </a:solidFill>
@@ -7515,7 +7637,7 @@
             </a:lvl9pPr>
           </a:lstStyle>
           <a:p>
-            <a:pPr indent="0" lvl="0" marL="0" rtl="0" algn="r">
+            <a:pPr marL="0" lvl="0" indent="0" algn="r" rtl="0">
               <a:spcBef>
                 <a:spcPts val="0"/>
               </a:spcBef>
@@ -7526,7 +7648,7 @@
             </a:pPr>
             <a:fld id="{00000000-1234-1234-1234-123412341234}" type="slidenum">
               <a:rPr lang="en-US"/>
-              <a:t>‹#›</a:t>
+              <a:t>‹nº›</a:t>
             </a:fld>
             <a:endParaRPr/>
           </a:p>
@@ -7541,11 +7663,11 @@
 </file>
 
 <file path=ppt/slideLayouts/slideLayout9.xml><?xml version="1.0" encoding="utf-8"?>
-<p:sldLayout xmlns:a="http://schemas.openxmlformats.org/drawingml/2006/main" xmlns:r="http://schemas.openxmlformats.org/officeDocument/2006/relationships" xmlns:mc="http://schemas.openxmlformats.org/markup-compatibility/2006" xmlns:mv="urn:schemas-microsoft-com:mac:vml" xmlns:p="http://schemas.openxmlformats.org/presentationml/2006/main" xmlns:c="http://schemas.openxmlformats.org/drawingml/2006/chart" xmlns:dgm="http://schemas.openxmlformats.org/drawingml/2006/diagram" xmlns:o="urn:schemas-microsoft-com:office:office" xmlns:v="urn:schemas-microsoft-com:vml" xmlns:pvml="urn:schemas-microsoft-com:office:powerpoint" xmlns:com="http://schemas.openxmlformats.org/drawingml/2006/compatibility" xmlns:p14="http://schemas.microsoft.com/office/powerpoint/2010/main" xmlns:p15="http://schemas.microsoft.com/office/powerpoint/2012/main" xmlns:ahyp="http://schemas.microsoft.com/office/drawing/2018/hyperlinkcolor" matchingName="Caption">
+<p:sldLayout xmlns:a="http://schemas.openxmlformats.org/drawingml/2006/main" xmlns:r="http://schemas.openxmlformats.org/officeDocument/2006/relationships" xmlns:p="http://schemas.openxmlformats.org/presentationml/2006/main" matchingName="Caption">
   <p:cSld name="CAPTION_ONLY">
     <p:spTree>
       <p:nvGrpSpPr>
-        <p:cNvPr id="46" name="Shape 46"/>
+        <p:cNvPr id="1" name="Shape 46"/>
         <p:cNvGrpSpPr/>
         <p:nvPr/>
       </p:nvGrpSpPr>
@@ -7560,9 +7682,11 @@
       <p:sp>
         <p:nvSpPr>
           <p:cNvPr id="47" name="Google Shape;47;p18"/>
-          <p:cNvSpPr txBox="1"/>
+          <p:cNvSpPr txBox="1">
+            <a:spLocks noGrp="1"/>
+          </p:cNvSpPr>
           <p:nvPr>
-            <p:ph idx="1" type="body"/>
+            <p:ph type="body" idx="1"/>
           </p:nvPr>
         </p:nvSpPr>
         <p:spPr>
@@ -7579,11 +7703,11 @@
           </a:ln>
         </p:spPr>
         <p:txBody>
-          <a:bodyPr anchorCtr="0" anchor="ctr" bIns="91425" lIns="91425" spcFirstLastPara="1" rIns="91425" wrap="square" tIns="91425">
+          <a:bodyPr spcFirstLastPara="1" wrap="square" lIns="91425" tIns="91425" rIns="91425" bIns="91425" anchor="ctr" anchorCtr="0">
             <a:noAutofit/>
           </a:bodyPr>
           <a:lstStyle>
-            <a:lvl1pPr indent="-228600" lvl="0" marL="457200" algn="l">
+            <a:lvl1pPr marL="457200" lvl="0" indent="-228600" algn="l">
               <a:lnSpc>
                 <a:spcPct val="100000"/>
               </a:lnSpc>
@@ -7598,15 +7722,19 @@
               <a:defRPr/>
             </a:lvl1pPr>
           </a:lstStyle>
-          <a:p/>
+          <a:p>
+            <a:endParaRPr/>
+          </a:p>
         </p:txBody>
       </p:sp>
       <p:sp>
         <p:nvSpPr>
           <p:cNvPr id="48" name="Google Shape;48;p18"/>
-          <p:cNvSpPr txBox="1"/>
+          <p:cNvSpPr txBox="1">
+            <a:spLocks noGrp="1"/>
+          </p:cNvSpPr>
           <p:nvPr>
-            <p:ph idx="12" type="sldNum"/>
+            <p:ph type="sldNum" idx="12"/>
           </p:nvPr>
         </p:nvSpPr>
         <p:spPr>
@@ -7623,11 +7751,11 @@
           </a:ln>
         </p:spPr>
         <p:txBody>
-          <a:bodyPr anchorCtr="0" anchor="ctr" bIns="91425" lIns="91425" spcFirstLastPara="1" rIns="91425" wrap="square" tIns="91425">
+          <a:bodyPr spcFirstLastPara="1" wrap="square" lIns="91425" tIns="91425" rIns="91425" bIns="91425" anchor="ctr" anchorCtr="0">
             <a:noAutofit/>
           </a:bodyPr>
           <a:lstStyle>
-            <a:lvl1pPr indent="0" lvl="0" marL="0" marR="0" algn="r">
+            <a:lvl1pPr marL="0" marR="0" lvl="0" indent="0" algn="r">
               <a:lnSpc>
                 <a:spcPct val="100000"/>
               </a:lnSpc>
@@ -7643,7 +7771,7 @@
               <a:buSzPts val="1000"/>
               <a:buFont typeface="Arial"/>
               <a:buNone/>
-              <a:defRPr b="0" i="0" sz="1000" u="none" cap="none" strike="noStrike">
+              <a:defRPr sz="1000" b="0" i="0" u="none" strike="noStrike" cap="none">
                 <a:solidFill>
                   <a:schemeClr val="dk2"/>
                 </a:solidFill>
@@ -7653,7 +7781,7 @@
                 <a:sym typeface="Arial"/>
               </a:defRPr>
             </a:lvl1pPr>
-            <a:lvl2pPr indent="0" lvl="1" marL="0" marR="0" algn="r">
+            <a:lvl2pPr marL="0" marR="0" lvl="1" indent="0" algn="r">
               <a:lnSpc>
                 <a:spcPct val="100000"/>
               </a:lnSpc>
@@ -7669,7 +7797,7 @@
               <a:buSzPts val="1000"/>
               <a:buFont typeface="Arial"/>
               <a:buNone/>
-              <a:defRPr b="0" i="0" sz="1000" u="none" cap="none" strike="noStrike">
+              <a:defRPr sz="1000" b="0" i="0" u="none" strike="noStrike" cap="none">
                 <a:solidFill>
                   <a:schemeClr val="dk2"/>
                 </a:solidFill>
@@ -7679,7 +7807,7 @@
                 <a:sym typeface="Arial"/>
               </a:defRPr>
             </a:lvl2pPr>
-            <a:lvl3pPr indent="0" lvl="2" marL="0" marR="0" algn="r">
+            <a:lvl3pPr marL="0" marR="0" lvl="2" indent="0" algn="r">
               <a:lnSpc>
                 <a:spcPct val="100000"/>
               </a:lnSpc>
@@ -7695,7 +7823,7 @@
               <a:buSzPts val="1000"/>
               <a:buFont typeface="Arial"/>
               <a:buNone/>
-              <a:defRPr b="0" i="0" sz="1000" u="none" cap="none" strike="noStrike">
+              <a:defRPr sz="1000" b="0" i="0" u="none" strike="noStrike" cap="none">
                 <a:solidFill>
                   <a:schemeClr val="dk2"/>
                 </a:solidFill>
@@ -7705,7 +7833,7 @@
                 <a:sym typeface="Arial"/>
               </a:defRPr>
             </a:lvl3pPr>
-            <a:lvl4pPr indent="0" lvl="3" marL="0" marR="0" algn="r">
+            <a:lvl4pPr marL="0" marR="0" lvl="3" indent="0" algn="r">
               <a:lnSpc>
                 <a:spcPct val="100000"/>
               </a:lnSpc>
@@ -7721,7 +7849,7 @@
               <a:buSzPts val="1000"/>
               <a:buFont typeface="Arial"/>
               <a:buNone/>
-              <a:defRPr b="0" i="0" sz="1000" u="none" cap="none" strike="noStrike">
+              <a:defRPr sz="1000" b="0" i="0" u="none" strike="noStrike" cap="none">
                 <a:solidFill>
                   <a:schemeClr val="dk2"/>
                 </a:solidFill>
@@ -7731,7 +7859,7 @@
                 <a:sym typeface="Arial"/>
               </a:defRPr>
             </a:lvl4pPr>
-            <a:lvl5pPr indent="0" lvl="4" marL="0" marR="0" algn="r">
+            <a:lvl5pPr marL="0" marR="0" lvl="4" indent="0" algn="r">
               <a:lnSpc>
                 <a:spcPct val="100000"/>
               </a:lnSpc>
@@ -7747,7 +7875,7 @@
               <a:buSzPts val="1000"/>
               <a:buFont typeface="Arial"/>
               <a:buNone/>
-              <a:defRPr b="0" i="0" sz="1000" u="none" cap="none" strike="noStrike">
+              <a:defRPr sz="1000" b="0" i="0" u="none" strike="noStrike" cap="none">
                 <a:solidFill>
                   <a:schemeClr val="dk2"/>
                 </a:solidFill>
@@ -7757,7 +7885,7 @@
                 <a:sym typeface="Arial"/>
               </a:defRPr>
             </a:lvl5pPr>
-            <a:lvl6pPr indent="0" lvl="5" marL="0" marR="0" algn="r">
+            <a:lvl6pPr marL="0" marR="0" lvl="5" indent="0" algn="r">
               <a:lnSpc>
                 <a:spcPct val="100000"/>
               </a:lnSpc>
@@ -7773,7 +7901,7 @@
               <a:buSzPts val="1000"/>
               <a:buFont typeface="Arial"/>
               <a:buNone/>
-              <a:defRPr b="0" i="0" sz="1000" u="none" cap="none" strike="noStrike">
+              <a:defRPr sz="1000" b="0" i="0" u="none" strike="noStrike" cap="none">
                 <a:solidFill>
                   <a:schemeClr val="dk2"/>
                 </a:solidFill>
@@ -7783,7 +7911,7 @@
                 <a:sym typeface="Arial"/>
               </a:defRPr>
             </a:lvl6pPr>
-            <a:lvl7pPr indent="0" lvl="6" marL="0" marR="0" algn="r">
+            <a:lvl7pPr marL="0" marR="0" lvl="6" indent="0" algn="r">
               <a:lnSpc>
                 <a:spcPct val="100000"/>
               </a:lnSpc>
@@ -7799,7 +7927,7 @@
               <a:buSzPts val="1000"/>
               <a:buFont typeface="Arial"/>
               <a:buNone/>
-              <a:defRPr b="0" i="0" sz="1000" u="none" cap="none" strike="noStrike">
+              <a:defRPr sz="1000" b="0" i="0" u="none" strike="noStrike" cap="none">
                 <a:solidFill>
                   <a:schemeClr val="dk2"/>
                 </a:solidFill>
@@ -7809,7 +7937,7 @@
                 <a:sym typeface="Arial"/>
               </a:defRPr>
             </a:lvl7pPr>
-            <a:lvl8pPr indent="0" lvl="7" marL="0" marR="0" algn="r">
+            <a:lvl8pPr marL="0" marR="0" lvl="7" indent="0" algn="r">
               <a:lnSpc>
                 <a:spcPct val="100000"/>
               </a:lnSpc>
@@ -7825,7 +7953,7 @@
               <a:buSzPts val="1000"/>
               <a:buFont typeface="Arial"/>
               <a:buNone/>
-              <a:defRPr b="0" i="0" sz="1000" u="none" cap="none" strike="noStrike">
+              <a:defRPr sz="1000" b="0" i="0" u="none" strike="noStrike" cap="none">
                 <a:solidFill>
                   <a:schemeClr val="dk2"/>
                 </a:solidFill>
@@ -7835,7 +7963,7 @@
                 <a:sym typeface="Arial"/>
               </a:defRPr>
             </a:lvl8pPr>
-            <a:lvl9pPr indent="0" lvl="8" marL="0" marR="0" algn="r">
+            <a:lvl9pPr marL="0" marR="0" lvl="8" indent="0" algn="r">
               <a:lnSpc>
                 <a:spcPct val="100000"/>
               </a:lnSpc>
@@ -7851,7 +7979,7 @@
               <a:buSzPts val="1000"/>
               <a:buFont typeface="Arial"/>
               <a:buNone/>
-              <a:defRPr b="0" i="0" sz="1000" u="none" cap="none" strike="noStrike">
+              <a:defRPr sz="1000" b="0" i="0" u="none" strike="noStrike" cap="none">
                 <a:solidFill>
                   <a:schemeClr val="dk2"/>
                 </a:solidFill>
@@ -7863,7 +7991,7 @@
             </a:lvl9pPr>
           </a:lstStyle>
           <a:p>
-            <a:pPr indent="0" lvl="0" marL="0" rtl="0" algn="r">
+            <a:pPr marL="0" lvl="0" indent="0" algn="r" rtl="0">
               <a:spcBef>
                 <a:spcPts val="0"/>
               </a:spcBef>
@@ -7874,7 +8002,7 @@
             </a:pPr>
             <a:fld id="{00000000-1234-1234-1234-123412341234}" type="slidenum">
               <a:rPr lang="en-US"/>
-              <a:t>‹#›</a:t>
+              <a:t>‹nº›</a:t>
             </a:fld>
             <a:endParaRPr/>
           </a:p>
@@ -7889,18 +8017,19 @@
 </file>
 
 <file path=ppt/slideMasters/slideMaster1.xml><?xml version="1.0" encoding="utf-8"?>
-<p:sldMaster xmlns:a="http://schemas.openxmlformats.org/drawingml/2006/main" xmlns:r="http://schemas.openxmlformats.org/officeDocument/2006/relationships" xmlns:mc="http://schemas.openxmlformats.org/markup-compatibility/2006" xmlns:mv="urn:schemas-microsoft-com:mac:vml" xmlns:p="http://schemas.openxmlformats.org/presentationml/2006/main" xmlns:c="http://schemas.openxmlformats.org/drawingml/2006/chart" xmlns:dgm="http://schemas.openxmlformats.org/drawingml/2006/diagram" xmlns:o="urn:schemas-microsoft-com:office:office" xmlns:v="urn:schemas-microsoft-com:vml" xmlns:pvml="urn:schemas-microsoft-com:office:powerpoint" xmlns:com="http://schemas.openxmlformats.org/drawingml/2006/compatibility" xmlns:p14="http://schemas.microsoft.com/office/powerpoint/2010/main" xmlns:p15="http://schemas.microsoft.com/office/powerpoint/2012/main" xmlns:ahyp="http://schemas.microsoft.com/office/drawing/2018/hyperlinkcolor">
+<p:sldMaster xmlns:a="http://schemas.openxmlformats.org/drawingml/2006/main" xmlns:r="http://schemas.openxmlformats.org/officeDocument/2006/relationships" xmlns:p="http://schemas.openxmlformats.org/presentationml/2006/main">
   <p:cSld name="simple-light-2">
     <p:bg>
       <p:bgPr>
         <a:solidFill>
           <a:schemeClr val="lt1"/>
         </a:solidFill>
+        <a:effectLst/>
       </p:bgPr>
     </p:bg>
     <p:spTree>
       <p:nvGrpSpPr>
-        <p:cNvPr id="5" name="Shape 5"/>
+        <p:cNvPr id="1" name="Shape 5"/>
         <p:cNvGrpSpPr/>
         <p:nvPr/>
       </p:nvGrpSpPr>
@@ -7915,7 +8044,9 @@
       <p:sp>
         <p:nvSpPr>
           <p:cNvPr id="6" name="Google Shape;6;p9"/>
-          <p:cNvSpPr txBox="1"/>
+          <p:cNvSpPr txBox="1">
+            <a:spLocks noGrp="1"/>
+          </p:cNvSpPr>
           <p:nvPr>
             <p:ph type="title"/>
           </p:nvPr>
@@ -7934,11 +8065,11 @@
           </a:ln>
         </p:spPr>
         <p:txBody>
-          <a:bodyPr anchorCtr="0" anchor="t" bIns="91425" lIns="91425" spcFirstLastPara="1" rIns="91425" wrap="square" tIns="91425">
+          <a:bodyPr spcFirstLastPara="1" wrap="square" lIns="91425" tIns="91425" rIns="91425" bIns="91425" anchor="t" anchorCtr="0">
             <a:noAutofit/>
           </a:bodyPr>
           <a:lstStyle>
-            <a:lvl1pPr lvl="0" marR="0" rtl="0" algn="l">
+            <a:lvl1pPr marR="0" lvl="0" algn="l" rtl="0">
               <a:lnSpc>
                 <a:spcPct val="100000"/>
               </a:lnSpc>
@@ -7954,7 +8085,7 @@
               <a:buSzPts val="2800"/>
               <a:buFont typeface="Arial"/>
               <a:buNone/>
-              <a:defRPr b="0" i="0" sz="2800" u="none" cap="none" strike="noStrike">
+              <a:defRPr sz="2800" b="0" i="0" u="none" strike="noStrike" cap="none">
                 <a:solidFill>
                   <a:schemeClr val="dk1"/>
                 </a:solidFill>
@@ -7964,7 +8095,7 @@
                 <a:sym typeface="Arial"/>
               </a:defRPr>
             </a:lvl1pPr>
-            <a:lvl2pPr lvl="1" marR="0" rtl="0" algn="l">
+            <a:lvl2pPr marR="0" lvl="1" algn="l" rtl="0">
               <a:lnSpc>
                 <a:spcPct val="100000"/>
               </a:lnSpc>
@@ -7980,7 +8111,7 @@
               <a:buSzPts val="2800"/>
               <a:buFont typeface="Arial"/>
               <a:buNone/>
-              <a:defRPr b="0" i="0" sz="2800" u="none" cap="none" strike="noStrike">
+              <a:defRPr sz="2800" b="0" i="0" u="none" strike="noStrike" cap="none">
                 <a:solidFill>
                   <a:schemeClr val="dk1"/>
                 </a:solidFill>
@@ -7990,7 +8121,7 @@
                 <a:sym typeface="Arial"/>
               </a:defRPr>
             </a:lvl2pPr>
-            <a:lvl3pPr lvl="2" marR="0" rtl="0" algn="l">
+            <a:lvl3pPr marR="0" lvl="2" algn="l" rtl="0">
               <a:lnSpc>
                 <a:spcPct val="100000"/>
               </a:lnSpc>
@@ -8006,7 +8137,7 @@
               <a:buSzPts val="2800"/>
               <a:buFont typeface="Arial"/>
               <a:buNone/>
-              <a:defRPr b="0" i="0" sz="2800" u="none" cap="none" strike="noStrike">
+              <a:defRPr sz="2800" b="0" i="0" u="none" strike="noStrike" cap="none">
                 <a:solidFill>
                   <a:schemeClr val="dk1"/>
                 </a:solidFill>
@@ -8016,7 +8147,7 @@
                 <a:sym typeface="Arial"/>
               </a:defRPr>
             </a:lvl3pPr>
-            <a:lvl4pPr lvl="3" marR="0" rtl="0" algn="l">
+            <a:lvl4pPr marR="0" lvl="3" algn="l" rtl="0">
               <a:lnSpc>
                 <a:spcPct val="100000"/>
               </a:lnSpc>
@@ -8032,7 +8163,7 @@
               <a:buSzPts val="2800"/>
               <a:buFont typeface="Arial"/>
               <a:buNone/>
-              <a:defRPr b="0" i="0" sz="2800" u="none" cap="none" strike="noStrike">
+              <a:defRPr sz="2800" b="0" i="0" u="none" strike="noStrike" cap="none">
                 <a:solidFill>
                   <a:schemeClr val="dk1"/>
                 </a:solidFill>
@@ -8042,7 +8173,7 @@
                 <a:sym typeface="Arial"/>
               </a:defRPr>
             </a:lvl4pPr>
-            <a:lvl5pPr lvl="4" marR="0" rtl="0" algn="l">
+            <a:lvl5pPr marR="0" lvl="4" algn="l" rtl="0">
               <a:lnSpc>
                 <a:spcPct val="100000"/>
               </a:lnSpc>
@@ -8058,7 +8189,7 @@
               <a:buSzPts val="2800"/>
               <a:buFont typeface="Arial"/>
               <a:buNone/>
-              <a:defRPr b="0" i="0" sz="2800" u="none" cap="none" strike="noStrike">
+              <a:defRPr sz="2800" b="0" i="0" u="none" strike="noStrike" cap="none">
                 <a:solidFill>
                   <a:schemeClr val="dk1"/>
                 </a:solidFill>
@@ -8068,7 +8199,7 @@
                 <a:sym typeface="Arial"/>
               </a:defRPr>
             </a:lvl5pPr>
-            <a:lvl6pPr lvl="5" marR="0" rtl="0" algn="l">
+            <a:lvl6pPr marR="0" lvl="5" algn="l" rtl="0">
               <a:lnSpc>
                 <a:spcPct val="100000"/>
               </a:lnSpc>
@@ -8084,7 +8215,7 @@
               <a:buSzPts val="2800"/>
               <a:buFont typeface="Arial"/>
               <a:buNone/>
-              <a:defRPr b="0" i="0" sz="2800" u="none" cap="none" strike="noStrike">
+              <a:defRPr sz="2800" b="0" i="0" u="none" strike="noStrike" cap="none">
                 <a:solidFill>
                   <a:schemeClr val="dk1"/>
                 </a:solidFill>
@@ -8094,7 +8225,7 @@
                 <a:sym typeface="Arial"/>
               </a:defRPr>
             </a:lvl6pPr>
-            <a:lvl7pPr lvl="6" marR="0" rtl="0" algn="l">
+            <a:lvl7pPr marR="0" lvl="6" algn="l" rtl="0">
               <a:lnSpc>
                 <a:spcPct val="100000"/>
               </a:lnSpc>
@@ -8110,7 +8241,7 @@
               <a:buSzPts val="2800"/>
               <a:buFont typeface="Arial"/>
               <a:buNone/>
-              <a:defRPr b="0" i="0" sz="2800" u="none" cap="none" strike="noStrike">
+              <a:defRPr sz="2800" b="0" i="0" u="none" strike="noStrike" cap="none">
                 <a:solidFill>
                   <a:schemeClr val="dk1"/>
                 </a:solidFill>
@@ -8120,7 +8251,7 @@
                 <a:sym typeface="Arial"/>
               </a:defRPr>
             </a:lvl7pPr>
-            <a:lvl8pPr lvl="7" marR="0" rtl="0" algn="l">
+            <a:lvl8pPr marR="0" lvl="7" algn="l" rtl="0">
               <a:lnSpc>
                 <a:spcPct val="100000"/>
               </a:lnSpc>
@@ -8136,7 +8267,7 @@
               <a:buSzPts val="2800"/>
               <a:buFont typeface="Arial"/>
               <a:buNone/>
-              <a:defRPr b="0" i="0" sz="2800" u="none" cap="none" strike="noStrike">
+              <a:defRPr sz="2800" b="0" i="0" u="none" strike="noStrike" cap="none">
                 <a:solidFill>
                   <a:schemeClr val="dk1"/>
                 </a:solidFill>
@@ -8146,7 +8277,7 @@
                 <a:sym typeface="Arial"/>
               </a:defRPr>
             </a:lvl8pPr>
-            <a:lvl9pPr lvl="8" marR="0" rtl="0" algn="l">
+            <a:lvl9pPr marR="0" lvl="8" algn="l" rtl="0">
               <a:lnSpc>
                 <a:spcPct val="100000"/>
               </a:lnSpc>
@@ -8162,7 +8293,7 @@
               <a:buSzPts val="2800"/>
               <a:buFont typeface="Arial"/>
               <a:buNone/>
-              <a:defRPr b="0" i="0" sz="2800" u="none" cap="none" strike="noStrike">
+              <a:defRPr sz="2800" b="0" i="0" u="none" strike="noStrike" cap="none">
                 <a:solidFill>
                   <a:schemeClr val="dk1"/>
                 </a:solidFill>
@@ -8173,15 +8304,19 @@
               </a:defRPr>
             </a:lvl9pPr>
           </a:lstStyle>
-          <a:p/>
+          <a:p>
+            <a:endParaRPr/>
+          </a:p>
         </p:txBody>
       </p:sp>
       <p:sp>
         <p:nvSpPr>
           <p:cNvPr id="7" name="Google Shape;7;p9"/>
-          <p:cNvSpPr txBox="1"/>
+          <p:cNvSpPr txBox="1">
+            <a:spLocks noGrp="1"/>
+          </p:cNvSpPr>
           <p:nvPr>
-            <p:ph idx="1" type="body"/>
+            <p:ph type="body" idx="1"/>
           </p:nvPr>
         </p:nvSpPr>
         <p:spPr>
@@ -8198,11 +8333,11 @@
           </a:ln>
         </p:spPr>
         <p:txBody>
-          <a:bodyPr anchorCtr="0" anchor="t" bIns="91425" lIns="91425" spcFirstLastPara="1" rIns="91425" wrap="square" tIns="91425">
+          <a:bodyPr spcFirstLastPara="1" wrap="square" lIns="91425" tIns="91425" rIns="91425" bIns="91425" anchor="t" anchorCtr="0">
             <a:noAutofit/>
           </a:bodyPr>
           <a:lstStyle>
-            <a:lvl1pPr indent="-342900" lvl="0" marL="457200" marR="0" rtl="0" algn="l">
+            <a:lvl1pPr marL="457200" marR="0" lvl="0" indent="-342900" algn="l" rtl="0">
               <a:lnSpc>
                 <a:spcPct val="115000"/>
               </a:lnSpc>
@@ -8218,7 +8353,7 @@
               <a:buSzPts val="1800"/>
               <a:buFont typeface="Arial"/>
               <a:buChar char="●"/>
-              <a:defRPr b="0" i="0" sz="1800" u="none" cap="none" strike="noStrike">
+              <a:defRPr sz="1800" b="0" i="0" u="none" strike="noStrike" cap="none">
                 <a:solidFill>
                   <a:schemeClr val="dk2"/>
                 </a:solidFill>
@@ -8228,7 +8363,7 @@
                 <a:sym typeface="Arial"/>
               </a:defRPr>
             </a:lvl1pPr>
-            <a:lvl2pPr indent="-317500" lvl="1" marL="914400" marR="0" rtl="0" algn="l">
+            <a:lvl2pPr marL="914400" marR="0" lvl="1" indent="-317500" algn="l" rtl="0">
               <a:lnSpc>
                 <a:spcPct val="115000"/>
               </a:lnSpc>
@@ -8244,7 +8379,7 @@
               <a:buSzPts val="1400"/>
               <a:buFont typeface="Arial"/>
               <a:buChar char="○"/>
-              <a:defRPr b="0" i="0" sz="1400" u="none" cap="none" strike="noStrike">
+              <a:defRPr sz="1400" b="0" i="0" u="none" strike="noStrike" cap="none">
                 <a:solidFill>
                   <a:schemeClr val="dk2"/>
                 </a:solidFill>
@@ -8254,7 +8389,7 @@
                 <a:sym typeface="Arial"/>
               </a:defRPr>
             </a:lvl2pPr>
-            <a:lvl3pPr indent="-317500" lvl="2" marL="1371600" marR="0" rtl="0" algn="l">
+            <a:lvl3pPr marL="1371600" marR="0" lvl="2" indent="-317500" algn="l" rtl="0">
               <a:lnSpc>
                 <a:spcPct val="115000"/>
               </a:lnSpc>
@@ -8270,7 +8405,7 @@
               <a:buSzPts val="1400"/>
               <a:buFont typeface="Arial"/>
               <a:buChar char="■"/>
-              <a:defRPr b="0" i="0" sz="1400" u="none" cap="none" strike="noStrike">
+              <a:defRPr sz="1400" b="0" i="0" u="none" strike="noStrike" cap="none">
                 <a:solidFill>
                   <a:schemeClr val="dk2"/>
                 </a:solidFill>
@@ -8280,7 +8415,7 @@
                 <a:sym typeface="Arial"/>
               </a:defRPr>
             </a:lvl3pPr>
-            <a:lvl4pPr indent="-317500" lvl="3" marL="1828800" marR="0" rtl="0" algn="l">
+            <a:lvl4pPr marL="1828800" marR="0" lvl="3" indent="-317500" algn="l" rtl="0">
               <a:lnSpc>
                 <a:spcPct val="115000"/>
               </a:lnSpc>
@@ -8296,7 +8431,7 @@
               <a:buSzPts val="1400"/>
               <a:buFont typeface="Arial"/>
               <a:buChar char="●"/>
-              <a:defRPr b="0" i="0" sz="1400" u="none" cap="none" strike="noStrike">
+              <a:defRPr sz="1400" b="0" i="0" u="none" strike="noStrike" cap="none">
                 <a:solidFill>
                   <a:schemeClr val="dk2"/>
                 </a:solidFill>
@@ -8306,7 +8441,7 @@
                 <a:sym typeface="Arial"/>
               </a:defRPr>
             </a:lvl4pPr>
-            <a:lvl5pPr indent="-317500" lvl="4" marL="2286000" marR="0" rtl="0" algn="l">
+            <a:lvl5pPr marL="2286000" marR="0" lvl="4" indent="-317500" algn="l" rtl="0">
               <a:lnSpc>
                 <a:spcPct val="115000"/>
               </a:lnSpc>
@@ -8322,7 +8457,7 @@
               <a:buSzPts val="1400"/>
               <a:buFont typeface="Arial"/>
               <a:buChar char="○"/>
-              <a:defRPr b="0" i="0" sz="1400" u="none" cap="none" strike="noStrike">
+              <a:defRPr sz="1400" b="0" i="0" u="none" strike="noStrike" cap="none">
                 <a:solidFill>
                   <a:schemeClr val="dk2"/>
                 </a:solidFill>
@@ -8332,7 +8467,7 @@
                 <a:sym typeface="Arial"/>
               </a:defRPr>
             </a:lvl5pPr>
-            <a:lvl6pPr indent="-317500" lvl="5" marL="2743200" marR="0" rtl="0" algn="l">
+            <a:lvl6pPr marL="2743200" marR="0" lvl="5" indent="-317500" algn="l" rtl="0">
               <a:lnSpc>
                 <a:spcPct val="115000"/>
               </a:lnSpc>
@@ -8348,7 +8483,7 @@
               <a:buSzPts val="1400"/>
               <a:buFont typeface="Arial"/>
               <a:buChar char="■"/>
-              <a:defRPr b="0" i="0" sz="1400" u="none" cap="none" strike="noStrike">
+              <a:defRPr sz="1400" b="0" i="0" u="none" strike="noStrike" cap="none">
                 <a:solidFill>
                   <a:schemeClr val="dk2"/>
                 </a:solidFill>
@@ -8358,7 +8493,7 @@
                 <a:sym typeface="Arial"/>
               </a:defRPr>
             </a:lvl6pPr>
-            <a:lvl7pPr indent="-317500" lvl="6" marL="3200400" marR="0" rtl="0" algn="l">
+            <a:lvl7pPr marL="3200400" marR="0" lvl="6" indent="-317500" algn="l" rtl="0">
               <a:lnSpc>
                 <a:spcPct val="115000"/>
               </a:lnSpc>
@@ -8374,7 +8509,7 @@
               <a:buSzPts val="1400"/>
               <a:buFont typeface="Arial"/>
               <a:buChar char="●"/>
-              <a:defRPr b="0" i="0" sz="1400" u="none" cap="none" strike="noStrike">
+              <a:defRPr sz="1400" b="0" i="0" u="none" strike="noStrike" cap="none">
                 <a:solidFill>
                   <a:schemeClr val="dk2"/>
                 </a:solidFill>
@@ -8384,7 +8519,7 @@
                 <a:sym typeface="Arial"/>
               </a:defRPr>
             </a:lvl7pPr>
-            <a:lvl8pPr indent="-317500" lvl="7" marL="3657600" marR="0" rtl="0" algn="l">
+            <a:lvl8pPr marL="3657600" marR="0" lvl="7" indent="-317500" algn="l" rtl="0">
               <a:lnSpc>
                 <a:spcPct val="115000"/>
               </a:lnSpc>
@@ -8400,7 +8535,7 @@
               <a:buSzPts val="1400"/>
               <a:buFont typeface="Arial"/>
               <a:buChar char="○"/>
-              <a:defRPr b="0" i="0" sz="1400" u="none" cap="none" strike="noStrike">
+              <a:defRPr sz="1400" b="0" i="0" u="none" strike="noStrike" cap="none">
                 <a:solidFill>
                   <a:schemeClr val="dk2"/>
                 </a:solidFill>
@@ -8410,7 +8545,7 @@
                 <a:sym typeface="Arial"/>
               </a:defRPr>
             </a:lvl8pPr>
-            <a:lvl9pPr indent="-317500" lvl="8" marL="4114800" marR="0" rtl="0" algn="l">
+            <a:lvl9pPr marL="4114800" marR="0" lvl="8" indent="-317500" algn="l" rtl="0">
               <a:lnSpc>
                 <a:spcPct val="115000"/>
               </a:lnSpc>
@@ -8426,7 +8561,7 @@
               <a:buSzPts val="1400"/>
               <a:buFont typeface="Arial"/>
               <a:buChar char="■"/>
-              <a:defRPr b="0" i="0" sz="1400" u="none" cap="none" strike="noStrike">
+              <a:defRPr sz="1400" b="0" i="0" u="none" strike="noStrike" cap="none">
                 <a:solidFill>
                   <a:schemeClr val="dk2"/>
                 </a:solidFill>
@@ -8437,15 +8572,19 @@
               </a:defRPr>
             </a:lvl9pPr>
           </a:lstStyle>
-          <a:p/>
+          <a:p>
+            <a:endParaRPr/>
+          </a:p>
         </p:txBody>
       </p:sp>
       <p:sp>
         <p:nvSpPr>
           <p:cNvPr id="8" name="Google Shape;8;p9"/>
-          <p:cNvSpPr txBox="1"/>
+          <p:cNvSpPr txBox="1">
+            <a:spLocks noGrp="1"/>
+          </p:cNvSpPr>
           <p:nvPr>
-            <p:ph idx="12" type="sldNum"/>
+            <p:ph type="sldNum" idx="12"/>
           </p:nvPr>
         </p:nvSpPr>
         <p:spPr>
@@ -8462,11 +8601,11 @@
           </a:ln>
         </p:spPr>
         <p:txBody>
-          <a:bodyPr anchorCtr="0" anchor="ctr" bIns="91425" lIns="91425" spcFirstLastPara="1" rIns="91425" wrap="square" tIns="91425">
+          <a:bodyPr spcFirstLastPara="1" wrap="square" lIns="91425" tIns="91425" rIns="91425" bIns="91425" anchor="ctr" anchorCtr="0">
             <a:noAutofit/>
           </a:bodyPr>
           <a:lstStyle>
-            <a:lvl1pPr indent="0" lvl="0" marL="0" marR="0" rtl="0" algn="r">
+            <a:lvl1pPr marL="0" marR="0" lvl="0" indent="0" algn="r" rtl="0">
               <a:lnSpc>
                 <a:spcPct val="100000"/>
               </a:lnSpc>
@@ -8482,7 +8621,7 @@
               <a:buSzPts val="1000"/>
               <a:buFont typeface="Arial"/>
               <a:buNone/>
-              <a:defRPr b="0" i="0" sz="1000" u="none" cap="none" strike="noStrike">
+              <a:defRPr sz="1000" b="0" i="0" u="none" strike="noStrike" cap="none">
                 <a:solidFill>
                   <a:schemeClr val="dk2"/>
                 </a:solidFill>
@@ -8492,7 +8631,7 @@
                 <a:sym typeface="Arial"/>
               </a:defRPr>
             </a:lvl1pPr>
-            <a:lvl2pPr indent="0" lvl="1" marL="0" marR="0" rtl="0" algn="r">
+            <a:lvl2pPr marL="0" marR="0" lvl="1" indent="0" algn="r" rtl="0">
               <a:lnSpc>
                 <a:spcPct val="100000"/>
               </a:lnSpc>
@@ -8508,7 +8647,7 @@
               <a:buSzPts val="1000"/>
               <a:buFont typeface="Arial"/>
               <a:buNone/>
-              <a:defRPr b="0" i="0" sz="1000" u="none" cap="none" strike="noStrike">
+              <a:defRPr sz="1000" b="0" i="0" u="none" strike="noStrike" cap="none">
                 <a:solidFill>
                   <a:schemeClr val="dk2"/>
                 </a:solidFill>
@@ -8518,7 +8657,7 @@
                 <a:sym typeface="Arial"/>
               </a:defRPr>
             </a:lvl2pPr>
-            <a:lvl3pPr indent="0" lvl="2" marL="0" marR="0" rtl="0" algn="r">
+            <a:lvl3pPr marL="0" marR="0" lvl="2" indent="0" algn="r" rtl="0">
               <a:lnSpc>
                 <a:spcPct val="100000"/>
               </a:lnSpc>
@@ -8534,7 +8673,7 @@
               <a:buSzPts val="1000"/>
               <a:buFont typeface="Arial"/>
               <a:buNone/>
-              <a:defRPr b="0" i="0" sz="1000" u="none" cap="none" strike="noStrike">
+              <a:defRPr sz="1000" b="0" i="0" u="none" strike="noStrike" cap="none">
                 <a:solidFill>
                   <a:schemeClr val="dk2"/>
                 </a:solidFill>
@@ -8544,7 +8683,7 @@
                 <a:sym typeface="Arial"/>
               </a:defRPr>
             </a:lvl3pPr>
-            <a:lvl4pPr indent="0" lvl="3" marL="0" marR="0" rtl="0" algn="r">
+            <a:lvl4pPr marL="0" marR="0" lvl="3" indent="0" algn="r" rtl="0">
               <a:lnSpc>
                 <a:spcPct val="100000"/>
               </a:lnSpc>
@@ -8560,7 +8699,7 @@
               <a:buSzPts val="1000"/>
               <a:buFont typeface="Arial"/>
               <a:buNone/>
-              <a:defRPr b="0" i="0" sz="1000" u="none" cap="none" strike="noStrike">
+              <a:defRPr sz="1000" b="0" i="0" u="none" strike="noStrike" cap="none">
                 <a:solidFill>
                   <a:schemeClr val="dk2"/>
                 </a:solidFill>
@@ -8570,7 +8709,7 @@
                 <a:sym typeface="Arial"/>
               </a:defRPr>
             </a:lvl4pPr>
-            <a:lvl5pPr indent="0" lvl="4" marL="0" marR="0" rtl="0" algn="r">
+            <a:lvl5pPr marL="0" marR="0" lvl="4" indent="0" algn="r" rtl="0">
               <a:lnSpc>
                 <a:spcPct val="100000"/>
               </a:lnSpc>
@@ -8586,7 +8725,7 @@
               <a:buSzPts val="1000"/>
               <a:buFont typeface="Arial"/>
               <a:buNone/>
-              <a:defRPr b="0" i="0" sz="1000" u="none" cap="none" strike="noStrike">
+              <a:defRPr sz="1000" b="0" i="0" u="none" strike="noStrike" cap="none">
                 <a:solidFill>
                   <a:schemeClr val="dk2"/>
                 </a:solidFill>
@@ -8596,7 +8735,7 @@
                 <a:sym typeface="Arial"/>
               </a:defRPr>
             </a:lvl5pPr>
-            <a:lvl6pPr indent="0" lvl="5" marL="0" marR="0" rtl="0" algn="r">
+            <a:lvl6pPr marL="0" marR="0" lvl="5" indent="0" algn="r" rtl="0">
               <a:lnSpc>
                 <a:spcPct val="100000"/>
               </a:lnSpc>
@@ -8612,7 +8751,7 @@
               <a:buSzPts val="1000"/>
               <a:buFont typeface="Arial"/>
               <a:buNone/>
-              <a:defRPr b="0" i="0" sz="1000" u="none" cap="none" strike="noStrike">
+              <a:defRPr sz="1000" b="0" i="0" u="none" strike="noStrike" cap="none">
                 <a:solidFill>
                   <a:schemeClr val="dk2"/>
                 </a:solidFill>
@@ -8622,7 +8761,7 @@
                 <a:sym typeface="Arial"/>
               </a:defRPr>
             </a:lvl6pPr>
-            <a:lvl7pPr indent="0" lvl="6" marL="0" marR="0" rtl="0" algn="r">
+            <a:lvl7pPr marL="0" marR="0" lvl="6" indent="0" algn="r" rtl="0">
               <a:lnSpc>
                 <a:spcPct val="100000"/>
               </a:lnSpc>
@@ -8638,7 +8777,7 @@
               <a:buSzPts val="1000"/>
               <a:buFont typeface="Arial"/>
               <a:buNone/>
-              <a:defRPr b="0" i="0" sz="1000" u="none" cap="none" strike="noStrike">
+              <a:defRPr sz="1000" b="0" i="0" u="none" strike="noStrike" cap="none">
                 <a:solidFill>
                   <a:schemeClr val="dk2"/>
                 </a:solidFill>
@@ -8648,7 +8787,7 @@
                 <a:sym typeface="Arial"/>
               </a:defRPr>
             </a:lvl7pPr>
-            <a:lvl8pPr indent="0" lvl="7" marL="0" marR="0" rtl="0" algn="r">
+            <a:lvl8pPr marL="0" marR="0" lvl="7" indent="0" algn="r" rtl="0">
               <a:lnSpc>
                 <a:spcPct val="100000"/>
               </a:lnSpc>
@@ -8664,7 +8803,7 @@
               <a:buSzPts val="1000"/>
               <a:buFont typeface="Arial"/>
               <a:buNone/>
-              <a:defRPr b="0" i="0" sz="1000" u="none" cap="none" strike="noStrike">
+              <a:defRPr sz="1000" b="0" i="0" u="none" strike="noStrike" cap="none">
                 <a:solidFill>
                   <a:schemeClr val="dk2"/>
                 </a:solidFill>
@@ -8674,7 +8813,7 @@
                 <a:sym typeface="Arial"/>
               </a:defRPr>
             </a:lvl8pPr>
-            <a:lvl9pPr indent="0" lvl="8" marL="0" marR="0" rtl="0" algn="r">
+            <a:lvl9pPr marL="0" marR="0" lvl="8" indent="0" algn="r" rtl="0">
               <a:lnSpc>
                 <a:spcPct val="100000"/>
               </a:lnSpc>
@@ -8690,7 +8829,7 @@
               <a:buSzPts val="1000"/>
               <a:buFont typeface="Arial"/>
               <a:buNone/>
-              <a:defRPr b="0" i="0" sz="1000" u="none" cap="none" strike="noStrike">
+              <a:defRPr sz="1000" b="0" i="0" u="none" strike="noStrike" cap="none">
                 <a:solidFill>
                   <a:schemeClr val="dk2"/>
                 </a:solidFill>
@@ -8702,7 +8841,7 @@
             </a:lvl9pPr>
           </a:lstStyle>
           <a:p>
-            <a:pPr indent="0" lvl="0" marL="0" rtl="0" algn="r">
+            <a:pPr marL="0" lvl="0" indent="0" algn="r" rtl="0">
               <a:spcBef>
                 <a:spcPts val="0"/>
               </a:spcBef>
@@ -8713,7 +8852,7 @@
             </a:pPr>
             <a:fld id="{00000000-1234-1234-1234-123412341234}" type="slidenum">
               <a:rPr lang="en-US"/>
-              <a:t>‹#›</a:t>
+              <a:t>‹nº›</a:t>
             </a:fld>
             <a:endParaRPr/>
           </a:p>
@@ -8732,7 +8871,7 @@
           </a:xfrm>
           <a:prstGeom prst="round1Rect">
             <a:avLst>
-              <a:gd fmla="val 3380" name="adj"/>
+              <a:gd name="adj" fmla="val 3380"/>
             </a:avLst>
           </a:prstGeom>
           <a:solidFill>
@@ -8743,12 +8882,12 @@
           </a:ln>
         </p:spPr>
         <p:txBody>
-          <a:bodyPr anchorCtr="0" anchor="ctr" bIns="91425" lIns="91425" spcFirstLastPara="1" rIns="91425" wrap="square" tIns="91425">
+          <a:bodyPr spcFirstLastPara="1" wrap="square" lIns="91425" tIns="91425" rIns="91425" bIns="91425" anchor="ctr" anchorCtr="0">
             <a:noAutofit/>
           </a:bodyPr>
           <a:lstStyle/>
           <a:p>
-            <a:pPr indent="0" lvl="0" marL="0" marR="0" rtl="0" algn="l">
+            <a:pPr marL="0" marR="0" lvl="0" indent="0" algn="l" rtl="0">
               <a:lnSpc>
                 <a:spcPct val="100000"/>
               </a:lnSpc>
@@ -8765,10 +8904,7 @@
               <a:buFont typeface="Arial"/>
               <a:buNone/>
             </a:pPr>
-            <a:r>
-              <a:t/>
-            </a:r>
-            <a:endParaRPr b="0" i="0" sz="1400" u="none" cap="none" strike="noStrike">
+            <a:endParaRPr sz="1400" b="0" i="0" u="none" strike="noStrike" cap="none">
               <a:solidFill>
                 <a:srgbClr val="000000"/>
               </a:solidFill>
@@ -8782,7 +8918,7 @@
       </p:sp>
     </p:spTree>
   </p:cSld>
-  <p:clrMap accent1="accent1" accent2="accent2" accent3="accent3" accent4="accent4" accent5="accent5" accent6="accent6" bg1="lt1" bg2="dk2" tx1="dk1" tx2="lt2" folHlink="folHlink" hlink="hlink"/>
+  <p:clrMap bg1="lt1" tx1="dk1" bg2="dk2" tx2="lt2" accent1="accent1" accent2="accent2" accent3="accent3" accent4="accent4" accent5="accent5" accent6="accent6" hlink="hlink" folHlink="folHlink"/>
   <p:sldLayoutIdLst>
     <p:sldLayoutId id="2147483649" r:id="rId1"/>
     <p:sldLayoutId id="2147483650" r:id="rId2"/>
@@ -8796,10 +8932,10 @@
     <p:sldLayoutId id="2147483658" r:id="rId10"/>
     <p:sldLayoutId id="2147483659" r:id="rId11"/>
   </p:sldLayoutIdLst>
-  <p:hf dt="0" ftr="0" hdr="0"/>
+  <p:hf hdr="0" ftr="0" dt="0"/>
   <p:txStyles>
     <p:titleStyle>
-      <a:defPPr lvl="0" marR="0" rtl="0" algn="l">
+      <a:defPPr marR="0" lvl="0" algn="l" rtl="0">
         <a:lnSpc>
           <a:spcPct val="100000"/>
         </a:lnSpc>
@@ -8810,7 +8946,7 @@
           <a:spcPts val="0"/>
         </a:spcAft>
       </a:defPPr>
-      <a:lvl1pPr lvl="0" marR="0" rtl="0" algn="l">
+      <a:lvl1pPr marR="0" lvl="0" algn="l" rtl="0">
         <a:lnSpc>
           <a:spcPct val="100000"/>
         </a:lnSpc>
@@ -8824,7 +8960,7 @@
           <a:srgbClr val="000000"/>
         </a:buClr>
         <a:buFont typeface="Arial"/>
-        <a:defRPr b="0" i="0" sz="1400" u="none" cap="none" strike="noStrike">
+        <a:defRPr sz="1400" b="0" i="0" u="none" strike="noStrike" cap="none">
           <a:solidFill>
             <a:srgbClr val="000000"/>
           </a:solidFill>
@@ -8834,7 +8970,7 @@
           <a:sym typeface="Arial"/>
         </a:defRPr>
       </a:lvl1pPr>
-      <a:lvl2pPr lvl="1" marR="0" rtl="0" algn="l">
+      <a:lvl2pPr marR="0" lvl="1" algn="l" rtl="0">
         <a:lnSpc>
           <a:spcPct val="100000"/>
         </a:lnSpc>
@@ -8848,7 +8984,7 @@
           <a:srgbClr val="000000"/>
         </a:buClr>
         <a:buFont typeface="Arial"/>
-        <a:defRPr b="0" i="0" sz="1400" u="none" cap="none" strike="noStrike">
+        <a:defRPr sz="1400" b="0" i="0" u="none" strike="noStrike" cap="none">
           <a:solidFill>
             <a:srgbClr val="000000"/>
           </a:solidFill>
@@ -8858,7 +8994,7 @@
           <a:sym typeface="Arial"/>
         </a:defRPr>
       </a:lvl2pPr>
-      <a:lvl3pPr lvl="2" marR="0" rtl="0" algn="l">
+      <a:lvl3pPr marR="0" lvl="2" algn="l" rtl="0">
         <a:lnSpc>
           <a:spcPct val="100000"/>
         </a:lnSpc>
@@ -8872,7 +9008,7 @@
           <a:srgbClr val="000000"/>
         </a:buClr>
         <a:buFont typeface="Arial"/>
-        <a:defRPr b="0" i="0" sz="1400" u="none" cap="none" strike="noStrike">
+        <a:defRPr sz="1400" b="0" i="0" u="none" strike="noStrike" cap="none">
           <a:solidFill>
             <a:srgbClr val="000000"/>
           </a:solidFill>
@@ -8882,7 +9018,7 @@
           <a:sym typeface="Arial"/>
         </a:defRPr>
       </a:lvl3pPr>
-      <a:lvl4pPr lvl="3" marR="0" rtl="0" algn="l">
+      <a:lvl4pPr marR="0" lvl="3" algn="l" rtl="0">
         <a:lnSpc>
           <a:spcPct val="100000"/>
         </a:lnSpc>
@@ -8896,7 +9032,7 @@
           <a:srgbClr val="000000"/>
         </a:buClr>
         <a:buFont typeface="Arial"/>
-        <a:defRPr b="0" i="0" sz="1400" u="none" cap="none" strike="noStrike">
+        <a:defRPr sz="1400" b="0" i="0" u="none" strike="noStrike" cap="none">
           <a:solidFill>
             <a:srgbClr val="000000"/>
           </a:solidFill>
@@ -8906,7 +9042,7 @@
           <a:sym typeface="Arial"/>
         </a:defRPr>
       </a:lvl4pPr>
-      <a:lvl5pPr lvl="4" marR="0" rtl="0" algn="l">
+      <a:lvl5pPr marR="0" lvl="4" algn="l" rtl="0">
         <a:lnSpc>
           <a:spcPct val="100000"/>
         </a:lnSpc>
@@ -8920,7 +9056,7 @@
           <a:srgbClr val="000000"/>
         </a:buClr>
         <a:buFont typeface="Arial"/>
-        <a:defRPr b="0" i="0" sz="1400" u="none" cap="none" strike="noStrike">
+        <a:defRPr sz="1400" b="0" i="0" u="none" strike="noStrike" cap="none">
           <a:solidFill>
             <a:srgbClr val="000000"/>
           </a:solidFill>
@@ -8930,7 +9066,7 @@
           <a:sym typeface="Arial"/>
         </a:defRPr>
       </a:lvl5pPr>
-      <a:lvl6pPr lvl="5" marR="0" rtl="0" algn="l">
+      <a:lvl6pPr marR="0" lvl="5" algn="l" rtl="0">
         <a:lnSpc>
           <a:spcPct val="100000"/>
         </a:lnSpc>
@@ -8944,7 +9080,7 @@
           <a:srgbClr val="000000"/>
         </a:buClr>
         <a:buFont typeface="Arial"/>
-        <a:defRPr b="0" i="0" sz="1400" u="none" cap="none" strike="noStrike">
+        <a:defRPr sz="1400" b="0" i="0" u="none" strike="noStrike" cap="none">
           <a:solidFill>
             <a:srgbClr val="000000"/>
           </a:solidFill>
@@ -8954,7 +9090,7 @@
           <a:sym typeface="Arial"/>
         </a:defRPr>
       </a:lvl6pPr>
-      <a:lvl7pPr lvl="6" marR="0" rtl="0" algn="l">
+      <a:lvl7pPr marR="0" lvl="6" algn="l" rtl="0">
         <a:lnSpc>
           <a:spcPct val="100000"/>
         </a:lnSpc>
@@ -8968,7 +9104,7 @@
           <a:srgbClr val="000000"/>
         </a:buClr>
         <a:buFont typeface="Arial"/>
-        <a:defRPr b="0" i="0" sz="1400" u="none" cap="none" strike="noStrike">
+        <a:defRPr sz="1400" b="0" i="0" u="none" strike="noStrike" cap="none">
           <a:solidFill>
             <a:srgbClr val="000000"/>
           </a:solidFill>
@@ -8978,7 +9114,7 @@
           <a:sym typeface="Arial"/>
         </a:defRPr>
       </a:lvl7pPr>
-      <a:lvl8pPr lvl="7" marR="0" rtl="0" algn="l">
+      <a:lvl8pPr marR="0" lvl="7" algn="l" rtl="0">
         <a:lnSpc>
           <a:spcPct val="100000"/>
         </a:lnSpc>
@@ -8992,7 +9128,7 @@
           <a:srgbClr val="000000"/>
         </a:buClr>
         <a:buFont typeface="Arial"/>
-        <a:defRPr b="0" i="0" sz="1400" u="none" cap="none" strike="noStrike">
+        <a:defRPr sz="1400" b="0" i="0" u="none" strike="noStrike" cap="none">
           <a:solidFill>
             <a:srgbClr val="000000"/>
           </a:solidFill>
@@ -9002,7 +9138,7 @@
           <a:sym typeface="Arial"/>
         </a:defRPr>
       </a:lvl8pPr>
-      <a:lvl9pPr lvl="8" marR="0" rtl="0" algn="l">
+      <a:lvl9pPr marR="0" lvl="8" algn="l" rtl="0">
         <a:lnSpc>
           <a:spcPct val="100000"/>
         </a:lnSpc>
@@ -9016,7 +9152,7 @@
           <a:srgbClr val="000000"/>
         </a:buClr>
         <a:buFont typeface="Arial"/>
-        <a:defRPr b="0" i="0" sz="1400" u="none" cap="none" strike="noStrike">
+        <a:defRPr sz="1400" b="0" i="0" u="none" strike="noStrike" cap="none">
           <a:solidFill>
             <a:srgbClr val="000000"/>
           </a:solidFill>
@@ -9028,7 +9164,7 @@
       </a:lvl9pPr>
     </p:titleStyle>
     <p:bodyStyle>
-      <a:defPPr lvl="0" marR="0" rtl="0" algn="l">
+      <a:defPPr marR="0" lvl="0" algn="l" rtl="0">
         <a:lnSpc>
           <a:spcPct val="100000"/>
         </a:lnSpc>
@@ -9039,7 +9175,7 @@
           <a:spcPts val="0"/>
         </a:spcAft>
       </a:defPPr>
-      <a:lvl1pPr lvl="0" marR="0" rtl="0" algn="l">
+      <a:lvl1pPr marR="0" lvl="0" algn="l" rtl="0">
         <a:lnSpc>
           <a:spcPct val="100000"/>
         </a:lnSpc>
@@ -9053,7 +9189,7 @@
           <a:srgbClr val="000000"/>
         </a:buClr>
         <a:buFont typeface="Arial"/>
-        <a:defRPr b="0" i="0" sz="1400" u="none" cap="none" strike="noStrike">
+        <a:defRPr sz="1400" b="0" i="0" u="none" strike="noStrike" cap="none">
           <a:solidFill>
             <a:srgbClr val="000000"/>
           </a:solidFill>
@@ -9063,7 +9199,7 @@
           <a:sym typeface="Arial"/>
         </a:defRPr>
       </a:lvl1pPr>
-      <a:lvl2pPr lvl="1" marR="0" rtl="0" algn="l">
+      <a:lvl2pPr marR="0" lvl="1" algn="l" rtl="0">
         <a:lnSpc>
           <a:spcPct val="100000"/>
         </a:lnSpc>
@@ -9077,7 +9213,7 @@
           <a:srgbClr val="000000"/>
         </a:buClr>
         <a:buFont typeface="Arial"/>
-        <a:defRPr b="0" i="0" sz="1400" u="none" cap="none" strike="noStrike">
+        <a:defRPr sz="1400" b="0" i="0" u="none" strike="noStrike" cap="none">
           <a:solidFill>
             <a:srgbClr val="000000"/>
           </a:solidFill>
@@ -9087,7 +9223,7 @@
           <a:sym typeface="Arial"/>
         </a:defRPr>
       </a:lvl2pPr>
-      <a:lvl3pPr lvl="2" marR="0" rtl="0" algn="l">
+      <a:lvl3pPr marR="0" lvl="2" algn="l" rtl="0">
         <a:lnSpc>
           <a:spcPct val="100000"/>
         </a:lnSpc>
@@ -9101,7 +9237,7 @@
           <a:srgbClr val="000000"/>
         </a:buClr>
         <a:buFont typeface="Arial"/>
-        <a:defRPr b="0" i="0" sz="1400" u="none" cap="none" strike="noStrike">
+        <a:defRPr sz="1400" b="0" i="0" u="none" strike="noStrike" cap="none">
           <a:solidFill>
             <a:srgbClr val="000000"/>
           </a:solidFill>
@@ -9111,7 +9247,7 @@
           <a:sym typeface="Arial"/>
         </a:defRPr>
       </a:lvl3pPr>
-      <a:lvl4pPr lvl="3" marR="0" rtl="0" algn="l">
+      <a:lvl4pPr marR="0" lvl="3" algn="l" rtl="0">
         <a:lnSpc>
           <a:spcPct val="100000"/>
         </a:lnSpc>
@@ -9125,7 +9261,7 @@
           <a:srgbClr val="000000"/>
         </a:buClr>
         <a:buFont typeface="Arial"/>
-        <a:defRPr b="0" i="0" sz="1400" u="none" cap="none" strike="noStrike">
+        <a:defRPr sz="1400" b="0" i="0" u="none" strike="noStrike" cap="none">
           <a:solidFill>
             <a:srgbClr val="000000"/>
           </a:solidFill>
@@ -9135,7 +9271,7 @@
           <a:sym typeface="Arial"/>
         </a:defRPr>
       </a:lvl4pPr>
-      <a:lvl5pPr lvl="4" marR="0" rtl="0" algn="l">
+      <a:lvl5pPr marR="0" lvl="4" algn="l" rtl="0">
         <a:lnSpc>
           <a:spcPct val="100000"/>
         </a:lnSpc>
@@ -9149,7 +9285,7 @@
           <a:srgbClr val="000000"/>
         </a:buClr>
         <a:buFont typeface="Arial"/>
-        <a:defRPr b="0" i="0" sz="1400" u="none" cap="none" strike="noStrike">
+        <a:defRPr sz="1400" b="0" i="0" u="none" strike="noStrike" cap="none">
           <a:solidFill>
             <a:srgbClr val="000000"/>
           </a:solidFill>
@@ -9159,7 +9295,7 @@
           <a:sym typeface="Arial"/>
         </a:defRPr>
       </a:lvl5pPr>
-      <a:lvl6pPr lvl="5" marR="0" rtl="0" algn="l">
+      <a:lvl6pPr marR="0" lvl="5" algn="l" rtl="0">
         <a:lnSpc>
           <a:spcPct val="100000"/>
         </a:lnSpc>
@@ -9173,7 +9309,7 @@
           <a:srgbClr val="000000"/>
         </a:buClr>
         <a:buFont typeface="Arial"/>
-        <a:defRPr b="0" i="0" sz="1400" u="none" cap="none" strike="noStrike">
+        <a:defRPr sz="1400" b="0" i="0" u="none" strike="noStrike" cap="none">
           <a:solidFill>
             <a:srgbClr val="000000"/>
           </a:solidFill>
@@ -9183,7 +9319,7 @@
           <a:sym typeface="Arial"/>
         </a:defRPr>
       </a:lvl6pPr>
-      <a:lvl7pPr lvl="6" marR="0" rtl="0" algn="l">
+      <a:lvl7pPr marR="0" lvl="6" algn="l" rtl="0">
         <a:lnSpc>
           <a:spcPct val="100000"/>
         </a:lnSpc>
@@ -9197,7 +9333,7 @@
           <a:srgbClr val="000000"/>
         </a:buClr>
         <a:buFont typeface="Arial"/>
-        <a:defRPr b="0" i="0" sz="1400" u="none" cap="none" strike="noStrike">
+        <a:defRPr sz="1400" b="0" i="0" u="none" strike="noStrike" cap="none">
           <a:solidFill>
             <a:srgbClr val="000000"/>
           </a:solidFill>
@@ -9207,7 +9343,7 @@
           <a:sym typeface="Arial"/>
         </a:defRPr>
       </a:lvl7pPr>
-      <a:lvl8pPr lvl="7" marR="0" rtl="0" algn="l">
+      <a:lvl8pPr marR="0" lvl="7" algn="l" rtl="0">
         <a:lnSpc>
           <a:spcPct val="100000"/>
         </a:lnSpc>
@@ -9221,7 +9357,7 @@
           <a:srgbClr val="000000"/>
         </a:buClr>
         <a:buFont typeface="Arial"/>
-        <a:defRPr b="0" i="0" sz="1400" u="none" cap="none" strike="noStrike">
+        <a:defRPr sz="1400" b="0" i="0" u="none" strike="noStrike" cap="none">
           <a:solidFill>
             <a:srgbClr val="000000"/>
           </a:solidFill>
@@ -9231,7 +9367,7 @@
           <a:sym typeface="Arial"/>
         </a:defRPr>
       </a:lvl8pPr>
-      <a:lvl9pPr lvl="8" marR="0" rtl="0" algn="l">
+      <a:lvl9pPr marR="0" lvl="8" algn="l" rtl="0">
         <a:lnSpc>
           <a:spcPct val="100000"/>
         </a:lnSpc>
@@ -9245,7 +9381,7 @@
           <a:srgbClr val="000000"/>
         </a:buClr>
         <a:buFont typeface="Arial"/>
-        <a:defRPr b="0" i="0" sz="1400" u="none" cap="none" strike="noStrike">
+        <a:defRPr sz="1400" b="0" i="0" u="none" strike="noStrike" cap="none">
           <a:solidFill>
             <a:srgbClr val="000000"/>
           </a:solidFill>
@@ -9257,7 +9393,7 @@
       </a:lvl9pPr>
     </p:bodyStyle>
     <p:otherStyle>
-      <a:defPPr lvl="0" marR="0" rtl="0" algn="l">
+      <a:defPPr marR="0" lvl="0" algn="l" rtl="0">
         <a:lnSpc>
           <a:spcPct val="100000"/>
         </a:lnSpc>
@@ -9268,7 +9404,7 @@
           <a:spcPts val="0"/>
         </a:spcAft>
       </a:defPPr>
-      <a:lvl1pPr lvl="0" marR="0" rtl="0" algn="l">
+      <a:lvl1pPr marR="0" lvl="0" algn="l" rtl="0">
         <a:lnSpc>
           <a:spcPct val="100000"/>
         </a:lnSpc>
@@ -9282,7 +9418,7 @@
           <a:srgbClr val="000000"/>
         </a:buClr>
         <a:buFont typeface="Arial"/>
-        <a:defRPr b="0" i="0" sz="1400" u="none" cap="none" strike="noStrike">
+        <a:defRPr sz="1400" b="0" i="0" u="none" strike="noStrike" cap="none">
           <a:solidFill>
             <a:srgbClr val="000000"/>
           </a:solidFill>
@@ -9292,7 +9428,7 @@
           <a:sym typeface="Arial"/>
         </a:defRPr>
       </a:lvl1pPr>
-      <a:lvl2pPr lvl="1" marR="0" rtl="0" algn="l">
+      <a:lvl2pPr marR="0" lvl="1" algn="l" rtl="0">
         <a:lnSpc>
           <a:spcPct val="100000"/>
         </a:lnSpc>
@@ -9306,7 +9442,7 @@
           <a:srgbClr val="000000"/>
         </a:buClr>
         <a:buFont typeface="Arial"/>
-        <a:defRPr b="0" i="0" sz="1400" u="none" cap="none" strike="noStrike">
+        <a:defRPr sz="1400" b="0" i="0" u="none" strike="noStrike" cap="none">
           <a:solidFill>
             <a:srgbClr val="000000"/>
           </a:solidFill>
@@ -9316,7 +9452,7 @@
           <a:sym typeface="Arial"/>
         </a:defRPr>
       </a:lvl2pPr>
-      <a:lvl3pPr lvl="2" marR="0" rtl="0" algn="l">
+      <a:lvl3pPr marR="0" lvl="2" algn="l" rtl="0">
         <a:lnSpc>
           <a:spcPct val="100000"/>
         </a:lnSpc>
@@ -9330,7 +9466,7 @@
           <a:srgbClr val="000000"/>
         </a:buClr>
         <a:buFont typeface="Arial"/>
-        <a:defRPr b="0" i="0" sz="1400" u="none" cap="none" strike="noStrike">
+        <a:defRPr sz="1400" b="0" i="0" u="none" strike="noStrike" cap="none">
           <a:solidFill>
             <a:srgbClr val="000000"/>
           </a:solidFill>
@@ -9340,7 +9476,7 @@
           <a:sym typeface="Arial"/>
         </a:defRPr>
       </a:lvl3pPr>
-      <a:lvl4pPr lvl="3" marR="0" rtl="0" algn="l">
+      <a:lvl4pPr marR="0" lvl="3" algn="l" rtl="0">
         <a:lnSpc>
           <a:spcPct val="100000"/>
         </a:lnSpc>
@@ -9354,7 +9490,7 @@
           <a:srgbClr val="000000"/>
         </a:buClr>
         <a:buFont typeface="Arial"/>
-        <a:defRPr b="0" i="0" sz="1400" u="none" cap="none" strike="noStrike">
+        <a:defRPr sz="1400" b="0" i="0" u="none" strike="noStrike" cap="none">
           <a:solidFill>
             <a:srgbClr val="000000"/>
           </a:solidFill>
@@ -9364,7 +9500,7 @@
           <a:sym typeface="Arial"/>
         </a:defRPr>
       </a:lvl4pPr>
-      <a:lvl5pPr lvl="4" marR="0" rtl="0" algn="l">
+      <a:lvl5pPr marR="0" lvl="4" algn="l" rtl="0">
         <a:lnSpc>
           <a:spcPct val="100000"/>
         </a:lnSpc>
@@ -9378,7 +9514,7 @@
           <a:srgbClr val="000000"/>
         </a:buClr>
         <a:buFont typeface="Arial"/>
-        <a:defRPr b="0" i="0" sz="1400" u="none" cap="none" strike="noStrike">
+        <a:defRPr sz="1400" b="0" i="0" u="none" strike="noStrike" cap="none">
           <a:solidFill>
             <a:srgbClr val="000000"/>
           </a:solidFill>
@@ -9388,7 +9524,7 @@
           <a:sym typeface="Arial"/>
         </a:defRPr>
       </a:lvl5pPr>
-      <a:lvl6pPr lvl="5" marR="0" rtl="0" algn="l">
+      <a:lvl6pPr marR="0" lvl="5" algn="l" rtl="0">
         <a:lnSpc>
           <a:spcPct val="100000"/>
         </a:lnSpc>
@@ -9402,7 +9538,7 @@
           <a:srgbClr val="000000"/>
         </a:buClr>
         <a:buFont typeface="Arial"/>
-        <a:defRPr b="0" i="0" sz="1400" u="none" cap="none" strike="noStrike">
+        <a:defRPr sz="1400" b="0" i="0" u="none" strike="noStrike" cap="none">
           <a:solidFill>
             <a:srgbClr val="000000"/>
           </a:solidFill>
@@ -9412,7 +9548,7 @@
           <a:sym typeface="Arial"/>
         </a:defRPr>
       </a:lvl6pPr>
-      <a:lvl7pPr lvl="6" marR="0" rtl="0" algn="l">
+      <a:lvl7pPr marR="0" lvl="6" algn="l" rtl="0">
         <a:lnSpc>
           <a:spcPct val="100000"/>
         </a:lnSpc>
@@ -9426,7 +9562,7 @@
           <a:srgbClr val="000000"/>
         </a:buClr>
         <a:buFont typeface="Arial"/>
-        <a:defRPr b="0" i="0" sz="1400" u="none" cap="none" strike="noStrike">
+        <a:defRPr sz="1400" b="0" i="0" u="none" strike="noStrike" cap="none">
           <a:solidFill>
             <a:srgbClr val="000000"/>
           </a:solidFill>
@@ -9436,7 +9572,7 @@
           <a:sym typeface="Arial"/>
         </a:defRPr>
       </a:lvl7pPr>
-      <a:lvl8pPr lvl="7" marR="0" rtl="0" algn="l">
+      <a:lvl8pPr marR="0" lvl="7" algn="l" rtl="0">
         <a:lnSpc>
           <a:spcPct val="100000"/>
         </a:lnSpc>
@@ -9450,7 +9586,7 @@
           <a:srgbClr val="000000"/>
         </a:buClr>
         <a:buFont typeface="Arial"/>
-        <a:defRPr b="0" i="0" sz="1400" u="none" cap="none" strike="noStrike">
+        <a:defRPr sz="1400" b="0" i="0" u="none" strike="noStrike" cap="none">
           <a:solidFill>
             <a:srgbClr val="000000"/>
           </a:solidFill>
@@ -9460,7 +9596,7 @@
           <a:sym typeface="Arial"/>
         </a:defRPr>
       </a:lvl8pPr>
-      <a:lvl9pPr lvl="8" marR="0" rtl="0" algn="l">
+      <a:lvl9pPr marR="0" lvl="8" algn="l" rtl="0">
         <a:lnSpc>
           <a:spcPct val="100000"/>
         </a:lnSpc>
@@ -9474,7 +9610,7 @@
           <a:srgbClr val="000000"/>
         </a:buClr>
         <a:buFont typeface="Arial"/>
-        <a:defRPr b="0" i="0" sz="1400" u="none" cap="none" strike="noStrike">
+        <a:defRPr sz="1400" b="0" i="0" u="none" strike="noStrike" cap="none">
           <a:solidFill>
             <a:srgbClr val="000000"/>
           </a:solidFill>
@@ -9490,18 +9626,19 @@
 </file>
 
 <file path=ppt/slides/slide1.xml><?xml version="1.0" encoding="utf-8"?>
-<p:sld xmlns:a="http://schemas.openxmlformats.org/drawingml/2006/main" xmlns:r="http://schemas.openxmlformats.org/officeDocument/2006/relationships" xmlns:mc="http://schemas.openxmlformats.org/markup-compatibility/2006" xmlns:mv="urn:schemas-microsoft-com:mac:vml" xmlns:p="http://schemas.openxmlformats.org/presentationml/2006/main" xmlns:c="http://schemas.openxmlformats.org/drawingml/2006/chart" xmlns:dgm="http://schemas.openxmlformats.org/drawingml/2006/diagram" xmlns:o="urn:schemas-microsoft-com:office:office" xmlns:v="urn:schemas-microsoft-com:vml" xmlns:pvml="urn:schemas-microsoft-com:office:powerpoint" xmlns:com="http://schemas.openxmlformats.org/drawingml/2006/compatibility" xmlns:p14="http://schemas.microsoft.com/office/powerpoint/2010/main" xmlns:p15="http://schemas.microsoft.com/office/powerpoint/2012/main" xmlns:ahyp="http://schemas.microsoft.com/office/drawing/2018/hyperlinkcolor">
+<p:sld xmlns:a="http://schemas.openxmlformats.org/drawingml/2006/main" xmlns:r="http://schemas.openxmlformats.org/officeDocument/2006/relationships" xmlns:p="http://schemas.openxmlformats.org/presentationml/2006/main">
   <p:cSld>
     <p:bg>
       <p:bgPr>
         <a:solidFill>
           <a:schemeClr val="lt1"/>
         </a:solidFill>
+        <a:effectLst/>
       </p:bgPr>
     </p:bg>
     <p:spTree>
       <p:nvGrpSpPr>
-        <p:cNvPr id="58" name="Shape 58"/>
+        <p:cNvPr id="1" name="Shape 58"/>
         <p:cNvGrpSpPr/>
         <p:nvPr/>
       </p:nvGrpSpPr>
@@ -9516,7 +9653,9 @@
       <p:sp>
         <p:nvSpPr>
           <p:cNvPr id="59" name="Google Shape;59;p1"/>
-          <p:cNvSpPr txBox="1"/>
+          <p:cNvSpPr txBox="1">
+            <a:spLocks noGrp="1"/>
+          </p:cNvSpPr>
           <p:nvPr>
             <p:ph type="title"/>
           </p:nvPr>
@@ -9535,12 +9674,12 @@
           </a:ln>
         </p:spPr>
         <p:txBody>
-          <a:bodyPr anchorCtr="0" anchor="t" bIns="91425" lIns="91425" spcFirstLastPara="1" rIns="91425" wrap="square" tIns="91425">
+          <a:bodyPr spcFirstLastPara="1" wrap="square" lIns="91425" tIns="91425" rIns="91425" bIns="91425" anchor="t" anchorCtr="0">
             <a:noAutofit/>
           </a:bodyPr>
           <a:lstStyle/>
           <a:p>
-            <a:pPr indent="0" lvl="0" marL="0" rtl="0" algn="l">
+            <a:pPr marL="0" lvl="0" indent="0" algn="l" rtl="0">
               <a:lnSpc>
                 <a:spcPct val="100000"/>
               </a:lnSpc>
@@ -9554,24 +9693,24 @@
               <a:buNone/>
             </a:pPr>
             <a:r>
-              <a:rPr lang="en-US"/>
+              <a:rPr lang="en-US" dirty="0"/>
               <a:t>Hands On:</a:t>
             </a:r>
             <a:br>
-              <a:rPr lang="en-US"/>
+              <a:rPr lang="en-US" dirty="0"/>
             </a:br>
             <a:r>
-              <a:rPr lang="en-US" sz="5400"/>
+              <a:rPr lang="en-US" sz="5400" dirty="0" err="1"/>
               <a:t>InfraDroid</a:t>
             </a:r>
             <a:br>
-              <a:rPr lang="en-US" sz="5400"/>
+              <a:rPr lang="en-US" sz="5400" dirty="0"/>
             </a:br>
             <a:r>
-              <a:rPr lang="en-US" sz="2400"/>
+              <a:rPr lang="en-US" sz="2400" dirty="0"/>
               <a:t>Equipe 5</a:t>
             </a:r>
-            <a:endParaRPr sz="2400"/>
+            <a:endParaRPr sz="2400" dirty="0"/>
           </a:p>
         </p:txBody>
       </p:sp>
@@ -9585,7 +9724,7 @@
           <a:blip r:embed="rId3">
             <a:alphaModFix/>
           </a:blip>
-          <a:srcRect b="0" l="0" r="0" t="0"/>
+          <a:srcRect/>
           <a:stretch/>
         </p:blipFill>
         <p:spPr>
@@ -9601,7 +9740,7 @@
             <a:noFill/>
           </a:ln>
           <a:effectLst>
-            <a:outerShdw blurRad="50800" rotWithShape="0" algn="t" dir="5400000" dist="38100">
+            <a:outerShdw blurRad="50800" dist="38100" dir="5400000" algn="t" rotWithShape="0">
               <a:srgbClr val="000000">
                 <a:alpha val="40000"/>
               </a:srgbClr>
@@ -9631,12 +9770,12 @@
           </a:ln>
         </p:spPr>
         <p:txBody>
-          <a:bodyPr anchorCtr="0" anchor="ctr" bIns="45700" lIns="91425" spcFirstLastPara="1" rIns="91425" wrap="square" tIns="45700">
+          <a:bodyPr spcFirstLastPara="1" wrap="square" lIns="91425" tIns="45700" rIns="91425" bIns="45700" anchor="ctr" anchorCtr="0">
             <a:noAutofit/>
           </a:bodyPr>
           <a:lstStyle/>
           <a:p>
-            <a:pPr indent="0" lvl="0" marL="0" marR="0" rtl="0" algn="ctr">
+            <a:pPr marL="0" marR="0" lvl="0" indent="0" algn="ctr" rtl="0">
               <a:lnSpc>
                 <a:spcPct val="100000"/>
               </a:lnSpc>
@@ -9648,10 +9787,7 @@
               </a:spcAft>
               <a:buNone/>
             </a:pPr>
-            <a:r>
-              <a:t/>
-            </a:r>
-            <a:endParaRPr b="0" i="0" sz="1400" u="none" cap="none" strike="noStrike">
+            <a:endParaRPr sz="1400" b="0" i="0" u="none" strike="noStrike" cap="none">
               <a:solidFill>
                 <a:schemeClr val="dk1"/>
               </a:solidFill>
@@ -9672,11 +9808,11 @@
 </file>
 
 <file path=ppt/slides/slide2.xml><?xml version="1.0" encoding="utf-8"?>
-<p:sld xmlns:a="http://schemas.openxmlformats.org/drawingml/2006/main" xmlns:r="http://schemas.openxmlformats.org/officeDocument/2006/relationships" xmlns:mc="http://schemas.openxmlformats.org/markup-compatibility/2006" xmlns:mv="urn:schemas-microsoft-com:mac:vml" xmlns:p="http://schemas.openxmlformats.org/presentationml/2006/main" xmlns:c="http://schemas.openxmlformats.org/drawingml/2006/chart" xmlns:dgm="http://schemas.openxmlformats.org/drawingml/2006/diagram" xmlns:o="urn:schemas-microsoft-com:office:office" xmlns:v="urn:schemas-microsoft-com:vml" xmlns:pvml="urn:schemas-microsoft-com:office:powerpoint" xmlns:com="http://schemas.openxmlformats.org/drawingml/2006/compatibility" xmlns:p14="http://schemas.microsoft.com/office/powerpoint/2010/main" xmlns:p15="http://schemas.microsoft.com/office/powerpoint/2012/main" xmlns:ahyp="http://schemas.microsoft.com/office/drawing/2018/hyperlinkcolor">
+<p:sld xmlns:a="http://schemas.openxmlformats.org/drawingml/2006/main" xmlns:r="http://schemas.openxmlformats.org/officeDocument/2006/relationships" xmlns:p="http://schemas.openxmlformats.org/presentationml/2006/main">
   <p:cSld>
     <p:spTree>
       <p:nvGrpSpPr>
-        <p:cNvPr id="65" name="Shape 65"/>
+        <p:cNvPr id="1" name="Shape 65"/>
         <p:cNvGrpSpPr/>
         <p:nvPr/>
       </p:nvGrpSpPr>
@@ -9726,7 +9862,7 @@
           <a:blip r:embed="rId4">
             <a:alphaModFix/>
           </a:blip>
-          <a:srcRect b="2492" l="2638" r="3119" t="1996"/>
+          <a:srcRect l="2638" t="1996" r="3119" b="2492"/>
           <a:stretch/>
         </p:blipFill>
         <p:spPr>
@@ -9746,7 +9882,9 @@
       <p:sp>
         <p:nvSpPr>
           <p:cNvPr id="68" name="Google Shape;68;p2"/>
-          <p:cNvSpPr txBox="1"/>
+          <p:cNvSpPr txBox="1">
+            <a:spLocks noGrp="1"/>
+          </p:cNvSpPr>
           <p:nvPr>
             <p:ph type="title"/>
           </p:nvPr>
@@ -9765,12 +9903,12 @@
           </a:ln>
         </p:spPr>
         <p:txBody>
-          <a:bodyPr anchorCtr="0" anchor="ctr" bIns="91425" lIns="91425" spcFirstLastPara="1" rIns="91425" wrap="square" tIns="91425">
+          <a:bodyPr spcFirstLastPara="1" wrap="square" lIns="91425" tIns="91425" rIns="91425" bIns="91425" anchor="ctr" anchorCtr="0">
             <a:noAutofit/>
           </a:bodyPr>
           <a:lstStyle/>
           <a:p>
-            <a:pPr indent="0" lvl="0" marL="0" rtl="0" algn="l">
+            <a:pPr marL="0" lvl="0" indent="0" algn="l" rtl="0">
               <a:lnSpc>
                 <a:spcPct val="100000"/>
               </a:lnSpc>
@@ -9794,9 +9932,11 @@
       <p:sp>
         <p:nvSpPr>
           <p:cNvPr id="69" name="Google Shape;69;p2"/>
-          <p:cNvSpPr txBox="1"/>
+          <p:cNvSpPr txBox="1">
+            <a:spLocks noGrp="1"/>
+          </p:cNvSpPr>
           <p:nvPr>
-            <p:ph idx="12" type="sldNum"/>
+            <p:ph type="sldNum" idx="12"/>
           </p:nvPr>
         </p:nvSpPr>
         <p:spPr>
@@ -9813,12 +9953,12 @@
           </a:ln>
         </p:spPr>
         <p:txBody>
-          <a:bodyPr anchorCtr="0" anchor="ctr" bIns="91425" lIns="91425" spcFirstLastPara="1" rIns="91425" wrap="square" tIns="91425">
+          <a:bodyPr spcFirstLastPara="1" wrap="square" lIns="91425" tIns="91425" rIns="91425" bIns="91425" anchor="ctr" anchorCtr="0">
             <a:noAutofit/>
           </a:bodyPr>
           <a:lstStyle/>
           <a:p>
-            <a:pPr indent="0" lvl="0" marL="0" rtl="0" algn="r">
+            <a:pPr marL="0" lvl="0" indent="0" algn="r" rtl="0">
               <a:lnSpc>
                 <a:spcPct val="100000"/>
               </a:lnSpc>
@@ -9833,7 +9973,7 @@
             </a:pPr>
             <a:fld id="{00000000-1234-1234-1234-123412341234}" type="slidenum">
               <a:rPr lang="en-US"/>
-              <a:t>‹#›</a:t>
+              <a:t>2</a:t>
             </a:fld>
             <a:endParaRPr/>
           </a:p>
@@ -9841,7 +9981,7 @@
       </p:sp>
       <p:pic>
         <p:nvPicPr>
-          <p:cNvPr descr="Tela de celular com foto de homem e texto&#10;&#10;O conteúdo gerado por IA pode estar incorreto." id="70" name="Google Shape;70;p2"/>
+          <p:cNvPr id="70" name="Google Shape;70;p2" descr="Tela de celular com foto de homem e texto&#10;&#10;O conteúdo gerado por IA pode estar incorreto."/>
           <p:cNvPicPr preferRelativeResize="0"/>
           <p:nvPr/>
         </p:nvPicPr>
@@ -9849,7 +9989,7 @@
           <a:blip r:embed="rId5">
             <a:alphaModFix/>
           </a:blip>
-          <a:srcRect b="2701" l="6795" r="3429" t="4154"/>
+          <a:srcRect l="6795" t="4154" r="3429" b="2701"/>
           <a:stretch/>
         </p:blipFill>
         <p:spPr>
@@ -9868,7 +10008,7 @@
       </p:pic>
       <p:pic>
         <p:nvPicPr>
-          <p:cNvPr descr="Texto&#10;&#10;O conteúdo gerado por IA pode estar incorreto." id="71" name="Google Shape;71;p2"/>
+          <p:cNvPr id="71" name="Google Shape;71;p2" descr="Texto&#10;&#10;O conteúdo gerado por IA pode estar incorreto."/>
           <p:cNvPicPr preferRelativeResize="0"/>
           <p:nvPr/>
         </p:nvPicPr>
@@ -9876,7 +10016,7 @@
           <a:blip r:embed="rId6">
             <a:alphaModFix/>
           </a:blip>
-          <a:srcRect b="3560" l="7382" r="4944" t="1751"/>
+          <a:srcRect l="7382" t="1751" r="4944" b="3560"/>
           <a:stretch/>
         </p:blipFill>
         <p:spPr>
@@ -9895,7 +10035,7 @@
       </p:pic>
       <p:pic>
         <p:nvPicPr>
-          <p:cNvPr descr="Interface gráfica do usuário, Texto, Aplicativo&#10;&#10;O conteúdo gerado por IA pode estar incorreto." id="72" name="Google Shape;72;p2"/>
+          <p:cNvPr id="72" name="Google Shape;72;p2" descr="Interface gráfica do usuário, Texto, Aplicativo&#10;&#10;O conteúdo gerado por IA pode estar incorreto."/>
           <p:cNvPicPr preferRelativeResize="0"/>
           <p:nvPr/>
         </p:nvPicPr>
@@ -9903,7 +10043,7 @@
           <a:blip r:embed="rId7">
             <a:alphaModFix/>
           </a:blip>
-          <a:srcRect b="3490" l="4958" r="2705" t="2436"/>
+          <a:srcRect l="4958" t="2436" r="2705" b="3490"/>
           <a:stretch/>
         </p:blipFill>
         <p:spPr>
@@ -9922,7 +10062,7 @@
       </p:pic>
       <p:pic>
         <p:nvPicPr>
-          <p:cNvPr descr="Interface gráfica do usuário, Texto, Aplicativo&#10;&#10;O conteúdo gerado por IA pode estar incorreto." id="73" name="Google Shape;73;p2"/>
+          <p:cNvPr id="73" name="Google Shape;73;p2" descr="Interface gráfica do usuário, Texto, Aplicativo&#10;&#10;O conteúdo gerado por IA pode estar incorreto."/>
           <p:cNvPicPr preferRelativeResize="0"/>
           <p:nvPr/>
         </p:nvPicPr>
@@ -9930,7 +10070,7 @@
           <a:blip r:embed="rId8">
             <a:alphaModFix/>
           </a:blip>
-          <a:srcRect b="2590" l="5726" r="2056" t="1116"/>
+          <a:srcRect l="5726" t="1116" r="2056" b="2590"/>
           <a:stretch/>
         </p:blipFill>
         <p:spPr>
@@ -9962,23 +10102,23 @@
             <a:avLst/>
           </a:prstGeom>
           <a:noFill/>
-          <a:ln cap="flat" cmpd="sng" w="9525">
+          <a:ln w="9525" cap="flat" cmpd="sng">
             <a:solidFill>
               <a:srgbClr val="9C7FBA"/>
             </a:solidFill>
             <a:prstDash val="solid"/>
             <a:round/>
-            <a:headEnd len="sm" w="sm" type="none"/>
-            <a:tailEnd len="sm" w="sm" type="none"/>
+            <a:headEnd type="none" w="sm" len="sm"/>
+            <a:tailEnd type="none" w="sm" len="sm"/>
           </a:ln>
         </p:spPr>
         <p:txBody>
-          <a:bodyPr anchorCtr="0" anchor="t" bIns="85900" lIns="85900" spcFirstLastPara="1" rIns="85900" wrap="square" tIns="85900">
+          <a:bodyPr spcFirstLastPara="1" wrap="square" lIns="85900" tIns="85900" rIns="85900" bIns="85900" anchor="t" anchorCtr="0">
             <a:spAutoFit/>
           </a:bodyPr>
           <a:lstStyle/>
           <a:p>
-            <a:pPr indent="0" lvl="0" marL="0" rtl="0" algn="ctr">
+            <a:pPr marL="0" lvl="0" indent="0" algn="ctr" rtl="0">
               <a:spcBef>
                 <a:spcPts val="0"/>
               </a:spcBef>
@@ -9988,7 +10128,7 @@
               <a:buNone/>
             </a:pPr>
             <a:r>
-              <a:rPr b="1" lang="en-US" sz="1033">
+              <a:rPr lang="en-US" sz="1033" b="1">
                 <a:solidFill>
                   <a:schemeClr val="dk1"/>
                 </a:solidFill>
@@ -10014,23 +10154,23 @@
             <a:avLst/>
           </a:prstGeom>
           <a:noFill/>
-          <a:ln cap="flat" cmpd="sng" w="9525">
+          <a:ln w="9525" cap="flat" cmpd="sng">
             <a:solidFill>
               <a:srgbClr val="9C7FBA"/>
             </a:solidFill>
             <a:prstDash val="solid"/>
             <a:round/>
-            <a:headEnd len="sm" w="sm" type="none"/>
-            <a:tailEnd len="sm" w="sm" type="none"/>
+            <a:headEnd type="none" w="sm" len="sm"/>
+            <a:tailEnd type="none" w="sm" len="sm"/>
           </a:ln>
         </p:spPr>
         <p:txBody>
-          <a:bodyPr anchorCtr="0" anchor="t" bIns="85900" lIns="85900" spcFirstLastPara="1" rIns="85900" wrap="square" tIns="85900">
+          <a:bodyPr spcFirstLastPara="1" wrap="square" lIns="85900" tIns="85900" rIns="85900" bIns="85900" anchor="t" anchorCtr="0">
             <a:spAutoFit/>
           </a:bodyPr>
           <a:lstStyle/>
           <a:p>
-            <a:pPr indent="0" lvl="0" marL="0" rtl="0" algn="ctr">
+            <a:pPr marL="0" lvl="0" indent="0" algn="ctr" rtl="0">
               <a:spcBef>
                 <a:spcPts val="0"/>
               </a:spcBef>
@@ -10040,7 +10180,7 @@
               <a:buNone/>
             </a:pPr>
             <a:r>
-              <a:rPr b="1" lang="en-US" sz="1100">
+              <a:rPr lang="en-US" sz="1100" b="1">
                 <a:solidFill>
                   <a:schemeClr val="dk1"/>
                 </a:solidFill>
@@ -10066,23 +10206,23 @@
             <a:avLst/>
           </a:prstGeom>
           <a:noFill/>
-          <a:ln cap="flat" cmpd="sng" w="9525">
+          <a:ln w="9525" cap="flat" cmpd="sng">
             <a:solidFill>
               <a:srgbClr val="9C7FBA"/>
             </a:solidFill>
             <a:prstDash val="solid"/>
             <a:round/>
-            <a:headEnd len="sm" w="sm" type="none"/>
-            <a:tailEnd len="sm" w="sm" type="none"/>
+            <a:headEnd type="none" w="sm" len="sm"/>
+            <a:tailEnd type="none" w="sm" len="sm"/>
           </a:ln>
         </p:spPr>
         <p:txBody>
-          <a:bodyPr anchorCtr="0" anchor="t" bIns="85900" lIns="85900" spcFirstLastPara="1" rIns="85900" wrap="square" tIns="85900">
+          <a:bodyPr spcFirstLastPara="1" wrap="square" lIns="85900" tIns="85900" rIns="85900" bIns="85900" anchor="t" anchorCtr="0">
             <a:spAutoFit/>
           </a:bodyPr>
           <a:lstStyle/>
           <a:p>
-            <a:pPr indent="0" lvl="0" marL="0" rtl="0" algn="ctr">
+            <a:pPr marL="0" lvl="0" indent="0" algn="ctr" rtl="0">
               <a:spcBef>
                 <a:spcPts val="0"/>
               </a:spcBef>
@@ -10092,7 +10232,7 @@
               <a:buNone/>
             </a:pPr>
             <a:r>
-              <a:rPr b="1" lang="en-US" sz="1100">
+              <a:rPr lang="en-US" sz="1100" b="1">
                 <a:solidFill>
                   <a:schemeClr val="dk1"/>
                 </a:solidFill>
@@ -10118,23 +10258,23 @@
             <a:avLst/>
           </a:prstGeom>
           <a:noFill/>
-          <a:ln cap="flat" cmpd="sng" w="9525">
+          <a:ln w="9525" cap="flat" cmpd="sng">
             <a:solidFill>
               <a:srgbClr val="9C7FBA"/>
             </a:solidFill>
             <a:prstDash val="solid"/>
             <a:round/>
-            <a:headEnd len="sm" w="sm" type="none"/>
-            <a:tailEnd len="sm" w="sm" type="none"/>
+            <a:headEnd type="none" w="sm" len="sm"/>
+            <a:tailEnd type="none" w="sm" len="sm"/>
           </a:ln>
         </p:spPr>
         <p:txBody>
-          <a:bodyPr anchorCtr="0" anchor="t" bIns="85900" lIns="85900" spcFirstLastPara="1" rIns="85900" wrap="square" tIns="85900">
+          <a:bodyPr spcFirstLastPara="1" wrap="square" lIns="85900" tIns="85900" rIns="85900" bIns="85900" anchor="t" anchorCtr="0">
             <a:spAutoFit/>
           </a:bodyPr>
           <a:lstStyle/>
           <a:p>
-            <a:pPr indent="0" lvl="0" marL="0" rtl="0" algn="ctr">
+            <a:pPr marL="0" lvl="0" indent="0" algn="ctr" rtl="0">
               <a:spcBef>
                 <a:spcPts val="0"/>
               </a:spcBef>
@@ -10144,7 +10284,7 @@
               <a:buNone/>
             </a:pPr>
             <a:r>
-              <a:rPr b="1" lang="en-US" sz="1100">
+              <a:rPr lang="en-US" sz="1100" b="1">
                 <a:solidFill>
                   <a:schemeClr val="dk1"/>
                 </a:solidFill>
@@ -10170,23 +10310,23 @@
             <a:avLst/>
           </a:prstGeom>
           <a:noFill/>
-          <a:ln cap="flat" cmpd="sng" w="9525">
+          <a:ln w="9525" cap="flat" cmpd="sng">
             <a:solidFill>
               <a:srgbClr val="9C7FBA"/>
             </a:solidFill>
             <a:prstDash val="solid"/>
             <a:round/>
-            <a:headEnd len="sm" w="sm" type="none"/>
-            <a:tailEnd len="sm" w="sm" type="none"/>
+            <a:headEnd type="none" w="sm" len="sm"/>
+            <a:tailEnd type="none" w="sm" len="sm"/>
           </a:ln>
         </p:spPr>
         <p:txBody>
-          <a:bodyPr anchorCtr="0" anchor="t" bIns="85900" lIns="85900" spcFirstLastPara="1" rIns="85900" wrap="square" tIns="85900">
+          <a:bodyPr spcFirstLastPara="1" wrap="square" lIns="85900" tIns="85900" rIns="85900" bIns="85900" anchor="t" anchorCtr="0">
             <a:spAutoFit/>
           </a:bodyPr>
           <a:lstStyle/>
           <a:p>
-            <a:pPr indent="0" lvl="0" marL="0" rtl="0" algn="ctr">
+            <a:pPr marL="0" lvl="0" indent="0" algn="ctr" rtl="0">
               <a:spcBef>
                 <a:spcPts val="0"/>
               </a:spcBef>
@@ -10196,7 +10336,7 @@
               <a:buNone/>
             </a:pPr>
             <a:r>
-              <a:rPr b="1" lang="en-US" sz="1100">
+              <a:rPr lang="en-US" sz="1100" b="1">
                 <a:solidFill>
                   <a:schemeClr val="dk1"/>
                 </a:solidFill>
@@ -10216,11 +10356,11 @@
 </file>
 
 <file path=ppt/slides/slide3.xml><?xml version="1.0" encoding="utf-8"?>
-<p:sld xmlns:a="http://schemas.openxmlformats.org/drawingml/2006/main" xmlns:r="http://schemas.openxmlformats.org/officeDocument/2006/relationships" xmlns:mc="http://schemas.openxmlformats.org/markup-compatibility/2006" xmlns:mv="urn:schemas-microsoft-com:mac:vml" xmlns:p="http://schemas.openxmlformats.org/presentationml/2006/main" xmlns:c="http://schemas.openxmlformats.org/drawingml/2006/chart" xmlns:dgm="http://schemas.openxmlformats.org/drawingml/2006/diagram" xmlns:o="urn:schemas-microsoft-com:office:office" xmlns:v="urn:schemas-microsoft-com:vml" xmlns:pvml="urn:schemas-microsoft-com:office:powerpoint" xmlns:com="http://schemas.openxmlformats.org/drawingml/2006/compatibility" xmlns:p14="http://schemas.microsoft.com/office/powerpoint/2010/main" xmlns:p15="http://schemas.microsoft.com/office/powerpoint/2012/main" xmlns:ahyp="http://schemas.microsoft.com/office/drawing/2018/hyperlinkcolor">
+<p:sld xmlns:a="http://schemas.openxmlformats.org/drawingml/2006/main" xmlns:r="http://schemas.openxmlformats.org/officeDocument/2006/relationships" xmlns:p="http://schemas.openxmlformats.org/presentationml/2006/main">
   <p:cSld>
     <p:spTree>
       <p:nvGrpSpPr>
-        <p:cNvPr id="82" name="Shape 82"/>
+        <p:cNvPr id="1" name="Shape 82"/>
         <p:cNvGrpSpPr/>
         <p:nvPr/>
       </p:nvGrpSpPr>
@@ -10235,7 +10375,9 @@
       <p:sp>
         <p:nvSpPr>
           <p:cNvPr id="83" name="Google Shape;83;p3"/>
-          <p:cNvSpPr txBox="1"/>
+          <p:cNvSpPr txBox="1">
+            <a:spLocks noGrp="1"/>
+          </p:cNvSpPr>
           <p:nvPr>
             <p:ph type="title"/>
           </p:nvPr>
@@ -10254,12 +10396,12 @@
           </a:ln>
         </p:spPr>
         <p:txBody>
-          <a:bodyPr anchorCtr="0" anchor="ctr" bIns="91425" lIns="91425" spcFirstLastPara="1" rIns="91425" wrap="square" tIns="91425">
+          <a:bodyPr spcFirstLastPara="1" wrap="square" lIns="91425" tIns="91425" rIns="91425" bIns="91425" anchor="ctr" anchorCtr="0">
             <a:noAutofit/>
           </a:bodyPr>
           <a:lstStyle/>
           <a:p>
-            <a:pPr indent="0" lvl="0" marL="0" rtl="0" algn="l">
+            <a:pPr marL="0" lvl="0" indent="0" algn="l" rtl="0">
               <a:lnSpc>
                 <a:spcPct val="100000"/>
               </a:lnSpc>
@@ -10286,9 +10428,11 @@
       <p:sp>
         <p:nvSpPr>
           <p:cNvPr id="84" name="Google Shape;84;p3"/>
-          <p:cNvSpPr txBox="1"/>
+          <p:cNvSpPr txBox="1">
+            <a:spLocks noGrp="1"/>
+          </p:cNvSpPr>
           <p:nvPr>
-            <p:ph idx="1" type="body"/>
+            <p:ph type="body" idx="1"/>
           </p:nvPr>
         </p:nvSpPr>
         <p:spPr>
@@ -10305,12 +10449,12 @@
           </a:ln>
         </p:spPr>
         <p:txBody>
-          <a:bodyPr anchorCtr="0" anchor="t" bIns="91425" lIns="91425" spcFirstLastPara="1" rIns="91425" wrap="square" tIns="91425">
+          <a:bodyPr spcFirstLastPara="1" wrap="square" lIns="91425" tIns="91425" rIns="91425" bIns="91425" anchor="t" anchorCtr="0">
             <a:noAutofit/>
           </a:bodyPr>
           <a:lstStyle/>
           <a:p>
-            <a:pPr indent="0" lvl="0" marL="228600" rtl="0" algn="l">
+            <a:pPr marL="228600" lvl="0" indent="0" algn="l" rtl="0">
               <a:lnSpc>
                 <a:spcPct val="115000"/>
               </a:lnSpc>
@@ -10337,9 +10481,11 @@
       <p:sp>
         <p:nvSpPr>
           <p:cNvPr id="85" name="Google Shape;85;p3"/>
-          <p:cNvSpPr txBox="1"/>
+          <p:cNvSpPr txBox="1">
+            <a:spLocks noGrp="1"/>
+          </p:cNvSpPr>
           <p:nvPr>
-            <p:ph idx="12" type="sldNum"/>
+            <p:ph type="sldNum" idx="12"/>
           </p:nvPr>
         </p:nvSpPr>
         <p:spPr>
@@ -10356,12 +10502,12 @@
           </a:ln>
         </p:spPr>
         <p:txBody>
-          <a:bodyPr anchorCtr="0" anchor="ctr" bIns="91425" lIns="91425" spcFirstLastPara="1" rIns="91425" wrap="square" tIns="91425">
+          <a:bodyPr spcFirstLastPara="1" wrap="square" lIns="91425" tIns="91425" rIns="91425" bIns="91425" anchor="ctr" anchorCtr="0">
             <a:noAutofit/>
           </a:bodyPr>
           <a:lstStyle/>
           <a:p>
-            <a:pPr indent="0" lvl="0" marL="0" rtl="0" algn="r">
+            <a:pPr marL="0" lvl="0" indent="0" algn="r" rtl="0">
               <a:lnSpc>
                 <a:spcPct val="100000"/>
               </a:lnSpc>
@@ -10376,7 +10522,7 @@
             </a:pPr>
             <a:fld id="{00000000-1234-1234-1234-123412341234}" type="slidenum">
               <a:rPr lang="en-US"/>
-              <a:t>‹#›</a:t>
+              <a:t>3</a:t>
             </a:fld>
             <a:endParaRPr/>
           </a:p>
@@ -10419,11 +10565,11 @@
 </file>
 
 <file path=ppt/slides/slide4.xml><?xml version="1.0" encoding="utf-8"?>
-<p:sld xmlns:a="http://schemas.openxmlformats.org/drawingml/2006/main" xmlns:r="http://schemas.openxmlformats.org/officeDocument/2006/relationships" xmlns:mc="http://schemas.openxmlformats.org/markup-compatibility/2006" xmlns:mv="urn:schemas-microsoft-com:mac:vml" xmlns:p="http://schemas.openxmlformats.org/presentationml/2006/main" xmlns:c="http://schemas.openxmlformats.org/drawingml/2006/chart" xmlns:dgm="http://schemas.openxmlformats.org/drawingml/2006/diagram" xmlns:o="urn:schemas-microsoft-com:office:office" xmlns:v="urn:schemas-microsoft-com:vml" xmlns:pvml="urn:schemas-microsoft-com:office:powerpoint" xmlns:com="http://schemas.openxmlformats.org/drawingml/2006/compatibility" xmlns:p14="http://schemas.microsoft.com/office/powerpoint/2010/main" xmlns:p15="http://schemas.microsoft.com/office/powerpoint/2012/main" xmlns:ahyp="http://schemas.microsoft.com/office/drawing/2018/hyperlinkcolor">
+<p:sld xmlns:a="http://schemas.openxmlformats.org/drawingml/2006/main" xmlns:r="http://schemas.openxmlformats.org/officeDocument/2006/relationships" xmlns:p="http://schemas.openxmlformats.org/presentationml/2006/main">
   <p:cSld>
     <p:spTree>
       <p:nvGrpSpPr>
-        <p:cNvPr id="90" name="Shape 90"/>
+        <p:cNvPr id="1" name="Shape 90"/>
         <p:cNvGrpSpPr/>
         <p:nvPr/>
       </p:nvGrpSpPr>
@@ -10438,7 +10584,9 @@
       <p:sp>
         <p:nvSpPr>
           <p:cNvPr id="91" name="Google Shape;91;p4"/>
-          <p:cNvSpPr txBox="1"/>
+          <p:cNvSpPr txBox="1">
+            <a:spLocks noGrp="1"/>
+          </p:cNvSpPr>
           <p:nvPr>
             <p:ph type="title"/>
           </p:nvPr>
@@ -10457,12 +10605,12 @@
           </a:ln>
         </p:spPr>
         <p:txBody>
-          <a:bodyPr anchorCtr="0" anchor="ctr" bIns="91425" lIns="91425" spcFirstLastPara="1" rIns="91425" wrap="square" tIns="91425">
+          <a:bodyPr spcFirstLastPara="1" wrap="square" lIns="91425" tIns="91425" rIns="91425" bIns="91425" anchor="ctr" anchorCtr="0">
             <a:noAutofit/>
           </a:bodyPr>
           <a:lstStyle/>
           <a:p>
-            <a:pPr indent="0" lvl="0" marL="0" rtl="0" algn="l">
+            <a:pPr marL="0" lvl="0" indent="0" algn="l" rtl="0">
               <a:lnSpc>
                 <a:spcPct val="100000"/>
               </a:lnSpc>
@@ -10489,9 +10637,11 @@
       <p:sp>
         <p:nvSpPr>
           <p:cNvPr id="92" name="Google Shape;92;p4"/>
-          <p:cNvSpPr txBox="1"/>
+          <p:cNvSpPr txBox="1">
+            <a:spLocks noGrp="1"/>
+          </p:cNvSpPr>
           <p:nvPr>
-            <p:ph idx="1" type="body"/>
+            <p:ph type="body" idx="1"/>
           </p:nvPr>
         </p:nvSpPr>
         <p:spPr>
@@ -10508,12 +10658,12 @@
           </a:ln>
         </p:spPr>
         <p:txBody>
-          <a:bodyPr anchorCtr="0" anchor="t" bIns="91425" lIns="91425" spcFirstLastPara="1" rIns="91425" wrap="square" tIns="91425">
+          <a:bodyPr spcFirstLastPara="1" wrap="square" lIns="91425" tIns="91425" rIns="91425" bIns="91425" anchor="t" anchorCtr="0">
             <a:noAutofit/>
           </a:bodyPr>
           <a:lstStyle/>
           <a:p>
-            <a:pPr indent="-355600" lvl="0" marL="457200" rtl="0" algn="l">
+            <a:pPr marL="457200" lvl="0" indent="-355600" algn="l" rtl="0">
               <a:spcBef>
                 <a:spcPts val="0"/>
               </a:spcBef>
@@ -10530,7 +10680,7 @@
             <a:endParaRPr/>
           </a:p>
           <a:p>
-            <a:pPr indent="-355600" lvl="0" marL="457200" rtl="0" algn="l">
+            <a:pPr marL="457200" lvl="0" indent="-355600" algn="l" rtl="0">
               <a:spcBef>
                 <a:spcPts val="0"/>
               </a:spcBef>
@@ -10547,7 +10697,7 @@
             <a:endParaRPr/>
           </a:p>
           <a:p>
-            <a:pPr indent="-355600" lvl="0" marL="457200" rtl="0" algn="l">
+            <a:pPr marL="457200" lvl="0" indent="-355600" algn="l" rtl="0">
               <a:spcBef>
                 <a:spcPts val="0"/>
               </a:spcBef>
@@ -10564,7 +10714,7 @@
             <a:endParaRPr/>
           </a:p>
           <a:p>
-            <a:pPr indent="-355600" lvl="0" marL="457200" rtl="0" algn="l">
+            <a:pPr marL="457200" lvl="0" indent="-355600" algn="l" rtl="0">
               <a:spcBef>
                 <a:spcPts val="0"/>
               </a:spcBef>
@@ -10581,7 +10731,7 @@
             <a:endParaRPr/>
           </a:p>
           <a:p>
-            <a:pPr indent="-355600" lvl="0" marL="457200" rtl="0" algn="l">
+            <a:pPr marL="457200" lvl="0" indent="-355600" algn="l" rtl="0">
               <a:spcBef>
                 <a:spcPts val="0"/>
               </a:spcBef>
@@ -10598,7 +10748,7 @@
             <a:endParaRPr/>
           </a:p>
           <a:p>
-            <a:pPr indent="-355600" lvl="0" marL="457200" rtl="0" algn="l">
+            <a:pPr marL="457200" lvl="0" indent="-355600" algn="l" rtl="0">
               <a:spcBef>
                 <a:spcPts val="0"/>
               </a:spcBef>
@@ -10615,7 +10765,7 @@
             <a:endParaRPr/>
           </a:p>
           <a:p>
-            <a:pPr indent="-355600" lvl="0" marL="457200" rtl="0" algn="l">
+            <a:pPr marL="457200" lvl="0" indent="-355600" algn="l" rtl="0">
               <a:spcBef>
                 <a:spcPts val="0"/>
               </a:spcBef>
@@ -10632,7 +10782,7 @@
             <a:endParaRPr/>
           </a:p>
           <a:p>
-            <a:pPr indent="-355600" lvl="0" marL="457200" rtl="0" algn="l">
+            <a:pPr marL="457200" lvl="0" indent="-355600" algn="l" rtl="0">
               <a:spcBef>
                 <a:spcPts val="0"/>
               </a:spcBef>
@@ -10649,7 +10799,7 @@
             <a:endParaRPr/>
           </a:p>
           <a:p>
-            <a:pPr indent="-355600" lvl="0" marL="457200" rtl="0" algn="l">
+            <a:pPr marL="457200" lvl="0" indent="-355600" algn="l" rtl="0">
               <a:lnSpc>
                 <a:spcPct val="115000"/>
               </a:lnSpc>
@@ -10673,9 +10823,11 @@
       <p:sp>
         <p:nvSpPr>
           <p:cNvPr id="93" name="Google Shape;93;p4"/>
-          <p:cNvSpPr txBox="1"/>
+          <p:cNvSpPr txBox="1">
+            <a:spLocks noGrp="1"/>
+          </p:cNvSpPr>
           <p:nvPr>
-            <p:ph idx="12" type="sldNum"/>
+            <p:ph type="sldNum" idx="12"/>
           </p:nvPr>
         </p:nvSpPr>
         <p:spPr>
@@ -10692,12 +10844,12 @@
           </a:ln>
         </p:spPr>
         <p:txBody>
-          <a:bodyPr anchorCtr="0" anchor="ctr" bIns="91425" lIns="91425" spcFirstLastPara="1" rIns="91425" wrap="square" tIns="91425">
+          <a:bodyPr spcFirstLastPara="1" wrap="square" lIns="91425" tIns="91425" rIns="91425" bIns="91425" anchor="ctr" anchorCtr="0">
             <a:noAutofit/>
           </a:bodyPr>
           <a:lstStyle/>
           <a:p>
-            <a:pPr indent="0" lvl="0" marL="0" rtl="0" algn="r">
+            <a:pPr marL="0" lvl="0" indent="0" algn="r" rtl="0">
               <a:lnSpc>
                 <a:spcPct val="100000"/>
               </a:lnSpc>
@@ -10712,7 +10864,7 @@
             </a:pPr>
             <a:fld id="{00000000-1234-1234-1234-123412341234}" type="slidenum">
               <a:rPr lang="en-US"/>
-              <a:t>‹#›</a:t>
+              <a:t>4</a:t>
             </a:fld>
             <a:endParaRPr/>
           </a:p>
@@ -10727,11 +10879,11 @@
 </file>
 
 <file path=ppt/slides/slide5.xml><?xml version="1.0" encoding="utf-8"?>
-<p:sld xmlns:a="http://schemas.openxmlformats.org/drawingml/2006/main" xmlns:r="http://schemas.openxmlformats.org/officeDocument/2006/relationships" xmlns:mc="http://schemas.openxmlformats.org/markup-compatibility/2006" xmlns:mv="urn:schemas-microsoft-com:mac:vml" xmlns:p="http://schemas.openxmlformats.org/presentationml/2006/main" xmlns:c="http://schemas.openxmlformats.org/drawingml/2006/chart" xmlns:dgm="http://schemas.openxmlformats.org/drawingml/2006/diagram" xmlns:o="urn:schemas-microsoft-com:office:office" xmlns:v="urn:schemas-microsoft-com:vml" xmlns:pvml="urn:schemas-microsoft-com:office:powerpoint" xmlns:com="http://schemas.openxmlformats.org/drawingml/2006/compatibility" xmlns:p14="http://schemas.microsoft.com/office/powerpoint/2010/main" xmlns:p15="http://schemas.microsoft.com/office/powerpoint/2012/main" xmlns:ahyp="http://schemas.microsoft.com/office/drawing/2018/hyperlinkcolor">
+<p:sld xmlns:a="http://schemas.openxmlformats.org/drawingml/2006/main" xmlns:r="http://schemas.openxmlformats.org/officeDocument/2006/relationships" xmlns:p="http://schemas.openxmlformats.org/presentationml/2006/main">
   <p:cSld>
     <p:spTree>
       <p:nvGrpSpPr>
-        <p:cNvPr id="97" name="Shape 97"/>
+        <p:cNvPr id="1" name="Shape 97"/>
         <p:cNvGrpSpPr/>
         <p:nvPr/>
       </p:nvGrpSpPr>
@@ -10746,7 +10898,9 @@
       <p:sp>
         <p:nvSpPr>
           <p:cNvPr id="98" name="Google Shape;98;p5"/>
-          <p:cNvSpPr txBox="1"/>
+          <p:cNvSpPr txBox="1">
+            <a:spLocks noGrp="1"/>
+          </p:cNvSpPr>
           <p:nvPr>
             <p:ph type="title"/>
           </p:nvPr>
@@ -10765,12 +10919,12 @@
           </a:ln>
         </p:spPr>
         <p:txBody>
-          <a:bodyPr anchorCtr="0" anchor="ctr" bIns="91425" lIns="91425" spcFirstLastPara="1" rIns="91425" wrap="square" tIns="91425">
+          <a:bodyPr spcFirstLastPara="1" wrap="square" lIns="91425" tIns="91425" rIns="91425" bIns="91425" anchor="ctr" anchorCtr="0">
             <a:noAutofit/>
           </a:bodyPr>
           <a:lstStyle/>
           <a:p>
-            <a:pPr indent="0" lvl="0" marL="0" rtl="0" algn="l">
+            <a:pPr marL="0" lvl="0" indent="0" algn="l" rtl="0">
               <a:lnSpc>
                 <a:spcPct val="100000"/>
               </a:lnSpc>
@@ -10797,9 +10951,11 @@
       <p:sp>
         <p:nvSpPr>
           <p:cNvPr id="99" name="Google Shape;99;p5"/>
-          <p:cNvSpPr txBox="1"/>
+          <p:cNvSpPr txBox="1">
+            <a:spLocks noGrp="1"/>
+          </p:cNvSpPr>
           <p:nvPr>
-            <p:ph idx="12" type="sldNum"/>
+            <p:ph type="sldNum" idx="12"/>
           </p:nvPr>
         </p:nvSpPr>
         <p:spPr>
@@ -10816,12 +10972,12 @@
           </a:ln>
         </p:spPr>
         <p:txBody>
-          <a:bodyPr anchorCtr="0" anchor="ctr" bIns="91425" lIns="91425" spcFirstLastPara="1" rIns="91425" wrap="square" tIns="91425">
+          <a:bodyPr spcFirstLastPara="1" wrap="square" lIns="91425" tIns="91425" rIns="91425" bIns="91425" anchor="ctr" anchorCtr="0">
             <a:noAutofit/>
           </a:bodyPr>
           <a:lstStyle/>
           <a:p>
-            <a:pPr indent="0" lvl="0" marL="0" rtl="0" algn="r">
+            <a:pPr marL="0" lvl="0" indent="0" algn="r" rtl="0">
               <a:lnSpc>
                 <a:spcPct val="100000"/>
               </a:lnSpc>
@@ -10836,7 +10992,7 @@
             </a:pPr>
             <a:fld id="{00000000-1234-1234-1234-123412341234}" type="slidenum">
               <a:rPr lang="en-US"/>
-              <a:t>‹#›</a:t>
+              <a:t>5</a:t>
             </a:fld>
             <a:endParaRPr/>
           </a:p>
@@ -10860,10 +11016,34 @@
                 <a:tableStyleId>{B8518A3A-9F5B-44A7-8B94-9B448A2C13EA}</a:tableStyleId>
               </a:tblPr>
               <a:tblGrid>
-                <a:gridCol w="2097650"/>
-                <a:gridCol w="2097650"/>
-                <a:gridCol w="2097650"/>
-                <a:gridCol w="2097650"/>
+                <a:gridCol w="2097650">
+                  <a:extLst>
+                    <a:ext uri="{9D8B030D-6E8A-4147-A177-3AD203B41FA5}">
+                      <a16:colId xmlns:a16="http://schemas.microsoft.com/office/drawing/2014/main" val="20000"/>
+                    </a:ext>
+                  </a:extLst>
+                </a:gridCol>
+                <a:gridCol w="2097650">
+                  <a:extLst>
+                    <a:ext uri="{9D8B030D-6E8A-4147-A177-3AD203B41FA5}">
+                      <a16:colId xmlns:a16="http://schemas.microsoft.com/office/drawing/2014/main" val="20001"/>
+                    </a:ext>
+                  </a:extLst>
+                </a:gridCol>
+                <a:gridCol w="2097650">
+                  <a:extLst>
+                    <a:ext uri="{9D8B030D-6E8A-4147-A177-3AD203B41FA5}">
+                      <a16:colId xmlns:a16="http://schemas.microsoft.com/office/drawing/2014/main" val="20002"/>
+                    </a:ext>
+                  </a:extLst>
+                </a:gridCol>
+                <a:gridCol w="2097650">
+                  <a:extLst>
+                    <a:ext uri="{9D8B030D-6E8A-4147-A177-3AD203B41FA5}">
+                      <a16:colId xmlns:a16="http://schemas.microsoft.com/office/drawing/2014/main" val="20003"/>
+                    </a:ext>
+                  </a:extLst>
+                </a:gridCol>
               </a:tblGrid>
               <a:tr h="381000">
                 <a:tc>
@@ -10871,7 +11051,7 @@
                     <a:bodyPr/>
                     <a:lstStyle/>
                     <a:p>
-                      <a:pPr indent="0" lvl="0" marL="0" rtl="0" algn="ctr">
+                      <a:pPr marL="0" lvl="0" indent="0" algn="ctr" rtl="0">
                         <a:spcBef>
                           <a:spcPts val="0"/>
                         </a:spcBef>
@@ -10881,56 +11061,56 @@
                         <a:buNone/>
                       </a:pPr>
                       <a:r>
-                        <a:rPr b="1" lang="en-US" sz="1200">
+                        <a:rPr lang="en-US" sz="1200" b="1">
                           <a:solidFill>
                             <a:schemeClr val="lt1"/>
                           </a:solidFill>
                         </a:rPr>
                         <a:t>Ciclo</a:t>
                       </a:r>
-                      <a:endParaRPr b="1" sz="1200">
+                      <a:endParaRPr sz="1200" b="1">
                         <a:solidFill>
                           <a:schemeClr val="lt1"/>
                         </a:solidFill>
                       </a:endParaRPr>
                     </a:p>
                   </a:txBody>
-                  <a:tcPr marT="91425" marB="91425" marR="91425" marL="91425">
-                    <a:lnL cap="flat" cmpd="sng" w="9525">
+                  <a:tcPr marL="91425" marR="91425" marT="91425" marB="91425">
+                    <a:lnL w="9525" cap="flat" cmpd="sng">
                       <a:solidFill>
                         <a:schemeClr val="dk2"/>
                       </a:solidFill>
                       <a:prstDash val="solid"/>
                       <a:round/>
-                      <a:headEnd len="sm" w="sm" type="none"/>
-                      <a:tailEnd len="sm" w="sm" type="none"/>
+                      <a:headEnd type="none" w="sm" len="sm"/>
+                      <a:tailEnd type="none" w="sm" len="sm"/>
                     </a:lnL>
-                    <a:lnR cap="flat" cmpd="sng" w="9525">
+                    <a:lnR w="9525" cap="flat" cmpd="sng">
                       <a:solidFill>
                         <a:schemeClr val="dk2"/>
                       </a:solidFill>
                       <a:prstDash val="solid"/>
                       <a:round/>
-                      <a:headEnd len="sm" w="sm" type="none"/>
-                      <a:tailEnd len="sm" w="sm" type="none"/>
+                      <a:headEnd type="none" w="sm" len="sm"/>
+                      <a:tailEnd type="none" w="sm" len="sm"/>
                     </a:lnR>
-                    <a:lnT cap="flat" cmpd="sng" w="9525">
+                    <a:lnT w="9525" cap="flat" cmpd="sng">
                       <a:solidFill>
                         <a:schemeClr val="dk2"/>
                       </a:solidFill>
                       <a:prstDash val="solid"/>
                       <a:round/>
-                      <a:headEnd len="sm" w="sm" type="none"/>
-                      <a:tailEnd len="sm" w="sm" type="none"/>
+                      <a:headEnd type="none" w="sm" len="sm"/>
+                      <a:tailEnd type="none" w="sm" len="sm"/>
                     </a:lnT>
-                    <a:lnB cap="flat" cmpd="sng" w="9525">
+                    <a:lnB w="9525" cap="flat" cmpd="sng">
                       <a:solidFill>
                         <a:schemeClr val="dk2"/>
                       </a:solidFill>
                       <a:prstDash val="solid"/>
                       <a:round/>
-                      <a:headEnd len="sm" w="sm" type="none"/>
-                      <a:tailEnd len="sm" w="sm" type="none"/>
+                      <a:headEnd type="none" w="sm" len="sm"/>
+                      <a:tailEnd type="none" w="sm" len="sm"/>
                     </a:lnB>
                     <a:solidFill>
                       <a:srgbClr val="9C7FBA"/>
@@ -10942,7 +11122,7 @@
                     <a:bodyPr/>
                     <a:lstStyle/>
                     <a:p>
-                      <a:pPr indent="0" lvl="0" marL="0" rtl="0" algn="ctr">
+                      <a:pPr marL="0" lvl="0" indent="0" algn="ctr" rtl="0">
                         <a:spcBef>
                           <a:spcPts val="0"/>
                         </a:spcBef>
@@ -10952,56 +11132,56 @@
                         <a:buNone/>
                       </a:pPr>
                       <a:r>
-                        <a:rPr b="1" lang="en-US" sz="1200">
+                        <a:rPr lang="en-US" sz="1200" b="1">
                           <a:solidFill>
                             <a:schemeClr val="lt1"/>
                           </a:solidFill>
                         </a:rPr>
                         <a:t>Data</a:t>
                       </a:r>
-                      <a:endParaRPr b="1" sz="1200">
+                      <a:endParaRPr sz="1200" b="1">
                         <a:solidFill>
                           <a:schemeClr val="lt1"/>
                         </a:solidFill>
                       </a:endParaRPr>
                     </a:p>
                   </a:txBody>
-                  <a:tcPr marT="91425" marB="91425" marR="91425" marL="91425">
-                    <a:lnL cap="flat" cmpd="sng" w="9525">
+                  <a:tcPr marL="91425" marR="91425" marT="91425" marB="91425">
+                    <a:lnL w="9525" cap="flat" cmpd="sng">
                       <a:solidFill>
                         <a:schemeClr val="dk2"/>
                       </a:solidFill>
                       <a:prstDash val="solid"/>
                       <a:round/>
-                      <a:headEnd len="sm" w="sm" type="none"/>
-                      <a:tailEnd len="sm" w="sm" type="none"/>
+                      <a:headEnd type="none" w="sm" len="sm"/>
+                      <a:tailEnd type="none" w="sm" len="sm"/>
                     </a:lnL>
-                    <a:lnR cap="flat" cmpd="sng" w="9525">
+                    <a:lnR w="9525" cap="flat" cmpd="sng">
                       <a:solidFill>
                         <a:schemeClr val="dk2"/>
                       </a:solidFill>
                       <a:prstDash val="solid"/>
                       <a:round/>
-                      <a:headEnd len="sm" w="sm" type="none"/>
-                      <a:tailEnd len="sm" w="sm" type="none"/>
+                      <a:headEnd type="none" w="sm" len="sm"/>
+                      <a:tailEnd type="none" w="sm" len="sm"/>
                     </a:lnR>
-                    <a:lnT cap="flat" cmpd="sng" w="9525">
+                    <a:lnT w="9525" cap="flat" cmpd="sng">
                       <a:solidFill>
                         <a:schemeClr val="dk2"/>
                       </a:solidFill>
                       <a:prstDash val="solid"/>
                       <a:round/>
-                      <a:headEnd len="sm" w="sm" type="none"/>
-                      <a:tailEnd len="sm" w="sm" type="none"/>
+                      <a:headEnd type="none" w="sm" len="sm"/>
+                      <a:tailEnd type="none" w="sm" len="sm"/>
                     </a:lnT>
-                    <a:lnB cap="flat" cmpd="sng" w="9525">
+                    <a:lnB w="9525" cap="flat" cmpd="sng">
                       <a:solidFill>
                         <a:schemeClr val="dk2"/>
                       </a:solidFill>
                       <a:prstDash val="solid"/>
                       <a:round/>
-                      <a:headEnd len="sm" w="sm" type="none"/>
-                      <a:tailEnd len="sm" w="sm" type="none"/>
+                      <a:headEnd type="none" w="sm" len="sm"/>
+                      <a:tailEnd type="none" w="sm" len="sm"/>
                     </a:lnB>
                     <a:solidFill>
                       <a:srgbClr val="9C7FBA"/>
@@ -11013,7 +11193,7 @@
                     <a:bodyPr/>
                     <a:lstStyle/>
                     <a:p>
-                      <a:pPr indent="0" lvl="0" marL="0" rtl="0" algn="ctr">
+                      <a:pPr marL="0" lvl="0" indent="0" algn="ctr" rtl="0">
                         <a:spcBef>
                           <a:spcPts val="0"/>
                         </a:spcBef>
@@ -11023,56 +11203,56 @@
                         <a:buNone/>
                       </a:pPr>
                       <a:r>
-                        <a:rPr b="1" lang="en-US" sz="1200">
+                        <a:rPr lang="en-US" sz="1200" b="1">
                           <a:solidFill>
                             <a:schemeClr val="lt1"/>
                           </a:solidFill>
                         </a:rPr>
                         <a:t>Objetivo</a:t>
                       </a:r>
-                      <a:endParaRPr b="1" sz="1200">
+                      <a:endParaRPr sz="1200" b="1">
                         <a:solidFill>
                           <a:schemeClr val="lt1"/>
                         </a:solidFill>
                       </a:endParaRPr>
                     </a:p>
                   </a:txBody>
-                  <a:tcPr marT="91425" marB="91425" marR="91425" marL="91425">
-                    <a:lnL cap="flat" cmpd="sng" w="9525">
+                  <a:tcPr marL="91425" marR="91425" marT="91425" marB="91425">
+                    <a:lnL w="9525" cap="flat" cmpd="sng">
                       <a:solidFill>
                         <a:schemeClr val="dk2"/>
                       </a:solidFill>
                       <a:prstDash val="solid"/>
                       <a:round/>
-                      <a:headEnd len="sm" w="sm" type="none"/>
-                      <a:tailEnd len="sm" w="sm" type="none"/>
+                      <a:headEnd type="none" w="sm" len="sm"/>
+                      <a:tailEnd type="none" w="sm" len="sm"/>
                     </a:lnL>
-                    <a:lnR cap="flat" cmpd="sng" w="9525">
+                    <a:lnR w="9525" cap="flat" cmpd="sng">
                       <a:solidFill>
                         <a:schemeClr val="dk2"/>
                       </a:solidFill>
                       <a:prstDash val="solid"/>
                       <a:round/>
-                      <a:headEnd len="sm" w="sm" type="none"/>
-                      <a:tailEnd len="sm" w="sm" type="none"/>
+                      <a:headEnd type="none" w="sm" len="sm"/>
+                      <a:tailEnd type="none" w="sm" len="sm"/>
                     </a:lnR>
-                    <a:lnT cap="flat" cmpd="sng" w="9525">
+                    <a:lnT w="9525" cap="flat" cmpd="sng">
                       <a:solidFill>
                         <a:schemeClr val="dk2"/>
                       </a:solidFill>
                       <a:prstDash val="solid"/>
                       <a:round/>
-                      <a:headEnd len="sm" w="sm" type="none"/>
-                      <a:tailEnd len="sm" w="sm" type="none"/>
+                      <a:headEnd type="none" w="sm" len="sm"/>
+                      <a:tailEnd type="none" w="sm" len="sm"/>
                     </a:lnT>
-                    <a:lnB cap="flat" cmpd="sng" w="9525">
+                    <a:lnB w="9525" cap="flat" cmpd="sng">
                       <a:solidFill>
                         <a:schemeClr val="dk2"/>
                       </a:solidFill>
                       <a:prstDash val="solid"/>
                       <a:round/>
-                      <a:headEnd len="sm" w="sm" type="none"/>
-                      <a:tailEnd len="sm" w="sm" type="none"/>
+                      <a:headEnd type="none" w="sm" len="sm"/>
+                      <a:tailEnd type="none" w="sm" len="sm"/>
                     </a:lnB>
                     <a:solidFill>
                       <a:srgbClr val="9C7FBA"/>
@@ -11084,7 +11264,7 @@
                     <a:bodyPr/>
                     <a:lstStyle/>
                     <a:p>
-                      <a:pPr indent="0" lvl="0" marL="0" rtl="0" algn="ctr">
+                      <a:pPr marL="0" lvl="0" indent="0" algn="ctr" rtl="0">
                         <a:spcBef>
                           <a:spcPts val="0"/>
                         </a:spcBef>
@@ -11094,62 +11274,67 @@
                         <a:buNone/>
                       </a:pPr>
                       <a:r>
-                        <a:rPr b="1" lang="en-US" sz="1200">
+                        <a:rPr lang="en-US" sz="1200" b="1">
                           <a:solidFill>
                             <a:schemeClr val="lt1"/>
                           </a:solidFill>
                         </a:rPr>
                         <a:t>Entregas</a:t>
                       </a:r>
-                      <a:endParaRPr b="1" sz="1200">
+                      <a:endParaRPr sz="1200" b="1">
                         <a:solidFill>
                           <a:schemeClr val="lt1"/>
                         </a:solidFill>
                       </a:endParaRPr>
                     </a:p>
                   </a:txBody>
-                  <a:tcPr marT="91425" marB="91425" marR="91425" marL="91425">
-                    <a:lnL cap="flat" cmpd="sng" w="9525">
+                  <a:tcPr marL="91425" marR="91425" marT="91425" marB="91425">
+                    <a:lnL w="9525" cap="flat" cmpd="sng">
                       <a:solidFill>
                         <a:schemeClr val="dk2"/>
                       </a:solidFill>
                       <a:prstDash val="solid"/>
                       <a:round/>
-                      <a:headEnd len="sm" w="sm" type="none"/>
-                      <a:tailEnd len="sm" w="sm" type="none"/>
+                      <a:headEnd type="none" w="sm" len="sm"/>
+                      <a:tailEnd type="none" w="sm" len="sm"/>
                     </a:lnL>
-                    <a:lnR cap="flat" cmpd="sng" w="9525">
+                    <a:lnR w="9525" cap="flat" cmpd="sng">
                       <a:solidFill>
                         <a:schemeClr val="dk2"/>
                       </a:solidFill>
                       <a:prstDash val="solid"/>
                       <a:round/>
-                      <a:headEnd len="sm" w="sm" type="none"/>
-                      <a:tailEnd len="sm" w="sm" type="none"/>
+                      <a:headEnd type="none" w="sm" len="sm"/>
+                      <a:tailEnd type="none" w="sm" len="sm"/>
                     </a:lnR>
-                    <a:lnT cap="flat" cmpd="sng" w="9525">
+                    <a:lnT w="9525" cap="flat" cmpd="sng">
                       <a:solidFill>
                         <a:schemeClr val="dk2"/>
                       </a:solidFill>
                       <a:prstDash val="solid"/>
                       <a:round/>
-                      <a:headEnd len="sm" w="sm" type="none"/>
-                      <a:tailEnd len="sm" w="sm" type="none"/>
+                      <a:headEnd type="none" w="sm" len="sm"/>
+                      <a:tailEnd type="none" w="sm" len="sm"/>
                     </a:lnT>
-                    <a:lnB cap="flat" cmpd="sng" w="9525">
+                    <a:lnB w="9525" cap="flat" cmpd="sng">
                       <a:solidFill>
                         <a:schemeClr val="dk2"/>
                       </a:solidFill>
                       <a:prstDash val="solid"/>
                       <a:round/>
-                      <a:headEnd len="sm" w="sm" type="none"/>
-                      <a:tailEnd len="sm" w="sm" type="none"/>
+                      <a:headEnd type="none" w="sm" len="sm"/>
+                      <a:tailEnd type="none" w="sm" len="sm"/>
                     </a:lnB>
                     <a:solidFill>
                       <a:srgbClr val="9C7FBA"/>
                     </a:solidFill>
                   </a:tcPr>
                 </a:tc>
+                <a:extLst>
+                  <a:ext uri="{0D108BD9-81ED-4DB2-BD59-A6C34878D82A}">
+                    <a16:rowId xmlns:a16="http://schemas.microsoft.com/office/drawing/2014/main" val="10000"/>
+                  </a:ext>
+                </a:extLst>
               </a:tr>
               <a:tr h="381000">
                 <a:tc>
@@ -11157,7 +11342,7 @@
                     <a:bodyPr/>
                     <a:lstStyle/>
                     <a:p>
-                      <a:pPr indent="0" lvl="0" marL="0" rtl="0" algn="ctr">
+                      <a:pPr marL="0" lvl="0" indent="0" algn="ctr" rtl="0">
                         <a:spcBef>
                           <a:spcPts val="0"/>
                         </a:spcBef>
@@ -11173,42 +11358,42 @@
                       <a:endParaRPr sz="1200"/>
                     </a:p>
                   </a:txBody>
-                  <a:tcPr marT="91425" marB="91425" marR="91425" marL="91425">
-                    <a:lnL cap="flat" cmpd="sng" w="9525">
+                  <a:tcPr marL="91425" marR="91425" marT="91425" marB="91425">
+                    <a:lnL w="9525" cap="flat" cmpd="sng">
                       <a:solidFill>
                         <a:schemeClr val="dk2"/>
                       </a:solidFill>
                       <a:prstDash val="solid"/>
                       <a:round/>
-                      <a:headEnd len="sm" w="sm" type="none"/>
-                      <a:tailEnd len="sm" w="sm" type="none"/>
+                      <a:headEnd type="none" w="sm" len="sm"/>
+                      <a:tailEnd type="none" w="sm" len="sm"/>
                     </a:lnL>
-                    <a:lnR cap="flat" cmpd="sng" w="9525">
+                    <a:lnR w="9525" cap="flat" cmpd="sng">
                       <a:solidFill>
                         <a:schemeClr val="dk2"/>
                       </a:solidFill>
                       <a:prstDash val="solid"/>
                       <a:round/>
-                      <a:headEnd len="sm" w="sm" type="none"/>
-                      <a:tailEnd len="sm" w="sm" type="none"/>
+                      <a:headEnd type="none" w="sm" len="sm"/>
+                      <a:tailEnd type="none" w="sm" len="sm"/>
                     </a:lnR>
-                    <a:lnT cap="flat" cmpd="sng" w="9525">
+                    <a:lnT w="9525" cap="flat" cmpd="sng">
                       <a:solidFill>
                         <a:schemeClr val="dk2"/>
                       </a:solidFill>
                       <a:prstDash val="solid"/>
                       <a:round/>
-                      <a:headEnd len="sm" w="sm" type="none"/>
-                      <a:tailEnd len="sm" w="sm" type="none"/>
+                      <a:headEnd type="none" w="sm" len="sm"/>
+                      <a:tailEnd type="none" w="sm" len="sm"/>
                     </a:lnT>
-                    <a:lnB cap="flat" cmpd="sng" w="9525">
+                    <a:lnB w="9525" cap="flat" cmpd="sng">
                       <a:solidFill>
                         <a:schemeClr val="dk2"/>
                       </a:solidFill>
                       <a:prstDash val="solid"/>
                       <a:round/>
-                      <a:headEnd len="sm" w="sm" type="none"/>
-                      <a:tailEnd len="sm" w="sm" type="none"/>
+                      <a:headEnd type="none" w="sm" len="sm"/>
+                      <a:tailEnd type="none" w="sm" len="sm"/>
                     </a:lnB>
                     <a:solidFill>
                       <a:schemeClr val="lt1"/>
@@ -11220,7 +11405,7 @@
                     <a:bodyPr/>
                     <a:lstStyle/>
                     <a:p>
-                      <a:pPr indent="0" lvl="0" marL="0" rtl="0" algn="ctr">
+                      <a:pPr marL="0" lvl="0" indent="0" algn="ctr" rtl="0">
                         <a:spcBef>
                           <a:spcPts val="0"/>
                         </a:spcBef>
@@ -11236,42 +11421,42 @@
                       <a:endParaRPr sz="1200"/>
                     </a:p>
                   </a:txBody>
-                  <a:tcPr marT="91425" marB="91425" marR="91425" marL="91425">
-                    <a:lnL cap="flat" cmpd="sng" w="9525">
+                  <a:tcPr marL="91425" marR="91425" marT="91425" marB="91425">
+                    <a:lnL w="9525" cap="flat" cmpd="sng">
                       <a:solidFill>
                         <a:schemeClr val="dk2"/>
                       </a:solidFill>
                       <a:prstDash val="solid"/>
                       <a:round/>
-                      <a:headEnd len="sm" w="sm" type="none"/>
-                      <a:tailEnd len="sm" w="sm" type="none"/>
+                      <a:headEnd type="none" w="sm" len="sm"/>
+                      <a:tailEnd type="none" w="sm" len="sm"/>
                     </a:lnL>
-                    <a:lnR cap="flat" cmpd="sng" w="9525">
+                    <a:lnR w="9525" cap="flat" cmpd="sng">
                       <a:solidFill>
                         <a:schemeClr val="dk2"/>
                       </a:solidFill>
                       <a:prstDash val="solid"/>
                       <a:round/>
-                      <a:headEnd len="sm" w="sm" type="none"/>
-                      <a:tailEnd len="sm" w="sm" type="none"/>
+                      <a:headEnd type="none" w="sm" len="sm"/>
+                      <a:tailEnd type="none" w="sm" len="sm"/>
                     </a:lnR>
-                    <a:lnT cap="flat" cmpd="sng" w="9525">
+                    <a:lnT w="9525" cap="flat" cmpd="sng">
                       <a:solidFill>
                         <a:schemeClr val="dk2"/>
                       </a:solidFill>
                       <a:prstDash val="solid"/>
                       <a:round/>
-                      <a:headEnd len="sm" w="sm" type="none"/>
-                      <a:tailEnd len="sm" w="sm" type="none"/>
+                      <a:headEnd type="none" w="sm" len="sm"/>
+                      <a:tailEnd type="none" w="sm" len="sm"/>
                     </a:lnT>
-                    <a:lnB cap="flat" cmpd="sng" w="9525">
+                    <a:lnB w="9525" cap="flat" cmpd="sng">
                       <a:solidFill>
                         <a:schemeClr val="dk2"/>
                       </a:solidFill>
                       <a:prstDash val="solid"/>
                       <a:round/>
-                      <a:headEnd len="sm" w="sm" type="none"/>
-                      <a:tailEnd len="sm" w="sm" type="none"/>
+                      <a:headEnd type="none" w="sm" len="sm"/>
+                      <a:tailEnd type="none" w="sm" len="sm"/>
                     </a:lnB>
                     <a:solidFill>
                       <a:schemeClr val="lt1"/>
@@ -11283,7 +11468,7 @@
                     <a:bodyPr/>
                     <a:lstStyle/>
                     <a:p>
-                      <a:pPr indent="0" lvl="0" marL="0" rtl="0" algn="ctr">
+                      <a:pPr marL="0" lvl="0" indent="0" algn="ctr" rtl="0">
                         <a:spcBef>
                           <a:spcPts val="0"/>
                         </a:spcBef>
@@ -11299,42 +11484,42 @@
                       <a:endParaRPr sz="1200"/>
                     </a:p>
                   </a:txBody>
-                  <a:tcPr marT="91425" marB="91425" marR="91425" marL="91425">
-                    <a:lnL cap="flat" cmpd="sng" w="9525">
+                  <a:tcPr marL="91425" marR="91425" marT="91425" marB="91425">
+                    <a:lnL w="9525" cap="flat" cmpd="sng">
                       <a:solidFill>
                         <a:schemeClr val="dk2"/>
                       </a:solidFill>
                       <a:prstDash val="solid"/>
                       <a:round/>
-                      <a:headEnd len="sm" w="sm" type="none"/>
-                      <a:tailEnd len="sm" w="sm" type="none"/>
+                      <a:headEnd type="none" w="sm" len="sm"/>
+                      <a:tailEnd type="none" w="sm" len="sm"/>
                     </a:lnL>
-                    <a:lnR cap="flat" cmpd="sng" w="9525">
+                    <a:lnR w="9525" cap="flat" cmpd="sng">
                       <a:solidFill>
                         <a:schemeClr val="dk2"/>
                       </a:solidFill>
                       <a:prstDash val="solid"/>
                       <a:round/>
-                      <a:headEnd len="sm" w="sm" type="none"/>
-                      <a:tailEnd len="sm" w="sm" type="none"/>
+                      <a:headEnd type="none" w="sm" len="sm"/>
+                      <a:tailEnd type="none" w="sm" len="sm"/>
                     </a:lnR>
-                    <a:lnT cap="flat" cmpd="sng" w="9525">
+                    <a:lnT w="9525" cap="flat" cmpd="sng">
                       <a:solidFill>
                         <a:schemeClr val="dk2"/>
                       </a:solidFill>
                       <a:prstDash val="solid"/>
                       <a:round/>
-                      <a:headEnd len="sm" w="sm" type="none"/>
-                      <a:tailEnd len="sm" w="sm" type="none"/>
+                      <a:headEnd type="none" w="sm" len="sm"/>
+                      <a:tailEnd type="none" w="sm" len="sm"/>
                     </a:lnT>
-                    <a:lnB cap="flat" cmpd="sng" w="9525">
+                    <a:lnB w="9525" cap="flat" cmpd="sng">
                       <a:solidFill>
                         <a:schemeClr val="dk2"/>
                       </a:solidFill>
                       <a:prstDash val="solid"/>
                       <a:round/>
-                      <a:headEnd len="sm" w="sm" type="none"/>
-                      <a:tailEnd len="sm" w="sm" type="none"/>
+                      <a:headEnd type="none" w="sm" len="sm"/>
+                      <a:tailEnd type="none" w="sm" len="sm"/>
                     </a:lnB>
                     <a:solidFill>
                       <a:schemeClr val="lt1"/>
@@ -11346,7 +11531,7 @@
                     <a:bodyPr/>
                     <a:lstStyle/>
                     <a:p>
-                      <a:pPr indent="0" lvl="0" marL="0" rtl="0" algn="ctr">
+                      <a:pPr marL="0" lvl="0" indent="0" algn="ctr" rtl="0">
                         <a:spcBef>
                           <a:spcPts val="0"/>
                         </a:spcBef>
@@ -11362,48 +11547,53 @@
                       <a:endParaRPr sz="1200"/>
                     </a:p>
                   </a:txBody>
-                  <a:tcPr marT="91425" marB="91425" marR="91425" marL="91425">
-                    <a:lnL cap="flat" cmpd="sng" w="9525">
+                  <a:tcPr marL="91425" marR="91425" marT="91425" marB="91425">
+                    <a:lnL w="9525" cap="flat" cmpd="sng">
                       <a:solidFill>
                         <a:schemeClr val="dk2"/>
                       </a:solidFill>
                       <a:prstDash val="solid"/>
                       <a:round/>
-                      <a:headEnd len="sm" w="sm" type="none"/>
-                      <a:tailEnd len="sm" w="sm" type="none"/>
+                      <a:headEnd type="none" w="sm" len="sm"/>
+                      <a:tailEnd type="none" w="sm" len="sm"/>
                     </a:lnL>
-                    <a:lnR cap="flat" cmpd="sng" w="9525">
+                    <a:lnR w="9525" cap="flat" cmpd="sng">
                       <a:solidFill>
                         <a:schemeClr val="dk2"/>
                       </a:solidFill>
                       <a:prstDash val="solid"/>
                       <a:round/>
-                      <a:headEnd len="sm" w="sm" type="none"/>
-                      <a:tailEnd len="sm" w="sm" type="none"/>
+                      <a:headEnd type="none" w="sm" len="sm"/>
+                      <a:tailEnd type="none" w="sm" len="sm"/>
                     </a:lnR>
-                    <a:lnT cap="flat" cmpd="sng" w="9525">
+                    <a:lnT w="9525" cap="flat" cmpd="sng">
                       <a:solidFill>
                         <a:schemeClr val="dk2"/>
                       </a:solidFill>
                       <a:prstDash val="solid"/>
                       <a:round/>
-                      <a:headEnd len="sm" w="sm" type="none"/>
-                      <a:tailEnd len="sm" w="sm" type="none"/>
+                      <a:headEnd type="none" w="sm" len="sm"/>
+                      <a:tailEnd type="none" w="sm" len="sm"/>
                     </a:lnT>
-                    <a:lnB cap="flat" cmpd="sng" w="9525">
+                    <a:lnB w="9525" cap="flat" cmpd="sng">
                       <a:solidFill>
                         <a:schemeClr val="dk2"/>
                       </a:solidFill>
                       <a:prstDash val="solid"/>
                       <a:round/>
-                      <a:headEnd len="sm" w="sm" type="none"/>
-                      <a:tailEnd len="sm" w="sm" type="none"/>
+                      <a:headEnd type="none" w="sm" len="sm"/>
+                      <a:tailEnd type="none" w="sm" len="sm"/>
                     </a:lnB>
                     <a:solidFill>
                       <a:schemeClr val="lt1"/>
                     </a:solidFill>
                   </a:tcPr>
                 </a:tc>
+                <a:extLst>
+                  <a:ext uri="{0D108BD9-81ED-4DB2-BD59-A6C34878D82A}">
+                    <a16:rowId xmlns:a16="http://schemas.microsoft.com/office/drawing/2014/main" val="10001"/>
+                  </a:ext>
+                </a:extLst>
               </a:tr>
               <a:tr h="381000">
                 <a:tc>
@@ -11411,7 +11601,7 @@
                     <a:bodyPr/>
                     <a:lstStyle/>
                     <a:p>
-                      <a:pPr indent="0" lvl="0" marL="0" rtl="0" algn="ctr">
+                      <a:pPr marL="0" lvl="0" indent="0" algn="ctr" rtl="0">
                         <a:spcBef>
                           <a:spcPts val="0"/>
                         </a:spcBef>
@@ -11427,42 +11617,42 @@
                       <a:endParaRPr sz="1200"/>
                     </a:p>
                   </a:txBody>
-                  <a:tcPr marT="91425" marB="91425" marR="91425" marL="91425">
-                    <a:lnL cap="flat" cmpd="sng" w="9525">
+                  <a:tcPr marL="91425" marR="91425" marT="91425" marB="91425">
+                    <a:lnL w="9525" cap="flat" cmpd="sng">
                       <a:solidFill>
                         <a:schemeClr val="dk2"/>
                       </a:solidFill>
                       <a:prstDash val="solid"/>
                       <a:round/>
-                      <a:headEnd len="sm" w="sm" type="none"/>
-                      <a:tailEnd len="sm" w="sm" type="none"/>
+                      <a:headEnd type="none" w="sm" len="sm"/>
+                      <a:tailEnd type="none" w="sm" len="sm"/>
                     </a:lnL>
-                    <a:lnR cap="flat" cmpd="sng" w="9525">
+                    <a:lnR w="9525" cap="flat" cmpd="sng">
                       <a:solidFill>
                         <a:schemeClr val="dk2"/>
                       </a:solidFill>
                       <a:prstDash val="solid"/>
                       <a:round/>
-                      <a:headEnd len="sm" w="sm" type="none"/>
-                      <a:tailEnd len="sm" w="sm" type="none"/>
+                      <a:headEnd type="none" w="sm" len="sm"/>
+                      <a:tailEnd type="none" w="sm" len="sm"/>
                     </a:lnR>
-                    <a:lnT cap="flat" cmpd="sng" w="9525">
+                    <a:lnT w="9525" cap="flat" cmpd="sng">
                       <a:solidFill>
                         <a:schemeClr val="dk2"/>
                       </a:solidFill>
                       <a:prstDash val="solid"/>
                       <a:round/>
-                      <a:headEnd len="sm" w="sm" type="none"/>
-                      <a:tailEnd len="sm" w="sm" type="none"/>
+                      <a:headEnd type="none" w="sm" len="sm"/>
+                      <a:tailEnd type="none" w="sm" len="sm"/>
                     </a:lnT>
-                    <a:lnB cap="flat" cmpd="sng" w="9525">
+                    <a:lnB w="9525" cap="flat" cmpd="sng">
                       <a:solidFill>
                         <a:schemeClr val="dk2"/>
                       </a:solidFill>
                       <a:prstDash val="solid"/>
                       <a:round/>
-                      <a:headEnd len="sm" w="sm" type="none"/>
-                      <a:tailEnd len="sm" w="sm" type="none"/>
+                      <a:headEnd type="none" w="sm" len="sm"/>
+                      <a:tailEnd type="none" w="sm" len="sm"/>
                     </a:lnB>
                     <a:solidFill>
                       <a:srgbClr val="F3F3F3"/>
@@ -11474,7 +11664,7 @@
                     <a:bodyPr/>
                     <a:lstStyle/>
                     <a:p>
-                      <a:pPr indent="0" lvl="0" marL="0" rtl="0" algn="ctr">
+                      <a:pPr marL="0" lvl="0" indent="0" algn="ctr" rtl="0">
                         <a:spcBef>
                           <a:spcPts val="0"/>
                         </a:spcBef>
@@ -11490,42 +11680,42 @@
                       <a:endParaRPr sz="1200"/>
                     </a:p>
                   </a:txBody>
-                  <a:tcPr marT="91425" marB="91425" marR="91425" marL="91425">
-                    <a:lnL cap="flat" cmpd="sng" w="9525">
+                  <a:tcPr marL="91425" marR="91425" marT="91425" marB="91425">
+                    <a:lnL w="9525" cap="flat" cmpd="sng">
                       <a:solidFill>
                         <a:schemeClr val="dk2"/>
                       </a:solidFill>
                       <a:prstDash val="solid"/>
                       <a:round/>
-                      <a:headEnd len="sm" w="sm" type="none"/>
-                      <a:tailEnd len="sm" w="sm" type="none"/>
+                      <a:headEnd type="none" w="sm" len="sm"/>
+                      <a:tailEnd type="none" w="sm" len="sm"/>
                     </a:lnL>
-                    <a:lnR cap="flat" cmpd="sng" w="9525">
+                    <a:lnR w="9525" cap="flat" cmpd="sng">
                       <a:solidFill>
                         <a:schemeClr val="dk2"/>
                       </a:solidFill>
                       <a:prstDash val="solid"/>
                       <a:round/>
-                      <a:headEnd len="sm" w="sm" type="none"/>
-                      <a:tailEnd len="sm" w="sm" type="none"/>
+                      <a:headEnd type="none" w="sm" len="sm"/>
+                      <a:tailEnd type="none" w="sm" len="sm"/>
                     </a:lnR>
-                    <a:lnT cap="flat" cmpd="sng" w="9525">
+                    <a:lnT w="9525" cap="flat" cmpd="sng">
                       <a:solidFill>
                         <a:schemeClr val="dk2"/>
                       </a:solidFill>
                       <a:prstDash val="solid"/>
                       <a:round/>
-                      <a:headEnd len="sm" w="sm" type="none"/>
-                      <a:tailEnd len="sm" w="sm" type="none"/>
+                      <a:headEnd type="none" w="sm" len="sm"/>
+                      <a:tailEnd type="none" w="sm" len="sm"/>
                     </a:lnT>
-                    <a:lnB cap="flat" cmpd="sng" w="9525">
+                    <a:lnB w="9525" cap="flat" cmpd="sng">
                       <a:solidFill>
                         <a:schemeClr val="dk2"/>
                       </a:solidFill>
                       <a:prstDash val="solid"/>
                       <a:round/>
-                      <a:headEnd len="sm" w="sm" type="none"/>
-                      <a:tailEnd len="sm" w="sm" type="none"/>
+                      <a:headEnd type="none" w="sm" len="sm"/>
+                      <a:tailEnd type="none" w="sm" len="sm"/>
                     </a:lnB>
                     <a:solidFill>
                       <a:srgbClr val="F3F3F3"/>
@@ -11537,7 +11727,7 @@
                     <a:bodyPr/>
                     <a:lstStyle/>
                     <a:p>
-                      <a:pPr indent="0" lvl="0" marL="0" rtl="0" algn="ctr">
+                      <a:pPr marL="0" lvl="0" indent="0" algn="ctr" rtl="0">
                         <a:spcBef>
                           <a:spcPts val="0"/>
                         </a:spcBef>
@@ -11553,42 +11743,42 @@
                       <a:endParaRPr sz="1200"/>
                     </a:p>
                   </a:txBody>
-                  <a:tcPr marT="91425" marB="91425" marR="91425" marL="91425">
-                    <a:lnL cap="flat" cmpd="sng" w="9525">
+                  <a:tcPr marL="91425" marR="91425" marT="91425" marB="91425">
+                    <a:lnL w="9525" cap="flat" cmpd="sng">
                       <a:solidFill>
                         <a:schemeClr val="dk2"/>
                       </a:solidFill>
                       <a:prstDash val="solid"/>
                       <a:round/>
-                      <a:headEnd len="sm" w="sm" type="none"/>
-                      <a:tailEnd len="sm" w="sm" type="none"/>
+                      <a:headEnd type="none" w="sm" len="sm"/>
+                      <a:tailEnd type="none" w="sm" len="sm"/>
                     </a:lnL>
-                    <a:lnR cap="flat" cmpd="sng" w="9525">
+                    <a:lnR w="9525" cap="flat" cmpd="sng">
                       <a:solidFill>
                         <a:schemeClr val="dk2"/>
                       </a:solidFill>
                       <a:prstDash val="solid"/>
                       <a:round/>
-                      <a:headEnd len="sm" w="sm" type="none"/>
-                      <a:tailEnd len="sm" w="sm" type="none"/>
+                      <a:headEnd type="none" w="sm" len="sm"/>
+                      <a:tailEnd type="none" w="sm" len="sm"/>
                     </a:lnR>
-                    <a:lnT cap="flat" cmpd="sng" w="9525">
+                    <a:lnT w="9525" cap="flat" cmpd="sng">
                       <a:solidFill>
                         <a:schemeClr val="dk2"/>
                       </a:solidFill>
                       <a:prstDash val="solid"/>
                       <a:round/>
-                      <a:headEnd len="sm" w="sm" type="none"/>
-                      <a:tailEnd len="sm" w="sm" type="none"/>
+                      <a:headEnd type="none" w="sm" len="sm"/>
+                      <a:tailEnd type="none" w="sm" len="sm"/>
                     </a:lnT>
-                    <a:lnB cap="flat" cmpd="sng" w="9525">
+                    <a:lnB w="9525" cap="flat" cmpd="sng">
                       <a:solidFill>
                         <a:schemeClr val="dk2"/>
                       </a:solidFill>
                       <a:prstDash val="solid"/>
                       <a:round/>
-                      <a:headEnd len="sm" w="sm" type="none"/>
-                      <a:tailEnd len="sm" w="sm" type="none"/>
+                      <a:headEnd type="none" w="sm" len="sm"/>
+                      <a:tailEnd type="none" w="sm" len="sm"/>
                     </a:lnB>
                     <a:solidFill>
                       <a:srgbClr val="F3F3F3"/>
@@ -11600,7 +11790,7 @@
                     <a:bodyPr/>
                     <a:lstStyle/>
                     <a:p>
-                      <a:pPr indent="0" lvl="0" marL="0" rtl="0" algn="ctr">
+                      <a:pPr marL="0" lvl="0" indent="0" algn="ctr" rtl="0">
                         <a:spcBef>
                           <a:spcPts val="0"/>
                         </a:spcBef>
@@ -11616,48 +11806,53 @@
                       <a:endParaRPr sz="1200"/>
                     </a:p>
                   </a:txBody>
-                  <a:tcPr marT="91425" marB="91425" marR="91425" marL="91425">
-                    <a:lnL cap="flat" cmpd="sng" w="9525">
+                  <a:tcPr marL="91425" marR="91425" marT="91425" marB="91425">
+                    <a:lnL w="9525" cap="flat" cmpd="sng">
                       <a:solidFill>
                         <a:schemeClr val="dk2"/>
                       </a:solidFill>
                       <a:prstDash val="solid"/>
                       <a:round/>
-                      <a:headEnd len="sm" w="sm" type="none"/>
-                      <a:tailEnd len="sm" w="sm" type="none"/>
+                      <a:headEnd type="none" w="sm" len="sm"/>
+                      <a:tailEnd type="none" w="sm" len="sm"/>
                     </a:lnL>
-                    <a:lnR cap="flat" cmpd="sng" w="9525">
+                    <a:lnR w="9525" cap="flat" cmpd="sng">
                       <a:solidFill>
                         <a:schemeClr val="dk2"/>
                       </a:solidFill>
                       <a:prstDash val="solid"/>
                       <a:round/>
-                      <a:headEnd len="sm" w="sm" type="none"/>
-                      <a:tailEnd len="sm" w="sm" type="none"/>
+                      <a:headEnd type="none" w="sm" len="sm"/>
+                      <a:tailEnd type="none" w="sm" len="sm"/>
                     </a:lnR>
-                    <a:lnT cap="flat" cmpd="sng" w="9525">
+                    <a:lnT w="9525" cap="flat" cmpd="sng">
                       <a:solidFill>
                         <a:schemeClr val="dk2"/>
                       </a:solidFill>
                       <a:prstDash val="solid"/>
                       <a:round/>
-                      <a:headEnd len="sm" w="sm" type="none"/>
-                      <a:tailEnd len="sm" w="sm" type="none"/>
+                      <a:headEnd type="none" w="sm" len="sm"/>
+                      <a:tailEnd type="none" w="sm" len="sm"/>
                     </a:lnT>
-                    <a:lnB cap="flat" cmpd="sng" w="9525">
+                    <a:lnB w="9525" cap="flat" cmpd="sng">
                       <a:solidFill>
                         <a:schemeClr val="dk2"/>
                       </a:solidFill>
                       <a:prstDash val="solid"/>
                       <a:round/>
-                      <a:headEnd len="sm" w="sm" type="none"/>
-                      <a:tailEnd len="sm" w="sm" type="none"/>
+                      <a:headEnd type="none" w="sm" len="sm"/>
+                      <a:tailEnd type="none" w="sm" len="sm"/>
                     </a:lnB>
                     <a:solidFill>
                       <a:srgbClr val="F3F3F3"/>
                     </a:solidFill>
                   </a:tcPr>
                 </a:tc>
+                <a:extLst>
+                  <a:ext uri="{0D108BD9-81ED-4DB2-BD59-A6C34878D82A}">
+                    <a16:rowId xmlns:a16="http://schemas.microsoft.com/office/drawing/2014/main" val="10002"/>
+                  </a:ext>
+                </a:extLst>
               </a:tr>
               <a:tr h="381000">
                 <a:tc>
@@ -11665,7 +11860,7 @@
                     <a:bodyPr/>
                     <a:lstStyle/>
                     <a:p>
-                      <a:pPr indent="0" lvl="0" marL="0" rtl="0" algn="ctr">
+                      <a:pPr marL="0" lvl="0" indent="0" algn="ctr" rtl="0">
                         <a:spcBef>
                           <a:spcPts val="0"/>
                         </a:spcBef>
@@ -11681,42 +11876,42 @@
                       <a:endParaRPr sz="1200"/>
                     </a:p>
                   </a:txBody>
-                  <a:tcPr marT="91425" marB="91425" marR="91425" marL="91425">
-                    <a:lnL cap="flat" cmpd="sng" w="9525">
+                  <a:tcPr marL="91425" marR="91425" marT="91425" marB="91425">
+                    <a:lnL w="9525" cap="flat" cmpd="sng">
                       <a:solidFill>
                         <a:schemeClr val="dk2"/>
                       </a:solidFill>
                       <a:prstDash val="solid"/>
                       <a:round/>
-                      <a:headEnd len="sm" w="sm" type="none"/>
-                      <a:tailEnd len="sm" w="sm" type="none"/>
+                      <a:headEnd type="none" w="sm" len="sm"/>
+                      <a:tailEnd type="none" w="sm" len="sm"/>
                     </a:lnL>
-                    <a:lnR cap="flat" cmpd="sng" w="9525">
+                    <a:lnR w="9525" cap="flat" cmpd="sng">
                       <a:solidFill>
                         <a:schemeClr val="dk2"/>
                       </a:solidFill>
                       <a:prstDash val="solid"/>
                       <a:round/>
-                      <a:headEnd len="sm" w="sm" type="none"/>
-                      <a:tailEnd len="sm" w="sm" type="none"/>
+                      <a:headEnd type="none" w="sm" len="sm"/>
+                      <a:tailEnd type="none" w="sm" len="sm"/>
                     </a:lnR>
-                    <a:lnT cap="flat" cmpd="sng" w="9525">
+                    <a:lnT w="9525" cap="flat" cmpd="sng">
                       <a:solidFill>
                         <a:schemeClr val="dk2"/>
                       </a:solidFill>
                       <a:prstDash val="solid"/>
                       <a:round/>
-                      <a:headEnd len="sm" w="sm" type="none"/>
-                      <a:tailEnd len="sm" w="sm" type="none"/>
+                      <a:headEnd type="none" w="sm" len="sm"/>
+                      <a:tailEnd type="none" w="sm" len="sm"/>
                     </a:lnT>
-                    <a:lnB cap="flat" cmpd="sng" w="9525">
+                    <a:lnB w="9525" cap="flat" cmpd="sng">
                       <a:solidFill>
                         <a:schemeClr val="dk2"/>
                       </a:solidFill>
                       <a:prstDash val="solid"/>
                       <a:round/>
-                      <a:headEnd len="sm" w="sm" type="none"/>
-                      <a:tailEnd len="sm" w="sm" type="none"/>
+                      <a:headEnd type="none" w="sm" len="sm"/>
+                      <a:tailEnd type="none" w="sm" len="sm"/>
                     </a:lnB>
                     <a:solidFill>
                       <a:schemeClr val="lt1"/>
@@ -11728,7 +11923,7 @@
                     <a:bodyPr/>
                     <a:lstStyle/>
                     <a:p>
-                      <a:pPr indent="0" lvl="0" marL="0" rtl="0" algn="ctr">
+                      <a:pPr marL="0" lvl="0" indent="0" algn="ctr" rtl="0">
                         <a:spcBef>
                           <a:spcPts val="0"/>
                         </a:spcBef>
@@ -11744,42 +11939,42 @@
                       <a:endParaRPr sz="1200"/>
                     </a:p>
                   </a:txBody>
-                  <a:tcPr marT="91425" marB="91425" marR="91425" marL="91425">
-                    <a:lnL cap="flat" cmpd="sng" w="9525">
+                  <a:tcPr marL="91425" marR="91425" marT="91425" marB="91425">
+                    <a:lnL w="9525" cap="flat" cmpd="sng">
                       <a:solidFill>
                         <a:schemeClr val="dk2"/>
                       </a:solidFill>
                       <a:prstDash val="solid"/>
                       <a:round/>
-                      <a:headEnd len="sm" w="sm" type="none"/>
-                      <a:tailEnd len="sm" w="sm" type="none"/>
+                      <a:headEnd type="none" w="sm" len="sm"/>
+                      <a:tailEnd type="none" w="sm" len="sm"/>
                     </a:lnL>
-                    <a:lnR cap="flat" cmpd="sng" w="9525">
+                    <a:lnR w="9525" cap="flat" cmpd="sng">
                       <a:solidFill>
                         <a:schemeClr val="dk2"/>
                       </a:solidFill>
                       <a:prstDash val="solid"/>
                       <a:round/>
-                      <a:headEnd len="sm" w="sm" type="none"/>
-                      <a:tailEnd len="sm" w="sm" type="none"/>
+                      <a:headEnd type="none" w="sm" len="sm"/>
+                      <a:tailEnd type="none" w="sm" len="sm"/>
                     </a:lnR>
-                    <a:lnT cap="flat" cmpd="sng" w="9525">
+                    <a:lnT w="9525" cap="flat" cmpd="sng">
                       <a:solidFill>
                         <a:schemeClr val="dk2"/>
                       </a:solidFill>
                       <a:prstDash val="solid"/>
                       <a:round/>
-                      <a:headEnd len="sm" w="sm" type="none"/>
-                      <a:tailEnd len="sm" w="sm" type="none"/>
+                      <a:headEnd type="none" w="sm" len="sm"/>
+                      <a:tailEnd type="none" w="sm" len="sm"/>
                     </a:lnT>
-                    <a:lnB cap="flat" cmpd="sng" w="9525">
+                    <a:lnB w="9525" cap="flat" cmpd="sng">
                       <a:solidFill>
                         <a:schemeClr val="dk2"/>
                       </a:solidFill>
                       <a:prstDash val="solid"/>
                       <a:round/>
-                      <a:headEnd len="sm" w="sm" type="none"/>
-                      <a:tailEnd len="sm" w="sm" type="none"/>
+                      <a:headEnd type="none" w="sm" len="sm"/>
+                      <a:tailEnd type="none" w="sm" len="sm"/>
                     </a:lnB>
                     <a:solidFill>
                       <a:schemeClr val="lt1"/>
@@ -11791,7 +11986,7 @@
                     <a:bodyPr/>
                     <a:lstStyle/>
                     <a:p>
-                      <a:pPr indent="0" lvl="0" marL="0" rtl="0" algn="ctr">
+                      <a:pPr marL="0" lvl="0" indent="0" algn="ctr" rtl="0">
                         <a:spcBef>
                           <a:spcPts val="0"/>
                         </a:spcBef>
@@ -11807,42 +12002,42 @@
                       <a:endParaRPr sz="1200"/>
                     </a:p>
                   </a:txBody>
-                  <a:tcPr marT="91425" marB="91425" marR="91425" marL="91425">
-                    <a:lnL cap="flat" cmpd="sng" w="9525">
+                  <a:tcPr marL="91425" marR="91425" marT="91425" marB="91425">
+                    <a:lnL w="9525" cap="flat" cmpd="sng">
                       <a:solidFill>
                         <a:schemeClr val="dk2"/>
                       </a:solidFill>
                       <a:prstDash val="solid"/>
                       <a:round/>
-                      <a:headEnd len="sm" w="sm" type="none"/>
-                      <a:tailEnd len="sm" w="sm" type="none"/>
+                      <a:headEnd type="none" w="sm" len="sm"/>
+                      <a:tailEnd type="none" w="sm" len="sm"/>
                     </a:lnL>
-                    <a:lnR cap="flat" cmpd="sng" w="9525">
+                    <a:lnR w="9525" cap="flat" cmpd="sng">
                       <a:solidFill>
                         <a:schemeClr val="dk2"/>
                       </a:solidFill>
                       <a:prstDash val="solid"/>
                       <a:round/>
-                      <a:headEnd len="sm" w="sm" type="none"/>
-                      <a:tailEnd len="sm" w="sm" type="none"/>
+                      <a:headEnd type="none" w="sm" len="sm"/>
+                      <a:tailEnd type="none" w="sm" len="sm"/>
                     </a:lnR>
-                    <a:lnT cap="flat" cmpd="sng" w="9525">
+                    <a:lnT w="9525" cap="flat" cmpd="sng">
                       <a:solidFill>
                         <a:schemeClr val="dk2"/>
                       </a:solidFill>
                       <a:prstDash val="solid"/>
                       <a:round/>
-                      <a:headEnd len="sm" w="sm" type="none"/>
-                      <a:tailEnd len="sm" w="sm" type="none"/>
+                      <a:headEnd type="none" w="sm" len="sm"/>
+                      <a:tailEnd type="none" w="sm" len="sm"/>
                     </a:lnT>
-                    <a:lnB cap="flat" cmpd="sng" w="9525">
+                    <a:lnB w="9525" cap="flat" cmpd="sng">
                       <a:solidFill>
                         <a:schemeClr val="dk2"/>
                       </a:solidFill>
                       <a:prstDash val="solid"/>
                       <a:round/>
-                      <a:headEnd len="sm" w="sm" type="none"/>
-                      <a:tailEnd len="sm" w="sm" type="none"/>
+                      <a:headEnd type="none" w="sm" len="sm"/>
+                      <a:tailEnd type="none" w="sm" len="sm"/>
                     </a:lnB>
                     <a:solidFill>
                       <a:schemeClr val="lt1"/>
@@ -11854,7 +12049,7 @@
                     <a:bodyPr/>
                     <a:lstStyle/>
                     <a:p>
-                      <a:pPr indent="0" lvl="0" marL="0" rtl="0" algn="ctr">
+                      <a:pPr marL="0" lvl="0" indent="0" algn="ctr" rtl="0">
                         <a:spcBef>
                           <a:spcPts val="0"/>
                         </a:spcBef>
@@ -11870,48 +12065,53 @@
                       <a:endParaRPr sz="1200"/>
                     </a:p>
                   </a:txBody>
-                  <a:tcPr marT="91425" marB="91425" marR="91425" marL="91425">
-                    <a:lnL cap="flat" cmpd="sng" w="9525">
+                  <a:tcPr marL="91425" marR="91425" marT="91425" marB="91425">
+                    <a:lnL w="9525" cap="flat" cmpd="sng">
                       <a:solidFill>
                         <a:schemeClr val="dk2"/>
                       </a:solidFill>
                       <a:prstDash val="solid"/>
                       <a:round/>
-                      <a:headEnd len="sm" w="sm" type="none"/>
-                      <a:tailEnd len="sm" w="sm" type="none"/>
+                      <a:headEnd type="none" w="sm" len="sm"/>
+                      <a:tailEnd type="none" w="sm" len="sm"/>
                     </a:lnL>
-                    <a:lnR cap="flat" cmpd="sng" w="9525">
+                    <a:lnR w="9525" cap="flat" cmpd="sng">
                       <a:solidFill>
                         <a:schemeClr val="dk2"/>
                       </a:solidFill>
                       <a:prstDash val="solid"/>
                       <a:round/>
-                      <a:headEnd len="sm" w="sm" type="none"/>
-                      <a:tailEnd len="sm" w="sm" type="none"/>
+                      <a:headEnd type="none" w="sm" len="sm"/>
+                      <a:tailEnd type="none" w="sm" len="sm"/>
                     </a:lnR>
-                    <a:lnT cap="flat" cmpd="sng" w="9525">
+                    <a:lnT w="9525" cap="flat" cmpd="sng">
                       <a:solidFill>
                         <a:schemeClr val="dk2"/>
                       </a:solidFill>
                       <a:prstDash val="solid"/>
                       <a:round/>
-                      <a:headEnd len="sm" w="sm" type="none"/>
-                      <a:tailEnd len="sm" w="sm" type="none"/>
+                      <a:headEnd type="none" w="sm" len="sm"/>
+                      <a:tailEnd type="none" w="sm" len="sm"/>
                     </a:lnT>
-                    <a:lnB cap="flat" cmpd="sng" w="9525">
+                    <a:lnB w="9525" cap="flat" cmpd="sng">
                       <a:solidFill>
                         <a:schemeClr val="dk2"/>
                       </a:solidFill>
                       <a:prstDash val="solid"/>
                       <a:round/>
-                      <a:headEnd len="sm" w="sm" type="none"/>
-                      <a:tailEnd len="sm" w="sm" type="none"/>
+                      <a:headEnd type="none" w="sm" len="sm"/>
+                      <a:tailEnd type="none" w="sm" len="sm"/>
                     </a:lnB>
                     <a:solidFill>
                       <a:schemeClr val="lt1"/>
                     </a:solidFill>
                   </a:tcPr>
                 </a:tc>
+                <a:extLst>
+                  <a:ext uri="{0D108BD9-81ED-4DB2-BD59-A6C34878D82A}">
+                    <a16:rowId xmlns:a16="http://schemas.microsoft.com/office/drawing/2014/main" val="10003"/>
+                  </a:ext>
+                </a:extLst>
               </a:tr>
               <a:tr h="381000">
                 <a:tc>
@@ -11919,7 +12119,7 @@
                     <a:bodyPr/>
                     <a:lstStyle/>
                     <a:p>
-                      <a:pPr indent="0" lvl="0" marL="0" rtl="0" algn="ctr">
+                      <a:pPr marL="0" lvl="0" indent="0" algn="ctr" rtl="0">
                         <a:spcBef>
                           <a:spcPts val="0"/>
                         </a:spcBef>
@@ -11935,42 +12135,42 @@
                       <a:endParaRPr sz="1200"/>
                     </a:p>
                   </a:txBody>
-                  <a:tcPr marT="91425" marB="91425" marR="91425" marL="91425">
-                    <a:lnL cap="flat" cmpd="sng" w="9525">
+                  <a:tcPr marL="91425" marR="91425" marT="91425" marB="91425">
+                    <a:lnL w="9525" cap="flat" cmpd="sng">
                       <a:solidFill>
                         <a:schemeClr val="dk2"/>
                       </a:solidFill>
                       <a:prstDash val="solid"/>
                       <a:round/>
-                      <a:headEnd len="sm" w="sm" type="none"/>
-                      <a:tailEnd len="sm" w="sm" type="none"/>
+                      <a:headEnd type="none" w="sm" len="sm"/>
+                      <a:tailEnd type="none" w="sm" len="sm"/>
                     </a:lnL>
-                    <a:lnR cap="flat" cmpd="sng" w="9525">
+                    <a:lnR w="9525" cap="flat" cmpd="sng">
                       <a:solidFill>
                         <a:schemeClr val="dk2"/>
                       </a:solidFill>
                       <a:prstDash val="solid"/>
                       <a:round/>
-                      <a:headEnd len="sm" w="sm" type="none"/>
-                      <a:tailEnd len="sm" w="sm" type="none"/>
+                      <a:headEnd type="none" w="sm" len="sm"/>
+                      <a:tailEnd type="none" w="sm" len="sm"/>
                     </a:lnR>
-                    <a:lnT cap="flat" cmpd="sng" w="9525">
+                    <a:lnT w="9525" cap="flat" cmpd="sng">
                       <a:solidFill>
                         <a:schemeClr val="dk2"/>
                       </a:solidFill>
                       <a:prstDash val="solid"/>
                       <a:round/>
-                      <a:headEnd len="sm" w="sm" type="none"/>
-                      <a:tailEnd len="sm" w="sm" type="none"/>
+                      <a:headEnd type="none" w="sm" len="sm"/>
+                      <a:tailEnd type="none" w="sm" len="sm"/>
                     </a:lnT>
-                    <a:lnB cap="flat" cmpd="sng" w="9525">
+                    <a:lnB w="9525" cap="flat" cmpd="sng">
                       <a:solidFill>
                         <a:schemeClr val="dk2"/>
                       </a:solidFill>
                       <a:prstDash val="solid"/>
                       <a:round/>
-                      <a:headEnd len="sm" w="sm" type="none"/>
-                      <a:tailEnd len="sm" w="sm" type="none"/>
+                      <a:headEnd type="none" w="sm" len="sm"/>
+                      <a:tailEnd type="none" w="sm" len="sm"/>
                     </a:lnB>
                     <a:solidFill>
                       <a:schemeClr val="lt2"/>
@@ -11982,7 +12182,7 @@
                     <a:bodyPr/>
                     <a:lstStyle/>
                     <a:p>
-                      <a:pPr indent="0" lvl="0" marL="0" rtl="0" algn="ctr">
+                      <a:pPr marL="0" lvl="0" indent="0" algn="ctr" rtl="0">
                         <a:spcBef>
                           <a:spcPts val="0"/>
                         </a:spcBef>
@@ -11998,42 +12198,42 @@
                       <a:endParaRPr sz="1200"/>
                     </a:p>
                   </a:txBody>
-                  <a:tcPr marT="91425" marB="91425" marR="91425" marL="91425">
-                    <a:lnL cap="flat" cmpd="sng" w="9525">
+                  <a:tcPr marL="91425" marR="91425" marT="91425" marB="91425">
+                    <a:lnL w="9525" cap="flat" cmpd="sng">
                       <a:solidFill>
                         <a:schemeClr val="dk2"/>
                       </a:solidFill>
                       <a:prstDash val="solid"/>
                       <a:round/>
-                      <a:headEnd len="sm" w="sm" type="none"/>
-                      <a:tailEnd len="sm" w="sm" type="none"/>
+                      <a:headEnd type="none" w="sm" len="sm"/>
+                      <a:tailEnd type="none" w="sm" len="sm"/>
                     </a:lnL>
-                    <a:lnR cap="flat" cmpd="sng" w="9525">
+                    <a:lnR w="9525" cap="flat" cmpd="sng">
                       <a:solidFill>
                         <a:schemeClr val="dk2"/>
                       </a:solidFill>
                       <a:prstDash val="solid"/>
                       <a:round/>
-                      <a:headEnd len="sm" w="sm" type="none"/>
-                      <a:tailEnd len="sm" w="sm" type="none"/>
+                      <a:headEnd type="none" w="sm" len="sm"/>
+                      <a:tailEnd type="none" w="sm" len="sm"/>
                     </a:lnR>
-                    <a:lnT cap="flat" cmpd="sng" w="9525">
+                    <a:lnT w="9525" cap="flat" cmpd="sng">
                       <a:solidFill>
                         <a:schemeClr val="dk2"/>
                       </a:solidFill>
                       <a:prstDash val="solid"/>
                       <a:round/>
-                      <a:headEnd len="sm" w="sm" type="none"/>
-                      <a:tailEnd len="sm" w="sm" type="none"/>
+                      <a:headEnd type="none" w="sm" len="sm"/>
+                      <a:tailEnd type="none" w="sm" len="sm"/>
                     </a:lnT>
-                    <a:lnB cap="flat" cmpd="sng" w="9525">
+                    <a:lnB w="9525" cap="flat" cmpd="sng">
                       <a:solidFill>
                         <a:schemeClr val="dk2"/>
                       </a:solidFill>
                       <a:prstDash val="solid"/>
                       <a:round/>
-                      <a:headEnd len="sm" w="sm" type="none"/>
-                      <a:tailEnd len="sm" w="sm" type="none"/>
+                      <a:headEnd type="none" w="sm" len="sm"/>
+                      <a:tailEnd type="none" w="sm" len="sm"/>
                     </a:lnB>
                     <a:solidFill>
                       <a:schemeClr val="lt2"/>
@@ -12045,7 +12245,7 @@
                     <a:bodyPr/>
                     <a:lstStyle/>
                     <a:p>
-                      <a:pPr indent="0" lvl="0" marL="0" rtl="0" algn="ctr">
+                      <a:pPr marL="0" lvl="0" indent="0" algn="ctr" rtl="0">
                         <a:spcBef>
                           <a:spcPts val="0"/>
                         </a:spcBef>
@@ -12061,42 +12261,42 @@
                       <a:endParaRPr sz="1200"/>
                     </a:p>
                   </a:txBody>
-                  <a:tcPr marT="91425" marB="91425" marR="91425" marL="91425">
-                    <a:lnL cap="flat" cmpd="sng" w="9525">
+                  <a:tcPr marL="91425" marR="91425" marT="91425" marB="91425">
+                    <a:lnL w="9525" cap="flat" cmpd="sng">
                       <a:solidFill>
                         <a:schemeClr val="dk2"/>
                       </a:solidFill>
                       <a:prstDash val="solid"/>
                       <a:round/>
-                      <a:headEnd len="sm" w="sm" type="none"/>
-                      <a:tailEnd len="sm" w="sm" type="none"/>
+                      <a:headEnd type="none" w="sm" len="sm"/>
+                      <a:tailEnd type="none" w="sm" len="sm"/>
                     </a:lnL>
-                    <a:lnR cap="flat" cmpd="sng" w="9525">
+                    <a:lnR w="9525" cap="flat" cmpd="sng">
                       <a:solidFill>
                         <a:schemeClr val="dk2"/>
                       </a:solidFill>
                       <a:prstDash val="solid"/>
                       <a:round/>
-                      <a:headEnd len="sm" w="sm" type="none"/>
-                      <a:tailEnd len="sm" w="sm" type="none"/>
+                      <a:headEnd type="none" w="sm" len="sm"/>
+                      <a:tailEnd type="none" w="sm" len="sm"/>
                     </a:lnR>
-                    <a:lnT cap="flat" cmpd="sng" w="9525">
+                    <a:lnT w="9525" cap="flat" cmpd="sng">
                       <a:solidFill>
                         <a:schemeClr val="dk2"/>
                       </a:solidFill>
                       <a:prstDash val="solid"/>
                       <a:round/>
-                      <a:headEnd len="sm" w="sm" type="none"/>
-                      <a:tailEnd len="sm" w="sm" type="none"/>
+                      <a:headEnd type="none" w="sm" len="sm"/>
+                      <a:tailEnd type="none" w="sm" len="sm"/>
                     </a:lnT>
-                    <a:lnB cap="flat" cmpd="sng" w="9525">
+                    <a:lnB w="9525" cap="flat" cmpd="sng">
                       <a:solidFill>
                         <a:schemeClr val="dk2"/>
                       </a:solidFill>
                       <a:prstDash val="solid"/>
                       <a:round/>
-                      <a:headEnd len="sm" w="sm" type="none"/>
-                      <a:tailEnd len="sm" w="sm" type="none"/>
+                      <a:headEnd type="none" w="sm" len="sm"/>
+                      <a:tailEnd type="none" w="sm" len="sm"/>
                     </a:lnB>
                     <a:solidFill>
                       <a:schemeClr val="lt2"/>
@@ -12108,7 +12308,7 @@
                     <a:bodyPr/>
                     <a:lstStyle/>
                     <a:p>
-                      <a:pPr indent="0" lvl="0" marL="0" rtl="0" algn="ctr">
+                      <a:pPr marL="0" lvl="0" indent="0" algn="ctr" rtl="0">
                         <a:spcBef>
                           <a:spcPts val="0"/>
                         </a:spcBef>
@@ -12124,48 +12324,53 @@
                       <a:endParaRPr sz="1200"/>
                     </a:p>
                   </a:txBody>
-                  <a:tcPr marT="91425" marB="91425" marR="91425" marL="91425">
-                    <a:lnL cap="flat" cmpd="sng" w="9525">
+                  <a:tcPr marL="91425" marR="91425" marT="91425" marB="91425">
+                    <a:lnL w="9525" cap="flat" cmpd="sng">
                       <a:solidFill>
                         <a:schemeClr val="dk2"/>
                       </a:solidFill>
                       <a:prstDash val="solid"/>
                       <a:round/>
-                      <a:headEnd len="sm" w="sm" type="none"/>
-                      <a:tailEnd len="sm" w="sm" type="none"/>
+                      <a:headEnd type="none" w="sm" len="sm"/>
+                      <a:tailEnd type="none" w="sm" len="sm"/>
                     </a:lnL>
-                    <a:lnR cap="flat" cmpd="sng" w="9525">
+                    <a:lnR w="9525" cap="flat" cmpd="sng">
                       <a:solidFill>
                         <a:schemeClr val="dk2"/>
                       </a:solidFill>
                       <a:prstDash val="solid"/>
                       <a:round/>
-                      <a:headEnd len="sm" w="sm" type="none"/>
-                      <a:tailEnd len="sm" w="sm" type="none"/>
+                      <a:headEnd type="none" w="sm" len="sm"/>
+                      <a:tailEnd type="none" w="sm" len="sm"/>
                     </a:lnR>
-                    <a:lnT cap="flat" cmpd="sng" w="9525">
+                    <a:lnT w="9525" cap="flat" cmpd="sng">
                       <a:solidFill>
                         <a:schemeClr val="dk2"/>
                       </a:solidFill>
                       <a:prstDash val="solid"/>
                       <a:round/>
-                      <a:headEnd len="sm" w="sm" type="none"/>
-                      <a:tailEnd len="sm" w="sm" type="none"/>
+                      <a:headEnd type="none" w="sm" len="sm"/>
+                      <a:tailEnd type="none" w="sm" len="sm"/>
                     </a:lnT>
-                    <a:lnB cap="flat" cmpd="sng" w="9525">
+                    <a:lnB w="9525" cap="flat" cmpd="sng">
                       <a:solidFill>
                         <a:schemeClr val="dk2"/>
                       </a:solidFill>
                       <a:prstDash val="solid"/>
                       <a:round/>
-                      <a:headEnd len="sm" w="sm" type="none"/>
-                      <a:tailEnd len="sm" w="sm" type="none"/>
+                      <a:headEnd type="none" w="sm" len="sm"/>
+                      <a:tailEnd type="none" w="sm" len="sm"/>
                     </a:lnB>
                     <a:solidFill>
                       <a:schemeClr val="lt2"/>
                     </a:solidFill>
                   </a:tcPr>
                 </a:tc>
+                <a:extLst>
+                  <a:ext uri="{0D108BD9-81ED-4DB2-BD59-A6C34878D82A}">
+                    <a16:rowId xmlns:a16="http://schemas.microsoft.com/office/drawing/2014/main" val="10004"/>
+                  </a:ext>
+                </a:extLst>
               </a:tr>
             </a:tbl>
           </a:graphicData>
@@ -12180,11 +12385,11 @@
 </file>
 
 <file path=ppt/slides/slide6.xml><?xml version="1.0" encoding="utf-8"?>
-<p:sld xmlns:a="http://schemas.openxmlformats.org/drawingml/2006/main" xmlns:r="http://schemas.openxmlformats.org/officeDocument/2006/relationships" xmlns:mc="http://schemas.openxmlformats.org/markup-compatibility/2006" xmlns:mv="urn:schemas-microsoft-com:mac:vml" xmlns:p="http://schemas.openxmlformats.org/presentationml/2006/main" xmlns:c="http://schemas.openxmlformats.org/drawingml/2006/chart" xmlns:dgm="http://schemas.openxmlformats.org/drawingml/2006/diagram" xmlns:o="urn:schemas-microsoft-com:office:office" xmlns:v="urn:schemas-microsoft-com:vml" xmlns:pvml="urn:schemas-microsoft-com:office:powerpoint" xmlns:com="http://schemas.openxmlformats.org/drawingml/2006/compatibility" xmlns:p14="http://schemas.microsoft.com/office/powerpoint/2010/main" xmlns:p15="http://schemas.microsoft.com/office/powerpoint/2012/main" xmlns:ahyp="http://schemas.microsoft.com/office/drawing/2018/hyperlinkcolor">
+<p:sld xmlns:a="http://schemas.openxmlformats.org/drawingml/2006/main" xmlns:r="http://schemas.openxmlformats.org/officeDocument/2006/relationships" xmlns:p="http://schemas.openxmlformats.org/presentationml/2006/main">
   <p:cSld>
     <p:spTree>
       <p:nvGrpSpPr>
-        <p:cNvPr id="104" name="Shape 104"/>
+        <p:cNvPr id="1" name="Shape 104"/>
         <p:cNvGrpSpPr/>
         <p:nvPr/>
       </p:nvGrpSpPr>
@@ -12199,7 +12404,9 @@
       <p:sp>
         <p:nvSpPr>
           <p:cNvPr id="105" name="Google Shape;105;p6"/>
-          <p:cNvSpPr txBox="1"/>
+          <p:cNvSpPr txBox="1">
+            <a:spLocks noGrp="1"/>
+          </p:cNvSpPr>
           <p:nvPr>
             <p:ph type="title"/>
           </p:nvPr>
@@ -12218,12 +12425,12 @@
           </a:ln>
         </p:spPr>
         <p:txBody>
-          <a:bodyPr anchorCtr="0" anchor="ctr" bIns="91425" lIns="91425" spcFirstLastPara="1" rIns="91425" wrap="square" tIns="91425">
+          <a:bodyPr spcFirstLastPara="1" wrap="square" lIns="91425" tIns="91425" rIns="91425" bIns="91425" anchor="ctr" anchorCtr="0">
             <a:noAutofit/>
           </a:bodyPr>
           <a:lstStyle/>
           <a:p>
-            <a:pPr indent="0" lvl="0" marL="0" rtl="0" algn="l">
+            <a:pPr marL="0" lvl="0" indent="0" algn="l" rtl="0">
               <a:lnSpc>
                 <a:spcPct val="100000"/>
               </a:lnSpc>
@@ -12250,9 +12457,11 @@
       <p:sp>
         <p:nvSpPr>
           <p:cNvPr id="106" name="Google Shape;106;p6"/>
-          <p:cNvSpPr txBox="1"/>
+          <p:cNvSpPr txBox="1">
+            <a:spLocks noGrp="1"/>
+          </p:cNvSpPr>
           <p:nvPr>
-            <p:ph idx="1" type="body"/>
+            <p:ph type="body" idx="1"/>
           </p:nvPr>
         </p:nvSpPr>
         <p:spPr>
@@ -12269,12 +12478,12 @@
           </a:ln>
         </p:spPr>
         <p:txBody>
-          <a:bodyPr anchorCtr="0" anchor="t" bIns="91425" lIns="91425" spcFirstLastPara="1" rIns="91425" wrap="square" tIns="91425">
+          <a:bodyPr spcFirstLastPara="1" wrap="square" lIns="91425" tIns="91425" rIns="91425" bIns="91425" anchor="t" anchorCtr="0">
             <a:noAutofit/>
           </a:bodyPr>
           <a:lstStyle/>
           <a:p>
-            <a:pPr indent="0" lvl="0" marL="0" rtl="0" algn="l">
+            <a:pPr marL="0" lvl="0" indent="0" algn="l" rtl="0">
               <a:lnSpc>
                 <a:spcPct val="115000"/>
               </a:lnSpc>
@@ -12301,9 +12510,11 @@
       <p:sp>
         <p:nvSpPr>
           <p:cNvPr id="107" name="Google Shape;107;p6"/>
-          <p:cNvSpPr txBox="1"/>
+          <p:cNvSpPr txBox="1">
+            <a:spLocks noGrp="1"/>
+          </p:cNvSpPr>
           <p:nvPr>
-            <p:ph idx="12" type="sldNum"/>
+            <p:ph type="sldNum" idx="12"/>
           </p:nvPr>
         </p:nvSpPr>
         <p:spPr>
@@ -12320,12 +12531,12 @@
           </a:ln>
         </p:spPr>
         <p:txBody>
-          <a:bodyPr anchorCtr="0" anchor="ctr" bIns="91425" lIns="91425" spcFirstLastPara="1" rIns="91425" wrap="square" tIns="91425">
+          <a:bodyPr spcFirstLastPara="1" wrap="square" lIns="91425" tIns="91425" rIns="91425" bIns="91425" anchor="ctr" anchorCtr="0">
             <a:noAutofit/>
           </a:bodyPr>
           <a:lstStyle/>
           <a:p>
-            <a:pPr indent="0" lvl="0" marL="0" rtl="0" algn="r">
+            <a:pPr marL="0" lvl="0" indent="0" algn="r" rtl="0">
               <a:lnSpc>
                 <a:spcPct val="100000"/>
               </a:lnSpc>
@@ -12340,7 +12551,7 @@
             </a:pPr>
             <a:fld id="{00000000-1234-1234-1234-123412341234}" type="slidenum">
               <a:rPr lang="en-US"/>
-              <a:t>‹#›</a:t>
+              <a:t>6</a:t>
             </a:fld>
             <a:endParaRPr/>
           </a:p>
@@ -12373,7 +12584,7 @@
             <a:noFill/>
           </a:ln>
           <a:effectLst>
-            <a:outerShdw blurRad="57150" rotWithShape="0" algn="bl" dir="5400000" dist="19050">
+            <a:outerShdw blurRad="57150" dist="19050" dir="5400000" algn="bl" rotWithShape="0">
               <a:srgbClr val="000000">
                 <a:alpha val="50000"/>
               </a:srgbClr>
@@ -12390,11 +12601,11 @@
 </file>
 
 <file path=ppt/slides/slide7.xml><?xml version="1.0" encoding="utf-8"?>
-<p:sld xmlns:a="http://schemas.openxmlformats.org/drawingml/2006/main" xmlns:r="http://schemas.openxmlformats.org/officeDocument/2006/relationships" xmlns:mc="http://schemas.openxmlformats.org/markup-compatibility/2006" xmlns:mv="urn:schemas-microsoft-com:mac:vml" xmlns:p="http://schemas.openxmlformats.org/presentationml/2006/main" xmlns:c="http://schemas.openxmlformats.org/drawingml/2006/chart" xmlns:dgm="http://schemas.openxmlformats.org/drawingml/2006/diagram" xmlns:o="urn:schemas-microsoft-com:office:office" xmlns:v="urn:schemas-microsoft-com:vml" xmlns:pvml="urn:schemas-microsoft-com:office:powerpoint" xmlns:com="http://schemas.openxmlformats.org/drawingml/2006/compatibility" xmlns:p14="http://schemas.microsoft.com/office/powerpoint/2010/main" xmlns:p15="http://schemas.microsoft.com/office/powerpoint/2012/main" xmlns:ahyp="http://schemas.microsoft.com/office/drawing/2018/hyperlinkcolor">
+<p:sld xmlns:a="http://schemas.openxmlformats.org/drawingml/2006/main" xmlns:r="http://schemas.openxmlformats.org/officeDocument/2006/relationships" xmlns:p="http://schemas.openxmlformats.org/presentationml/2006/main">
   <p:cSld>
     <p:spTree>
       <p:nvGrpSpPr>
-        <p:cNvPr id="112" name="Shape 112"/>
+        <p:cNvPr id="1" name="Shape 112"/>
         <p:cNvGrpSpPr/>
         <p:nvPr/>
       </p:nvGrpSpPr>
@@ -12409,7 +12620,9 @@
       <p:sp>
         <p:nvSpPr>
           <p:cNvPr id="113" name="Google Shape;113;p7"/>
-          <p:cNvSpPr txBox="1"/>
+          <p:cNvSpPr txBox="1">
+            <a:spLocks noGrp="1"/>
+          </p:cNvSpPr>
           <p:nvPr>
             <p:ph type="title"/>
           </p:nvPr>
@@ -12428,12 +12641,12 @@
           </a:ln>
         </p:spPr>
         <p:txBody>
-          <a:bodyPr anchorCtr="0" anchor="ctr" bIns="91425" lIns="91425" spcFirstLastPara="1" rIns="91425" wrap="square" tIns="91425">
+          <a:bodyPr spcFirstLastPara="1" wrap="square" lIns="91425" tIns="91425" rIns="91425" bIns="91425" anchor="ctr" anchorCtr="0">
             <a:noAutofit/>
           </a:bodyPr>
           <a:lstStyle/>
           <a:p>
-            <a:pPr indent="0" lvl="0" marL="0" rtl="0" algn="l">
+            <a:pPr marL="0" lvl="0" indent="0" algn="l" rtl="0">
               <a:lnSpc>
                 <a:spcPct val="100000"/>
               </a:lnSpc>
@@ -12460,9 +12673,11 @@
       <p:sp>
         <p:nvSpPr>
           <p:cNvPr id="114" name="Google Shape;114;p7"/>
-          <p:cNvSpPr txBox="1"/>
+          <p:cNvSpPr txBox="1">
+            <a:spLocks noGrp="1"/>
+          </p:cNvSpPr>
           <p:nvPr>
-            <p:ph idx="12" type="sldNum"/>
+            <p:ph type="sldNum" idx="12"/>
           </p:nvPr>
         </p:nvSpPr>
         <p:spPr>
@@ -12479,12 +12694,12 @@
           </a:ln>
         </p:spPr>
         <p:txBody>
-          <a:bodyPr anchorCtr="0" anchor="ctr" bIns="91425" lIns="91425" spcFirstLastPara="1" rIns="91425" wrap="square" tIns="91425">
+          <a:bodyPr spcFirstLastPara="1" wrap="square" lIns="91425" tIns="91425" rIns="91425" bIns="91425" anchor="ctr" anchorCtr="0">
             <a:noAutofit/>
           </a:bodyPr>
           <a:lstStyle/>
           <a:p>
-            <a:pPr indent="0" lvl="0" marL="0" rtl="0" algn="r">
+            <a:pPr marL="0" lvl="0" indent="0" algn="r" rtl="0">
               <a:lnSpc>
                 <a:spcPct val="100000"/>
               </a:lnSpc>
@@ -12499,7 +12714,7 @@
             </a:pPr>
             <a:fld id="{00000000-1234-1234-1234-123412341234}" type="slidenum">
               <a:rPr lang="en-US"/>
-              <a:t>‹#›</a:t>
+              <a:t>7</a:t>
             </a:fld>
             <a:endParaRPr/>
           </a:p>
@@ -12525,12 +12740,12 @@
           </a:ln>
         </p:spPr>
         <p:txBody>
-          <a:bodyPr anchorCtr="0" anchor="t" bIns="91425" lIns="91425" spcFirstLastPara="1" rIns="91425" wrap="square" tIns="91425">
+          <a:bodyPr spcFirstLastPara="1" wrap="square" lIns="91425" tIns="91425" rIns="91425" bIns="91425" anchor="t" anchorCtr="0">
             <a:spAutoFit/>
           </a:bodyPr>
           <a:lstStyle/>
           <a:p>
-            <a:pPr indent="0" lvl="0" marL="0" rtl="0" algn="l">
+            <a:pPr marL="0" lvl="0" indent="0" algn="l" rtl="0">
               <a:spcBef>
                 <a:spcPts val="0"/>
               </a:spcBef>
@@ -12551,7 +12766,7 @@
             <a:endParaRPr sz="2300"/>
           </a:p>
           <a:p>
-            <a:pPr indent="0" lvl="0" marL="0" rtl="0" algn="l">
+            <a:pPr marL="0" lvl="0" indent="0" algn="l" rtl="0">
               <a:spcBef>
                 <a:spcPts val="0"/>
               </a:spcBef>
@@ -12560,9 +12775,6 @@
               </a:spcAft>
               <a:buNone/>
             </a:pPr>
-            <a:r>
-              <a:t/>
-            </a:r>
             <a:endParaRPr/>
           </a:p>
         </p:txBody>
@@ -12587,12 +12799,12 @@
           </a:ln>
         </p:spPr>
         <p:txBody>
-          <a:bodyPr anchorCtr="0" anchor="t" bIns="91425" lIns="91425" spcFirstLastPara="1" rIns="91425" wrap="square" tIns="91425">
+          <a:bodyPr spcFirstLastPara="1" wrap="square" lIns="91425" tIns="91425" rIns="91425" bIns="91425" anchor="t" anchorCtr="0">
             <a:spAutoFit/>
           </a:bodyPr>
           <a:lstStyle/>
           <a:p>
-            <a:pPr indent="0" lvl="0" marL="0" rtl="0" algn="l">
+            <a:pPr marL="0" lvl="0" indent="0" algn="l" rtl="0">
               <a:spcBef>
                 <a:spcPts val="0"/>
               </a:spcBef>
@@ -12626,11 +12838,11 @@
 </file>
 
 <file path=ppt/slides/slide8.xml><?xml version="1.0" encoding="utf-8"?>
-<p:sld xmlns:a="http://schemas.openxmlformats.org/drawingml/2006/main" xmlns:r="http://schemas.openxmlformats.org/officeDocument/2006/relationships" xmlns:mc="http://schemas.openxmlformats.org/markup-compatibility/2006" xmlns:mv="urn:schemas-microsoft-com:mac:vml" xmlns:p="http://schemas.openxmlformats.org/presentationml/2006/main" xmlns:c="http://schemas.openxmlformats.org/drawingml/2006/chart" xmlns:dgm="http://schemas.openxmlformats.org/drawingml/2006/diagram" xmlns:o="urn:schemas-microsoft-com:office:office" xmlns:v="urn:schemas-microsoft-com:vml" xmlns:pvml="urn:schemas-microsoft-com:office:powerpoint" xmlns:com="http://schemas.openxmlformats.org/drawingml/2006/compatibility" xmlns:p14="http://schemas.microsoft.com/office/powerpoint/2010/main" xmlns:p15="http://schemas.microsoft.com/office/powerpoint/2012/main" xmlns:ahyp="http://schemas.microsoft.com/office/drawing/2018/hyperlinkcolor">
+<p:sld xmlns:a="http://schemas.openxmlformats.org/drawingml/2006/main" xmlns:r="http://schemas.openxmlformats.org/officeDocument/2006/relationships" xmlns:p="http://schemas.openxmlformats.org/presentationml/2006/main">
   <p:cSld>
     <p:spTree>
       <p:nvGrpSpPr>
-        <p:cNvPr id="120" name="Shape 120"/>
+        <p:cNvPr id="1" name="Shape 120"/>
         <p:cNvGrpSpPr/>
         <p:nvPr/>
       </p:nvGrpSpPr>
@@ -12645,7 +12857,9 @@
       <p:sp>
         <p:nvSpPr>
           <p:cNvPr id="121" name="Google Shape;121;p8"/>
-          <p:cNvSpPr txBox="1"/>
+          <p:cNvSpPr txBox="1">
+            <a:spLocks noGrp="1"/>
+          </p:cNvSpPr>
           <p:nvPr>
             <p:ph type="title"/>
           </p:nvPr>
@@ -12664,12 +12878,12 @@
           </a:ln>
         </p:spPr>
         <p:txBody>
-          <a:bodyPr anchorCtr="0" anchor="ctr" bIns="91425" lIns="91425" spcFirstLastPara="1" rIns="91425" wrap="square" tIns="91425">
+          <a:bodyPr spcFirstLastPara="1" wrap="square" lIns="91425" tIns="91425" rIns="91425" bIns="91425" anchor="ctr" anchorCtr="0">
             <a:noAutofit/>
           </a:bodyPr>
           <a:lstStyle/>
           <a:p>
-            <a:pPr indent="0" lvl="0" marL="0" rtl="0" algn="l">
+            <a:pPr marL="0" lvl="0" indent="0" algn="l" rtl="0">
               <a:lnSpc>
                 <a:spcPct val="100000"/>
               </a:lnSpc>
@@ -12696,9 +12910,11 @@
       <p:sp>
         <p:nvSpPr>
           <p:cNvPr id="122" name="Google Shape;122;p8"/>
-          <p:cNvSpPr txBox="1"/>
+          <p:cNvSpPr txBox="1">
+            <a:spLocks noGrp="1"/>
+          </p:cNvSpPr>
           <p:nvPr>
-            <p:ph idx="1" type="body"/>
+            <p:ph type="body" idx="1"/>
           </p:nvPr>
         </p:nvSpPr>
         <p:spPr>
@@ -12715,12 +12931,12 @@
           </a:ln>
         </p:spPr>
         <p:txBody>
-          <a:bodyPr anchorCtr="0" anchor="t" bIns="91425" lIns="91425" spcFirstLastPara="1" rIns="91425" wrap="square" tIns="91425">
+          <a:bodyPr spcFirstLastPara="1" wrap="square" lIns="91425" tIns="91425" rIns="91425" bIns="91425" anchor="t" anchorCtr="0">
             <a:noAutofit/>
           </a:bodyPr>
           <a:lstStyle/>
           <a:p>
-            <a:pPr indent="-355600" lvl="0" marL="457200" rtl="0" algn="l">
+            <a:pPr marL="457200" lvl="0" indent="-355600" algn="l" rtl="0">
               <a:lnSpc>
                 <a:spcPct val="115000"/>
               </a:lnSpc>
@@ -12740,7 +12956,7 @@
             <a:endParaRPr/>
           </a:p>
           <a:p>
-            <a:pPr indent="-355600" lvl="0" marL="457200" rtl="0" algn="l">
+            <a:pPr marL="457200" lvl="0" indent="-355600" algn="l" rtl="0">
               <a:lnSpc>
                 <a:spcPct val="115000"/>
               </a:lnSpc>
@@ -12760,7 +12976,7 @@
             <a:endParaRPr/>
           </a:p>
           <a:p>
-            <a:pPr indent="-355600" lvl="0" marL="457200" rtl="0" algn="l">
+            <a:pPr marL="457200" lvl="0" indent="-355600" algn="l" rtl="0">
               <a:lnSpc>
                 <a:spcPct val="115000"/>
               </a:lnSpc>
@@ -12775,23 +12991,7 @@
             </a:pPr>
             <a:r>
               <a:rPr lang="en-US"/>
-              <a:t>E</a:t>
-            </a:r>
-            <a:r>
-              <a:rPr lang="en-US"/>
-              <a:t>specialmente</a:t>
-            </a:r>
-            <a:r>
-              <a:rPr lang="en-US"/>
-              <a:t>, ao Mateus Prestes pelo suporte durante os </a:t>
-            </a:r>
-            <a:r>
-              <a:rPr lang="en-US"/>
-              <a:t>laboratórios</a:t>
-            </a:r>
-            <a:r>
-              <a:rPr lang="en-US"/>
-              <a:t>.</a:t>
+              <a:t>Especialmente, ao Mateus Prestes pelo suporte durante os laboratórios.</a:t>
             </a:r>
             <a:endParaRPr/>
           </a:p>
@@ -12800,9 +13000,11 @@
       <p:sp>
         <p:nvSpPr>
           <p:cNvPr id="123" name="Google Shape;123;p8"/>
-          <p:cNvSpPr txBox="1"/>
+          <p:cNvSpPr txBox="1">
+            <a:spLocks noGrp="1"/>
+          </p:cNvSpPr>
           <p:nvPr>
-            <p:ph idx="12" type="sldNum"/>
+            <p:ph type="sldNum" idx="12"/>
           </p:nvPr>
         </p:nvSpPr>
         <p:spPr>
@@ -12819,12 +13021,12 @@
           </a:ln>
         </p:spPr>
         <p:txBody>
-          <a:bodyPr anchorCtr="0" anchor="ctr" bIns="91425" lIns="91425" spcFirstLastPara="1" rIns="91425" wrap="square" tIns="91425">
+          <a:bodyPr spcFirstLastPara="1" wrap="square" lIns="91425" tIns="91425" rIns="91425" bIns="91425" anchor="ctr" anchorCtr="0">
             <a:noAutofit/>
           </a:bodyPr>
           <a:lstStyle/>
           <a:p>
-            <a:pPr indent="0" lvl="0" marL="0" rtl="0" algn="r">
+            <a:pPr marL="0" lvl="0" indent="0" algn="r" rtl="0">
               <a:lnSpc>
                 <a:spcPct val="100000"/>
               </a:lnSpc>
@@ -12839,7 +13041,7 @@
             </a:pPr>
             <a:fld id="{00000000-1234-1234-1234-123412341234}" type="slidenum">
               <a:rPr lang="en-US"/>
-              <a:t>‹#›</a:t>
+              <a:t>8</a:t>
             </a:fld>
             <a:endParaRPr/>
           </a:p>
@@ -12855,7 +13057,7 @@
           <a:blip r:embed="rId3">
             <a:alphaModFix/>
           </a:blip>
-          <a:srcRect b="0" l="0" r="17088" t="0"/>
+          <a:srcRect r="17088"/>
           <a:stretch/>
         </p:blipFill>
         <p:spPr>
@@ -12881,7 +13083,7 @@
 </file>
 
 <file path=ppt/theme/theme1.xml><?xml version="1.0" encoding="utf-8"?>
-<a:theme xmlns:a="http://schemas.openxmlformats.org/drawingml/2006/main" xmlns:r="http://schemas.openxmlformats.org/officeDocument/2006/relationships" name="Simple Light">
+<a:theme xmlns:a="http://schemas.openxmlformats.org/drawingml/2006/main" name="Simple Light">
   <a:themeElements>
     <a:clrScheme name="Simple Light">
       <a:dk1>
@@ -13156,11 +13358,13 @@
       </a:bgFillStyleLst>
     </a:fmtScheme>
   </a:themeElements>
+  <a:objectDefaults/>
+  <a:extraClrSchemeLst/>
 </a:theme>
 </file>
 
 <file path=ppt/theme/theme2.xml><?xml version="1.0" encoding="utf-8"?>
-<a:theme xmlns:a="http://schemas.openxmlformats.org/drawingml/2006/main" xmlns:r="http://schemas.openxmlformats.org/officeDocument/2006/relationships">
+<a:theme xmlns:a="http://schemas.openxmlformats.org/drawingml/2006/main">
   <a:themeElements>
     <a:clrScheme name="Default">
       <a:dk1>
@@ -13435,5 +13639,7 @@
       </a:bgFillStyleLst>
     </a:fmtScheme>
   </a:themeElements>
+  <a:objectDefaults/>
+  <a:extraClrSchemeLst/>
 </a:theme>
 </file>